--- a/AI_Weekly_2025-12-15.pptx
+++ b/AI_Weekly_2025-12-15.pptx
@@ -3105,6 +3105,14 @@
 <file path=ppt/slides/slide1.xml><?xml version="1.0" encoding="utf-8"?>
 <p:sld xmlns:a="http://schemas.openxmlformats.org/drawingml/2006/main" xmlns:p="http://schemas.openxmlformats.org/presentationml/2006/main" xmlns:r="http://schemas.openxmlformats.org/officeDocument/2006/relationships">
   <p:cSld>
+    <p:bg>
+      <p:bgPr>
+        <a:solidFill>
+          <a:srgbClr val="667EEA"/>
+        </a:solidFill>
+        <a:effectLst/>
+      </p:bgPr>
+    </p:bg>
     <p:spTree>
       <p:nvGrpSpPr>
         <p:cNvPr id="1" name=""/>
@@ -3196,6 +3204,14 @@
 <file path=ppt/slides/slide10.xml><?xml version="1.0" encoding="utf-8"?>
 <p:sld xmlns:a="http://schemas.openxmlformats.org/drawingml/2006/main" xmlns:p="http://schemas.openxmlformats.org/presentationml/2006/main" xmlns:r="http://schemas.openxmlformats.org/officeDocument/2006/relationships">
   <p:cSld>
+    <p:bg>
+      <p:bgPr>
+        <a:solidFill>
+          <a:srgbClr val="F8F9FA"/>
+        </a:solidFill>
+        <a:effectLst/>
+      </p:bgPr>
+    </p:bg>
     <p:spTree>
       <p:nvGrpSpPr>
         <p:cNvPr id="1" name=""/>
@@ -3205,19 +3221,29 @@
       <p:grpSpPr/>
       <p:sp>
         <p:nvSpPr>
-          <p:cNvPr id="2" name="Title 1"/>
-          <p:cNvSpPr>
-            <a:spLocks noGrp="1"/>
-          </p:cNvSpPr>
-          <p:nvPr>
-            <p:ph type="title"/>
-          </p:nvPr>
-        </p:nvSpPr>
-        <p:spPr/>
-        <p:txBody>
-          <a:bodyPr/>
-          <a:lstStyle/>
-          <a:p>
+          <p:cNvPr id="2" name="TextBox 1"/>
+          <p:cNvSpPr txBox="1"/>
+          <p:nvPr/>
+        </p:nvSpPr>
+        <p:spPr>
+          <a:xfrm>
+            <a:off x="457200" y="457200"/>
+            <a:ext cx="8229600" cy="685800"/>
+          </a:xfrm>
+          <a:prstGeom prst="rect">
+            <a:avLst/>
+          </a:prstGeom>
+          <a:noFill/>
+        </p:spPr>
+        <p:txBody>
+          <a:bodyPr wrap="none">
+            <a:spAutoFit/>
+          </a:bodyPr>
+          <a:lstStyle/>
+          <a:p>
+            <a:pPr>
+              <a:defRPr sz="3200" b="1"/>
+            </a:pPr>
             <a:r>
               <a:t>1. AI agents are starting to eat SaaS</a:t>
             </a:r>
@@ -3226,46 +3252,35 @@
       </p:sp>
       <p:sp>
         <p:nvSpPr>
-          <p:cNvPr id="3" name="Content Placeholder 2"/>
-          <p:cNvSpPr>
-            <a:spLocks noGrp="1"/>
-          </p:cNvSpPr>
-          <p:nvPr>
-            <p:ph idx="1"/>
-          </p:nvPr>
-        </p:nvSpPr>
-        <p:spPr/>
-        <p:txBody>
-          <a:bodyPr/>
-          <a:lstStyle/>
-          <a:p>
-            <a:r>
-              <a:t>Analysis of how autonomous AI agents are beginning to replace traditional SaaS</a:t>
-            </a:r>
-          </a:p>
-          <a:p>
-            <a:r>
-              <a:t>workflows, marking a significant shift in enterprise software economics and</a:t>
-            </a:r>
-          </a:p>
-          <a:p>
-            <a:r>
-              <a:t>integration patterns.</a:t>
-            </a:r>
-          </a:p>
-          <a:p>
-            <a:pPr/>
-          </a:p>
-          <a:p>
-            <a:pPr/>
-            <a:r>
-              <a:t>Source: Hacker News • 115 points • 134 comments</a:t>
-            </a:r>
-          </a:p>
-          <a:p>
-            <a:pPr/>
-            <a:r>
-              <a:t>Link: https://martinalderson.com/posts/ai-agents-are-...</a:t>
+          <p:cNvPr id="3" name="TextBox 2"/>
+          <p:cNvSpPr txBox="1"/>
+          <p:nvPr/>
+        </p:nvSpPr>
+        <p:spPr>
+          <a:xfrm>
+            <a:off x="457200" y="1371600"/>
+            <a:ext cx="8229600" cy="685800"/>
+          </a:xfrm>
+          <a:prstGeom prst="rect">
+            <a:avLst/>
+          </a:prstGeom>
+          <a:noFill/>
+        </p:spPr>
+        <p:txBody>
+          <a:bodyPr wrap="none">
+            <a:spAutoFit/>
+          </a:bodyPr>
+          <a:lstStyle/>
+          <a:p>
+            <a:pPr>
+              <a:defRPr sz="1300">
+                <a:solidFill>
+                  <a:srgbClr val="333333"/>
+                </a:solidFill>
+              </a:defRPr>
+            </a:pPr>
+            <a:r>
+              <a:t>Analyzes the emerging trend of AI agents replacing traditional SaaS applications, marking</a:t>
             </a:r>
           </a:p>
         </p:txBody>
@@ -3273,6 +3288,139 @@
       <p:sp>
         <p:nvSpPr>
           <p:cNvPr id="4" name="TextBox 3"/>
+          <p:cNvSpPr txBox="1"/>
+          <p:nvPr/>
+        </p:nvSpPr>
+        <p:spPr>
+          <a:xfrm>
+            <a:off x="457200" y="2057400"/>
+            <a:ext cx="8229600" cy="685800"/>
+          </a:xfrm>
+          <a:prstGeom prst="rect">
+            <a:avLst/>
+          </a:prstGeom>
+          <a:noFill/>
+        </p:spPr>
+        <p:txBody>
+          <a:bodyPr wrap="none">
+            <a:spAutoFit/>
+          </a:bodyPr>
+          <a:lstStyle/>
+          <a:p>
+            <a:pPr>
+              <a:defRPr sz="1300">
+                <a:solidFill>
+                  <a:srgbClr val="333333"/>
+                </a:solidFill>
+              </a:defRPr>
+            </a:pPr>
+            <a:r>
+              <a:t>a fundamental shift in how software products are conceived and delivered.</a:t>
+            </a:r>
+          </a:p>
+        </p:txBody>
+      </p:sp>
+      <p:sp>
+        <p:nvSpPr>
+          <p:cNvPr id="5" name="TextBox 4"/>
+          <p:cNvSpPr txBox="1"/>
+          <p:nvPr/>
+        </p:nvSpPr>
+        <p:spPr>
+          <a:xfrm>
+            <a:off x="457200" y="2743200"/>
+            <a:ext cx="8229600" cy="685800"/>
+          </a:xfrm>
+          <a:prstGeom prst="rect">
+            <a:avLst/>
+          </a:prstGeom>
+          <a:noFill/>
+        </p:spPr>
+        <p:txBody>
+          <a:bodyPr wrap="none">
+            <a:spAutoFit/>
+          </a:bodyPr>
+          <a:lstStyle/>
+          <a:p>
+            <a:pPr>
+              <a:defRPr sz="1000"/>
+            </a:pPr>
+          </a:p>
+        </p:txBody>
+      </p:sp>
+      <p:sp>
+        <p:nvSpPr>
+          <p:cNvPr id="6" name="TextBox 5"/>
+          <p:cNvSpPr txBox="1"/>
+          <p:nvPr/>
+        </p:nvSpPr>
+        <p:spPr>
+          <a:xfrm>
+            <a:off x="457200" y="3429000"/>
+            <a:ext cx="8229600" cy="685800"/>
+          </a:xfrm>
+          <a:prstGeom prst="rect">
+            <a:avLst/>
+          </a:prstGeom>
+          <a:noFill/>
+        </p:spPr>
+        <p:txBody>
+          <a:bodyPr wrap="none">
+            <a:spAutoFit/>
+          </a:bodyPr>
+          <a:lstStyle/>
+          <a:p>
+            <a:pPr>
+              <a:defRPr sz="1000" i="1">
+                <a:solidFill>
+                  <a:srgbClr val="666666"/>
+                </a:solidFill>
+              </a:defRPr>
+            </a:pPr>
+            <a:r>
+              <a:t>Source: Hacker News • 116 points • 134 comments</a:t>
+            </a:r>
+          </a:p>
+        </p:txBody>
+      </p:sp>
+      <p:sp>
+        <p:nvSpPr>
+          <p:cNvPr id="7" name="TextBox 6"/>
+          <p:cNvSpPr txBox="1"/>
+          <p:nvPr/>
+        </p:nvSpPr>
+        <p:spPr>
+          <a:xfrm>
+            <a:off x="457200" y="4114800"/>
+            <a:ext cx="8229600" cy="685800"/>
+          </a:xfrm>
+          <a:prstGeom prst="rect">
+            <a:avLst/>
+          </a:prstGeom>
+          <a:noFill/>
+        </p:spPr>
+        <p:txBody>
+          <a:bodyPr wrap="none">
+            <a:spAutoFit/>
+          </a:bodyPr>
+          <a:lstStyle/>
+          <a:p>
+            <a:pPr>
+              <a:defRPr sz="900">
+                <a:solidFill>
+                  <a:srgbClr val="3498DB"/>
+                </a:solidFill>
+              </a:defRPr>
+            </a:pPr>
+            <a:r>
+              <a:t>🔗 https://martinalderson.com/posts/ai-agents-are-starting-t...</a:t>
+            </a:r>
+          </a:p>
+        </p:txBody>
+      </p:sp>
+      <p:sp>
+        <p:nvSpPr>
+          <p:cNvPr id="8" name="TextBox 7"/>
           <p:cNvSpPr txBox="1"/>
           <p:nvPr/>
         </p:nvSpPr>
@@ -3312,6 +3460,14 @@
 <file path=ppt/slides/slide11.xml><?xml version="1.0" encoding="utf-8"?>
 <p:sld xmlns:a="http://schemas.openxmlformats.org/drawingml/2006/main" xmlns:p="http://schemas.openxmlformats.org/presentationml/2006/main" xmlns:r="http://schemas.openxmlformats.org/officeDocument/2006/relationships">
   <p:cSld>
+    <p:bg>
+      <p:bgPr>
+        <a:solidFill>
+          <a:srgbClr val="F8F9FA"/>
+        </a:solidFill>
+        <a:effectLst/>
+      </p:bgPr>
+    </p:bg>
     <p:spTree>
       <p:nvGrpSpPr>
         <p:cNvPr id="1" name=""/>
@@ -3321,67 +3477,66 @@
       <p:grpSpPr/>
       <p:sp>
         <p:nvSpPr>
-          <p:cNvPr id="2" name="Title 1"/>
-          <p:cNvSpPr>
-            <a:spLocks noGrp="1"/>
-          </p:cNvSpPr>
-          <p:nvPr>
-            <p:ph type="title"/>
-          </p:nvPr>
-        </p:nvSpPr>
-        <p:spPr/>
-        <p:txBody>
-          <a:bodyPr/>
-          <a:lstStyle/>
-          <a:p>
-            <a:r>
-              <a:t>2. OpenAI are quietly adopting skills, now available in ChatGPT and Co...</a:t>
-            </a:r>
-          </a:p>
-        </p:txBody>
-      </p:sp>
-      <p:sp>
-        <p:nvSpPr>
-          <p:cNvPr id="3" name="Content Placeholder 2"/>
-          <p:cNvSpPr>
-            <a:spLocks noGrp="1"/>
-          </p:cNvSpPr>
-          <p:nvPr>
-            <p:ph idx="1"/>
-          </p:nvPr>
-        </p:nvSpPr>
-        <p:spPr/>
-        <p:txBody>
-          <a:bodyPr/>
-          <a:lstStyle/>
-          <a:p>
-            <a:r>
-              <a:t>OpenAI introduces 'skills' system enabling ChatGPT to perform structured tool</a:t>
-            </a:r>
-          </a:p>
-          <a:p>
-            <a:r>
-              <a:t>use and task execution, representing a major step toward productized agentic</a:t>
-            </a:r>
-          </a:p>
-          <a:p>
-            <a:r>
-              <a:t>capabilities.</a:t>
-            </a:r>
-          </a:p>
-          <a:p>
-            <a:pPr/>
-          </a:p>
-          <a:p>
-            <a:pPr/>
-            <a:r>
-              <a:t>Source: Hacker News • 567 points • 313 comments</a:t>
-            </a:r>
-          </a:p>
-          <a:p>
-            <a:pPr/>
-            <a:r>
-              <a:t>Link: https://simonwillison.net/2025/Dec/12/openai-sk...</a:t>
+          <p:cNvPr id="2" name="TextBox 1"/>
+          <p:cNvSpPr txBox="1"/>
+          <p:nvPr/>
+        </p:nvSpPr>
+        <p:spPr>
+          <a:xfrm>
+            <a:off x="457200" y="457200"/>
+            <a:ext cx="8229600" cy="685800"/>
+          </a:xfrm>
+          <a:prstGeom prst="rect">
+            <a:avLst/>
+          </a:prstGeom>
+          <a:noFill/>
+        </p:spPr>
+        <p:txBody>
+          <a:bodyPr wrap="none">
+            <a:spAutoFit/>
+          </a:bodyPr>
+          <a:lstStyle/>
+          <a:p>
+            <a:pPr>
+              <a:defRPr sz="3200" b="1"/>
+            </a:pPr>
+            <a:r>
+              <a:t>2. OpenAI are quietly adopting skills, now available in ChatGPT and Codex CLI</a:t>
+            </a:r>
+          </a:p>
+        </p:txBody>
+      </p:sp>
+      <p:sp>
+        <p:nvSpPr>
+          <p:cNvPr id="3" name="TextBox 2"/>
+          <p:cNvSpPr txBox="1"/>
+          <p:nvPr/>
+        </p:nvSpPr>
+        <p:spPr>
+          <a:xfrm>
+            <a:off x="457200" y="1371600"/>
+            <a:ext cx="8229600" cy="685800"/>
+          </a:xfrm>
+          <a:prstGeom prst="rect">
+            <a:avLst/>
+          </a:prstGeom>
+          <a:noFill/>
+        </p:spPr>
+        <p:txBody>
+          <a:bodyPr wrap="none">
+            <a:spAutoFit/>
+          </a:bodyPr>
+          <a:lstStyle/>
+          <a:p>
+            <a:pPr>
+              <a:defRPr sz="1300">
+                <a:solidFill>
+                  <a:srgbClr val="333333"/>
+                </a:solidFill>
+              </a:defRPr>
+            </a:pPr>
+            <a:r>
+              <a:t>OpenAI's introduction of 'skills' represents a modular approach to agent capabilities,</a:t>
             </a:r>
           </a:p>
         </p:txBody>
@@ -3389,6 +3544,139 @@
       <p:sp>
         <p:nvSpPr>
           <p:cNvPr id="4" name="TextBox 3"/>
+          <p:cNvSpPr txBox="1"/>
+          <p:nvPr/>
+        </p:nvSpPr>
+        <p:spPr>
+          <a:xfrm>
+            <a:off x="457200" y="2057400"/>
+            <a:ext cx="8229600" cy="685800"/>
+          </a:xfrm>
+          <a:prstGeom prst="rect">
+            <a:avLst/>
+          </a:prstGeom>
+          <a:noFill/>
+        </p:spPr>
+        <p:txBody>
+          <a:bodyPr wrap="none">
+            <a:spAutoFit/>
+          </a:bodyPr>
+          <a:lstStyle/>
+          <a:p>
+            <a:pPr>
+              <a:defRPr sz="1300">
+                <a:solidFill>
+                  <a:srgbClr val="333333"/>
+                </a:solidFill>
+              </a:defRPr>
+            </a:pPr>
+            <a:r>
+              <a:t>allowing users to extend ChatGPT's tool use and functionality programmatically.</a:t>
+            </a:r>
+          </a:p>
+        </p:txBody>
+      </p:sp>
+      <p:sp>
+        <p:nvSpPr>
+          <p:cNvPr id="5" name="TextBox 4"/>
+          <p:cNvSpPr txBox="1"/>
+          <p:nvPr/>
+        </p:nvSpPr>
+        <p:spPr>
+          <a:xfrm>
+            <a:off x="457200" y="2743200"/>
+            <a:ext cx="8229600" cy="685800"/>
+          </a:xfrm>
+          <a:prstGeom prst="rect">
+            <a:avLst/>
+          </a:prstGeom>
+          <a:noFill/>
+        </p:spPr>
+        <p:txBody>
+          <a:bodyPr wrap="none">
+            <a:spAutoFit/>
+          </a:bodyPr>
+          <a:lstStyle/>
+          <a:p>
+            <a:pPr>
+              <a:defRPr sz="1000"/>
+            </a:pPr>
+          </a:p>
+        </p:txBody>
+      </p:sp>
+      <p:sp>
+        <p:nvSpPr>
+          <p:cNvPr id="6" name="TextBox 5"/>
+          <p:cNvSpPr txBox="1"/>
+          <p:nvPr/>
+        </p:nvSpPr>
+        <p:spPr>
+          <a:xfrm>
+            <a:off x="457200" y="3429000"/>
+            <a:ext cx="8229600" cy="685800"/>
+          </a:xfrm>
+          <a:prstGeom prst="rect">
+            <a:avLst/>
+          </a:prstGeom>
+          <a:noFill/>
+        </p:spPr>
+        <p:txBody>
+          <a:bodyPr wrap="none">
+            <a:spAutoFit/>
+          </a:bodyPr>
+          <a:lstStyle/>
+          <a:p>
+            <a:pPr>
+              <a:defRPr sz="1000" i="1">
+                <a:solidFill>
+                  <a:srgbClr val="666666"/>
+                </a:solidFill>
+              </a:defRPr>
+            </a:pPr>
+            <a:r>
+              <a:t>Source: Hacker News • 568 points • 313 comments</a:t>
+            </a:r>
+          </a:p>
+        </p:txBody>
+      </p:sp>
+      <p:sp>
+        <p:nvSpPr>
+          <p:cNvPr id="7" name="TextBox 6"/>
+          <p:cNvSpPr txBox="1"/>
+          <p:nvPr/>
+        </p:nvSpPr>
+        <p:spPr>
+          <a:xfrm>
+            <a:off x="457200" y="4114800"/>
+            <a:ext cx="8229600" cy="685800"/>
+          </a:xfrm>
+          <a:prstGeom prst="rect">
+            <a:avLst/>
+          </a:prstGeom>
+          <a:noFill/>
+        </p:spPr>
+        <p:txBody>
+          <a:bodyPr wrap="none">
+            <a:spAutoFit/>
+          </a:bodyPr>
+          <a:lstStyle/>
+          <a:p>
+            <a:pPr>
+              <a:defRPr sz="900">
+                <a:solidFill>
+                  <a:srgbClr val="3498DB"/>
+                </a:solidFill>
+              </a:defRPr>
+            </a:pPr>
+            <a:r>
+              <a:t>🔗 https://simonwillison.net/2025/Dec/12/openai-skills/</a:t>
+            </a:r>
+          </a:p>
+        </p:txBody>
+      </p:sp>
+      <p:sp>
+        <p:nvSpPr>
+          <p:cNvPr id="8" name="TextBox 7"/>
           <p:cNvSpPr txBox="1"/>
           <p:nvPr/>
         </p:nvSpPr>
@@ -3428,6 +3716,14 @@
 <file path=ppt/slides/slide12.xml><?xml version="1.0" encoding="utf-8"?>
 <p:sld xmlns:a="http://schemas.openxmlformats.org/drawingml/2006/main" xmlns:p="http://schemas.openxmlformats.org/presentationml/2006/main" xmlns:r="http://schemas.openxmlformats.org/officeDocument/2006/relationships">
   <p:cSld>
+    <p:bg>
+      <p:bgPr>
+        <a:solidFill>
+          <a:srgbClr val="F8F9FA"/>
+        </a:solidFill>
+        <a:effectLst/>
+      </p:bgPr>
+    </p:bg>
     <p:spTree>
       <p:nvGrpSpPr>
         <p:cNvPr id="1" name=""/>
@@ -3437,19 +3733,29 @@
       <p:grpSpPr/>
       <p:sp>
         <p:nvSpPr>
-          <p:cNvPr id="2" name="Title 1"/>
-          <p:cNvSpPr>
-            <a:spLocks noGrp="1"/>
-          </p:cNvSpPr>
-          <p:nvPr>
-            <p:ph type="title"/>
-          </p:nvPr>
-        </p:nvSpPr>
-        <p:spPr/>
-        <p:txBody>
-          <a:bodyPr/>
-          <a:lstStyle/>
-          <a:p>
+          <p:cNvPr id="2" name="TextBox 1"/>
+          <p:cNvSpPr txBox="1"/>
+          <p:nvPr/>
+        </p:nvSpPr>
+        <p:spPr>
+          <a:xfrm>
+            <a:off x="457200" y="457200"/>
+            <a:ext cx="8229600" cy="685800"/>
+          </a:xfrm>
+          <a:prstGeom prst="rect">
+            <a:avLst/>
+          </a:prstGeom>
+          <a:noFill/>
+        </p:spPr>
+        <p:txBody>
+          <a:bodyPr wrap="none">
+            <a:spAutoFit/>
+          </a:bodyPr>
+          <a:lstStyle/>
+          <a:p>
+            <a:pPr>
+              <a:defRPr sz="3200" b="1"/>
+            </a:pPr>
             <a:r>
               <a:t>3. Claude CLI deleted my home directory and wiped my Mac</a:t>
             </a:r>
@@ -3458,53 +3764,175 @@
       </p:sp>
       <p:sp>
         <p:nvSpPr>
-          <p:cNvPr id="3" name="Content Placeholder 2"/>
-          <p:cNvSpPr>
-            <a:spLocks noGrp="1"/>
-          </p:cNvSpPr>
-          <p:nvPr>
-            <p:ph idx="1"/>
-          </p:nvPr>
-        </p:nvSpPr>
-        <p:spPr/>
-        <p:txBody>
-          <a:bodyPr/>
-          <a:lstStyle/>
-          <a:p>
-            <a:r>
-              <a:t>Critical safety incident highlighting the risks of autonomous agents with</a:t>
-            </a:r>
-          </a:p>
-          <a:p>
-            <a:r>
-              <a:t>system-level tool access, sparking important discussions about agent guardrails</a:t>
-            </a:r>
-          </a:p>
-          <a:p>
-            <a:r>
-              <a:t>and permission systems.</a:t>
-            </a:r>
-          </a:p>
-          <a:p>
-            <a:pPr/>
-          </a:p>
-          <a:p>
-            <a:pPr/>
+          <p:cNvPr id="3" name="TextBox 2"/>
+          <p:cNvSpPr txBox="1"/>
+          <p:nvPr/>
+        </p:nvSpPr>
+        <p:spPr>
+          <a:xfrm>
+            <a:off x="457200" y="1371600"/>
+            <a:ext cx="8229600" cy="685800"/>
+          </a:xfrm>
+          <a:prstGeom prst="rect">
+            <a:avLst/>
+          </a:prstGeom>
+          <a:noFill/>
+        </p:spPr>
+        <p:txBody>
+          <a:bodyPr wrap="none">
+            <a:spAutoFit/>
+          </a:bodyPr>
+          <a:lstStyle/>
+          <a:p>
+            <a:pPr>
+              <a:defRPr sz="1300">
+                <a:solidFill>
+                  <a:srgbClr val="333333"/>
+                </a:solidFill>
+              </a:defRPr>
+            </a:pPr>
+            <a:r>
+              <a:t>A critical real-world incident highlighting the risks of autonomous tool use by AI agents,</a:t>
+            </a:r>
+          </a:p>
+        </p:txBody>
+      </p:sp>
+      <p:sp>
+        <p:nvSpPr>
+          <p:cNvPr id="4" name="TextBox 3"/>
+          <p:cNvSpPr txBox="1"/>
+          <p:nvPr/>
+        </p:nvSpPr>
+        <p:spPr>
+          <a:xfrm>
+            <a:off x="457200" y="2057400"/>
+            <a:ext cx="8229600" cy="685800"/>
+          </a:xfrm>
+          <a:prstGeom prst="rect">
+            <a:avLst/>
+          </a:prstGeom>
+          <a:noFill/>
+        </p:spPr>
+        <p:txBody>
+          <a:bodyPr wrap="none">
+            <a:spAutoFit/>
+          </a:bodyPr>
+          <a:lstStyle/>
+          <a:p>
+            <a:pPr>
+              <a:defRPr sz="1300">
+                <a:solidFill>
+                  <a:srgbClr val="333333"/>
+                </a:solidFill>
+              </a:defRPr>
+            </a:pPr>
+            <a:r>
+              <a:t>emphasizing the urgent need for better safety guardrails in agentic systems.</a:t>
+            </a:r>
+          </a:p>
+        </p:txBody>
+      </p:sp>
+      <p:sp>
+        <p:nvSpPr>
+          <p:cNvPr id="5" name="TextBox 4"/>
+          <p:cNvSpPr txBox="1"/>
+          <p:nvPr/>
+        </p:nvSpPr>
+        <p:spPr>
+          <a:xfrm>
+            <a:off x="457200" y="2743200"/>
+            <a:ext cx="8229600" cy="685800"/>
+          </a:xfrm>
+          <a:prstGeom prst="rect">
+            <a:avLst/>
+          </a:prstGeom>
+          <a:noFill/>
+        </p:spPr>
+        <p:txBody>
+          <a:bodyPr wrap="none">
+            <a:spAutoFit/>
+          </a:bodyPr>
+          <a:lstStyle/>
+          <a:p>
+            <a:pPr>
+              <a:defRPr sz="1000"/>
+            </a:pPr>
+          </a:p>
+        </p:txBody>
+      </p:sp>
+      <p:sp>
+        <p:nvSpPr>
+          <p:cNvPr id="6" name="TextBox 5"/>
+          <p:cNvSpPr txBox="1"/>
+          <p:nvPr/>
+        </p:nvSpPr>
+        <p:spPr>
+          <a:xfrm>
+            <a:off x="457200" y="3429000"/>
+            <a:ext cx="8229600" cy="685800"/>
+          </a:xfrm>
+          <a:prstGeom prst="rect">
+            <a:avLst/>
+          </a:prstGeom>
+          <a:noFill/>
+        </p:spPr>
+        <p:txBody>
+          <a:bodyPr wrap="none">
+            <a:spAutoFit/>
+          </a:bodyPr>
+          <a:lstStyle/>
+          <a:p>
+            <a:pPr>
+              <a:defRPr sz="1000" i="1">
+                <a:solidFill>
+                  <a:srgbClr val="666666"/>
+                </a:solidFill>
+              </a:defRPr>
+            </a:pPr>
             <a:r>
               <a:t>Source: Hacker News • 220 points • 179 comments</a:t>
             </a:r>
           </a:p>
-          <a:p>
-            <a:pPr/>
-            <a:r>
-              <a:t>Link: https://old.reddit.com/r/ClaudeAI/comments/1pgx...</a:t>
-            </a:r>
-          </a:p>
-        </p:txBody>
-      </p:sp>
-      <p:sp>
-        <p:nvSpPr>
-          <p:cNvPr id="4" name="TextBox 3"/>
+        </p:txBody>
+      </p:sp>
+      <p:sp>
+        <p:nvSpPr>
+          <p:cNvPr id="7" name="TextBox 6"/>
+          <p:cNvSpPr txBox="1"/>
+          <p:nvPr/>
+        </p:nvSpPr>
+        <p:spPr>
+          <a:xfrm>
+            <a:off x="457200" y="4114800"/>
+            <a:ext cx="8229600" cy="685800"/>
+          </a:xfrm>
+          <a:prstGeom prst="rect">
+            <a:avLst/>
+          </a:prstGeom>
+          <a:noFill/>
+        </p:spPr>
+        <p:txBody>
+          <a:bodyPr wrap="none">
+            <a:spAutoFit/>
+          </a:bodyPr>
+          <a:lstStyle/>
+          <a:p>
+            <a:pPr>
+              <a:defRPr sz="900">
+                <a:solidFill>
+                  <a:srgbClr val="3498DB"/>
+                </a:solidFill>
+              </a:defRPr>
+            </a:pPr>
+            <a:r>
+              <a:t>🔗 https://old.reddit.com/r/ClaudeAI/comments/1pgxckk/claude...</a:t>
+            </a:r>
+          </a:p>
+        </p:txBody>
+      </p:sp>
+      <p:sp>
+        <p:nvSpPr>
+          <p:cNvPr id="8" name="TextBox 7"/>
           <p:cNvSpPr txBox="1"/>
           <p:nvPr/>
         </p:nvSpPr>
@@ -3544,6 +3972,14 @@
 <file path=ppt/slides/slide13.xml><?xml version="1.0" encoding="utf-8"?>
 <p:sld xmlns:a="http://schemas.openxmlformats.org/drawingml/2006/main" xmlns:p="http://schemas.openxmlformats.org/presentationml/2006/main" xmlns:r="http://schemas.openxmlformats.org/officeDocument/2006/relationships">
   <p:cSld>
+    <p:bg>
+      <p:bgPr>
+        <a:solidFill>
+          <a:srgbClr val="F8F9FA"/>
+        </a:solidFill>
+        <a:effectLst/>
+      </p:bgPr>
+    </p:bg>
     <p:spTree>
       <p:nvGrpSpPr>
         <p:cNvPr id="1" name=""/>
@@ -3553,67 +3989,66 @@
       <p:grpSpPr/>
       <p:sp>
         <p:nvSpPr>
-          <p:cNvPr id="2" name="Title 1"/>
-          <p:cNvSpPr>
-            <a:spLocks noGrp="1"/>
-          </p:cNvSpPr>
-          <p:nvPr>
-            <p:ph type="title"/>
-          </p:nvPr>
-        </p:nvSpPr>
-        <p:spPr/>
-        <p:txBody>
-          <a:bodyPr/>
-          <a:lstStyle/>
-          <a:p>
-            <a:r>
-              <a:t>4. An AI agent spent 16 hours hacking Stanford's network. It outperfor...</a:t>
-            </a:r>
-          </a:p>
-        </p:txBody>
-      </p:sp>
-      <p:sp>
-        <p:nvSpPr>
-          <p:cNvPr id="3" name="Content Placeholder 2"/>
-          <p:cNvSpPr>
-            <a:spLocks noGrp="1"/>
-          </p:cNvSpPr>
-          <p:nvPr>
-            <p:ph idx="1"/>
-          </p:nvPr>
-        </p:nvSpPr>
-        <p:spPr/>
-        <p:txBody>
-          <a:bodyPr/>
-          <a:lstStyle/>
-          <a:p>
-            <a:r>
-              <a:t>Demonstrates autonomous AI agents achieving expert-level performance in complex</a:t>
-            </a:r>
-          </a:p>
-          <a:p>
-            <a:r>
-              <a:t>security tasks through multi-step planning and tool execution, outperforming</a:t>
-            </a:r>
-          </a:p>
-          <a:p>
-            <a:r>
-              <a:t>human specialists.</a:t>
-            </a:r>
-          </a:p>
-          <a:p>
-            <a:pPr/>
-          </a:p>
-          <a:p>
-            <a:pPr/>
-            <a:r>
-              <a:t>Source: r/artificial • 211 upvotes • 32 comments</a:t>
-            </a:r>
-          </a:p>
-          <a:p>
-            <a:pPr/>
-            <a:r>
-              <a:t>Link: https://reddit.com/r/artificial/comments/1pkuaa...</a:t>
+          <p:cNvPr id="2" name="TextBox 1"/>
+          <p:cNvSpPr txBox="1"/>
+          <p:nvPr/>
+        </p:nvSpPr>
+        <p:spPr>
+          <a:xfrm>
+            <a:off x="457200" y="457200"/>
+            <a:ext cx="8229600" cy="685800"/>
+          </a:xfrm>
+          <a:prstGeom prst="rect">
+            <a:avLst/>
+          </a:prstGeom>
+          <a:noFill/>
+        </p:spPr>
+        <p:txBody>
+          <a:bodyPr wrap="none">
+            <a:spAutoFit/>
+          </a:bodyPr>
+          <a:lstStyle/>
+          <a:p>
+            <a:pPr>
+              <a:defRPr sz="3200" b="1"/>
+            </a:pPr>
+            <a:r>
+              <a:t>4. An AI agent spent 16 hours hacking Stanford's network. It outperformed h...</a:t>
+            </a:r>
+          </a:p>
+        </p:txBody>
+      </p:sp>
+      <p:sp>
+        <p:nvSpPr>
+          <p:cNvPr id="3" name="TextBox 2"/>
+          <p:cNvSpPr txBox="1"/>
+          <p:nvPr/>
+        </p:nvSpPr>
+        <p:spPr>
+          <a:xfrm>
+            <a:off x="457200" y="1371600"/>
+            <a:ext cx="8229600" cy="685800"/>
+          </a:xfrm>
+          <a:prstGeom prst="rect">
+            <a:avLst/>
+          </a:prstGeom>
+          <a:noFill/>
+        </p:spPr>
+        <p:txBody>
+          <a:bodyPr wrap="none">
+            <a:spAutoFit/>
+          </a:bodyPr>
+          <a:lstStyle/>
+          <a:p>
+            <a:pPr>
+              <a:defRPr sz="1300">
+                <a:solidFill>
+                  <a:srgbClr val="333333"/>
+                </a:solidFill>
+              </a:defRPr>
+            </a:pPr>
+            <a:r>
+              <a:t>Demonstrates autonomous AI agents successfully performing complex, multi-step</a:t>
             </a:r>
           </a:p>
         </p:txBody>
@@ -3621,6 +4056,174 @@
       <p:sp>
         <p:nvSpPr>
           <p:cNvPr id="4" name="TextBox 3"/>
+          <p:cNvSpPr txBox="1"/>
+          <p:nvPr/>
+        </p:nvSpPr>
+        <p:spPr>
+          <a:xfrm>
+            <a:off x="457200" y="2057400"/>
+            <a:ext cx="8229600" cy="685800"/>
+          </a:xfrm>
+          <a:prstGeom prst="rect">
+            <a:avLst/>
+          </a:prstGeom>
+          <a:noFill/>
+        </p:spPr>
+        <p:txBody>
+          <a:bodyPr wrap="none">
+            <a:spAutoFit/>
+          </a:bodyPr>
+          <a:lstStyle/>
+          <a:p>
+            <a:pPr>
+              <a:defRPr sz="1300">
+                <a:solidFill>
+                  <a:srgbClr val="333333"/>
+                </a:solidFill>
+              </a:defRPr>
+            </a:pPr>
+            <a:r>
+              <a:t>cybersecurity tasks at expert level, showing practical agent capability in specialized</a:t>
+            </a:r>
+          </a:p>
+        </p:txBody>
+      </p:sp>
+      <p:sp>
+        <p:nvSpPr>
+          <p:cNvPr id="5" name="TextBox 4"/>
+          <p:cNvSpPr txBox="1"/>
+          <p:nvPr/>
+        </p:nvSpPr>
+        <p:spPr>
+          <a:xfrm>
+            <a:off x="457200" y="2743200"/>
+            <a:ext cx="8229600" cy="685800"/>
+          </a:xfrm>
+          <a:prstGeom prst="rect">
+            <a:avLst/>
+          </a:prstGeom>
+          <a:noFill/>
+        </p:spPr>
+        <p:txBody>
+          <a:bodyPr wrap="none">
+            <a:spAutoFit/>
+          </a:bodyPr>
+          <a:lstStyle/>
+          <a:p>
+            <a:pPr>
+              <a:defRPr sz="1300">
+                <a:solidFill>
+                  <a:srgbClr val="333333"/>
+                </a:solidFill>
+              </a:defRPr>
+            </a:pPr>
+            <a:r>
+              <a:t>domains.</a:t>
+            </a:r>
+          </a:p>
+        </p:txBody>
+      </p:sp>
+      <p:sp>
+        <p:nvSpPr>
+          <p:cNvPr id="6" name="TextBox 5"/>
+          <p:cNvSpPr txBox="1"/>
+          <p:nvPr/>
+        </p:nvSpPr>
+        <p:spPr>
+          <a:xfrm>
+            <a:off x="457200" y="3429000"/>
+            <a:ext cx="8229600" cy="685800"/>
+          </a:xfrm>
+          <a:prstGeom prst="rect">
+            <a:avLst/>
+          </a:prstGeom>
+          <a:noFill/>
+        </p:spPr>
+        <p:txBody>
+          <a:bodyPr wrap="none">
+            <a:spAutoFit/>
+          </a:bodyPr>
+          <a:lstStyle/>
+          <a:p>
+            <a:pPr>
+              <a:defRPr sz="1000"/>
+            </a:pPr>
+          </a:p>
+        </p:txBody>
+      </p:sp>
+      <p:sp>
+        <p:nvSpPr>
+          <p:cNvPr id="7" name="TextBox 6"/>
+          <p:cNvSpPr txBox="1"/>
+          <p:nvPr/>
+        </p:nvSpPr>
+        <p:spPr>
+          <a:xfrm>
+            <a:off x="457200" y="4114800"/>
+            <a:ext cx="8229600" cy="685800"/>
+          </a:xfrm>
+          <a:prstGeom prst="rect">
+            <a:avLst/>
+          </a:prstGeom>
+          <a:noFill/>
+        </p:spPr>
+        <p:txBody>
+          <a:bodyPr wrap="none">
+            <a:spAutoFit/>
+          </a:bodyPr>
+          <a:lstStyle/>
+          <a:p>
+            <a:pPr>
+              <a:defRPr sz="1000" i="1">
+                <a:solidFill>
+                  <a:srgbClr val="666666"/>
+                </a:solidFill>
+              </a:defRPr>
+            </a:pPr>
+            <a:r>
+              <a:t>Source: r/artificial • 210 upvotes • 32 comments</a:t>
+            </a:r>
+          </a:p>
+        </p:txBody>
+      </p:sp>
+      <p:sp>
+        <p:nvSpPr>
+          <p:cNvPr id="8" name="TextBox 7"/>
+          <p:cNvSpPr txBox="1"/>
+          <p:nvPr/>
+        </p:nvSpPr>
+        <p:spPr>
+          <a:xfrm>
+            <a:off x="457200" y="4800600"/>
+            <a:ext cx="8229600" cy="685800"/>
+          </a:xfrm>
+          <a:prstGeom prst="rect">
+            <a:avLst/>
+          </a:prstGeom>
+          <a:noFill/>
+        </p:spPr>
+        <p:txBody>
+          <a:bodyPr wrap="none">
+            <a:spAutoFit/>
+          </a:bodyPr>
+          <a:lstStyle/>
+          <a:p>
+            <a:pPr>
+              <a:defRPr sz="900">
+                <a:solidFill>
+                  <a:srgbClr val="3498DB"/>
+                </a:solidFill>
+              </a:defRPr>
+            </a:pPr>
+            <a:r>
+              <a:t>🔗 https://reddit.com/r/artificial/comments/1pkuaaq/an_ai_ag...</a:t>
+            </a:r>
+          </a:p>
+        </p:txBody>
+      </p:sp>
+      <p:sp>
+        <p:nvSpPr>
+          <p:cNvPr id="9" name="TextBox 8"/>
           <p:cNvSpPr txBox="1"/>
           <p:nvPr/>
         </p:nvSpPr>
@@ -3660,6 +4263,14 @@
 <file path=ppt/slides/slide14.xml><?xml version="1.0" encoding="utf-8"?>
 <p:sld xmlns:a="http://schemas.openxmlformats.org/drawingml/2006/main" xmlns:p="http://schemas.openxmlformats.org/presentationml/2006/main" xmlns:r="http://schemas.openxmlformats.org/officeDocument/2006/relationships">
   <p:cSld>
+    <p:bg>
+      <p:bgPr>
+        <a:solidFill>
+          <a:srgbClr val="F8F9FA"/>
+        </a:solidFill>
+        <a:effectLst/>
+      </p:bgPr>
+    </p:bg>
     <p:spTree>
       <p:nvGrpSpPr>
         <p:cNvPr id="1" name=""/>
@@ -3669,19 +4280,29 @@
       <p:grpSpPr/>
       <p:sp>
         <p:nvSpPr>
-          <p:cNvPr id="2" name="Title 1"/>
-          <p:cNvSpPr>
-            <a:spLocks noGrp="1"/>
-          </p:cNvSpPr>
-          <p:nvPr>
-            <p:ph type="title"/>
-          </p:nvPr>
-        </p:nvSpPr>
-        <p:spPr/>
-        <p:txBody>
-          <a:bodyPr/>
-          <a:lstStyle/>
-          <a:p>
+          <p:cNvPr id="2" name="TextBox 1"/>
+          <p:cNvSpPr txBox="1"/>
+          <p:nvPr/>
+        </p:nvSpPr>
+        <p:spPr>
+          <a:xfrm>
+            <a:off x="457200" y="457200"/>
+            <a:ext cx="8229600" cy="685800"/>
+          </a:xfrm>
+          <a:prstGeom prst="rect">
+            <a:avLst/>
+          </a:prstGeom>
+          <a:noFill/>
+        </p:spPr>
+        <p:txBody>
+          <a:bodyPr wrap="none">
+            <a:spAutoFit/>
+          </a:bodyPr>
+          <a:lstStyle/>
+          <a:p>
+            <a:pPr>
+              <a:defRPr sz="3200" b="1"/>
+            </a:pPr>
             <a:r>
               <a:t>5. Introducing: Devstral 2 and Mistral Vibe CLI</a:t>
             </a:r>
@@ -3690,41 +4311,35 @@
       </p:sp>
       <p:sp>
         <p:nvSpPr>
-          <p:cNvPr id="3" name="Content Placeholder 2"/>
-          <p:cNvSpPr>
-            <a:spLocks noGrp="1"/>
-          </p:cNvSpPr>
-          <p:nvPr>
-            <p:ph idx="1"/>
-          </p:nvPr>
-        </p:nvSpPr>
-        <p:spPr/>
-        <p:txBody>
-          <a:bodyPr/>
-          <a:lstStyle/>
-          <a:p>
-            <a:r>
-              <a:t>Mistral launches new developer-focused model with CLI tool interface, expanding</a:t>
-            </a:r>
-          </a:p>
-          <a:p>
-            <a:r>
-              <a:t>the competitive landscape for code-capable agentic systems.</a:t>
-            </a:r>
-          </a:p>
-          <a:p>
-            <a:pPr/>
-          </a:p>
-          <a:p>
-            <a:pPr/>
-            <a:r>
-              <a:t>Source: r/LocalLLaMA • 690 upvotes • 218 comments</a:t>
-            </a:r>
-          </a:p>
-          <a:p>
-            <a:pPr/>
-            <a:r>
-              <a:t>Link: https://reddit.com/r/LocalLLaMA/comments/1pi9q3...</a:t>
+          <p:cNvPr id="3" name="TextBox 2"/>
+          <p:cNvSpPr txBox="1"/>
+          <p:nvPr/>
+        </p:nvSpPr>
+        <p:spPr>
+          <a:xfrm>
+            <a:off x="457200" y="1371600"/>
+            <a:ext cx="8229600" cy="685800"/>
+          </a:xfrm>
+          <a:prstGeom prst="rect">
+            <a:avLst/>
+          </a:prstGeom>
+          <a:noFill/>
+        </p:spPr>
+        <p:txBody>
+          <a:bodyPr wrap="none">
+            <a:spAutoFit/>
+          </a:bodyPr>
+          <a:lstStyle/>
+          <a:p>
+            <a:pPr>
+              <a:defRPr sz="1300">
+                <a:solidFill>
+                  <a:srgbClr val="333333"/>
+                </a:solidFill>
+              </a:defRPr>
+            </a:pPr>
+            <a:r>
+              <a:t>Mistral launches a development-focused model with CLI integration, expanding the</a:t>
             </a:r>
           </a:p>
         </p:txBody>
@@ -3732,6 +4347,139 @@
       <p:sp>
         <p:nvSpPr>
           <p:cNvPr id="4" name="TextBox 3"/>
+          <p:cNvSpPr txBox="1"/>
+          <p:nvPr/>
+        </p:nvSpPr>
+        <p:spPr>
+          <a:xfrm>
+            <a:off x="457200" y="2057400"/>
+            <a:ext cx="8229600" cy="685800"/>
+          </a:xfrm>
+          <a:prstGeom prst="rect">
+            <a:avLst/>
+          </a:prstGeom>
+          <a:noFill/>
+        </p:spPr>
+        <p:txBody>
+          <a:bodyPr wrap="none">
+            <a:spAutoFit/>
+          </a:bodyPr>
+          <a:lstStyle/>
+          <a:p>
+            <a:pPr>
+              <a:defRPr sz="1300">
+                <a:solidFill>
+                  <a:srgbClr val="333333"/>
+                </a:solidFill>
+              </a:defRPr>
+            </a:pPr>
+            <a:r>
+              <a:t>competitive landscape for agent-capable coding assistants.</a:t>
+            </a:r>
+          </a:p>
+        </p:txBody>
+      </p:sp>
+      <p:sp>
+        <p:nvSpPr>
+          <p:cNvPr id="5" name="TextBox 4"/>
+          <p:cNvSpPr txBox="1"/>
+          <p:nvPr/>
+        </p:nvSpPr>
+        <p:spPr>
+          <a:xfrm>
+            <a:off x="457200" y="2743200"/>
+            <a:ext cx="8229600" cy="685800"/>
+          </a:xfrm>
+          <a:prstGeom prst="rect">
+            <a:avLst/>
+          </a:prstGeom>
+          <a:noFill/>
+        </p:spPr>
+        <p:txBody>
+          <a:bodyPr wrap="none">
+            <a:spAutoFit/>
+          </a:bodyPr>
+          <a:lstStyle/>
+          <a:p>
+            <a:pPr>
+              <a:defRPr sz="1000"/>
+            </a:pPr>
+          </a:p>
+        </p:txBody>
+      </p:sp>
+      <p:sp>
+        <p:nvSpPr>
+          <p:cNvPr id="6" name="TextBox 5"/>
+          <p:cNvSpPr txBox="1"/>
+          <p:nvPr/>
+        </p:nvSpPr>
+        <p:spPr>
+          <a:xfrm>
+            <a:off x="457200" y="3429000"/>
+            <a:ext cx="8229600" cy="685800"/>
+          </a:xfrm>
+          <a:prstGeom prst="rect">
+            <a:avLst/>
+          </a:prstGeom>
+          <a:noFill/>
+        </p:spPr>
+        <p:txBody>
+          <a:bodyPr wrap="none">
+            <a:spAutoFit/>
+          </a:bodyPr>
+          <a:lstStyle/>
+          <a:p>
+            <a:pPr>
+              <a:defRPr sz="1000" i="1">
+                <a:solidFill>
+                  <a:srgbClr val="666666"/>
+                </a:solidFill>
+              </a:defRPr>
+            </a:pPr>
+            <a:r>
+              <a:t>Source: r/LocalLLaMA • 686 upvotes • 218 comments</a:t>
+            </a:r>
+          </a:p>
+        </p:txBody>
+      </p:sp>
+      <p:sp>
+        <p:nvSpPr>
+          <p:cNvPr id="7" name="TextBox 6"/>
+          <p:cNvSpPr txBox="1"/>
+          <p:nvPr/>
+        </p:nvSpPr>
+        <p:spPr>
+          <a:xfrm>
+            <a:off x="457200" y="4114800"/>
+            <a:ext cx="8229600" cy="685800"/>
+          </a:xfrm>
+          <a:prstGeom prst="rect">
+            <a:avLst/>
+          </a:prstGeom>
+          <a:noFill/>
+        </p:spPr>
+        <p:txBody>
+          <a:bodyPr wrap="none">
+            <a:spAutoFit/>
+          </a:bodyPr>
+          <a:lstStyle/>
+          <a:p>
+            <a:pPr>
+              <a:defRPr sz="900">
+                <a:solidFill>
+                  <a:srgbClr val="3498DB"/>
+                </a:solidFill>
+              </a:defRPr>
+            </a:pPr>
+            <a:r>
+              <a:t>🔗 https://reddit.com/r/LocalLLaMA/comments/1pi9q3t/introduc...</a:t>
+            </a:r>
+          </a:p>
+        </p:txBody>
+      </p:sp>
+      <p:sp>
+        <p:nvSpPr>
+          <p:cNvPr id="8" name="TextBox 7"/>
           <p:cNvSpPr txBox="1"/>
           <p:nvPr/>
         </p:nvSpPr>
@@ -3771,6 +4519,14 @@
 <file path=ppt/slides/slide15.xml><?xml version="1.0" encoding="utf-8"?>
 <p:sld xmlns:a="http://schemas.openxmlformats.org/drawingml/2006/main" xmlns:p="http://schemas.openxmlformats.org/presentationml/2006/main" xmlns:r="http://schemas.openxmlformats.org/officeDocument/2006/relationships">
   <p:cSld>
+    <p:bg>
+      <p:bgPr>
+        <a:solidFill>
+          <a:srgbClr val="1ABC9C"/>
+        </a:solidFill>
+        <a:effectLst/>
+      </p:bgPr>
+    </p:bg>
     <p:spTree>
       <p:nvGrpSpPr>
         <p:cNvPr id="1" name=""/>
@@ -3780,19 +4536,29 @@
       <p:grpSpPr/>
       <p:sp>
         <p:nvSpPr>
-          <p:cNvPr id="2" name="Title 1"/>
-          <p:cNvSpPr>
-            <a:spLocks noGrp="1"/>
-          </p:cNvSpPr>
-          <p:nvPr>
-            <p:ph type="title"/>
-          </p:nvPr>
-        </p:nvSpPr>
-        <p:spPr/>
-        <p:txBody>
-          <a:bodyPr/>
-          <a:lstStyle/>
-          <a:p>
+          <p:cNvPr id="2" name="TextBox 1"/>
+          <p:cNvSpPr txBox="1"/>
+          <p:nvPr/>
+        </p:nvSpPr>
+        <p:spPr>
+          <a:xfrm>
+            <a:off x="457200" y="457200"/>
+            <a:ext cx="8229600" cy="685800"/>
+          </a:xfrm>
+          <a:prstGeom prst="rect">
+            <a:avLst/>
+          </a:prstGeom>
+          <a:noFill/>
+        </p:spPr>
+        <p:txBody>
+          <a:bodyPr wrap="none">
+            <a:spAutoFit/>
+          </a:bodyPr>
+          <a:lstStyle/>
+          <a:p>
+            <a:pPr>
+              <a:defRPr sz="3200" b="1"/>
+            </a:pPr>
             <a:r>
               <a:t>Tools &amp; Frameworks</a:t>
             </a:r>
@@ -3801,28 +4567,96 @@
       </p:sp>
       <p:sp>
         <p:nvSpPr>
-          <p:cNvPr id="3" name="Content Placeholder 2"/>
-          <p:cNvSpPr>
-            <a:spLocks noGrp="1"/>
-          </p:cNvSpPr>
-          <p:nvPr>
-            <p:ph idx="1"/>
-          </p:nvPr>
-        </p:nvSpPr>
-        <p:spPr/>
-        <p:txBody>
-          <a:bodyPr/>
-          <a:lstStyle/>
-          <a:p>
+          <p:cNvPr id="3" name="TextBox 2"/>
+          <p:cNvSpPr txBox="1"/>
+          <p:nvPr/>
+        </p:nvSpPr>
+        <p:spPr>
+          <a:xfrm>
+            <a:off x="457200" y="1371600"/>
+            <a:ext cx="8229600" cy="685800"/>
+          </a:xfrm>
+          <a:prstGeom prst="rect">
+            <a:avLst/>
+          </a:prstGeom>
+          <a:noFill/>
+        </p:spPr>
+        <p:txBody>
+          <a:bodyPr wrap="none">
+            <a:spAutoFit/>
+          </a:bodyPr>
+          <a:lstStyle/>
+          <a:p>
+            <a:pPr>
+              <a:defRPr sz="2000" b="1">
+                <a:solidFill>
+                  <a:srgbClr val="FFFFFF"/>
+                </a:solidFill>
+              </a:defRPr>
+            </a:pPr>
             <a:r>
               <a:t>4 key updates</a:t>
             </a:r>
           </a:p>
-          <a:p>
-            <a:pPr/>
-          </a:p>
-          <a:p>
-            <a:pPr/>
+        </p:txBody>
+      </p:sp>
+      <p:sp>
+        <p:nvSpPr>
+          <p:cNvPr id="4" name="TextBox 3"/>
+          <p:cNvSpPr txBox="1"/>
+          <p:nvPr/>
+        </p:nvSpPr>
+        <p:spPr>
+          <a:xfrm>
+            <a:off x="457200" y="2057400"/>
+            <a:ext cx="8229600" cy="685800"/>
+          </a:xfrm>
+          <a:prstGeom prst="rect">
+            <a:avLst/>
+          </a:prstGeom>
+          <a:noFill/>
+        </p:spPr>
+        <p:txBody>
+          <a:bodyPr wrap="none">
+            <a:spAutoFit/>
+          </a:bodyPr>
+          <a:lstStyle/>
+          <a:p>
+            <a:pPr>
+              <a:defRPr sz="1200"/>
+            </a:pPr>
+          </a:p>
+        </p:txBody>
+      </p:sp>
+      <p:sp>
+        <p:nvSpPr>
+          <p:cNvPr id="5" name="TextBox 4"/>
+          <p:cNvSpPr txBox="1"/>
+          <p:nvPr/>
+        </p:nvSpPr>
+        <p:spPr>
+          <a:xfrm>
+            <a:off x="457200" y="2743200"/>
+            <a:ext cx="8229600" cy="685800"/>
+          </a:xfrm>
+          <a:prstGeom prst="rect">
+            <a:avLst/>
+          </a:prstGeom>
+          <a:noFill/>
+        </p:spPr>
+        <p:txBody>
+          <a:bodyPr wrap="none">
+            <a:spAutoFit/>
+          </a:bodyPr>
+          <a:lstStyle/>
+          <a:p>
+            <a:pPr>
+              <a:defRPr sz="1600" i="1">
+                <a:solidFill>
+                  <a:srgbClr val="FFFFFF"/>
+                </a:solidFill>
+              </a:defRPr>
+            </a:pPr>
             <a:r>
               <a:t>Swipe to explore →</a:t>
             </a:r>
@@ -3831,7 +4665,7 @@
       </p:sp>
       <p:sp>
         <p:nvSpPr>
-          <p:cNvPr id="4" name="TextBox 3"/>
+          <p:cNvPr id="6" name="TextBox 5"/>
           <p:cNvSpPr txBox="1"/>
           <p:nvPr/>
         </p:nvSpPr>
@@ -3871,6 +4705,14 @@
 <file path=ppt/slides/slide16.xml><?xml version="1.0" encoding="utf-8"?>
 <p:sld xmlns:a="http://schemas.openxmlformats.org/drawingml/2006/main" xmlns:p="http://schemas.openxmlformats.org/presentationml/2006/main" xmlns:r="http://schemas.openxmlformats.org/officeDocument/2006/relationships">
   <p:cSld>
+    <p:bg>
+      <p:bgPr>
+        <a:solidFill>
+          <a:srgbClr val="F8F9FA"/>
+        </a:solidFill>
+        <a:effectLst/>
+      </p:bgPr>
+    </p:bg>
     <p:spTree>
       <p:nvGrpSpPr>
         <p:cNvPr id="1" name=""/>
@@ -3880,62 +4722,66 @@
       <p:grpSpPr/>
       <p:sp>
         <p:nvSpPr>
-          <p:cNvPr id="2" name="Title 1"/>
-          <p:cNvSpPr>
-            <a:spLocks noGrp="1"/>
-          </p:cNvSpPr>
-          <p:nvPr>
-            <p:ph type="title"/>
-          </p:nvPr>
-        </p:nvSpPr>
-        <p:spPr/>
-        <p:txBody>
-          <a:bodyPr/>
-          <a:lstStyle/>
-          <a:p>
-            <a:r>
-              <a:t>1. OpenAI Skills (ChatGPT and Codex CLI)</a:t>
-            </a:r>
-          </a:p>
-        </p:txBody>
-      </p:sp>
-      <p:sp>
-        <p:nvSpPr>
-          <p:cNvPr id="3" name="Content Placeholder 2"/>
-          <p:cNvSpPr>
-            <a:spLocks noGrp="1"/>
-          </p:cNvSpPr>
-          <p:nvPr>
-            <p:ph idx="1"/>
-          </p:nvPr>
-        </p:nvSpPr>
-        <p:spPr/>
-        <p:txBody>
-          <a:bodyPr/>
-          <a:lstStyle/>
-          <a:p>
-            <a:r>
-              <a:t>New framework enabling structured task execution and tool chaining in ChatGPT,</a:t>
-            </a:r>
-          </a:p>
-          <a:p>
-            <a:r>
-              <a:t>representing OpenAI's formal entry into agent orchestration infrastructure.</a:t>
-            </a:r>
-          </a:p>
-          <a:p>
-            <a:pPr/>
-          </a:p>
-          <a:p>
-            <a:pPr/>
-            <a:r>
-              <a:t>Source: Hacker News • 567 points • 313 comments</a:t>
-            </a:r>
-          </a:p>
-          <a:p>
-            <a:pPr/>
-            <a:r>
-              <a:t>Link: https://simonwillison.net/2025/Dec/12/openai-sk...</a:t>
+          <p:cNvPr id="2" name="TextBox 1"/>
+          <p:cNvSpPr txBox="1"/>
+          <p:nvPr/>
+        </p:nvSpPr>
+        <p:spPr>
+          <a:xfrm>
+            <a:off x="457200" y="457200"/>
+            <a:ext cx="8229600" cy="685800"/>
+          </a:xfrm>
+          <a:prstGeom prst="rect">
+            <a:avLst/>
+          </a:prstGeom>
+          <a:noFill/>
+        </p:spPr>
+        <p:txBody>
+          <a:bodyPr wrap="none">
+            <a:spAutoFit/>
+          </a:bodyPr>
+          <a:lstStyle/>
+          <a:p>
+            <a:pPr>
+              <a:defRPr sz="3200" b="1"/>
+            </a:pPr>
+            <a:r>
+              <a:t>1. OpenAI are quietly adopting skills, now available in ChatGPT and Codex CLI</a:t>
+            </a:r>
+          </a:p>
+        </p:txBody>
+      </p:sp>
+      <p:sp>
+        <p:nvSpPr>
+          <p:cNvPr id="3" name="TextBox 2"/>
+          <p:cNvSpPr txBox="1"/>
+          <p:nvPr/>
+        </p:nvSpPr>
+        <p:spPr>
+          <a:xfrm>
+            <a:off x="457200" y="1371600"/>
+            <a:ext cx="8229600" cy="685800"/>
+          </a:xfrm>
+          <a:prstGeom prst="rect">
+            <a:avLst/>
+          </a:prstGeom>
+          <a:noFill/>
+        </p:spPr>
+        <p:txBody>
+          <a:bodyPr wrap="none">
+            <a:spAutoFit/>
+          </a:bodyPr>
+          <a:lstStyle/>
+          <a:p>
+            <a:pPr>
+              <a:defRPr sz="1300">
+                <a:solidFill>
+                  <a:srgbClr val="333333"/>
+                </a:solidFill>
+              </a:defRPr>
+            </a:pPr>
+            <a:r>
+              <a:t>OpenAI's skills system provides a framework for extending agent capabilities through</a:t>
             </a:r>
           </a:p>
         </p:txBody>
@@ -3943,6 +4789,139 @@
       <p:sp>
         <p:nvSpPr>
           <p:cNvPr id="4" name="TextBox 3"/>
+          <p:cNvSpPr txBox="1"/>
+          <p:nvPr/>
+        </p:nvSpPr>
+        <p:spPr>
+          <a:xfrm>
+            <a:off x="457200" y="2057400"/>
+            <a:ext cx="8229600" cy="685800"/>
+          </a:xfrm>
+          <a:prstGeom prst="rect">
+            <a:avLst/>
+          </a:prstGeom>
+          <a:noFill/>
+        </p:spPr>
+        <p:txBody>
+          <a:bodyPr wrap="none">
+            <a:spAutoFit/>
+          </a:bodyPr>
+          <a:lstStyle/>
+          <a:p>
+            <a:pPr>
+              <a:defRPr sz="1300">
+                <a:solidFill>
+                  <a:srgbClr val="333333"/>
+                </a:solidFill>
+              </a:defRPr>
+            </a:pPr>
+            <a:r>
+              <a:t>composable, reusable tool definitions accessible via CLI and chat interfaces.</a:t>
+            </a:r>
+          </a:p>
+        </p:txBody>
+      </p:sp>
+      <p:sp>
+        <p:nvSpPr>
+          <p:cNvPr id="5" name="TextBox 4"/>
+          <p:cNvSpPr txBox="1"/>
+          <p:nvPr/>
+        </p:nvSpPr>
+        <p:spPr>
+          <a:xfrm>
+            <a:off x="457200" y="2743200"/>
+            <a:ext cx="8229600" cy="685800"/>
+          </a:xfrm>
+          <a:prstGeom prst="rect">
+            <a:avLst/>
+          </a:prstGeom>
+          <a:noFill/>
+        </p:spPr>
+        <p:txBody>
+          <a:bodyPr wrap="none">
+            <a:spAutoFit/>
+          </a:bodyPr>
+          <a:lstStyle/>
+          <a:p>
+            <a:pPr>
+              <a:defRPr sz="1000"/>
+            </a:pPr>
+          </a:p>
+        </p:txBody>
+      </p:sp>
+      <p:sp>
+        <p:nvSpPr>
+          <p:cNvPr id="6" name="TextBox 5"/>
+          <p:cNvSpPr txBox="1"/>
+          <p:nvPr/>
+        </p:nvSpPr>
+        <p:spPr>
+          <a:xfrm>
+            <a:off x="457200" y="3429000"/>
+            <a:ext cx="8229600" cy="685800"/>
+          </a:xfrm>
+          <a:prstGeom prst="rect">
+            <a:avLst/>
+          </a:prstGeom>
+          <a:noFill/>
+        </p:spPr>
+        <p:txBody>
+          <a:bodyPr wrap="none">
+            <a:spAutoFit/>
+          </a:bodyPr>
+          <a:lstStyle/>
+          <a:p>
+            <a:pPr>
+              <a:defRPr sz="1000" i="1">
+                <a:solidFill>
+                  <a:srgbClr val="666666"/>
+                </a:solidFill>
+              </a:defRPr>
+            </a:pPr>
+            <a:r>
+              <a:t>Source: Hacker News • 568 points • 313 comments</a:t>
+            </a:r>
+          </a:p>
+        </p:txBody>
+      </p:sp>
+      <p:sp>
+        <p:nvSpPr>
+          <p:cNvPr id="7" name="TextBox 6"/>
+          <p:cNvSpPr txBox="1"/>
+          <p:nvPr/>
+        </p:nvSpPr>
+        <p:spPr>
+          <a:xfrm>
+            <a:off x="457200" y="4114800"/>
+            <a:ext cx="8229600" cy="685800"/>
+          </a:xfrm>
+          <a:prstGeom prst="rect">
+            <a:avLst/>
+          </a:prstGeom>
+          <a:noFill/>
+        </p:spPr>
+        <p:txBody>
+          <a:bodyPr wrap="none">
+            <a:spAutoFit/>
+          </a:bodyPr>
+          <a:lstStyle/>
+          <a:p>
+            <a:pPr>
+              <a:defRPr sz="900">
+                <a:solidFill>
+                  <a:srgbClr val="3498DB"/>
+                </a:solidFill>
+              </a:defRPr>
+            </a:pPr>
+            <a:r>
+              <a:t>🔗 https://simonwillison.net/2025/Dec/12/openai-skills/</a:t>
+            </a:r>
+          </a:p>
+        </p:txBody>
+      </p:sp>
+      <p:sp>
+        <p:nvSpPr>
+          <p:cNvPr id="8" name="TextBox 7"/>
           <p:cNvSpPr txBox="1"/>
           <p:nvPr/>
         </p:nvSpPr>
@@ -3982,6 +4961,14 @@
 <file path=ppt/slides/slide17.xml><?xml version="1.0" encoding="utf-8"?>
 <p:sld xmlns:a="http://schemas.openxmlformats.org/drawingml/2006/main" xmlns:p="http://schemas.openxmlformats.org/presentationml/2006/main" xmlns:r="http://schemas.openxmlformats.org/officeDocument/2006/relationships">
   <p:cSld>
+    <p:bg>
+      <p:bgPr>
+        <a:solidFill>
+          <a:srgbClr val="F8F9FA"/>
+        </a:solidFill>
+        <a:effectLst/>
+      </p:bgPr>
+    </p:bg>
     <p:spTree>
       <p:nvGrpSpPr>
         <p:cNvPr id="1" name=""/>
@@ -3991,62 +4978,66 @@
       <p:grpSpPr/>
       <p:sp>
         <p:nvSpPr>
-          <p:cNvPr id="2" name="Title 1"/>
-          <p:cNvSpPr>
-            <a:spLocks noGrp="1"/>
-          </p:cNvSpPr>
-          <p:nvPr>
-            <p:ph type="title"/>
-          </p:nvPr>
-        </p:nvSpPr>
-        <p:spPr/>
-        <p:txBody>
-          <a:bodyPr/>
-          <a:lstStyle/>
-          <a:p>
-            <a:r>
-              <a:t>2. Mistral Vibe CLI</a:t>
-            </a:r>
-          </a:p>
-        </p:txBody>
-      </p:sp>
-      <p:sp>
-        <p:nvSpPr>
-          <p:cNvPr id="3" name="Content Placeholder 2"/>
-          <p:cNvSpPr>
-            <a:spLocks noGrp="1"/>
-          </p:cNvSpPr>
-          <p:nvPr>
-            <p:ph idx="1"/>
-          </p:nvPr>
-        </p:nvSpPr>
-        <p:spPr/>
-        <p:txBody>
-          <a:bodyPr/>
-          <a:lstStyle/>
-          <a:p>
-            <a:r>
-              <a:t>Command-line interface for agent-style development workflows with Devstral 2,</a:t>
-            </a:r>
-          </a:p>
-          <a:p>
-            <a:r>
-              <a:t>competing directly with GitHub Copilot and similar agent-assisted coding tools.</a:t>
-            </a:r>
-          </a:p>
-          <a:p>
-            <a:pPr/>
-          </a:p>
-          <a:p>
-            <a:pPr/>
-            <a:r>
-              <a:t>Source: r/LocalLLaMA • 690 upvotes • 218 comments</a:t>
-            </a:r>
-          </a:p>
-          <a:p>
-            <a:pPr/>
-            <a:r>
-              <a:t>Link: https://reddit.com/r/LocalLLaMA/comments/1pi9q3...</a:t>
+          <p:cNvPr id="2" name="TextBox 1"/>
+          <p:cNvSpPr txBox="1"/>
+          <p:nvPr/>
+        </p:nvSpPr>
+        <p:spPr>
+          <a:xfrm>
+            <a:off x="457200" y="457200"/>
+            <a:ext cx="8229600" cy="685800"/>
+          </a:xfrm>
+          <a:prstGeom prst="rect">
+            <a:avLst/>
+          </a:prstGeom>
+          <a:noFill/>
+        </p:spPr>
+        <p:txBody>
+          <a:bodyPr wrap="none">
+            <a:spAutoFit/>
+          </a:bodyPr>
+          <a:lstStyle/>
+          <a:p>
+            <a:pPr>
+              <a:defRPr sz="3200" b="1"/>
+            </a:pPr>
+            <a:r>
+              <a:t>2. Introducing: Devstral 2 and Mistral Vibe CLI</a:t>
+            </a:r>
+          </a:p>
+        </p:txBody>
+      </p:sp>
+      <p:sp>
+        <p:nvSpPr>
+          <p:cNvPr id="3" name="TextBox 2"/>
+          <p:cNvSpPr txBox="1"/>
+          <p:nvPr/>
+        </p:nvSpPr>
+        <p:spPr>
+          <a:xfrm>
+            <a:off x="457200" y="1371600"/>
+            <a:ext cx="8229600" cy="685800"/>
+          </a:xfrm>
+          <a:prstGeom prst="rect">
+            <a:avLst/>
+          </a:prstGeom>
+          <a:noFill/>
+        </p:spPr>
+        <p:txBody>
+          <a:bodyPr wrap="none">
+            <a:spAutoFit/>
+          </a:bodyPr>
+          <a:lstStyle/>
+          <a:p>
+            <a:pPr>
+              <a:defRPr sz="1300">
+                <a:solidFill>
+                  <a:srgbClr val="333333"/>
+                </a:solidFill>
+              </a:defRPr>
+            </a:pPr>
+            <a:r>
+              <a:t>Mistral's new CLI framework enables local agent deployment with development-focused</a:t>
             </a:r>
           </a:p>
         </p:txBody>
@@ -4054,6 +5045,139 @@
       <p:sp>
         <p:nvSpPr>
           <p:cNvPr id="4" name="TextBox 3"/>
+          <p:cNvSpPr txBox="1"/>
+          <p:nvPr/>
+        </p:nvSpPr>
+        <p:spPr>
+          <a:xfrm>
+            <a:off x="457200" y="2057400"/>
+            <a:ext cx="8229600" cy="685800"/>
+          </a:xfrm>
+          <a:prstGeom prst="rect">
+            <a:avLst/>
+          </a:prstGeom>
+          <a:noFill/>
+        </p:spPr>
+        <p:txBody>
+          <a:bodyPr wrap="none">
+            <a:spAutoFit/>
+          </a:bodyPr>
+          <a:lstStyle/>
+          <a:p>
+            <a:pPr>
+              <a:defRPr sz="1300">
+                <a:solidFill>
+                  <a:srgbClr val="333333"/>
+                </a:solidFill>
+              </a:defRPr>
+            </a:pPr>
+            <a:r>
+              <a:t>capabilities, competing directly with OpenAI's tooling ecosystem.</a:t>
+            </a:r>
+          </a:p>
+        </p:txBody>
+      </p:sp>
+      <p:sp>
+        <p:nvSpPr>
+          <p:cNvPr id="5" name="TextBox 4"/>
+          <p:cNvSpPr txBox="1"/>
+          <p:nvPr/>
+        </p:nvSpPr>
+        <p:spPr>
+          <a:xfrm>
+            <a:off x="457200" y="2743200"/>
+            <a:ext cx="8229600" cy="685800"/>
+          </a:xfrm>
+          <a:prstGeom prst="rect">
+            <a:avLst/>
+          </a:prstGeom>
+          <a:noFill/>
+        </p:spPr>
+        <p:txBody>
+          <a:bodyPr wrap="none">
+            <a:spAutoFit/>
+          </a:bodyPr>
+          <a:lstStyle/>
+          <a:p>
+            <a:pPr>
+              <a:defRPr sz="1000"/>
+            </a:pPr>
+          </a:p>
+        </p:txBody>
+      </p:sp>
+      <p:sp>
+        <p:nvSpPr>
+          <p:cNvPr id="6" name="TextBox 5"/>
+          <p:cNvSpPr txBox="1"/>
+          <p:nvPr/>
+        </p:nvSpPr>
+        <p:spPr>
+          <a:xfrm>
+            <a:off x="457200" y="3429000"/>
+            <a:ext cx="8229600" cy="685800"/>
+          </a:xfrm>
+          <a:prstGeom prst="rect">
+            <a:avLst/>
+          </a:prstGeom>
+          <a:noFill/>
+        </p:spPr>
+        <p:txBody>
+          <a:bodyPr wrap="none">
+            <a:spAutoFit/>
+          </a:bodyPr>
+          <a:lstStyle/>
+          <a:p>
+            <a:pPr>
+              <a:defRPr sz="1000" i="1">
+                <a:solidFill>
+                  <a:srgbClr val="666666"/>
+                </a:solidFill>
+              </a:defRPr>
+            </a:pPr>
+            <a:r>
+              <a:t>Source: r/LocalLLaMA • 686 upvotes • 218 comments</a:t>
+            </a:r>
+          </a:p>
+        </p:txBody>
+      </p:sp>
+      <p:sp>
+        <p:nvSpPr>
+          <p:cNvPr id="7" name="TextBox 6"/>
+          <p:cNvSpPr txBox="1"/>
+          <p:nvPr/>
+        </p:nvSpPr>
+        <p:spPr>
+          <a:xfrm>
+            <a:off x="457200" y="4114800"/>
+            <a:ext cx="8229600" cy="685800"/>
+          </a:xfrm>
+          <a:prstGeom prst="rect">
+            <a:avLst/>
+          </a:prstGeom>
+          <a:noFill/>
+        </p:spPr>
+        <p:txBody>
+          <a:bodyPr wrap="none">
+            <a:spAutoFit/>
+          </a:bodyPr>
+          <a:lstStyle/>
+          <a:p>
+            <a:pPr>
+              <a:defRPr sz="900">
+                <a:solidFill>
+                  <a:srgbClr val="3498DB"/>
+                </a:solidFill>
+              </a:defRPr>
+            </a:pPr>
+            <a:r>
+              <a:t>🔗 https://reddit.com/r/LocalLLaMA/comments/1pi9q3t/introduc...</a:t>
+            </a:r>
+          </a:p>
+        </p:txBody>
+      </p:sp>
+      <p:sp>
+        <p:nvSpPr>
+          <p:cNvPr id="8" name="TextBox 7"/>
           <p:cNvSpPr txBox="1"/>
           <p:nvPr/>
         </p:nvSpPr>
@@ -4093,6 +5217,14 @@
 <file path=ppt/slides/slide18.xml><?xml version="1.0" encoding="utf-8"?>
 <p:sld xmlns:a="http://schemas.openxmlformats.org/drawingml/2006/main" xmlns:p="http://schemas.openxmlformats.org/presentationml/2006/main" xmlns:r="http://schemas.openxmlformats.org/officeDocument/2006/relationships">
   <p:cSld>
+    <p:bg>
+      <p:bgPr>
+        <a:solidFill>
+          <a:srgbClr val="F8F9FA"/>
+        </a:solidFill>
+        <a:effectLst/>
+      </p:bgPr>
+    </p:bg>
     <p:spTree>
       <p:nvGrpSpPr>
         <p:cNvPr id="1" name=""/>
@@ -4102,62 +5234,66 @@
       <p:grpSpPr/>
       <p:sp>
         <p:nvSpPr>
-          <p:cNvPr id="2" name="Title 1"/>
-          <p:cNvSpPr>
-            <a:spLocks noGrp="1"/>
-          </p:cNvSpPr>
-          <p:nvPr>
-            <p:ph type="title"/>
-          </p:nvPr>
-        </p:nvSpPr>
-        <p:spPr/>
-        <p:txBody>
-          <a:bodyPr/>
-          <a:lstStyle/>
-          <a:p>
-            <a:r>
-              <a:t>3. Claude CLI</a:t>
-            </a:r>
-          </a:p>
-        </p:txBody>
-      </p:sp>
-      <p:sp>
-        <p:nvSpPr>
-          <p:cNvPr id="3" name="Content Placeholder 2"/>
-          <p:cNvSpPr>
-            <a:spLocks noGrp="1"/>
-          </p:cNvSpPr>
-          <p:nvPr>
-            <p:ph idx="1"/>
-          </p:nvPr>
-        </p:nvSpPr>
-        <p:spPr/>
-        <p:txBody>
-          <a:bodyPr/>
-          <a:lstStyle/>
-          <a:p>
-            <a:r>
-              <a:t>Anthropic's command-line agent tool that can execute system commands,</a:t>
-            </a:r>
-          </a:p>
-          <a:p>
-            <a:r>
-              <a:t>highlighting both the power and safety challenges of autonomous CLI agents.</a:t>
-            </a:r>
-          </a:p>
-          <a:p>
-            <a:pPr/>
-          </a:p>
-          <a:p>
-            <a:pPr/>
-            <a:r>
-              <a:t>Source: Hacker News • 220 points • 179 comments</a:t>
-            </a:r>
-          </a:p>
-          <a:p>
-            <a:pPr/>
-            <a:r>
-              <a:t>Link: https://old.reddit.com/r/ClaudeAI/comments/1pgx...</a:t>
+          <p:cNvPr id="2" name="TextBox 1"/>
+          <p:cNvSpPr txBox="1"/>
+          <p:nvPr/>
+        </p:nvSpPr>
+        <p:spPr>
+          <a:xfrm>
+            <a:off x="457200" y="457200"/>
+            <a:ext cx="8229600" cy="685800"/>
+          </a:xfrm>
+          <a:prstGeom prst="rect">
+            <a:avLst/>
+          </a:prstGeom>
+          <a:noFill/>
+        </p:spPr>
+        <p:txBody>
+          <a:bodyPr wrap="none">
+            <a:spAutoFit/>
+          </a:bodyPr>
+          <a:lstStyle/>
+          <a:p>
+            <a:pPr>
+              <a:defRPr sz="3200" b="1"/>
+            </a:pPr>
+            <a:r>
+              <a:t>3. You can now train LLMs 3x faster with 30% less memory! (&lt;3.9GB VRAM)</a:t>
+            </a:r>
+          </a:p>
+        </p:txBody>
+      </p:sp>
+      <p:sp>
+        <p:nvSpPr>
+          <p:cNvPr id="3" name="TextBox 2"/>
+          <p:cNvSpPr txBox="1"/>
+          <p:nvPr/>
+        </p:nvSpPr>
+        <p:spPr>
+          <a:xfrm>
+            <a:off x="457200" y="1371600"/>
+            <a:ext cx="8229600" cy="685800"/>
+          </a:xfrm>
+          <a:prstGeom prst="rect">
+            <a:avLst/>
+          </a:prstGeom>
+          <a:noFill/>
+        </p:spPr>
+        <p:txBody>
+          <a:bodyPr wrap="none">
+            <a:spAutoFit/>
+          </a:bodyPr>
+          <a:lstStyle/>
+          <a:p>
+            <a:pPr>
+              <a:defRPr sz="1300">
+                <a:solidFill>
+                  <a:srgbClr val="333333"/>
+                </a:solidFill>
+              </a:defRPr>
+            </a:pPr>
+            <a:r>
+              <a:t>New memory optimization techniques dramatically lower the barrier to training and</a:t>
             </a:r>
           </a:p>
         </p:txBody>
@@ -4165,6 +5301,139 @@
       <p:sp>
         <p:nvSpPr>
           <p:cNvPr id="4" name="TextBox 3"/>
+          <p:cNvSpPr txBox="1"/>
+          <p:nvPr/>
+        </p:nvSpPr>
+        <p:spPr>
+          <a:xfrm>
+            <a:off x="457200" y="2057400"/>
+            <a:ext cx="8229600" cy="685800"/>
+          </a:xfrm>
+          <a:prstGeom prst="rect">
+            <a:avLst/>
+          </a:prstGeom>
+          <a:noFill/>
+        </p:spPr>
+        <p:txBody>
+          <a:bodyPr wrap="none">
+            <a:spAutoFit/>
+          </a:bodyPr>
+          <a:lstStyle/>
+          <a:p>
+            <a:pPr>
+              <a:defRPr sz="1300">
+                <a:solidFill>
+                  <a:srgbClr val="333333"/>
+                </a:solidFill>
+              </a:defRPr>
+            </a:pPr>
+            <a:r>
+              <a:t>fine-tuning specialized agent models on consumer hardware.</a:t>
+            </a:r>
+          </a:p>
+        </p:txBody>
+      </p:sp>
+      <p:sp>
+        <p:nvSpPr>
+          <p:cNvPr id="5" name="TextBox 4"/>
+          <p:cNvSpPr txBox="1"/>
+          <p:nvPr/>
+        </p:nvSpPr>
+        <p:spPr>
+          <a:xfrm>
+            <a:off x="457200" y="2743200"/>
+            <a:ext cx="8229600" cy="685800"/>
+          </a:xfrm>
+          <a:prstGeom prst="rect">
+            <a:avLst/>
+          </a:prstGeom>
+          <a:noFill/>
+        </p:spPr>
+        <p:txBody>
+          <a:bodyPr wrap="none">
+            <a:spAutoFit/>
+          </a:bodyPr>
+          <a:lstStyle/>
+          <a:p>
+            <a:pPr>
+              <a:defRPr sz="1000"/>
+            </a:pPr>
+          </a:p>
+        </p:txBody>
+      </p:sp>
+      <p:sp>
+        <p:nvSpPr>
+          <p:cNvPr id="6" name="TextBox 5"/>
+          <p:cNvSpPr txBox="1"/>
+          <p:nvPr/>
+        </p:nvSpPr>
+        <p:spPr>
+          <a:xfrm>
+            <a:off x="457200" y="3429000"/>
+            <a:ext cx="8229600" cy="685800"/>
+          </a:xfrm>
+          <a:prstGeom prst="rect">
+            <a:avLst/>
+          </a:prstGeom>
+          <a:noFill/>
+        </p:spPr>
+        <p:txBody>
+          <a:bodyPr wrap="none">
+            <a:spAutoFit/>
+          </a:bodyPr>
+          <a:lstStyle/>
+          <a:p>
+            <a:pPr>
+              <a:defRPr sz="1000" i="1">
+                <a:solidFill>
+                  <a:srgbClr val="666666"/>
+                </a:solidFill>
+              </a:defRPr>
+            </a:pPr>
+            <a:r>
+              <a:t>Source: r/LocalLLaMA • 1020 upvotes • 114 comments</a:t>
+            </a:r>
+          </a:p>
+        </p:txBody>
+      </p:sp>
+      <p:sp>
+        <p:nvSpPr>
+          <p:cNvPr id="7" name="TextBox 6"/>
+          <p:cNvSpPr txBox="1"/>
+          <p:nvPr/>
+        </p:nvSpPr>
+        <p:spPr>
+          <a:xfrm>
+            <a:off x="457200" y="4114800"/>
+            <a:ext cx="8229600" cy="685800"/>
+          </a:xfrm>
+          <a:prstGeom prst="rect">
+            <a:avLst/>
+          </a:prstGeom>
+          <a:noFill/>
+        </p:spPr>
+        <p:txBody>
+          <a:bodyPr wrap="none">
+            <a:spAutoFit/>
+          </a:bodyPr>
+          <a:lstStyle/>
+          <a:p>
+            <a:pPr>
+              <a:defRPr sz="900">
+                <a:solidFill>
+                  <a:srgbClr val="3498DB"/>
+                </a:solidFill>
+              </a:defRPr>
+            </a:pPr>
+            <a:r>
+              <a:t>🔗 https://reddit.com/r/LocalLLaMA/comments/1pj51tu/you_can_...</a:t>
+            </a:r>
+          </a:p>
+        </p:txBody>
+      </p:sp>
+      <p:sp>
+        <p:nvSpPr>
+          <p:cNvPr id="8" name="TextBox 7"/>
           <p:cNvSpPr txBox="1"/>
           <p:nvPr/>
         </p:nvSpPr>
@@ -4204,6 +5473,14 @@
 <file path=ppt/slides/slide19.xml><?xml version="1.0" encoding="utf-8"?>
 <p:sld xmlns:a="http://schemas.openxmlformats.org/drawingml/2006/main" xmlns:p="http://schemas.openxmlformats.org/presentationml/2006/main" xmlns:r="http://schemas.openxmlformats.org/officeDocument/2006/relationships">
   <p:cSld>
+    <p:bg>
+      <p:bgPr>
+        <a:solidFill>
+          <a:srgbClr val="F8F9FA"/>
+        </a:solidFill>
+        <a:effectLst/>
+      </p:bgPr>
+    </p:bg>
     <p:spTree>
       <p:nvGrpSpPr>
         <p:cNvPr id="1" name=""/>
@@ -4213,62 +5490,66 @@
       <p:grpSpPr/>
       <p:sp>
         <p:nvSpPr>
-          <p:cNvPr id="2" name="Title 1"/>
-          <p:cNvSpPr>
-            <a:spLocks noGrp="1"/>
-          </p:cNvSpPr>
-          <p:nvPr>
-            <p:ph type="title"/>
-          </p:nvPr>
-        </p:nvSpPr>
-        <p:spPr/>
-        <p:txBody>
-          <a:bodyPr/>
-          <a:lstStyle/>
-          <a:p>
-            <a:r>
-              <a:t>4. You can now train LLMs 3x faster with 30% less memory! (&lt;3.9GB VRAM)</a:t>
-            </a:r>
-          </a:p>
-        </p:txBody>
-      </p:sp>
-      <p:sp>
-        <p:nvSpPr>
-          <p:cNvPr id="3" name="Content Placeholder 2"/>
-          <p:cNvSpPr>
-            <a:spLocks noGrp="1"/>
-          </p:cNvSpPr>
-          <p:nvPr>
-            <p:ph idx="1"/>
-          </p:nvPr>
-        </p:nvSpPr>
-        <p:spPr/>
-        <p:txBody>
-          <a:bodyPr/>
-          <a:lstStyle/>
-          <a:p>
-            <a:r>
-              <a:t>Breakthrough optimization enabling efficient fine-tuning of agent models on</a:t>
-            </a:r>
-          </a:p>
-          <a:p>
-            <a:r>
-              <a:t>consumer hardware, democratizing the development of custom agentic systems.</a:t>
-            </a:r>
-          </a:p>
-          <a:p>
-            <a:pPr/>
-          </a:p>
-          <a:p>
-            <a:pPr/>
-            <a:r>
-              <a:t>Source: r/LocalLLaMA • 1027 upvotes • 114 comments</a:t>
-            </a:r>
-          </a:p>
-          <a:p>
-            <a:pPr/>
-            <a:r>
-              <a:t>Link: https://reddit.com/r/LocalLLaMA/comments/1pj51t...</a:t>
+          <p:cNvPr id="2" name="TextBox 1"/>
+          <p:cNvSpPr txBox="1"/>
+          <p:nvPr/>
+        </p:nvSpPr>
+        <p:spPr>
+          <a:xfrm>
+            <a:off x="457200" y="457200"/>
+            <a:ext cx="8229600" cy="685800"/>
+          </a:xfrm>
+          <a:prstGeom prst="rect">
+            <a:avLst/>
+          </a:prstGeom>
+          <a:noFill/>
+        </p:spPr>
+        <p:txBody>
+          <a:bodyPr wrap="none">
+            <a:spAutoFit/>
+          </a:bodyPr>
+          <a:lstStyle/>
+          <a:p>
+            <a:pPr>
+              <a:defRPr sz="3200" b="1"/>
+            </a:pPr>
+            <a:r>
+              <a:t>4. Claude CLI deleted my home directory and wiped my Mac</a:t>
+            </a:r>
+          </a:p>
+        </p:txBody>
+      </p:sp>
+      <p:sp>
+        <p:nvSpPr>
+          <p:cNvPr id="3" name="TextBox 2"/>
+          <p:cNvSpPr txBox="1"/>
+          <p:nvPr/>
+        </p:nvSpPr>
+        <p:spPr>
+          <a:xfrm>
+            <a:off x="457200" y="1371600"/>
+            <a:ext cx="8229600" cy="685800"/>
+          </a:xfrm>
+          <a:prstGeom prst="rect">
+            <a:avLst/>
+          </a:prstGeom>
+          <a:noFill/>
+        </p:spPr>
+        <p:txBody>
+          <a:bodyPr wrap="none">
+            <a:spAutoFit/>
+          </a:bodyPr>
+          <a:lstStyle/>
+          <a:p>
+            <a:pPr>
+              <a:defRPr sz="1300">
+                <a:solidFill>
+                  <a:srgbClr val="333333"/>
+                </a:solidFill>
+              </a:defRPr>
+            </a:pPr>
+            <a:r>
+              <a:t>Reveals critical safety gaps in current CLI agent frameworks, highlighting the need for</a:t>
             </a:r>
           </a:p>
         </p:txBody>
@@ -4276,6 +5557,139 @@
       <p:sp>
         <p:nvSpPr>
           <p:cNvPr id="4" name="TextBox 3"/>
+          <p:cNvSpPr txBox="1"/>
+          <p:nvPr/>
+        </p:nvSpPr>
+        <p:spPr>
+          <a:xfrm>
+            <a:off x="457200" y="2057400"/>
+            <a:ext cx="8229600" cy="685800"/>
+          </a:xfrm>
+          <a:prstGeom prst="rect">
+            <a:avLst/>
+          </a:prstGeom>
+          <a:noFill/>
+        </p:spPr>
+        <p:txBody>
+          <a:bodyPr wrap="none">
+            <a:spAutoFit/>
+          </a:bodyPr>
+          <a:lstStyle/>
+          <a:p>
+            <a:pPr>
+              <a:defRPr sz="1300">
+                <a:solidFill>
+                  <a:srgbClr val="333333"/>
+                </a:solidFill>
+              </a:defRPr>
+            </a:pPr>
+            <a:r>
+              <a:t>better permission systems and execution sandboxing in agent tools.</a:t>
+            </a:r>
+          </a:p>
+        </p:txBody>
+      </p:sp>
+      <p:sp>
+        <p:nvSpPr>
+          <p:cNvPr id="5" name="TextBox 4"/>
+          <p:cNvSpPr txBox="1"/>
+          <p:nvPr/>
+        </p:nvSpPr>
+        <p:spPr>
+          <a:xfrm>
+            <a:off x="457200" y="2743200"/>
+            <a:ext cx="8229600" cy="685800"/>
+          </a:xfrm>
+          <a:prstGeom prst="rect">
+            <a:avLst/>
+          </a:prstGeom>
+          <a:noFill/>
+        </p:spPr>
+        <p:txBody>
+          <a:bodyPr wrap="none">
+            <a:spAutoFit/>
+          </a:bodyPr>
+          <a:lstStyle/>
+          <a:p>
+            <a:pPr>
+              <a:defRPr sz="1000"/>
+            </a:pPr>
+          </a:p>
+        </p:txBody>
+      </p:sp>
+      <p:sp>
+        <p:nvSpPr>
+          <p:cNvPr id="6" name="TextBox 5"/>
+          <p:cNvSpPr txBox="1"/>
+          <p:nvPr/>
+        </p:nvSpPr>
+        <p:spPr>
+          <a:xfrm>
+            <a:off x="457200" y="3429000"/>
+            <a:ext cx="8229600" cy="685800"/>
+          </a:xfrm>
+          <a:prstGeom prst="rect">
+            <a:avLst/>
+          </a:prstGeom>
+          <a:noFill/>
+        </p:spPr>
+        <p:txBody>
+          <a:bodyPr wrap="none">
+            <a:spAutoFit/>
+          </a:bodyPr>
+          <a:lstStyle/>
+          <a:p>
+            <a:pPr>
+              <a:defRPr sz="1000" i="1">
+                <a:solidFill>
+                  <a:srgbClr val="666666"/>
+                </a:solidFill>
+              </a:defRPr>
+            </a:pPr>
+            <a:r>
+              <a:t>Source: Hacker News • 220 points • 179 comments</a:t>
+            </a:r>
+          </a:p>
+        </p:txBody>
+      </p:sp>
+      <p:sp>
+        <p:nvSpPr>
+          <p:cNvPr id="7" name="TextBox 6"/>
+          <p:cNvSpPr txBox="1"/>
+          <p:nvPr/>
+        </p:nvSpPr>
+        <p:spPr>
+          <a:xfrm>
+            <a:off x="457200" y="4114800"/>
+            <a:ext cx="8229600" cy="685800"/>
+          </a:xfrm>
+          <a:prstGeom prst="rect">
+            <a:avLst/>
+          </a:prstGeom>
+          <a:noFill/>
+        </p:spPr>
+        <p:txBody>
+          <a:bodyPr wrap="none">
+            <a:spAutoFit/>
+          </a:bodyPr>
+          <a:lstStyle/>
+          <a:p>
+            <a:pPr>
+              <a:defRPr sz="900">
+                <a:solidFill>
+                  <a:srgbClr val="3498DB"/>
+                </a:solidFill>
+              </a:defRPr>
+            </a:pPr>
+            <a:r>
+              <a:t>🔗 https://old.reddit.com/r/ClaudeAI/comments/1pgxckk/claude...</a:t>
+            </a:r>
+          </a:p>
+        </p:txBody>
+      </p:sp>
+      <p:sp>
+        <p:nvSpPr>
+          <p:cNvPr id="8" name="TextBox 7"/>
           <p:cNvSpPr txBox="1"/>
           <p:nvPr/>
         </p:nvSpPr>
@@ -4315,6 +5729,14 @@
 <file path=ppt/slides/slide2.xml><?xml version="1.0" encoding="utf-8"?>
 <p:sld xmlns:a="http://schemas.openxmlformats.org/drawingml/2006/main" xmlns:p="http://schemas.openxmlformats.org/presentationml/2006/main" xmlns:r="http://schemas.openxmlformats.org/officeDocument/2006/relationships">
   <p:cSld>
+    <p:bg>
+      <p:bgPr>
+        <a:solidFill>
+          <a:srgbClr val="3498DB"/>
+        </a:solidFill>
+        <a:effectLst/>
+      </p:bgPr>
+    </p:bg>
     <p:spTree>
       <p:nvGrpSpPr>
         <p:cNvPr id="1" name=""/>
@@ -4324,19 +5746,29 @@
       <p:grpSpPr/>
       <p:sp>
         <p:nvSpPr>
-          <p:cNvPr id="2" name="Title 1"/>
-          <p:cNvSpPr>
-            <a:spLocks noGrp="1"/>
-          </p:cNvSpPr>
-          <p:nvPr>
-            <p:ph type="title"/>
-          </p:nvPr>
-        </p:nvSpPr>
-        <p:spPr/>
-        <p:txBody>
-          <a:bodyPr/>
-          <a:lstStyle/>
-          <a:p>
+          <p:cNvPr id="2" name="TextBox 1"/>
+          <p:cNvSpPr txBox="1"/>
+          <p:nvPr/>
+        </p:nvSpPr>
+        <p:spPr>
+          <a:xfrm>
+            <a:off x="457200" y="457200"/>
+            <a:ext cx="8229600" cy="685800"/>
+          </a:xfrm>
+          <a:prstGeom prst="rect">
+            <a:avLst/>
+          </a:prstGeom>
+          <a:noFill/>
+        </p:spPr>
+        <p:txBody>
+          <a:bodyPr wrap="none">
+            <a:spAutoFit/>
+          </a:bodyPr>
+          <a:lstStyle/>
+          <a:p>
+            <a:pPr>
+              <a:defRPr sz="3200" b="1"/>
+            </a:pPr>
             <a:r>
               <a:t>This Week in Agentic AI</a:t>
             </a:r>
@@ -4345,64 +5777,306 @@
       </p:sp>
       <p:sp>
         <p:nvSpPr>
-          <p:cNvPr id="3" name="Content Placeholder 2"/>
-          <p:cNvSpPr>
-            <a:spLocks noGrp="1"/>
-          </p:cNvSpPr>
-          <p:nvPr>
-            <p:ph idx="1"/>
-          </p:nvPr>
-        </p:nvSpPr>
-        <p:spPr/>
-        <p:txBody>
-          <a:bodyPr/>
-          <a:lstStyle/>
-          <a:p>
-            <a:r>
-              <a:t>This week marked a pivotal moment for agentic AI as major providers launched</a:t>
-            </a:r>
-          </a:p>
-          <a:p>
-            <a:r>
-              <a:t>production-ready agent tools (OpenAI Skills, Claude CLI, Mistral Vibe), but a critical</a:t>
-            </a:r>
-          </a:p>
-          <a:p>
-            <a:r>
-              <a:t>safety incident with Claude CLI deleting user data sparked urgent discussions about agent</a:t>
-            </a:r>
-          </a:p>
-          <a:p>
-            <a:r>
-              <a:t>autonomy and control. Meanwhile, research advances in multi-agent competition, medical</a:t>
-            </a:r>
-          </a:p>
-          <a:p>
-            <a:r>
-              <a:t>reasoning agents, and verifiable RAG systems demonstrate growing sophistication, even as</a:t>
-            </a:r>
-          </a:p>
-          <a:p>
-            <a:r>
-              <a:t>industry leaders like Ilya Sutskever question the gap between benchmark performance and</a:t>
-            </a:r>
-          </a:p>
-          <a:p>
-            <a:r>
-              <a:t>real-world economic impact.</a:t>
-            </a:r>
-          </a:p>
-          <a:p>
-            <a:pPr/>
-          </a:p>
-          <a:p>
-            <a:pPr/>
+          <p:cNvPr id="3" name="TextBox 2"/>
+          <p:cNvSpPr txBox="1"/>
+          <p:nvPr/>
+        </p:nvSpPr>
+        <p:spPr>
+          <a:xfrm>
+            <a:off x="457200" y="1371600"/>
+            <a:ext cx="8229600" cy="685800"/>
+          </a:xfrm>
+          <a:prstGeom prst="rect">
+            <a:avLst/>
+          </a:prstGeom>
+          <a:noFill/>
+        </p:spPr>
+        <p:txBody>
+          <a:bodyPr wrap="none">
+            <a:spAutoFit/>
+          </a:bodyPr>
+          <a:lstStyle/>
+          <a:p>
+            <a:pPr>
+              <a:defRPr sz="1400">
+                <a:solidFill>
+                  <a:srgbClr val="FFFFFF"/>
+                </a:solidFill>
+              </a:defRPr>
+            </a:pPr>
+            <a:r>
+              <a:t>This week saw significant momentum in agentic AI deployment with OpenAI and Mistral both launching</a:t>
+            </a:r>
+          </a:p>
+        </p:txBody>
+      </p:sp>
+      <p:sp>
+        <p:nvSpPr>
+          <p:cNvPr id="4" name="TextBox 3"/>
+          <p:cNvSpPr txBox="1"/>
+          <p:nvPr/>
+        </p:nvSpPr>
+        <p:spPr>
+          <a:xfrm>
+            <a:off x="457200" y="2057400"/>
+            <a:ext cx="8229600" cy="685800"/>
+          </a:xfrm>
+          <a:prstGeom prst="rect">
+            <a:avLst/>
+          </a:prstGeom>
+          <a:noFill/>
+        </p:spPr>
+        <p:txBody>
+          <a:bodyPr wrap="none">
+            <a:spAutoFit/>
+          </a:bodyPr>
+          <a:lstStyle/>
+          <a:p>
+            <a:pPr>
+              <a:defRPr sz="1400">
+                <a:solidFill>
+                  <a:srgbClr val="FFFFFF"/>
+                </a:solidFill>
+              </a:defRPr>
+            </a:pPr>
+            <a:r>
+              <a:t>CLI-based agent frameworks with extended tool use capabilities, while a serious Claude CLI incident</a:t>
+            </a:r>
+          </a:p>
+        </p:txBody>
+      </p:sp>
+      <p:sp>
+        <p:nvSpPr>
+          <p:cNvPr id="5" name="TextBox 4"/>
+          <p:cNvSpPr txBox="1"/>
+          <p:nvPr/>
+        </p:nvSpPr>
+        <p:spPr>
+          <a:xfrm>
+            <a:off x="457200" y="2743200"/>
+            <a:ext cx="8229600" cy="685800"/>
+          </a:xfrm>
+          <a:prstGeom prst="rect">
+            <a:avLst/>
+          </a:prstGeom>
+          <a:noFill/>
+        </p:spPr>
+        <p:txBody>
+          <a:bodyPr wrap="none">
+            <a:spAutoFit/>
+          </a:bodyPr>
+          <a:lstStyle/>
+          <a:p>
+            <a:pPr>
+              <a:defRPr sz="1400">
+                <a:solidFill>
+                  <a:srgbClr val="FFFFFF"/>
+                </a:solidFill>
+              </a:defRPr>
+            </a:pPr>
+            <a:r>
+              <a:t>highlighted critical safety challenges in autonomous systems. Research advances demonstrated</a:t>
+            </a:r>
+          </a:p>
+        </p:txBody>
+      </p:sp>
+      <p:sp>
+        <p:nvSpPr>
+          <p:cNvPr id="6" name="TextBox 5"/>
+          <p:cNvSpPr txBox="1"/>
+          <p:nvPr/>
+        </p:nvSpPr>
+        <p:spPr>
+          <a:xfrm>
+            <a:off x="457200" y="3429000"/>
+            <a:ext cx="8229600" cy="685800"/>
+          </a:xfrm>
+          <a:prstGeom prst="rect">
+            <a:avLst/>
+          </a:prstGeom>
+          <a:noFill/>
+        </p:spPr>
+        <p:txBody>
+          <a:bodyPr wrap="none">
+            <a:spAutoFit/>
+          </a:bodyPr>
+          <a:lstStyle/>
+          <a:p>
+            <a:pPr>
+              <a:defRPr sz="1400">
+                <a:solidFill>
+                  <a:srgbClr val="FFFFFF"/>
+                </a:solidFill>
+              </a:defRPr>
+            </a:pPr>
+            <a:r>
+              <a:t>emergent complex behaviors from multi-agent competition and formal verification approaches for RAG</a:t>
+            </a:r>
+          </a:p>
+        </p:txBody>
+      </p:sp>
+      <p:sp>
+        <p:nvSpPr>
+          <p:cNvPr id="7" name="TextBox 6"/>
+          <p:cNvSpPr txBox="1"/>
+          <p:nvPr/>
+        </p:nvSpPr>
+        <p:spPr>
+          <a:xfrm>
+            <a:off x="457200" y="4114800"/>
+            <a:ext cx="8229600" cy="685800"/>
+          </a:xfrm>
+          <a:prstGeom prst="rect">
+            <a:avLst/>
+          </a:prstGeom>
+          <a:noFill/>
+        </p:spPr>
+        <p:txBody>
+          <a:bodyPr wrap="none">
+            <a:spAutoFit/>
+          </a:bodyPr>
+          <a:lstStyle/>
+          <a:p>
+            <a:pPr>
+              <a:defRPr sz="1400">
+                <a:solidFill>
+                  <a:srgbClr val="FFFFFF"/>
+                </a:solidFill>
+              </a:defRPr>
+            </a:pPr>
+            <a:r>
+              <a:t>systems, while industry discussions centered on agents potentially replacing traditional SaaS and</a:t>
+            </a:r>
+          </a:p>
+        </p:txBody>
+      </p:sp>
+      <p:sp>
+        <p:nvSpPr>
+          <p:cNvPr id="8" name="TextBox 7"/>
+          <p:cNvSpPr txBox="1"/>
+          <p:nvPr/>
+        </p:nvSpPr>
+        <p:spPr>
+          <a:xfrm>
+            <a:off x="457200" y="4800600"/>
+            <a:ext cx="8229600" cy="685800"/>
+          </a:xfrm>
+          <a:prstGeom prst="rect">
+            <a:avLst/>
+          </a:prstGeom>
+          <a:noFill/>
+        </p:spPr>
+        <p:txBody>
+          <a:bodyPr wrap="none">
+            <a:spAutoFit/>
+          </a:bodyPr>
+          <a:lstStyle/>
+          <a:p>
+            <a:pPr>
+              <a:defRPr sz="1400">
+                <a:solidFill>
+                  <a:srgbClr val="FFFFFF"/>
+                </a:solidFill>
+              </a:defRPr>
+            </a:pPr>
+            <a:r>
+              <a:t>the growing gap between benchmark performance and real-world economic impact.</a:t>
+            </a:r>
+          </a:p>
+        </p:txBody>
+      </p:sp>
+      <p:sp>
+        <p:nvSpPr>
+          <p:cNvPr id="9" name="TextBox 8"/>
+          <p:cNvSpPr txBox="1"/>
+          <p:nvPr/>
+        </p:nvSpPr>
+        <p:spPr>
+          <a:xfrm>
+            <a:off x="457200" y="5486400"/>
+            <a:ext cx="8229600" cy="685800"/>
+          </a:xfrm>
+          <a:prstGeom prst="rect">
+            <a:avLst/>
+          </a:prstGeom>
+          <a:noFill/>
+        </p:spPr>
+        <p:txBody>
+          <a:bodyPr wrap="none">
+            <a:spAutoFit/>
+          </a:bodyPr>
+          <a:lstStyle/>
+          <a:p>
+            <a:pPr>
+              <a:defRPr sz="1200"/>
+            </a:pPr>
+          </a:p>
+        </p:txBody>
+      </p:sp>
+      <p:sp>
+        <p:nvSpPr>
+          <p:cNvPr id="10" name="TextBox 9"/>
+          <p:cNvSpPr txBox="1"/>
+          <p:nvPr/>
+        </p:nvSpPr>
+        <p:spPr>
+          <a:xfrm>
+            <a:off x="457200" y="6172200"/>
+            <a:ext cx="8229600" cy="685800"/>
+          </a:xfrm>
+          <a:prstGeom prst="rect">
+            <a:avLst/>
+          </a:prstGeom>
+          <a:noFill/>
+        </p:spPr>
+        <p:txBody>
+          <a:bodyPr wrap="none">
+            <a:spAutoFit/>
+          </a:bodyPr>
+          <a:lstStyle/>
+          <a:p>
+            <a:pPr>
+              <a:defRPr sz="1100" i="1">
+                <a:solidFill>
+                  <a:srgbClr val="CCCCCC"/>
+                </a:solidFill>
+              </a:defRPr>
+            </a:pPr>
             <a:r>
               <a:t>Curated from arXiv, Hacker News, and Reddit</a:t>
             </a:r>
           </a:p>
-          <a:p>
-            <a:pPr/>
+        </p:txBody>
+      </p:sp>
+      <p:sp>
+        <p:nvSpPr>
+          <p:cNvPr id="11" name="TextBox 10"/>
+          <p:cNvSpPr txBox="1"/>
+          <p:nvPr/>
+        </p:nvSpPr>
+        <p:spPr>
+          <a:xfrm>
+            <a:off x="457200" y="6858000"/>
+            <a:ext cx="8229600" cy="685800"/>
+          </a:xfrm>
+          <a:prstGeom prst="rect">
+            <a:avLst/>
+          </a:prstGeom>
+          <a:noFill/>
+        </p:spPr>
+        <p:txBody>
+          <a:bodyPr wrap="none">
+            <a:spAutoFit/>
+          </a:bodyPr>
+          <a:lstStyle/>
+          <a:p>
+            <a:pPr>
+              <a:defRPr sz="1100" i="1">
+                <a:solidFill>
+                  <a:srgbClr val="CCCCCC"/>
+                </a:solidFill>
+              </a:defRPr>
+            </a:pPr>
             <a:r>
               <a:t>Generated: 2025-12-15</a:t>
             </a:r>
@@ -4411,7 +6085,7 @@
       </p:sp>
       <p:sp>
         <p:nvSpPr>
-          <p:cNvPr id="4" name="TextBox 3"/>
+          <p:cNvPr id="12" name="TextBox 11"/>
           <p:cNvSpPr txBox="1"/>
           <p:nvPr/>
         </p:nvSpPr>
@@ -4451,6 +6125,14 @@
 <file path=ppt/slides/slide20.xml><?xml version="1.0" encoding="utf-8"?>
 <p:sld xmlns:a="http://schemas.openxmlformats.org/drawingml/2006/main" xmlns:p="http://schemas.openxmlformats.org/presentationml/2006/main" xmlns:r="http://schemas.openxmlformats.org/officeDocument/2006/relationships">
   <p:cSld>
+    <p:bg>
+      <p:bgPr>
+        <a:solidFill>
+          <a:srgbClr val="E74C3C"/>
+        </a:solidFill>
+        <a:effectLst/>
+      </p:bgPr>
+    </p:bg>
     <p:spTree>
       <p:nvGrpSpPr>
         <p:cNvPr id="1" name=""/>
@@ -4460,19 +6142,29 @@
       <p:grpSpPr/>
       <p:sp>
         <p:nvSpPr>
-          <p:cNvPr id="2" name="Title 1"/>
-          <p:cNvSpPr>
-            <a:spLocks noGrp="1"/>
-          </p:cNvSpPr>
-          <p:nvPr>
-            <p:ph type="title"/>
-          </p:nvPr>
-        </p:nvSpPr>
-        <p:spPr/>
-        <p:txBody>
-          <a:bodyPr/>
-          <a:lstStyle/>
-          <a:p>
+          <p:cNvPr id="2" name="TextBox 1"/>
+          <p:cNvSpPr txBox="1"/>
+          <p:nvPr/>
+        </p:nvSpPr>
+        <p:spPr>
+          <a:xfrm>
+            <a:off x="457200" y="457200"/>
+            <a:ext cx="8229600" cy="685800"/>
+          </a:xfrm>
+          <a:prstGeom prst="rect">
+            <a:avLst/>
+          </a:prstGeom>
+          <a:noFill/>
+        </p:spPr>
+        <p:txBody>
+          <a:bodyPr wrap="none">
+            <a:spAutoFit/>
+          </a:bodyPr>
+          <a:lstStyle/>
+          <a:p>
+            <a:pPr>
+              <a:defRPr sz="3200" b="1"/>
+            </a:pPr>
             <a:r>
               <a:t>Notable Discussions</a:t>
             </a:r>
@@ -4481,28 +6173,96 @@
       </p:sp>
       <p:sp>
         <p:nvSpPr>
-          <p:cNvPr id="3" name="Content Placeholder 2"/>
-          <p:cNvSpPr>
-            <a:spLocks noGrp="1"/>
-          </p:cNvSpPr>
-          <p:nvPr>
-            <p:ph idx="1"/>
-          </p:nvPr>
-        </p:nvSpPr>
-        <p:spPr/>
-        <p:txBody>
-          <a:bodyPr/>
-          <a:lstStyle/>
-          <a:p>
+          <p:cNvPr id="3" name="TextBox 2"/>
+          <p:cNvSpPr txBox="1"/>
+          <p:nvPr/>
+        </p:nvSpPr>
+        <p:spPr>
+          <a:xfrm>
+            <a:off x="457200" y="1371600"/>
+            <a:ext cx="8229600" cy="685800"/>
+          </a:xfrm>
+          <a:prstGeom prst="rect">
+            <a:avLst/>
+          </a:prstGeom>
+          <a:noFill/>
+        </p:spPr>
+        <p:txBody>
+          <a:bodyPr wrap="none">
+            <a:spAutoFit/>
+          </a:bodyPr>
+          <a:lstStyle/>
+          <a:p>
+            <a:pPr>
+              <a:defRPr sz="2000" b="1">
+                <a:solidFill>
+                  <a:srgbClr val="FFFFFF"/>
+                </a:solidFill>
+              </a:defRPr>
+            </a:pPr>
             <a:r>
               <a:t>4 key updates</a:t>
             </a:r>
           </a:p>
-          <a:p>
-            <a:pPr/>
-          </a:p>
-          <a:p>
-            <a:pPr/>
+        </p:txBody>
+      </p:sp>
+      <p:sp>
+        <p:nvSpPr>
+          <p:cNvPr id="4" name="TextBox 3"/>
+          <p:cNvSpPr txBox="1"/>
+          <p:nvPr/>
+        </p:nvSpPr>
+        <p:spPr>
+          <a:xfrm>
+            <a:off x="457200" y="2057400"/>
+            <a:ext cx="8229600" cy="685800"/>
+          </a:xfrm>
+          <a:prstGeom prst="rect">
+            <a:avLst/>
+          </a:prstGeom>
+          <a:noFill/>
+        </p:spPr>
+        <p:txBody>
+          <a:bodyPr wrap="none">
+            <a:spAutoFit/>
+          </a:bodyPr>
+          <a:lstStyle/>
+          <a:p>
+            <a:pPr>
+              <a:defRPr sz="1200"/>
+            </a:pPr>
+          </a:p>
+        </p:txBody>
+      </p:sp>
+      <p:sp>
+        <p:nvSpPr>
+          <p:cNvPr id="5" name="TextBox 4"/>
+          <p:cNvSpPr txBox="1"/>
+          <p:nvPr/>
+        </p:nvSpPr>
+        <p:spPr>
+          <a:xfrm>
+            <a:off x="457200" y="2743200"/>
+            <a:ext cx="8229600" cy="685800"/>
+          </a:xfrm>
+          <a:prstGeom prst="rect">
+            <a:avLst/>
+          </a:prstGeom>
+          <a:noFill/>
+        </p:spPr>
+        <p:txBody>
+          <a:bodyPr wrap="none">
+            <a:spAutoFit/>
+          </a:bodyPr>
+          <a:lstStyle/>
+          <a:p>
+            <a:pPr>
+              <a:defRPr sz="1600" i="1">
+                <a:solidFill>
+                  <a:srgbClr val="FFFFFF"/>
+                </a:solidFill>
+              </a:defRPr>
+            </a:pPr>
             <a:r>
               <a:t>Swipe to explore →</a:t>
             </a:r>
@@ -4511,7 +6271,7 @@
       </p:sp>
       <p:sp>
         <p:nvSpPr>
-          <p:cNvPr id="4" name="TextBox 3"/>
+          <p:cNvPr id="6" name="TextBox 5"/>
           <p:cNvSpPr txBox="1"/>
           <p:nvPr/>
         </p:nvSpPr>
@@ -4551,6 +6311,14 @@
 <file path=ppt/slides/slide21.xml><?xml version="1.0" encoding="utf-8"?>
 <p:sld xmlns:a="http://schemas.openxmlformats.org/drawingml/2006/main" xmlns:p="http://schemas.openxmlformats.org/presentationml/2006/main" xmlns:r="http://schemas.openxmlformats.org/officeDocument/2006/relationships">
   <p:cSld>
+    <p:bg>
+      <p:bgPr>
+        <a:solidFill>
+          <a:srgbClr val="F8F9FA"/>
+        </a:solidFill>
+        <a:effectLst/>
+      </p:bgPr>
+    </p:bg>
     <p:spTree>
       <p:nvGrpSpPr>
         <p:cNvPr id="1" name=""/>
@@ -4560,67 +6328,66 @@
       <p:grpSpPr/>
       <p:sp>
         <p:nvSpPr>
-          <p:cNvPr id="2" name="Title 1"/>
-          <p:cNvSpPr>
-            <a:spLocks noGrp="1"/>
-          </p:cNvSpPr>
-          <p:nvPr>
-            <p:ph type="title"/>
-          </p:nvPr>
-        </p:nvSpPr>
-        <p:spPr/>
-        <p:txBody>
-          <a:bodyPr/>
-          <a:lstStyle/>
-          <a:p>
-            <a:r>
-              <a:t>1. Ilya Sutskever is puzzled by the gap between AI benchmarks and the ...</a:t>
-            </a:r>
-          </a:p>
-        </p:txBody>
-      </p:sp>
-      <p:sp>
-        <p:nvSpPr>
-          <p:cNvPr id="3" name="Content Placeholder 2"/>
-          <p:cNvSpPr>
-            <a:spLocks noGrp="1"/>
-          </p:cNvSpPr>
-          <p:nvPr>
-            <p:ph idx="1"/>
-          </p:nvPr>
-        </p:nvSpPr>
-        <p:spPr/>
-        <p:txBody>
-          <a:bodyPr/>
-          <a:lstStyle/>
-          <a:p>
-            <a:r>
-              <a:t>Leading AI researcher questions why impressive agent capabilities on benchmarks</a:t>
-            </a:r>
-          </a:p>
-          <a:p>
-            <a:r>
-              <a:t>aren't translating to proportional real-world economic value, sparking debate</a:t>
-            </a:r>
-          </a:p>
-          <a:p>
-            <a:r>
-              <a:t>about deployment challenges.</a:t>
-            </a:r>
-          </a:p>
-          <a:p>
-            <a:pPr/>
-          </a:p>
-          <a:p>
-            <a:pPr/>
-            <a:r>
-              <a:t>Source: r/MachineLearning • 385 upvotes • 190 comments</a:t>
-            </a:r>
-          </a:p>
-          <a:p>
-            <a:pPr/>
-            <a:r>
-              <a:t>Link: https://reddit.com/r/MachineLearning/comments/1...</a:t>
+          <p:cNvPr id="2" name="TextBox 1"/>
+          <p:cNvSpPr txBox="1"/>
+          <p:nvPr/>
+        </p:nvSpPr>
+        <p:spPr>
+          <a:xfrm>
+            <a:off x="457200" y="457200"/>
+            <a:ext cx="8229600" cy="685800"/>
+          </a:xfrm>
+          <a:prstGeom prst="rect">
+            <a:avLst/>
+          </a:prstGeom>
+          <a:noFill/>
+        </p:spPr>
+        <p:txBody>
+          <a:bodyPr wrap="none">
+            <a:spAutoFit/>
+          </a:bodyPr>
+          <a:lstStyle/>
+          <a:p>
+            <a:pPr>
+              <a:defRPr sz="3200" b="1"/>
+            </a:pPr>
+            <a:r>
+              <a:t>1. AI agents are starting to eat SaaS</a:t>
+            </a:r>
+          </a:p>
+        </p:txBody>
+      </p:sp>
+      <p:sp>
+        <p:nvSpPr>
+          <p:cNvPr id="3" name="TextBox 2"/>
+          <p:cNvSpPr txBox="1"/>
+          <p:nvPr/>
+        </p:nvSpPr>
+        <p:spPr>
+          <a:xfrm>
+            <a:off x="457200" y="1371600"/>
+            <a:ext cx="8229600" cy="685800"/>
+          </a:xfrm>
+          <a:prstGeom prst="rect">
+            <a:avLst/>
+          </a:prstGeom>
+          <a:noFill/>
+        </p:spPr>
+        <p:txBody>
+          <a:bodyPr wrap="none">
+            <a:spAutoFit/>
+          </a:bodyPr>
+          <a:lstStyle/>
+          <a:p>
+            <a:pPr>
+              <a:defRPr sz="1300">
+                <a:solidFill>
+                  <a:srgbClr val="333333"/>
+                </a:solidFill>
+              </a:defRPr>
+            </a:pPr>
+            <a:r>
+              <a:t>Industry analysis suggesting autonomous agents are beginning to replace traditional</a:t>
             </a:r>
           </a:p>
         </p:txBody>
@@ -4628,6 +6395,139 @@
       <p:sp>
         <p:nvSpPr>
           <p:cNvPr id="4" name="TextBox 3"/>
+          <p:cNvSpPr txBox="1"/>
+          <p:nvPr/>
+        </p:nvSpPr>
+        <p:spPr>
+          <a:xfrm>
+            <a:off x="457200" y="2057400"/>
+            <a:ext cx="8229600" cy="685800"/>
+          </a:xfrm>
+          <a:prstGeom prst="rect">
+            <a:avLst/>
+          </a:prstGeom>
+          <a:noFill/>
+        </p:spPr>
+        <p:txBody>
+          <a:bodyPr wrap="none">
+            <a:spAutoFit/>
+          </a:bodyPr>
+          <a:lstStyle/>
+          <a:p>
+            <a:pPr>
+              <a:defRPr sz="1300">
+                <a:solidFill>
+                  <a:srgbClr val="333333"/>
+                </a:solidFill>
+              </a:defRPr>
+            </a:pPr>
+            <a:r>
+              <a:t>software products, representing a paradigm shift in software delivery and value creation.</a:t>
+            </a:r>
+          </a:p>
+        </p:txBody>
+      </p:sp>
+      <p:sp>
+        <p:nvSpPr>
+          <p:cNvPr id="5" name="TextBox 4"/>
+          <p:cNvSpPr txBox="1"/>
+          <p:nvPr/>
+        </p:nvSpPr>
+        <p:spPr>
+          <a:xfrm>
+            <a:off x="457200" y="2743200"/>
+            <a:ext cx="8229600" cy="685800"/>
+          </a:xfrm>
+          <a:prstGeom prst="rect">
+            <a:avLst/>
+          </a:prstGeom>
+          <a:noFill/>
+        </p:spPr>
+        <p:txBody>
+          <a:bodyPr wrap="none">
+            <a:spAutoFit/>
+          </a:bodyPr>
+          <a:lstStyle/>
+          <a:p>
+            <a:pPr>
+              <a:defRPr sz="1000"/>
+            </a:pPr>
+          </a:p>
+        </p:txBody>
+      </p:sp>
+      <p:sp>
+        <p:nvSpPr>
+          <p:cNvPr id="6" name="TextBox 5"/>
+          <p:cNvSpPr txBox="1"/>
+          <p:nvPr/>
+        </p:nvSpPr>
+        <p:spPr>
+          <a:xfrm>
+            <a:off x="457200" y="3429000"/>
+            <a:ext cx="8229600" cy="685800"/>
+          </a:xfrm>
+          <a:prstGeom prst="rect">
+            <a:avLst/>
+          </a:prstGeom>
+          <a:noFill/>
+        </p:spPr>
+        <p:txBody>
+          <a:bodyPr wrap="none">
+            <a:spAutoFit/>
+          </a:bodyPr>
+          <a:lstStyle/>
+          <a:p>
+            <a:pPr>
+              <a:defRPr sz="1000" i="1">
+                <a:solidFill>
+                  <a:srgbClr val="666666"/>
+                </a:solidFill>
+              </a:defRPr>
+            </a:pPr>
+            <a:r>
+              <a:t>Source: Hacker News • 116 points • 134 comments</a:t>
+            </a:r>
+          </a:p>
+        </p:txBody>
+      </p:sp>
+      <p:sp>
+        <p:nvSpPr>
+          <p:cNvPr id="7" name="TextBox 6"/>
+          <p:cNvSpPr txBox="1"/>
+          <p:nvPr/>
+        </p:nvSpPr>
+        <p:spPr>
+          <a:xfrm>
+            <a:off x="457200" y="4114800"/>
+            <a:ext cx="8229600" cy="685800"/>
+          </a:xfrm>
+          <a:prstGeom prst="rect">
+            <a:avLst/>
+          </a:prstGeom>
+          <a:noFill/>
+        </p:spPr>
+        <p:txBody>
+          <a:bodyPr wrap="none">
+            <a:spAutoFit/>
+          </a:bodyPr>
+          <a:lstStyle/>
+          <a:p>
+            <a:pPr>
+              <a:defRPr sz="900">
+                <a:solidFill>
+                  <a:srgbClr val="3498DB"/>
+                </a:solidFill>
+              </a:defRPr>
+            </a:pPr>
+            <a:r>
+              <a:t>🔗 https://martinalderson.com/posts/ai-agents-are-starting-t...</a:t>
+            </a:r>
+          </a:p>
+        </p:txBody>
+      </p:sp>
+      <p:sp>
+        <p:nvSpPr>
+          <p:cNvPr id="8" name="TextBox 7"/>
           <p:cNvSpPr txBox="1"/>
           <p:nvPr/>
         </p:nvSpPr>
@@ -4667,6 +6567,14 @@
 <file path=ppt/slides/slide22.xml><?xml version="1.0" encoding="utf-8"?>
 <p:sld xmlns:a="http://schemas.openxmlformats.org/drawingml/2006/main" xmlns:p="http://schemas.openxmlformats.org/presentationml/2006/main" xmlns:r="http://schemas.openxmlformats.org/officeDocument/2006/relationships">
   <p:cSld>
+    <p:bg>
+      <p:bgPr>
+        <a:solidFill>
+          <a:srgbClr val="F8F9FA"/>
+        </a:solidFill>
+        <a:effectLst/>
+      </p:bgPr>
+    </p:bg>
     <p:spTree>
       <p:nvGrpSpPr>
         <p:cNvPr id="1" name=""/>
@@ -4676,62 +6584,66 @@
       <p:grpSpPr/>
       <p:sp>
         <p:nvSpPr>
-          <p:cNvPr id="2" name="Title 1"/>
-          <p:cNvSpPr>
-            <a:spLocks noGrp="1"/>
-          </p:cNvSpPr>
-          <p:nvPr>
-            <p:ph type="title"/>
-          </p:nvPr>
-        </p:nvSpPr>
-        <p:spPr/>
-        <p:txBody>
-          <a:bodyPr/>
-          <a:lstStyle/>
-          <a:p>
-            <a:r>
-              <a:t>2. Claude CLI safety incident discussion</a:t>
-            </a:r>
-          </a:p>
-        </p:txBody>
-      </p:sp>
-      <p:sp>
-        <p:nvSpPr>
-          <p:cNvPr id="3" name="Content Placeholder 2"/>
-          <p:cNvSpPr>
-            <a:spLocks noGrp="1"/>
-          </p:cNvSpPr>
-          <p:nvPr>
-            <p:ph idx="1"/>
-          </p:nvPr>
-        </p:nvSpPr>
-        <p:spPr/>
-        <p:txBody>
-          <a:bodyPr/>
-          <a:lstStyle/>
-          <a:p>
-            <a:r>
-              <a:t>Community grapples with fundamental questions about agent safety, permission</a:t>
-            </a:r>
-          </a:p>
-          <a:p>
-            <a:r>
-              <a:t>models, and the balance between autonomy and control in tool-using AI systems.</a:t>
-            </a:r>
-          </a:p>
-          <a:p>
-            <a:pPr/>
-          </a:p>
-          <a:p>
-            <a:pPr/>
-            <a:r>
-              <a:t>Source: Hacker News • 220 points • 179 comments</a:t>
-            </a:r>
-          </a:p>
-          <a:p>
-            <a:pPr/>
-            <a:r>
-              <a:t>Link: https://old.reddit.com/r/ClaudeAI/comments/1pgx...</a:t>
+          <p:cNvPr id="2" name="TextBox 1"/>
+          <p:cNvSpPr txBox="1"/>
+          <p:nvPr/>
+        </p:nvSpPr>
+        <p:spPr>
+          <a:xfrm>
+            <a:off x="457200" y="457200"/>
+            <a:ext cx="8229600" cy="685800"/>
+          </a:xfrm>
+          <a:prstGeom prst="rect">
+            <a:avLst/>
+          </a:prstGeom>
+          <a:noFill/>
+        </p:spPr>
+        <p:txBody>
+          <a:bodyPr wrap="none">
+            <a:spAutoFit/>
+          </a:bodyPr>
+          <a:lstStyle/>
+          <a:p>
+            <a:pPr>
+              <a:defRPr sz="3200" b="1"/>
+            </a:pPr>
+            <a:r>
+              <a:t>2. Ilya Sutskever is puzzled by the gap between AI benchmarks and the econo...</a:t>
+            </a:r>
+          </a:p>
+        </p:txBody>
+      </p:sp>
+      <p:sp>
+        <p:nvSpPr>
+          <p:cNvPr id="3" name="TextBox 2"/>
+          <p:cNvSpPr txBox="1"/>
+          <p:nvPr/>
+        </p:nvSpPr>
+        <p:spPr>
+          <a:xfrm>
+            <a:off x="457200" y="1371600"/>
+            <a:ext cx="8229600" cy="685800"/>
+          </a:xfrm>
+          <a:prstGeom prst="rect">
+            <a:avLst/>
+          </a:prstGeom>
+          <a:noFill/>
+        </p:spPr>
+        <p:txBody>
+          <a:bodyPr wrap="none">
+            <a:spAutoFit/>
+          </a:bodyPr>
+          <a:lstStyle/>
+          <a:p>
+            <a:pPr>
+              <a:defRPr sz="1300">
+                <a:solidFill>
+                  <a:srgbClr val="333333"/>
+                </a:solidFill>
+              </a:defRPr>
+            </a:pPr>
+            <a:r>
+              <a:t>OpenAI co-founder's observation about the benchmark-to-deployment gap sparks critical</a:t>
             </a:r>
           </a:p>
         </p:txBody>
@@ -4739,6 +6651,139 @@
       <p:sp>
         <p:nvSpPr>
           <p:cNvPr id="4" name="TextBox 3"/>
+          <p:cNvSpPr txBox="1"/>
+          <p:nvPr/>
+        </p:nvSpPr>
+        <p:spPr>
+          <a:xfrm>
+            <a:off x="457200" y="2057400"/>
+            <a:ext cx="8229600" cy="685800"/>
+          </a:xfrm>
+          <a:prstGeom prst="rect">
+            <a:avLst/>
+          </a:prstGeom>
+          <a:noFill/>
+        </p:spPr>
+        <p:txBody>
+          <a:bodyPr wrap="none">
+            <a:spAutoFit/>
+          </a:bodyPr>
+          <a:lstStyle/>
+          <a:p>
+            <a:pPr>
+              <a:defRPr sz="1300">
+                <a:solidFill>
+                  <a:srgbClr val="333333"/>
+                </a:solidFill>
+              </a:defRPr>
+            </a:pPr>
+            <a:r>
+              <a:t>discussion about measuring and translating agent capabilities into real-world value.</a:t>
+            </a:r>
+          </a:p>
+        </p:txBody>
+      </p:sp>
+      <p:sp>
+        <p:nvSpPr>
+          <p:cNvPr id="5" name="TextBox 4"/>
+          <p:cNvSpPr txBox="1"/>
+          <p:nvPr/>
+        </p:nvSpPr>
+        <p:spPr>
+          <a:xfrm>
+            <a:off x="457200" y="2743200"/>
+            <a:ext cx="8229600" cy="685800"/>
+          </a:xfrm>
+          <a:prstGeom prst="rect">
+            <a:avLst/>
+          </a:prstGeom>
+          <a:noFill/>
+        </p:spPr>
+        <p:txBody>
+          <a:bodyPr wrap="none">
+            <a:spAutoFit/>
+          </a:bodyPr>
+          <a:lstStyle/>
+          <a:p>
+            <a:pPr>
+              <a:defRPr sz="1000"/>
+            </a:pPr>
+          </a:p>
+        </p:txBody>
+      </p:sp>
+      <p:sp>
+        <p:nvSpPr>
+          <p:cNvPr id="6" name="TextBox 5"/>
+          <p:cNvSpPr txBox="1"/>
+          <p:nvPr/>
+        </p:nvSpPr>
+        <p:spPr>
+          <a:xfrm>
+            <a:off x="457200" y="3429000"/>
+            <a:ext cx="8229600" cy="685800"/>
+          </a:xfrm>
+          <a:prstGeom prst="rect">
+            <a:avLst/>
+          </a:prstGeom>
+          <a:noFill/>
+        </p:spPr>
+        <p:txBody>
+          <a:bodyPr wrap="none">
+            <a:spAutoFit/>
+          </a:bodyPr>
+          <a:lstStyle/>
+          <a:p>
+            <a:pPr>
+              <a:defRPr sz="1000" i="1">
+                <a:solidFill>
+                  <a:srgbClr val="666666"/>
+                </a:solidFill>
+              </a:defRPr>
+            </a:pPr>
+            <a:r>
+              <a:t>Source: r/MachineLearning • 381 upvotes • 191 comments</a:t>
+            </a:r>
+          </a:p>
+        </p:txBody>
+      </p:sp>
+      <p:sp>
+        <p:nvSpPr>
+          <p:cNvPr id="7" name="TextBox 6"/>
+          <p:cNvSpPr txBox="1"/>
+          <p:nvPr/>
+        </p:nvSpPr>
+        <p:spPr>
+          <a:xfrm>
+            <a:off x="457200" y="4114800"/>
+            <a:ext cx="8229600" cy="685800"/>
+          </a:xfrm>
+          <a:prstGeom prst="rect">
+            <a:avLst/>
+          </a:prstGeom>
+          <a:noFill/>
+        </p:spPr>
+        <p:txBody>
+          <a:bodyPr wrap="none">
+            <a:spAutoFit/>
+          </a:bodyPr>
+          <a:lstStyle/>
+          <a:p>
+            <a:pPr>
+              <a:defRPr sz="900">
+                <a:solidFill>
+                  <a:srgbClr val="3498DB"/>
+                </a:solidFill>
+              </a:defRPr>
+            </a:pPr>
+            <a:r>
+              <a:t>🔗 https://reddit.com/r/MachineLearning/comments/1pm2zsb/ily...</a:t>
+            </a:r>
+          </a:p>
+        </p:txBody>
+      </p:sp>
+      <p:sp>
+        <p:nvSpPr>
+          <p:cNvPr id="8" name="TextBox 7"/>
           <p:cNvSpPr txBox="1"/>
           <p:nvPr/>
         </p:nvSpPr>
@@ -4778,6 +6823,14 @@
 <file path=ppt/slides/slide23.xml><?xml version="1.0" encoding="utf-8"?>
 <p:sld xmlns:a="http://schemas.openxmlformats.org/drawingml/2006/main" xmlns:p="http://schemas.openxmlformats.org/presentationml/2006/main" xmlns:r="http://schemas.openxmlformats.org/officeDocument/2006/relationships">
   <p:cSld>
+    <p:bg>
+      <p:bgPr>
+        <a:solidFill>
+          <a:srgbClr val="F8F9FA"/>
+        </a:solidFill>
+        <a:effectLst/>
+      </p:bgPr>
+    </p:bg>
     <p:spTree>
       <p:nvGrpSpPr>
         <p:cNvPr id="1" name=""/>
@@ -4787,67 +6840,66 @@
       <p:grpSpPr/>
       <p:sp>
         <p:nvSpPr>
-          <p:cNvPr id="2" name="Title 1"/>
-          <p:cNvSpPr>
-            <a:spLocks noGrp="1"/>
-          </p:cNvSpPr>
-          <p:nvPr>
-            <p:ph type="title"/>
-          </p:nvPr>
-        </p:nvSpPr>
-        <p:spPr/>
-        <p:txBody>
-          <a:bodyPr/>
-          <a:lstStyle/>
-          <a:p>
-            <a:r>
-              <a:t>3. AI agents are starting to eat SaaS - discussion</a:t>
-            </a:r>
-          </a:p>
-        </p:txBody>
-      </p:sp>
-      <p:sp>
-        <p:nvSpPr>
-          <p:cNvPr id="3" name="Content Placeholder 2"/>
-          <p:cNvSpPr>
-            <a:spLocks noGrp="1"/>
-          </p:cNvSpPr>
-          <p:nvPr>
-            <p:ph idx="1"/>
-          </p:nvPr>
-        </p:nvSpPr>
-        <p:spPr/>
-        <p:txBody>
-          <a:bodyPr/>
-          <a:lstStyle/>
-          <a:p>
-            <a:r>
-              <a:t>Industry professionals debate how autonomous agents will restructure software</a:t>
-            </a:r>
-          </a:p>
-          <a:p>
-            <a:r>
-              <a:t>markets, with implications for SaaS business models and integration</a:t>
-            </a:r>
-          </a:p>
-          <a:p>
-            <a:r>
-              <a:t>architectures.</a:t>
-            </a:r>
-          </a:p>
-          <a:p>
-            <a:pPr/>
-          </a:p>
-          <a:p>
-            <a:pPr/>
-            <a:r>
-              <a:t>Source: Hacker News • 115 points • 134 comments</a:t>
-            </a:r>
-          </a:p>
-          <a:p>
-            <a:pPr/>
-            <a:r>
-              <a:t>Link: https://martinalderson.com/posts/ai-agents-are-...</a:t>
+          <p:cNvPr id="2" name="TextBox 1"/>
+          <p:cNvSpPr txBox="1"/>
+          <p:nvPr/>
+        </p:nvSpPr>
+        <p:spPr>
+          <a:xfrm>
+            <a:off x="457200" y="457200"/>
+            <a:ext cx="8229600" cy="685800"/>
+          </a:xfrm>
+          <a:prstGeom prst="rect">
+            <a:avLst/>
+          </a:prstGeom>
+          <a:noFill/>
+        </p:spPr>
+        <p:txBody>
+          <a:bodyPr wrap="none">
+            <a:spAutoFit/>
+          </a:bodyPr>
+          <a:lstStyle/>
+          <a:p>
+            <a:pPr>
+              <a:defRPr sz="3200" b="1"/>
+            </a:pPr>
+            <a:r>
+              <a:t>3. An AI agent spent 16 hours hacking Stanford's network. It outperformed h...</a:t>
+            </a:r>
+          </a:p>
+        </p:txBody>
+      </p:sp>
+      <p:sp>
+        <p:nvSpPr>
+          <p:cNvPr id="3" name="TextBox 2"/>
+          <p:cNvSpPr txBox="1"/>
+          <p:nvPr/>
+        </p:nvSpPr>
+        <p:spPr>
+          <a:xfrm>
+            <a:off x="457200" y="1371600"/>
+            <a:ext cx="8229600" cy="685800"/>
+          </a:xfrm>
+          <a:prstGeom prst="rect">
+            <a:avLst/>
+          </a:prstGeom>
+          <a:noFill/>
+        </p:spPr>
+        <p:txBody>
+          <a:bodyPr wrap="none">
+            <a:spAutoFit/>
+          </a:bodyPr>
+          <a:lstStyle/>
+          <a:p>
+            <a:pPr>
+              <a:defRPr sz="1300">
+                <a:solidFill>
+                  <a:srgbClr val="333333"/>
+                </a:solidFill>
+              </a:defRPr>
+            </a:pPr>
+            <a:r>
+              <a:t>Real-world demonstration of autonomous agents performing complex multi-step tasks in</a:t>
             </a:r>
           </a:p>
         </p:txBody>
@@ -4855,6 +6907,139 @@
       <p:sp>
         <p:nvSpPr>
           <p:cNvPr id="4" name="TextBox 3"/>
+          <p:cNvSpPr txBox="1"/>
+          <p:nvPr/>
+        </p:nvSpPr>
+        <p:spPr>
+          <a:xfrm>
+            <a:off x="457200" y="2057400"/>
+            <a:ext cx="8229600" cy="685800"/>
+          </a:xfrm>
+          <a:prstGeom prst="rect">
+            <a:avLst/>
+          </a:prstGeom>
+          <a:noFill/>
+        </p:spPr>
+        <p:txBody>
+          <a:bodyPr wrap="none">
+            <a:spAutoFit/>
+          </a:bodyPr>
+          <a:lstStyle/>
+          <a:p>
+            <a:pPr>
+              <a:defRPr sz="1300">
+                <a:solidFill>
+                  <a:srgbClr val="333333"/>
+                </a:solidFill>
+              </a:defRPr>
+            </a:pPr>
+            <a:r>
+              <a:t>cybersecurity, raising discussions about agent reliability and economic implications.</a:t>
+            </a:r>
+          </a:p>
+        </p:txBody>
+      </p:sp>
+      <p:sp>
+        <p:nvSpPr>
+          <p:cNvPr id="5" name="TextBox 4"/>
+          <p:cNvSpPr txBox="1"/>
+          <p:nvPr/>
+        </p:nvSpPr>
+        <p:spPr>
+          <a:xfrm>
+            <a:off x="457200" y="2743200"/>
+            <a:ext cx="8229600" cy="685800"/>
+          </a:xfrm>
+          <a:prstGeom prst="rect">
+            <a:avLst/>
+          </a:prstGeom>
+          <a:noFill/>
+        </p:spPr>
+        <p:txBody>
+          <a:bodyPr wrap="none">
+            <a:spAutoFit/>
+          </a:bodyPr>
+          <a:lstStyle/>
+          <a:p>
+            <a:pPr>
+              <a:defRPr sz="1000"/>
+            </a:pPr>
+          </a:p>
+        </p:txBody>
+      </p:sp>
+      <p:sp>
+        <p:nvSpPr>
+          <p:cNvPr id="6" name="TextBox 5"/>
+          <p:cNvSpPr txBox="1"/>
+          <p:nvPr/>
+        </p:nvSpPr>
+        <p:spPr>
+          <a:xfrm>
+            <a:off x="457200" y="3429000"/>
+            <a:ext cx="8229600" cy="685800"/>
+          </a:xfrm>
+          <a:prstGeom prst="rect">
+            <a:avLst/>
+          </a:prstGeom>
+          <a:noFill/>
+        </p:spPr>
+        <p:txBody>
+          <a:bodyPr wrap="none">
+            <a:spAutoFit/>
+          </a:bodyPr>
+          <a:lstStyle/>
+          <a:p>
+            <a:pPr>
+              <a:defRPr sz="1000" i="1">
+                <a:solidFill>
+                  <a:srgbClr val="666666"/>
+                </a:solidFill>
+              </a:defRPr>
+            </a:pPr>
+            <a:r>
+              <a:t>Source: r/artificial • 210 upvotes • 32 comments</a:t>
+            </a:r>
+          </a:p>
+        </p:txBody>
+      </p:sp>
+      <p:sp>
+        <p:nvSpPr>
+          <p:cNvPr id="7" name="TextBox 6"/>
+          <p:cNvSpPr txBox="1"/>
+          <p:nvPr/>
+        </p:nvSpPr>
+        <p:spPr>
+          <a:xfrm>
+            <a:off x="457200" y="4114800"/>
+            <a:ext cx="8229600" cy="685800"/>
+          </a:xfrm>
+          <a:prstGeom prst="rect">
+            <a:avLst/>
+          </a:prstGeom>
+          <a:noFill/>
+        </p:spPr>
+        <p:txBody>
+          <a:bodyPr wrap="none">
+            <a:spAutoFit/>
+          </a:bodyPr>
+          <a:lstStyle/>
+          <a:p>
+            <a:pPr>
+              <a:defRPr sz="900">
+                <a:solidFill>
+                  <a:srgbClr val="3498DB"/>
+                </a:solidFill>
+              </a:defRPr>
+            </a:pPr>
+            <a:r>
+              <a:t>🔗 https://reddit.com/r/artificial/comments/1pkuaaq/an_ai_ag...</a:t>
+            </a:r>
+          </a:p>
+        </p:txBody>
+      </p:sp>
+      <p:sp>
+        <p:nvSpPr>
+          <p:cNvPr id="8" name="TextBox 7"/>
           <p:cNvSpPr txBox="1"/>
           <p:nvPr/>
         </p:nvSpPr>
@@ -4894,6 +7079,14 @@
 <file path=ppt/slides/slide24.xml><?xml version="1.0" encoding="utf-8"?>
 <p:sld xmlns:a="http://schemas.openxmlformats.org/drawingml/2006/main" xmlns:p="http://schemas.openxmlformats.org/presentationml/2006/main" xmlns:r="http://schemas.openxmlformats.org/officeDocument/2006/relationships">
   <p:cSld>
+    <p:bg>
+      <p:bgPr>
+        <a:solidFill>
+          <a:srgbClr val="F8F9FA"/>
+        </a:solidFill>
+        <a:effectLst/>
+      </p:bgPr>
+    </p:bg>
     <p:spTree>
       <p:nvGrpSpPr>
         <p:cNvPr id="1" name=""/>
@@ -4903,67 +7096,66 @@
       <p:grpSpPr/>
       <p:sp>
         <p:nvSpPr>
-          <p:cNvPr id="2" name="Title 1"/>
-          <p:cNvSpPr>
-            <a:spLocks noGrp="1"/>
-          </p:cNvSpPr>
-          <p:nvPr>
-            <p:ph type="title"/>
-          </p:nvPr>
-        </p:nvSpPr>
-        <p:spPr/>
-        <p:txBody>
-          <a:bodyPr/>
-          <a:lstStyle/>
-          <a:p>
-            <a:r>
-              <a:t>4. An AI agent spent 16 hours hacking Stanford's network</a:t>
-            </a:r>
-          </a:p>
-        </p:txBody>
-      </p:sp>
-      <p:sp>
-        <p:nvSpPr>
-          <p:cNvPr id="3" name="Content Placeholder 2"/>
-          <p:cNvSpPr>
-            <a:spLocks noGrp="1"/>
-          </p:cNvSpPr>
-          <p:nvPr>
-            <p:ph idx="1"/>
-          </p:nvPr>
-        </p:nvSpPr>
-        <p:spPr/>
-        <p:txBody>
-          <a:bodyPr/>
-          <a:lstStyle/>
-          <a:p>
-            <a:r>
-              <a:t>Discussion of autonomous penetration testing agents achieving human-expert</a:t>
-            </a:r>
-          </a:p>
-          <a:p>
-            <a:r>
-              <a:t>performance, raising questions about agent capabilities in adversarial</a:t>
-            </a:r>
-          </a:p>
-          <a:p>
-            <a:r>
-              <a:t>multi-step reasoning tasks.</a:t>
-            </a:r>
-          </a:p>
-          <a:p>
-            <a:pPr/>
-          </a:p>
-          <a:p>
-            <a:pPr/>
-            <a:r>
-              <a:t>Source: r/artificial • 211 upvotes • 32 comments</a:t>
-            </a:r>
-          </a:p>
-          <a:p>
-            <a:pPr/>
-            <a:r>
-              <a:t>Link: https://reddit.com/r/artificial/comments/1pkuaa...</a:t>
+          <p:cNvPr id="2" name="TextBox 1"/>
+          <p:cNvSpPr txBox="1"/>
+          <p:nvPr/>
+        </p:nvSpPr>
+        <p:spPr>
+          <a:xfrm>
+            <a:off x="457200" y="457200"/>
+            <a:ext cx="8229600" cy="685800"/>
+          </a:xfrm>
+          <a:prstGeom prst="rect">
+            <a:avLst/>
+          </a:prstGeom>
+          <a:noFill/>
+        </p:spPr>
+        <p:txBody>
+          <a:bodyPr wrap="none">
+            <a:spAutoFit/>
+          </a:bodyPr>
+          <a:lstStyle/>
+          <a:p>
+            <a:pPr>
+              <a:defRPr sz="3200" b="1"/>
+            </a:pPr>
+            <a:r>
+              <a:t>4. Claude CLI deleted my home directory and wiped my Mac</a:t>
+            </a:r>
+          </a:p>
+        </p:txBody>
+      </p:sp>
+      <p:sp>
+        <p:nvSpPr>
+          <p:cNvPr id="3" name="TextBox 2"/>
+          <p:cNvSpPr txBox="1"/>
+          <p:nvPr/>
+        </p:nvSpPr>
+        <p:spPr>
+          <a:xfrm>
+            <a:off x="457200" y="1371600"/>
+            <a:ext cx="8229600" cy="685800"/>
+          </a:xfrm>
+          <a:prstGeom prst="rect">
+            <a:avLst/>
+          </a:prstGeom>
+          <a:noFill/>
+        </p:spPr>
+        <p:txBody>
+          <a:bodyPr wrap="none">
+            <a:spAutoFit/>
+          </a:bodyPr>
+          <a:lstStyle/>
+          <a:p>
+            <a:pPr>
+              <a:defRPr sz="1300">
+                <a:solidFill>
+                  <a:srgbClr val="333333"/>
+                </a:solidFill>
+              </a:defRPr>
+            </a:pPr>
+            <a:r>
+              <a:t>Catalyzes urgent community discussion about safety mechanisms, permission boundaries, and</a:t>
             </a:r>
           </a:p>
         </p:txBody>
@@ -4971,6 +7163,139 @@
       <p:sp>
         <p:nvSpPr>
           <p:cNvPr id="4" name="TextBox 3"/>
+          <p:cNvSpPr txBox="1"/>
+          <p:nvPr/>
+        </p:nvSpPr>
+        <p:spPr>
+          <a:xfrm>
+            <a:off x="457200" y="2057400"/>
+            <a:ext cx="8229600" cy="685800"/>
+          </a:xfrm>
+          <a:prstGeom prst="rect">
+            <a:avLst/>
+          </a:prstGeom>
+          <a:noFill/>
+        </p:spPr>
+        <p:txBody>
+          <a:bodyPr wrap="none">
+            <a:spAutoFit/>
+          </a:bodyPr>
+          <a:lstStyle/>
+          <a:p>
+            <a:pPr>
+              <a:defRPr sz="1300">
+                <a:solidFill>
+                  <a:srgbClr val="333333"/>
+                </a:solidFill>
+              </a:defRPr>
+            </a:pPr>
+            <a:r>
+              <a:t>responsible deployment practices for autonomous tool-using agents.</a:t>
+            </a:r>
+          </a:p>
+        </p:txBody>
+      </p:sp>
+      <p:sp>
+        <p:nvSpPr>
+          <p:cNvPr id="5" name="TextBox 4"/>
+          <p:cNvSpPr txBox="1"/>
+          <p:nvPr/>
+        </p:nvSpPr>
+        <p:spPr>
+          <a:xfrm>
+            <a:off x="457200" y="2743200"/>
+            <a:ext cx="8229600" cy="685800"/>
+          </a:xfrm>
+          <a:prstGeom prst="rect">
+            <a:avLst/>
+          </a:prstGeom>
+          <a:noFill/>
+        </p:spPr>
+        <p:txBody>
+          <a:bodyPr wrap="none">
+            <a:spAutoFit/>
+          </a:bodyPr>
+          <a:lstStyle/>
+          <a:p>
+            <a:pPr>
+              <a:defRPr sz="1000"/>
+            </a:pPr>
+          </a:p>
+        </p:txBody>
+      </p:sp>
+      <p:sp>
+        <p:nvSpPr>
+          <p:cNvPr id="6" name="TextBox 5"/>
+          <p:cNvSpPr txBox="1"/>
+          <p:nvPr/>
+        </p:nvSpPr>
+        <p:spPr>
+          <a:xfrm>
+            <a:off x="457200" y="3429000"/>
+            <a:ext cx="8229600" cy="685800"/>
+          </a:xfrm>
+          <a:prstGeom prst="rect">
+            <a:avLst/>
+          </a:prstGeom>
+          <a:noFill/>
+        </p:spPr>
+        <p:txBody>
+          <a:bodyPr wrap="none">
+            <a:spAutoFit/>
+          </a:bodyPr>
+          <a:lstStyle/>
+          <a:p>
+            <a:pPr>
+              <a:defRPr sz="1000" i="1">
+                <a:solidFill>
+                  <a:srgbClr val="666666"/>
+                </a:solidFill>
+              </a:defRPr>
+            </a:pPr>
+            <a:r>
+              <a:t>Source: Hacker News • 220 points • 179 comments</a:t>
+            </a:r>
+          </a:p>
+        </p:txBody>
+      </p:sp>
+      <p:sp>
+        <p:nvSpPr>
+          <p:cNvPr id="7" name="TextBox 6"/>
+          <p:cNvSpPr txBox="1"/>
+          <p:nvPr/>
+        </p:nvSpPr>
+        <p:spPr>
+          <a:xfrm>
+            <a:off x="457200" y="4114800"/>
+            <a:ext cx="8229600" cy="685800"/>
+          </a:xfrm>
+          <a:prstGeom prst="rect">
+            <a:avLst/>
+          </a:prstGeom>
+          <a:noFill/>
+        </p:spPr>
+        <p:txBody>
+          <a:bodyPr wrap="none">
+            <a:spAutoFit/>
+          </a:bodyPr>
+          <a:lstStyle/>
+          <a:p>
+            <a:pPr>
+              <a:defRPr sz="900">
+                <a:solidFill>
+                  <a:srgbClr val="3498DB"/>
+                </a:solidFill>
+              </a:defRPr>
+            </a:pPr>
+            <a:r>
+              <a:t>🔗 https://old.reddit.com/r/ClaudeAI/comments/1pgxckk/claude...</a:t>
+            </a:r>
+          </a:p>
+        </p:txBody>
+      </p:sp>
+      <p:sp>
+        <p:nvSpPr>
+          <p:cNvPr id="8" name="TextBox 7"/>
           <p:cNvSpPr txBox="1"/>
           <p:nvPr/>
         </p:nvSpPr>
@@ -5010,6 +7335,14 @@
 <file path=ppt/slides/slide25.xml><?xml version="1.0" encoding="utf-8"?>
 <p:sld xmlns:a="http://schemas.openxmlformats.org/drawingml/2006/main" xmlns:p="http://schemas.openxmlformats.org/presentationml/2006/main" xmlns:r="http://schemas.openxmlformats.org/officeDocument/2006/relationships">
   <p:cSld>
+    <p:bg>
+      <p:bgPr>
+        <a:solidFill>
+          <a:srgbClr val="764BA2"/>
+        </a:solidFill>
+        <a:effectLst/>
+      </p:bgPr>
+    </p:bg>
     <p:spTree>
       <p:nvGrpSpPr>
         <p:cNvPr id="1" name=""/>
@@ -5019,19 +7352,29 @@
       <p:grpSpPr/>
       <p:sp>
         <p:nvSpPr>
-          <p:cNvPr id="2" name="Title 1"/>
-          <p:cNvSpPr>
-            <a:spLocks noGrp="1"/>
-          </p:cNvSpPr>
-          <p:nvPr>
-            <p:ph type="title"/>
-          </p:nvPr>
-        </p:nvSpPr>
-        <p:spPr/>
-        <p:txBody>
-          <a:bodyPr/>
-          <a:lstStyle/>
-          <a:p>
+          <p:cNvPr id="2" name="TextBox 1"/>
+          <p:cNvSpPr txBox="1"/>
+          <p:nvPr/>
+        </p:nvSpPr>
+        <p:spPr>
+          <a:xfrm>
+            <a:off x="457200" y="457200"/>
+            <a:ext cx="8229600" cy="685800"/>
+          </a:xfrm>
+          <a:prstGeom prst="rect">
+            <a:avLst/>
+          </a:prstGeom>
+          <a:noFill/>
+        </p:spPr>
+        <p:txBody>
+          <a:bodyPr wrap="none">
+            <a:spAutoFit/>
+          </a:bodyPr>
+          <a:lstStyle/>
+          <a:p>
+            <a:pPr>
+              <a:defRPr sz="3200" b="1"/>
+            </a:pPr>
             <a:r>
               <a:t>Stay Curious</a:t>
             </a:r>
@@ -5040,61 +7383,299 @@
       </p:sp>
       <p:sp>
         <p:nvSpPr>
-          <p:cNvPr id="3" name="Content Placeholder 2"/>
-          <p:cNvSpPr>
-            <a:spLocks noGrp="1"/>
-          </p:cNvSpPr>
-          <p:nvPr>
-            <p:ph idx="1"/>
-          </p:nvPr>
-        </p:nvSpPr>
-        <p:spPr/>
-        <p:txBody>
-          <a:bodyPr/>
-          <a:lstStyle/>
-          <a:p>
+          <p:cNvPr id="3" name="TextBox 2"/>
+          <p:cNvSpPr txBox="1"/>
+          <p:nvPr/>
+        </p:nvSpPr>
+        <p:spPr>
+          <a:xfrm>
+            <a:off x="457200" y="1371600"/>
+            <a:ext cx="8229600" cy="685800"/>
+          </a:xfrm>
+          <a:prstGeom prst="rect">
+            <a:avLst/>
+          </a:prstGeom>
+          <a:noFill/>
+        </p:spPr>
+        <p:txBody>
+          <a:bodyPr wrap="none">
+            <a:spAutoFit/>
+          </a:bodyPr>
+          <a:lstStyle/>
+          <a:p>
+            <a:pPr>
+              <a:defRPr sz="1800" b="1">
+                <a:solidFill>
+                  <a:srgbClr val="FFFFFF"/>
+                </a:solidFill>
+              </a:defRPr>
+            </a:pPr>
             <a:r>
               <a:t>Your weekly AI digest</a:t>
             </a:r>
           </a:p>
-          <a:p>
-            <a:pPr/>
+        </p:txBody>
+      </p:sp>
+      <p:sp>
+        <p:nvSpPr>
+          <p:cNvPr id="4" name="TextBox 3"/>
+          <p:cNvSpPr txBox="1"/>
+          <p:nvPr/>
+        </p:nvSpPr>
+        <p:spPr>
+          <a:xfrm>
+            <a:off x="457200" y="2057400"/>
+            <a:ext cx="8229600" cy="685800"/>
+          </a:xfrm>
+          <a:prstGeom prst="rect">
+            <a:avLst/>
+          </a:prstGeom>
+          <a:noFill/>
+        </p:spPr>
+        <p:txBody>
+          <a:bodyPr wrap="none">
+            <a:spAutoFit/>
+          </a:bodyPr>
+          <a:lstStyle/>
+          <a:p>
+            <a:pPr>
+              <a:defRPr sz="1400" i="1">
+                <a:solidFill>
+                  <a:srgbClr val="EEEEEE"/>
+                </a:solidFill>
+              </a:defRPr>
+            </a:pPr>
             <a:r>
               <a:t>Automatically curated every Sunday</a:t>
             </a:r>
           </a:p>
-          <a:p>
-            <a:pPr/>
-          </a:p>
-          <a:p>
-            <a:pPr/>
+        </p:txBody>
+      </p:sp>
+      <p:sp>
+        <p:nvSpPr>
+          <p:cNvPr id="5" name="TextBox 4"/>
+          <p:cNvSpPr txBox="1"/>
+          <p:nvPr/>
+        </p:nvSpPr>
+        <p:spPr>
+          <a:xfrm>
+            <a:off x="457200" y="2743200"/>
+            <a:ext cx="8229600" cy="685800"/>
+          </a:xfrm>
+          <a:prstGeom prst="rect">
+            <a:avLst/>
+          </a:prstGeom>
+          <a:noFill/>
+        </p:spPr>
+        <p:txBody>
+          <a:bodyPr wrap="none">
+            <a:spAutoFit/>
+          </a:bodyPr>
+          <a:lstStyle/>
+          <a:p>
+            <a:pPr>
+              <a:defRPr sz="1200"/>
+            </a:pPr>
+          </a:p>
+        </p:txBody>
+      </p:sp>
+      <p:sp>
+        <p:nvSpPr>
+          <p:cNvPr id="6" name="TextBox 5"/>
+          <p:cNvSpPr txBox="1"/>
+          <p:nvPr/>
+        </p:nvSpPr>
+        <p:spPr>
+          <a:xfrm>
+            <a:off x="457200" y="3429000"/>
+            <a:ext cx="8229600" cy="685800"/>
+          </a:xfrm>
+          <a:prstGeom prst="rect">
+            <a:avLst/>
+          </a:prstGeom>
+          <a:noFill/>
+        </p:spPr>
+        <p:txBody>
+          <a:bodyPr wrap="none">
+            <a:spAutoFit/>
+          </a:bodyPr>
+          <a:lstStyle/>
+          <a:p>
+            <a:pPr>
+              <a:defRPr sz="1400" b="1">
+                <a:solidFill>
+                  <a:srgbClr val="FFFFFF"/>
+                </a:solidFill>
+              </a:defRPr>
+            </a:pPr>
             <a:r>
               <a:t>Data Sources:</a:t>
             </a:r>
           </a:p>
-          <a:p>
-            <a:pPr/>
+        </p:txBody>
+      </p:sp>
+      <p:sp>
+        <p:nvSpPr>
+          <p:cNvPr id="7" name="TextBox 6"/>
+          <p:cNvSpPr txBox="1"/>
+          <p:nvPr/>
+        </p:nvSpPr>
+        <p:spPr>
+          <a:xfrm>
+            <a:off x="457200" y="4114800"/>
+            <a:ext cx="8229600" cy="685800"/>
+          </a:xfrm>
+          <a:prstGeom prst="rect">
+            <a:avLst/>
+          </a:prstGeom>
+          <a:noFill/>
+        </p:spPr>
+        <p:txBody>
+          <a:bodyPr wrap="none">
+            <a:spAutoFit/>
+          </a:bodyPr>
+          <a:lstStyle/>
+          <a:p>
+            <a:pPr>
+              <a:defRPr sz="1200">
+                <a:solidFill>
+                  <a:srgbClr val="EEEEEE"/>
+                </a:solidFill>
+              </a:defRPr>
+            </a:pPr>
             <a:r>
               <a:t>  → arXiv Research Papers</a:t>
             </a:r>
           </a:p>
-          <a:p>
-            <a:pPr/>
+        </p:txBody>
+      </p:sp>
+      <p:sp>
+        <p:nvSpPr>
+          <p:cNvPr id="8" name="TextBox 7"/>
+          <p:cNvSpPr txBox="1"/>
+          <p:nvPr/>
+        </p:nvSpPr>
+        <p:spPr>
+          <a:xfrm>
+            <a:off x="457200" y="4800600"/>
+            <a:ext cx="8229600" cy="685800"/>
+          </a:xfrm>
+          <a:prstGeom prst="rect">
+            <a:avLst/>
+          </a:prstGeom>
+          <a:noFill/>
+        </p:spPr>
+        <p:txBody>
+          <a:bodyPr wrap="none">
+            <a:spAutoFit/>
+          </a:bodyPr>
+          <a:lstStyle/>
+          <a:p>
+            <a:pPr>
+              <a:defRPr sz="1200">
+                <a:solidFill>
+                  <a:srgbClr val="EEEEEE"/>
+                </a:solidFill>
+              </a:defRPr>
+            </a:pPr>
             <a:r>
               <a:t>  → Hacker News</a:t>
             </a:r>
           </a:p>
-          <a:p>
-            <a:pPr/>
+        </p:txBody>
+      </p:sp>
+      <p:sp>
+        <p:nvSpPr>
+          <p:cNvPr id="9" name="TextBox 8"/>
+          <p:cNvSpPr txBox="1"/>
+          <p:nvPr/>
+        </p:nvSpPr>
+        <p:spPr>
+          <a:xfrm>
+            <a:off x="457200" y="5486400"/>
+            <a:ext cx="8229600" cy="685800"/>
+          </a:xfrm>
+          <a:prstGeom prst="rect">
+            <a:avLst/>
+          </a:prstGeom>
+          <a:noFill/>
+        </p:spPr>
+        <p:txBody>
+          <a:bodyPr wrap="none">
+            <a:spAutoFit/>
+          </a:bodyPr>
+          <a:lstStyle/>
+          <a:p>
+            <a:pPr>
+              <a:defRPr sz="1200">
+                <a:solidFill>
+                  <a:srgbClr val="EEEEEE"/>
+                </a:solidFill>
+              </a:defRPr>
+            </a:pPr>
             <a:r>
               <a:t>  → Reddit ML Communities</a:t>
             </a:r>
           </a:p>
-          <a:p>
-            <a:pPr/>
-          </a:p>
-          <a:p>
-            <a:pPr/>
+        </p:txBody>
+      </p:sp>
+      <p:sp>
+        <p:nvSpPr>
+          <p:cNvPr id="10" name="TextBox 9"/>
+          <p:cNvSpPr txBox="1"/>
+          <p:nvPr/>
+        </p:nvSpPr>
+        <p:spPr>
+          <a:xfrm>
+            <a:off x="457200" y="6172200"/>
+            <a:ext cx="8229600" cy="685800"/>
+          </a:xfrm>
+          <a:prstGeom prst="rect">
+            <a:avLst/>
+          </a:prstGeom>
+          <a:noFill/>
+        </p:spPr>
+        <p:txBody>
+          <a:bodyPr wrap="none">
+            <a:spAutoFit/>
+          </a:bodyPr>
+          <a:lstStyle/>
+          <a:p>
+            <a:pPr>
+              <a:defRPr sz="1200"/>
+            </a:pPr>
+          </a:p>
+        </p:txBody>
+      </p:sp>
+      <p:sp>
+        <p:nvSpPr>
+          <p:cNvPr id="11" name="TextBox 10"/>
+          <p:cNvSpPr txBox="1"/>
+          <p:nvPr/>
+        </p:nvSpPr>
+        <p:spPr>
+          <a:xfrm>
+            <a:off x="457200" y="6858000"/>
+            <a:ext cx="8229600" cy="685800"/>
+          </a:xfrm>
+          <a:prstGeom prst="rect">
+            <a:avLst/>
+          </a:prstGeom>
+          <a:noFill/>
+        </p:spPr>
+        <p:txBody>
+          <a:bodyPr wrap="none">
+            <a:spAutoFit/>
+          </a:bodyPr>
+          <a:lstStyle/>
+          <a:p>
+            <a:pPr>
+              <a:defRPr sz="1300" i="1">
+                <a:solidFill>
+                  <a:srgbClr val="CCCCCC"/>
+                </a:solidFill>
+              </a:defRPr>
+            </a:pPr>
             <a:r>
               <a:t>Next edition: December 21, 2025</a:t>
             </a:r>
@@ -5103,7 +7684,7 @@
       </p:sp>
       <p:sp>
         <p:nvSpPr>
-          <p:cNvPr id="4" name="TextBox 3"/>
+          <p:cNvPr id="12" name="TextBox 11"/>
           <p:cNvSpPr txBox="1"/>
           <p:nvPr/>
         </p:nvSpPr>
@@ -5143,6 +7724,14 @@
 <file path=ppt/slides/slide3.xml><?xml version="1.0" encoding="utf-8"?>
 <p:sld xmlns:a="http://schemas.openxmlformats.org/drawingml/2006/main" xmlns:p="http://schemas.openxmlformats.org/presentationml/2006/main" xmlns:r="http://schemas.openxmlformats.org/officeDocument/2006/relationships">
   <p:cSld>
+    <p:bg>
+      <p:bgPr>
+        <a:solidFill>
+          <a:srgbClr val="9B59B6"/>
+        </a:solidFill>
+        <a:effectLst/>
+      </p:bgPr>
+    </p:bg>
     <p:spTree>
       <p:nvGrpSpPr>
         <p:cNvPr id="1" name=""/>
@@ -5152,19 +7741,29 @@
       <p:grpSpPr/>
       <p:sp>
         <p:nvSpPr>
-          <p:cNvPr id="2" name="Title 1"/>
-          <p:cNvSpPr>
-            <a:spLocks noGrp="1"/>
-          </p:cNvSpPr>
-          <p:nvPr>
-            <p:ph type="title"/>
-          </p:nvPr>
-        </p:nvSpPr>
-        <p:spPr/>
-        <p:txBody>
-          <a:bodyPr/>
-          <a:lstStyle/>
-          <a:p>
+          <p:cNvPr id="2" name="TextBox 1"/>
+          <p:cNvSpPr txBox="1"/>
+          <p:nvPr/>
+        </p:nvSpPr>
+        <p:spPr>
+          <a:xfrm>
+            <a:off x="457200" y="457200"/>
+            <a:ext cx="8229600" cy="685800"/>
+          </a:xfrm>
+          <a:prstGeom prst="rect">
+            <a:avLst/>
+          </a:prstGeom>
+          <a:noFill/>
+        </p:spPr>
+        <p:txBody>
+          <a:bodyPr wrap="none">
+            <a:spAutoFit/>
+          </a:bodyPr>
+          <a:lstStyle/>
+          <a:p>
+            <a:pPr>
+              <a:defRPr sz="3200" b="1"/>
+            </a:pPr>
             <a:r>
               <a:t>Key Research Papers</a:t>
             </a:r>
@@ -5173,28 +7772,96 @@
       </p:sp>
       <p:sp>
         <p:nvSpPr>
-          <p:cNvPr id="3" name="Content Placeholder 2"/>
-          <p:cNvSpPr>
-            <a:spLocks noGrp="1"/>
-          </p:cNvSpPr>
-          <p:nvPr>
-            <p:ph idx="1"/>
-          </p:nvPr>
-        </p:nvSpPr>
-        <p:spPr/>
-        <p:txBody>
-          <a:bodyPr/>
-          <a:lstStyle/>
-          <a:p>
+          <p:cNvPr id="3" name="TextBox 2"/>
+          <p:cNvSpPr txBox="1"/>
+          <p:nvPr/>
+        </p:nvSpPr>
+        <p:spPr>
+          <a:xfrm>
+            <a:off x="457200" y="1371600"/>
+            <a:ext cx="8229600" cy="685800"/>
+          </a:xfrm>
+          <a:prstGeom prst="rect">
+            <a:avLst/>
+          </a:prstGeom>
+          <a:noFill/>
+        </p:spPr>
+        <p:txBody>
+          <a:bodyPr wrap="none">
+            <a:spAutoFit/>
+          </a:bodyPr>
+          <a:lstStyle/>
+          <a:p>
+            <a:pPr>
+              <a:defRPr sz="2000" b="1">
+                <a:solidFill>
+                  <a:srgbClr val="FFFFFF"/>
+                </a:solidFill>
+              </a:defRPr>
+            </a:pPr>
             <a:r>
               <a:t>5 key updates</a:t>
             </a:r>
           </a:p>
-          <a:p>
-            <a:pPr/>
-          </a:p>
-          <a:p>
-            <a:pPr/>
+        </p:txBody>
+      </p:sp>
+      <p:sp>
+        <p:nvSpPr>
+          <p:cNvPr id="4" name="TextBox 3"/>
+          <p:cNvSpPr txBox="1"/>
+          <p:nvPr/>
+        </p:nvSpPr>
+        <p:spPr>
+          <a:xfrm>
+            <a:off x="457200" y="2057400"/>
+            <a:ext cx="8229600" cy="685800"/>
+          </a:xfrm>
+          <a:prstGeom prst="rect">
+            <a:avLst/>
+          </a:prstGeom>
+          <a:noFill/>
+        </p:spPr>
+        <p:txBody>
+          <a:bodyPr wrap="none">
+            <a:spAutoFit/>
+          </a:bodyPr>
+          <a:lstStyle/>
+          <a:p>
+            <a:pPr>
+              <a:defRPr sz="1200"/>
+            </a:pPr>
+          </a:p>
+        </p:txBody>
+      </p:sp>
+      <p:sp>
+        <p:nvSpPr>
+          <p:cNvPr id="5" name="TextBox 4"/>
+          <p:cNvSpPr txBox="1"/>
+          <p:nvPr/>
+        </p:nvSpPr>
+        <p:spPr>
+          <a:xfrm>
+            <a:off x="457200" y="2743200"/>
+            <a:ext cx="8229600" cy="685800"/>
+          </a:xfrm>
+          <a:prstGeom prst="rect">
+            <a:avLst/>
+          </a:prstGeom>
+          <a:noFill/>
+        </p:spPr>
+        <p:txBody>
+          <a:bodyPr wrap="none">
+            <a:spAutoFit/>
+          </a:bodyPr>
+          <a:lstStyle/>
+          <a:p>
+            <a:pPr>
+              <a:defRPr sz="1600" i="1">
+                <a:solidFill>
+                  <a:srgbClr val="FFFFFF"/>
+                </a:solidFill>
+              </a:defRPr>
+            </a:pPr>
             <a:r>
               <a:t>Swipe to explore →</a:t>
             </a:r>
@@ -5203,7 +7870,7 @@
       </p:sp>
       <p:sp>
         <p:nvSpPr>
-          <p:cNvPr id="4" name="TextBox 3"/>
+          <p:cNvPr id="6" name="TextBox 5"/>
           <p:cNvSpPr txBox="1"/>
           <p:nvPr/>
         </p:nvSpPr>
@@ -5243,6 +7910,14 @@
 <file path=ppt/slides/slide4.xml><?xml version="1.0" encoding="utf-8"?>
 <p:sld xmlns:a="http://schemas.openxmlformats.org/drawingml/2006/main" xmlns:p="http://schemas.openxmlformats.org/presentationml/2006/main" xmlns:r="http://schemas.openxmlformats.org/officeDocument/2006/relationships">
   <p:cSld>
+    <p:bg>
+      <p:bgPr>
+        <a:solidFill>
+          <a:srgbClr val="F8F9FA"/>
+        </a:solidFill>
+        <a:effectLst/>
+      </p:bgPr>
+    </p:bg>
     <p:spTree>
       <p:nvGrpSpPr>
         <p:cNvPr id="1" name=""/>
@@ -5252,19 +7927,29 @@
       <p:grpSpPr/>
       <p:sp>
         <p:nvSpPr>
-          <p:cNvPr id="2" name="Title 1"/>
-          <p:cNvSpPr>
-            <a:spLocks noGrp="1"/>
-          </p:cNvSpPr>
-          <p:nvPr>
-            <p:ph type="title"/>
-          </p:nvPr>
-        </p:nvSpPr>
-        <p:spPr/>
-        <p:txBody>
-          <a:bodyPr/>
-          <a:lstStyle/>
-          <a:p>
+          <p:cNvPr id="2" name="TextBox 1"/>
+          <p:cNvSpPr txBox="1"/>
+          <p:nvPr/>
+        </p:nvSpPr>
+        <p:spPr>
+          <a:xfrm>
+            <a:off x="457200" y="457200"/>
+            <a:ext cx="8229600" cy="685800"/>
+          </a:xfrm>
+          <a:prstGeom prst="rect">
+            <a:avLst/>
+          </a:prstGeom>
+          <a:noFill/>
+        </p:spPr>
+        <p:txBody>
+          <a:bodyPr wrap="none">
+            <a:spAutoFit/>
+          </a:bodyPr>
+          <a:lstStyle/>
+          <a:p>
+            <a:pPr>
+              <a:defRPr sz="3200" b="1"/>
+            </a:pPr>
             <a:r>
               <a:t>1. Agile Flight Emerges from Multi-Agent Competitive Racing</a:t>
             </a:r>
@@ -5273,53 +7958,210 @@
       </p:sp>
       <p:sp>
         <p:nvSpPr>
-          <p:cNvPr id="3" name="Content Placeholder 2"/>
-          <p:cNvSpPr>
-            <a:spLocks noGrp="1"/>
-          </p:cNvSpPr>
-          <p:nvPr>
-            <p:ph idx="1"/>
-          </p:nvPr>
-        </p:nvSpPr>
-        <p:spPr/>
-        <p:txBody>
-          <a:bodyPr/>
-          <a:lstStyle/>
-          <a:p>
-            <a:r>
-              <a:t>Demonstrates how multi-agent competition with sparse rewards can emergently</a:t>
-            </a:r>
-          </a:p>
-          <a:p>
-            <a:r>
-              <a:t>produce complex agile behaviors and strategic planning without explicit</a:t>
-            </a:r>
-          </a:p>
-          <a:p>
-            <a:r>
-              <a:t>programming of flight maneuvers.</a:t>
-            </a:r>
-          </a:p>
-          <a:p>
-            <a:pPr/>
-          </a:p>
-          <a:p>
-            <a:pPr/>
+          <p:cNvPr id="3" name="TextBox 2"/>
+          <p:cNvSpPr txBox="1"/>
+          <p:nvPr/>
+        </p:nvSpPr>
+        <p:spPr>
+          <a:xfrm>
+            <a:off x="457200" y="1371600"/>
+            <a:ext cx="8229600" cy="685800"/>
+          </a:xfrm>
+          <a:prstGeom prst="rect">
+            <a:avLst/>
+          </a:prstGeom>
+          <a:noFill/>
+        </p:spPr>
+        <p:txBody>
+          <a:bodyPr wrap="none">
+            <a:spAutoFit/>
+          </a:bodyPr>
+          <a:lstStyle/>
+          <a:p>
+            <a:pPr>
+              <a:defRPr sz="1300">
+                <a:solidFill>
+                  <a:srgbClr val="333333"/>
+                </a:solidFill>
+              </a:defRPr>
+            </a:pPr>
+            <a:r>
+              <a:t>Demonstrates that complex agile flight behaviors and strategic decision-making emerge</a:t>
+            </a:r>
+          </a:p>
+        </p:txBody>
+      </p:sp>
+      <p:sp>
+        <p:nvSpPr>
+          <p:cNvPr id="4" name="TextBox 3"/>
+          <p:cNvSpPr txBox="1"/>
+          <p:nvPr/>
+        </p:nvSpPr>
+        <p:spPr>
+          <a:xfrm>
+            <a:off x="457200" y="2057400"/>
+            <a:ext cx="8229600" cy="685800"/>
+          </a:xfrm>
+          <a:prstGeom prst="rect">
+            <a:avLst/>
+          </a:prstGeom>
+          <a:noFill/>
+        </p:spPr>
+        <p:txBody>
+          <a:bodyPr wrap="none">
+            <a:spAutoFit/>
+          </a:bodyPr>
+          <a:lstStyle/>
+          <a:p>
+            <a:pPr>
+              <a:defRPr sz="1300">
+                <a:solidFill>
+                  <a:srgbClr val="333333"/>
+                </a:solidFill>
+              </a:defRPr>
+            </a:pPr>
+            <a:r>
+              <a:t>purely from multi-agent competition with sparse rewards, showing how agent interaction</a:t>
+            </a:r>
+          </a:p>
+        </p:txBody>
+      </p:sp>
+      <p:sp>
+        <p:nvSpPr>
+          <p:cNvPr id="5" name="TextBox 4"/>
+          <p:cNvSpPr txBox="1"/>
+          <p:nvPr/>
+        </p:nvSpPr>
+        <p:spPr>
+          <a:xfrm>
+            <a:off x="457200" y="2743200"/>
+            <a:ext cx="8229600" cy="685800"/>
+          </a:xfrm>
+          <a:prstGeom prst="rect">
+            <a:avLst/>
+          </a:prstGeom>
+          <a:noFill/>
+        </p:spPr>
+        <p:txBody>
+          <a:bodyPr wrap="none">
+            <a:spAutoFit/>
+          </a:bodyPr>
+          <a:lstStyle/>
+          <a:p>
+            <a:pPr>
+              <a:defRPr sz="1300">
+                <a:solidFill>
+                  <a:srgbClr val="333333"/>
+                </a:solidFill>
+              </a:defRPr>
+            </a:pPr>
+            <a:r>
+              <a:t>drives capability development.</a:t>
+            </a:r>
+          </a:p>
+        </p:txBody>
+      </p:sp>
+      <p:sp>
+        <p:nvSpPr>
+          <p:cNvPr id="6" name="TextBox 5"/>
+          <p:cNvSpPr txBox="1"/>
+          <p:nvPr/>
+        </p:nvSpPr>
+        <p:spPr>
+          <a:xfrm>
+            <a:off x="457200" y="3429000"/>
+            <a:ext cx="8229600" cy="685800"/>
+          </a:xfrm>
+          <a:prstGeom prst="rect">
+            <a:avLst/>
+          </a:prstGeom>
+          <a:noFill/>
+        </p:spPr>
+        <p:txBody>
+          <a:bodyPr wrap="none">
+            <a:spAutoFit/>
+          </a:bodyPr>
+          <a:lstStyle/>
+          <a:p>
+            <a:pPr>
+              <a:defRPr sz="1000"/>
+            </a:pPr>
+          </a:p>
+        </p:txBody>
+      </p:sp>
+      <p:sp>
+        <p:nvSpPr>
+          <p:cNvPr id="7" name="TextBox 6"/>
+          <p:cNvSpPr txBox="1"/>
+          <p:nvPr/>
+        </p:nvSpPr>
+        <p:spPr>
+          <a:xfrm>
+            <a:off x="457200" y="4114800"/>
+            <a:ext cx="8229600" cy="685800"/>
+          </a:xfrm>
+          <a:prstGeom prst="rect">
+            <a:avLst/>
+          </a:prstGeom>
+          <a:noFill/>
+        </p:spPr>
+        <p:txBody>
+          <a:bodyPr wrap="none">
+            <a:spAutoFit/>
+          </a:bodyPr>
+          <a:lstStyle/>
+          <a:p>
+            <a:pPr>
+              <a:defRPr sz="1000" i="1">
+                <a:solidFill>
+                  <a:srgbClr val="666666"/>
+                </a:solidFill>
+              </a:defRPr>
+            </a:pPr>
             <a:r>
               <a:t>Source: arXiv • Vineet Pasumarti, Lorenzo Bianchi, Antonio Loquercio</a:t>
             </a:r>
           </a:p>
-          <a:p>
-            <a:pPr/>
-            <a:r>
-              <a:t>Link: https://arxiv.org/abs/2512.11781v1</a:t>
-            </a:r>
-          </a:p>
-        </p:txBody>
-      </p:sp>
-      <p:sp>
-        <p:nvSpPr>
-          <p:cNvPr id="4" name="TextBox 3"/>
+        </p:txBody>
+      </p:sp>
+      <p:sp>
+        <p:nvSpPr>
+          <p:cNvPr id="8" name="TextBox 7"/>
+          <p:cNvSpPr txBox="1"/>
+          <p:nvPr/>
+        </p:nvSpPr>
+        <p:spPr>
+          <a:xfrm>
+            <a:off x="457200" y="4800600"/>
+            <a:ext cx="8229600" cy="685800"/>
+          </a:xfrm>
+          <a:prstGeom prst="rect">
+            <a:avLst/>
+          </a:prstGeom>
+          <a:noFill/>
+        </p:spPr>
+        <p:txBody>
+          <a:bodyPr wrap="none">
+            <a:spAutoFit/>
+          </a:bodyPr>
+          <a:lstStyle/>
+          <a:p>
+            <a:pPr>
+              <a:defRPr sz="900">
+                <a:solidFill>
+                  <a:srgbClr val="3498DB"/>
+                </a:solidFill>
+              </a:defRPr>
+            </a:pPr>
+            <a:r>
+              <a:t>🔗 https://arxiv.org/abs/2512.11781v1</a:t>
+            </a:r>
+          </a:p>
+        </p:txBody>
+      </p:sp>
+      <p:sp>
+        <p:nvSpPr>
+          <p:cNvPr id="9" name="TextBox 8"/>
           <p:cNvSpPr txBox="1"/>
           <p:nvPr/>
         </p:nvSpPr>
@@ -5359,6 +8201,14 @@
 <file path=ppt/slides/slide5.xml><?xml version="1.0" encoding="utf-8"?>
 <p:sld xmlns:a="http://schemas.openxmlformats.org/drawingml/2006/main" xmlns:p="http://schemas.openxmlformats.org/presentationml/2006/main" xmlns:r="http://schemas.openxmlformats.org/officeDocument/2006/relationships">
   <p:cSld>
+    <p:bg>
+      <p:bgPr>
+        <a:solidFill>
+          <a:srgbClr val="F8F9FA"/>
+        </a:solidFill>
+        <a:effectLst/>
+      </p:bgPr>
+    </p:bg>
     <p:spTree>
       <p:nvGrpSpPr>
         <p:cNvPr id="1" name=""/>
@@ -5368,74 +8218,241 @@
       <p:grpSpPr/>
       <p:sp>
         <p:nvSpPr>
-          <p:cNvPr id="2" name="Title 1"/>
-          <p:cNvSpPr>
-            <a:spLocks noGrp="1"/>
-          </p:cNvSpPr>
-          <p:nvPr>
-            <p:ph type="title"/>
-          </p:nvPr>
-        </p:nvSpPr>
-        <p:spPr/>
-        <p:txBody>
-          <a:bodyPr/>
-          <a:lstStyle/>
-          <a:p>
-            <a:r>
-              <a:t>2. MedAI: Evaluating TxAgent's Therapeutic Agentic Reasoning in the Ne...</a:t>
-            </a:r>
-          </a:p>
-        </p:txBody>
-      </p:sp>
-      <p:sp>
-        <p:nvSpPr>
-          <p:cNvPr id="3" name="Content Placeholder 2"/>
-          <p:cNvSpPr>
-            <a:spLocks noGrp="1"/>
-          </p:cNvSpPr>
-          <p:nvPr>
-            <p:ph idx="1"/>
-          </p:nvPr>
-        </p:nvSpPr>
-        <p:spPr/>
-        <p:txBody>
-          <a:bodyPr/>
-          <a:lstStyle/>
-          <a:p>
-            <a:r>
-              <a:t>Showcases agentic AI reasoning in high-stakes therapeutic decision-making,</a:t>
-            </a:r>
-          </a:p>
-          <a:p>
-            <a:r>
-              <a:t>demonstrating agent capabilities in complex medical domains with multi-factor</a:t>
-            </a:r>
-          </a:p>
-          <a:p>
-            <a:r>
-              <a:t>consideration.</a:t>
-            </a:r>
-          </a:p>
-          <a:p>
-            <a:pPr/>
-          </a:p>
-          <a:p>
-            <a:pPr/>
+          <p:cNvPr id="2" name="TextBox 1"/>
+          <p:cNvSpPr txBox="1"/>
+          <p:nvPr/>
+        </p:nvSpPr>
+        <p:spPr>
+          <a:xfrm>
+            <a:off x="457200" y="457200"/>
+            <a:ext cx="8229600" cy="685800"/>
+          </a:xfrm>
+          <a:prstGeom prst="rect">
+            <a:avLst/>
+          </a:prstGeom>
+          <a:noFill/>
+        </p:spPr>
+        <p:txBody>
+          <a:bodyPr wrap="none">
+            <a:spAutoFit/>
+          </a:bodyPr>
+          <a:lstStyle/>
+          <a:p>
+            <a:pPr>
+              <a:defRPr sz="3200" b="1"/>
+            </a:pPr>
+            <a:r>
+              <a:t>2. MedAI: Evaluating TxAgent's Therapeutic Agentic Reasoning in the NeurIPS...</a:t>
+            </a:r>
+          </a:p>
+        </p:txBody>
+      </p:sp>
+      <p:sp>
+        <p:nvSpPr>
+          <p:cNvPr id="3" name="TextBox 2"/>
+          <p:cNvSpPr txBox="1"/>
+          <p:nvPr/>
+        </p:nvSpPr>
+        <p:spPr>
+          <a:xfrm>
+            <a:off x="457200" y="1371600"/>
+            <a:ext cx="8229600" cy="685800"/>
+          </a:xfrm>
+          <a:prstGeom prst="rect">
+            <a:avLst/>
+          </a:prstGeom>
+          <a:noFill/>
+        </p:spPr>
+        <p:txBody>
+          <a:bodyPr wrap="none">
+            <a:spAutoFit/>
+          </a:bodyPr>
+          <a:lstStyle/>
+          <a:p>
+            <a:pPr>
+              <a:defRPr sz="1300">
+                <a:solidFill>
+                  <a:srgbClr val="333333"/>
+                </a:solidFill>
+              </a:defRPr>
+            </a:pPr>
+            <a:r>
+              <a:t>Introduces TxAgent, an agentic system specifically designed for therapeutic</a:t>
+            </a:r>
+          </a:p>
+        </p:txBody>
+      </p:sp>
+      <p:sp>
+        <p:nvSpPr>
+          <p:cNvPr id="4" name="TextBox 3"/>
+          <p:cNvSpPr txBox="1"/>
+          <p:nvPr/>
+        </p:nvSpPr>
+        <p:spPr>
+          <a:xfrm>
+            <a:off x="457200" y="2057400"/>
+            <a:ext cx="8229600" cy="685800"/>
+          </a:xfrm>
+          <a:prstGeom prst="rect">
+            <a:avLst/>
+          </a:prstGeom>
+          <a:noFill/>
+        </p:spPr>
+        <p:txBody>
+          <a:bodyPr wrap="none">
+            <a:spAutoFit/>
+          </a:bodyPr>
+          <a:lstStyle/>
+          <a:p>
+            <a:pPr>
+              <a:defRPr sz="1300">
+                <a:solidFill>
+                  <a:srgbClr val="333333"/>
+                </a:solidFill>
+              </a:defRPr>
+            </a:pPr>
+            <a:r>
+              <a:t>decision-making, representing a critical application of agentic reasoning in high-stakes</a:t>
+            </a:r>
+          </a:p>
+        </p:txBody>
+      </p:sp>
+      <p:sp>
+        <p:nvSpPr>
+          <p:cNvPr id="5" name="TextBox 4"/>
+          <p:cNvSpPr txBox="1"/>
+          <p:nvPr/>
+        </p:nvSpPr>
+        <p:spPr>
+          <a:xfrm>
+            <a:off x="457200" y="2743200"/>
+            <a:ext cx="8229600" cy="685800"/>
+          </a:xfrm>
+          <a:prstGeom prst="rect">
+            <a:avLst/>
+          </a:prstGeom>
+          <a:noFill/>
+        </p:spPr>
+        <p:txBody>
+          <a:bodyPr wrap="none">
+            <a:spAutoFit/>
+          </a:bodyPr>
+          <a:lstStyle/>
+          <a:p>
+            <a:pPr>
+              <a:defRPr sz="1300">
+                <a:solidFill>
+                  <a:srgbClr val="333333"/>
+                </a:solidFill>
+              </a:defRPr>
+            </a:pPr>
+            <a:r>
+              <a:t>medical domains.</a:t>
+            </a:r>
+          </a:p>
+        </p:txBody>
+      </p:sp>
+      <p:sp>
+        <p:nvSpPr>
+          <p:cNvPr id="6" name="TextBox 5"/>
+          <p:cNvSpPr txBox="1"/>
+          <p:nvPr/>
+        </p:nvSpPr>
+        <p:spPr>
+          <a:xfrm>
+            <a:off x="457200" y="3429000"/>
+            <a:ext cx="8229600" cy="685800"/>
+          </a:xfrm>
+          <a:prstGeom prst="rect">
+            <a:avLst/>
+          </a:prstGeom>
+          <a:noFill/>
+        </p:spPr>
+        <p:txBody>
+          <a:bodyPr wrap="none">
+            <a:spAutoFit/>
+          </a:bodyPr>
+          <a:lstStyle/>
+          <a:p>
+            <a:pPr>
+              <a:defRPr sz="1000"/>
+            </a:pPr>
+          </a:p>
+        </p:txBody>
+      </p:sp>
+      <p:sp>
+        <p:nvSpPr>
+          <p:cNvPr id="7" name="TextBox 6"/>
+          <p:cNvSpPr txBox="1"/>
+          <p:nvPr/>
+        </p:nvSpPr>
+        <p:spPr>
+          <a:xfrm>
+            <a:off x="457200" y="4114800"/>
+            <a:ext cx="8229600" cy="685800"/>
+          </a:xfrm>
+          <a:prstGeom prst="rect">
+            <a:avLst/>
+          </a:prstGeom>
+          <a:noFill/>
+        </p:spPr>
+        <p:txBody>
+          <a:bodyPr wrap="none">
+            <a:spAutoFit/>
+          </a:bodyPr>
+          <a:lstStyle/>
+          <a:p>
+            <a:pPr>
+              <a:defRPr sz="1000" i="1">
+                <a:solidFill>
+                  <a:srgbClr val="666666"/>
+                </a:solidFill>
+              </a:defRPr>
+            </a:pPr>
             <a:r>
               <a:t>Source: arXiv • Tim Cofala, Christian Kalfar, Jingge Xiao</a:t>
             </a:r>
           </a:p>
-          <a:p>
-            <a:pPr/>
-            <a:r>
-              <a:t>Link: https://arxiv.org/abs/2512.11682v1</a:t>
-            </a:r>
-          </a:p>
-        </p:txBody>
-      </p:sp>
-      <p:sp>
-        <p:nvSpPr>
-          <p:cNvPr id="4" name="TextBox 3"/>
+        </p:txBody>
+      </p:sp>
+      <p:sp>
+        <p:nvSpPr>
+          <p:cNvPr id="8" name="TextBox 7"/>
+          <p:cNvSpPr txBox="1"/>
+          <p:nvPr/>
+        </p:nvSpPr>
+        <p:spPr>
+          <a:xfrm>
+            <a:off x="457200" y="4800600"/>
+            <a:ext cx="8229600" cy="685800"/>
+          </a:xfrm>
+          <a:prstGeom prst="rect">
+            <a:avLst/>
+          </a:prstGeom>
+          <a:noFill/>
+        </p:spPr>
+        <p:txBody>
+          <a:bodyPr wrap="none">
+            <a:spAutoFit/>
+          </a:bodyPr>
+          <a:lstStyle/>
+          <a:p>
+            <a:pPr>
+              <a:defRPr sz="900">
+                <a:solidFill>
+                  <a:srgbClr val="3498DB"/>
+                </a:solidFill>
+              </a:defRPr>
+            </a:pPr>
+            <a:r>
+              <a:t>🔗 https://arxiv.org/abs/2512.11682v1</a:t>
+            </a:r>
+          </a:p>
+        </p:txBody>
+      </p:sp>
+      <p:sp>
+        <p:nvSpPr>
+          <p:cNvPr id="9" name="TextBox 8"/>
           <p:cNvSpPr txBox="1"/>
           <p:nvPr/>
         </p:nvSpPr>
@@ -5475,6 +8492,14 @@
 <file path=ppt/slides/slide6.xml><?xml version="1.0" encoding="utf-8"?>
 <p:sld xmlns:a="http://schemas.openxmlformats.org/drawingml/2006/main" xmlns:p="http://schemas.openxmlformats.org/presentationml/2006/main" xmlns:r="http://schemas.openxmlformats.org/officeDocument/2006/relationships">
   <p:cSld>
+    <p:bg>
+      <p:bgPr>
+        <a:solidFill>
+          <a:srgbClr val="F8F9FA"/>
+        </a:solidFill>
+        <a:effectLst/>
+      </p:bgPr>
+    </p:bg>
     <p:spTree>
       <p:nvGrpSpPr>
         <p:cNvPr id="1" name=""/>
@@ -5484,74 +8509,241 @@
       <p:grpSpPr/>
       <p:sp>
         <p:nvSpPr>
-          <p:cNvPr id="2" name="Title 1"/>
-          <p:cNvSpPr>
-            <a:spLocks noGrp="1"/>
-          </p:cNvSpPr>
-          <p:nvPr>
-            <p:ph type="title"/>
-          </p:nvPr>
-        </p:nvSpPr>
-        <p:spPr/>
-        <p:txBody>
-          <a:bodyPr/>
-          <a:lstStyle/>
-          <a:p>
-            <a:r>
-              <a:t>3. Bounding Hallucinations: Information-Theoretic Guarantees for RAG S...</a:t>
-            </a:r>
-          </a:p>
-        </p:txBody>
-      </p:sp>
-      <p:sp>
-        <p:nvSpPr>
-          <p:cNvPr id="3" name="Content Placeholder 2"/>
-          <p:cNvSpPr>
-            <a:spLocks noGrp="1"/>
-          </p:cNvSpPr>
-          <p:nvPr>
-            <p:ph idx="1"/>
-          </p:nvPr>
-        </p:nvSpPr>
-        <p:spPr/>
-        <p:txBody>
-          <a:bodyPr/>
-          <a:lstStyle/>
-          <a:p>
-            <a:r>
-              <a:t>Provides theoretical foundations for verifiable tool use in RAG systems,</a:t>
-            </a:r>
-          </a:p>
-          <a:p>
-            <a:r>
-              <a:t>transforming retrieval from heuristic to provable evidence with formal</a:t>
-            </a:r>
-          </a:p>
-          <a:p>
-            <a:r>
-              <a:t>guarantees against hallucination.</a:t>
-            </a:r>
-          </a:p>
-          <a:p>
-            <a:pPr/>
-          </a:p>
-          <a:p>
-            <a:pPr/>
+          <p:cNvPr id="2" name="TextBox 1"/>
+          <p:cNvSpPr txBox="1"/>
+          <p:nvPr/>
+        </p:nvSpPr>
+        <p:spPr>
+          <a:xfrm>
+            <a:off x="457200" y="457200"/>
+            <a:ext cx="8229600" cy="685800"/>
+          </a:xfrm>
+          <a:prstGeom prst="rect">
+            <a:avLst/>
+          </a:prstGeom>
+          <a:noFill/>
+        </p:spPr>
+        <p:txBody>
+          <a:bodyPr wrap="none">
+            <a:spAutoFit/>
+          </a:bodyPr>
+          <a:lstStyle/>
+          <a:p>
+            <a:pPr>
+              <a:defRPr sz="3200" b="1"/>
+            </a:pPr>
+            <a:r>
+              <a:t>3. Bounding Hallucinations: Information-Theoretic Guarantees for RAG System...</a:t>
+            </a:r>
+          </a:p>
+        </p:txBody>
+      </p:sp>
+      <p:sp>
+        <p:nvSpPr>
+          <p:cNvPr id="3" name="TextBox 2"/>
+          <p:cNvSpPr txBox="1"/>
+          <p:nvPr/>
+        </p:nvSpPr>
+        <p:spPr>
+          <a:xfrm>
+            <a:off x="457200" y="1371600"/>
+            <a:ext cx="8229600" cy="685800"/>
+          </a:xfrm>
+          <a:prstGeom prst="rect">
+            <a:avLst/>
+          </a:prstGeom>
+          <a:noFill/>
+        </p:spPr>
+        <p:txBody>
+          <a:bodyPr wrap="none">
+            <a:spAutoFit/>
+          </a:bodyPr>
+          <a:lstStyle/>
+          <a:p>
+            <a:pPr>
+              <a:defRPr sz="1300">
+                <a:solidFill>
+                  <a:srgbClr val="333333"/>
+                </a:solidFill>
+              </a:defRPr>
+            </a:pPr>
+            <a:r>
+              <a:t>Provides formal information-theoretic guarantees for RAG systems, transforming retrieval</a:t>
+            </a:r>
+          </a:p>
+        </p:txBody>
+      </p:sp>
+      <p:sp>
+        <p:nvSpPr>
+          <p:cNvPr id="4" name="TextBox 3"/>
+          <p:cNvSpPr txBox="1"/>
+          <p:nvPr/>
+        </p:nvSpPr>
+        <p:spPr>
+          <a:xfrm>
+            <a:off x="457200" y="2057400"/>
+            <a:ext cx="8229600" cy="685800"/>
+          </a:xfrm>
+          <a:prstGeom prst="rect">
+            <a:avLst/>
+          </a:prstGeom>
+          <a:noFill/>
+        </p:spPr>
+        <p:txBody>
+          <a:bodyPr wrap="none">
+            <a:spAutoFit/>
+          </a:bodyPr>
+          <a:lstStyle/>
+          <a:p>
+            <a:pPr>
+              <a:defRPr sz="1300">
+                <a:solidFill>
+                  <a:srgbClr val="333333"/>
+                </a:solidFill>
+              </a:defRPr>
+            </a:pPr>
+            <a:r>
+              <a:t>from a heuristic into verifiable evidence—critical for reliable agentic systems that must</a:t>
+            </a:r>
+          </a:p>
+        </p:txBody>
+      </p:sp>
+      <p:sp>
+        <p:nvSpPr>
+          <p:cNvPr id="5" name="TextBox 4"/>
+          <p:cNvSpPr txBox="1"/>
+          <p:nvPr/>
+        </p:nvSpPr>
+        <p:spPr>
+          <a:xfrm>
+            <a:off x="457200" y="2743200"/>
+            <a:ext cx="8229600" cy="685800"/>
+          </a:xfrm>
+          <a:prstGeom prst="rect">
+            <a:avLst/>
+          </a:prstGeom>
+          <a:noFill/>
+        </p:spPr>
+        <p:txBody>
+          <a:bodyPr wrap="none">
+            <a:spAutoFit/>
+          </a:bodyPr>
+          <a:lstStyle/>
+          <a:p>
+            <a:pPr>
+              <a:defRPr sz="1300">
+                <a:solidFill>
+                  <a:srgbClr val="333333"/>
+                </a:solidFill>
+              </a:defRPr>
+            </a:pPr>
+            <a:r>
+              <a:t>reason over retrieved information.</a:t>
+            </a:r>
+          </a:p>
+        </p:txBody>
+      </p:sp>
+      <p:sp>
+        <p:nvSpPr>
+          <p:cNvPr id="6" name="TextBox 5"/>
+          <p:cNvSpPr txBox="1"/>
+          <p:nvPr/>
+        </p:nvSpPr>
+        <p:spPr>
+          <a:xfrm>
+            <a:off x="457200" y="3429000"/>
+            <a:ext cx="8229600" cy="685800"/>
+          </a:xfrm>
+          <a:prstGeom prst="rect">
+            <a:avLst/>
+          </a:prstGeom>
+          <a:noFill/>
+        </p:spPr>
+        <p:txBody>
+          <a:bodyPr wrap="none">
+            <a:spAutoFit/>
+          </a:bodyPr>
+          <a:lstStyle/>
+          <a:p>
+            <a:pPr>
+              <a:defRPr sz="1000"/>
+            </a:pPr>
+          </a:p>
+        </p:txBody>
+      </p:sp>
+      <p:sp>
+        <p:nvSpPr>
+          <p:cNvPr id="7" name="TextBox 6"/>
+          <p:cNvSpPr txBox="1"/>
+          <p:nvPr/>
+        </p:nvSpPr>
+        <p:spPr>
+          <a:xfrm>
+            <a:off x="457200" y="4114800"/>
+            <a:ext cx="8229600" cy="685800"/>
+          </a:xfrm>
+          <a:prstGeom prst="rect">
+            <a:avLst/>
+          </a:prstGeom>
+          <a:noFill/>
+        </p:spPr>
+        <p:txBody>
+          <a:bodyPr wrap="none">
+            <a:spAutoFit/>
+          </a:bodyPr>
+          <a:lstStyle/>
+          <a:p>
+            <a:pPr>
+              <a:defRPr sz="1000" i="1">
+                <a:solidFill>
+                  <a:srgbClr val="666666"/>
+                </a:solidFill>
+              </a:defRPr>
+            </a:pPr>
             <a:r>
               <a:t>Source: arXiv • Björn Deiseroth, Max Henning Höth, Kristian Kersting</a:t>
             </a:r>
           </a:p>
-          <a:p>
-            <a:pPr/>
-            <a:r>
-              <a:t>Link: https://arxiv.org/abs/2512.11614v1</a:t>
-            </a:r>
-          </a:p>
-        </p:txBody>
-      </p:sp>
-      <p:sp>
-        <p:nvSpPr>
-          <p:cNvPr id="4" name="TextBox 3"/>
+        </p:txBody>
+      </p:sp>
+      <p:sp>
+        <p:nvSpPr>
+          <p:cNvPr id="8" name="TextBox 7"/>
+          <p:cNvSpPr txBox="1"/>
+          <p:nvPr/>
+        </p:nvSpPr>
+        <p:spPr>
+          <a:xfrm>
+            <a:off x="457200" y="4800600"/>
+            <a:ext cx="8229600" cy="685800"/>
+          </a:xfrm>
+          <a:prstGeom prst="rect">
+            <a:avLst/>
+          </a:prstGeom>
+          <a:noFill/>
+        </p:spPr>
+        <p:txBody>
+          <a:bodyPr wrap="none">
+            <a:spAutoFit/>
+          </a:bodyPr>
+          <a:lstStyle/>
+          <a:p>
+            <a:pPr>
+              <a:defRPr sz="900">
+                <a:solidFill>
+                  <a:srgbClr val="3498DB"/>
+                </a:solidFill>
+              </a:defRPr>
+            </a:pPr>
+            <a:r>
+              <a:t>🔗 https://arxiv.org/abs/2512.11614v1</a:t>
+            </a:r>
+          </a:p>
+        </p:txBody>
+      </p:sp>
+      <p:sp>
+        <p:nvSpPr>
+          <p:cNvPr id="9" name="TextBox 8"/>
           <p:cNvSpPr txBox="1"/>
           <p:nvPr/>
         </p:nvSpPr>
@@ -5591,6 +8783,14 @@
 <file path=ppt/slides/slide7.xml><?xml version="1.0" encoding="utf-8"?>
 <p:sld xmlns:a="http://schemas.openxmlformats.org/drawingml/2006/main" xmlns:p="http://schemas.openxmlformats.org/presentationml/2006/main" xmlns:r="http://schemas.openxmlformats.org/officeDocument/2006/relationships">
   <p:cSld>
+    <p:bg>
+      <p:bgPr>
+        <a:solidFill>
+          <a:srgbClr val="F8F9FA"/>
+        </a:solidFill>
+        <a:effectLst/>
+      </p:bgPr>
+    </p:bg>
     <p:spTree>
       <p:nvGrpSpPr>
         <p:cNvPr id="1" name=""/>
@@ -5600,74 +8800,206 @@
       <p:grpSpPr/>
       <p:sp>
         <p:nvSpPr>
-          <p:cNvPr id="2" name="Title 1"/>
-          <p:cNvSpPr>
-            <a:spLocks noGrp="1"/>
-          </p:cNvSpPr>
-          <p:nvPr>
-            <p:ph type="title"/>
-          </p:nvPr>
-        </p:nvSpPr>
-        <p:spPr/>
-        <p:txBody>
-          <a:bodyPr/>
-          <a:lstStyle/>
-          <a:p>
-            <a:r>
-              <a:t>4. LUCID: Learning-Enabled Uncertainty-Aware Certification of Stochast...</a:t>
-            </a:r>
-          </a:p>
-        </p:txBody>
-      </p:sp>
-      <p:sp>
-        <p:nvSpPr>
-          <p:cNvPr id="3" name="Content Placeholder 2"/>
-          <p:cNvSpPr>
-            <a:spLocks noGrp="1"/>
-          </p:cNvSpPr>
-          <p:nvPr>
-            <p:ph idx="1"/>
-          </p:nvPr>
-        </p:nvSpPr>
-        <p:spPr/>
-        <p:txBody>
-          <a:bodyPr/>
-          <a:lstStyle/>
-          <a:p>
-            <a:r>
-              <a:t>Advances formal verification for autonomous systems by combining learning with</a:t>
-            </a:r>
-          </a:p>
-          <a:p>
-            <a:r>
-              <a:t>uncertainty quantification, critical for safe deployment of AI agents in</a:t>
-            </a:r>
-          </a:p>
-          <a:p>
-            <a:r>
-              <a:t>safety-critical domains.</a:t>
-            </a:r>
-          </a:p>
-          <a:p>
-            <a:pPr/>
-          </a:p>
-          <a:p>
-            <a:pPr/>
+          <p:cNvPr id="2" name="TextBox 1"/>
+          <p:cNvSpPr txBox="1"/>
+          <p:nvPr/>
+        </p:nvSpPr>
+        <p:spPr>
+          <a:xfrm>
+            <a:off x="457200" y="457200"/>
+            <a:ext cx="8229600" cy="685800"/>
+          </a:xfrm>
+          <a:prstGeom prst="rect">
+            <a:avLst/>
+          </a:prstGeom>
+          <a:noFill/>
+        </p:spPr>
+        <p:txBody>
+          <a:bodyPr wrap="none">
+            <a:spAutoFit/>
+          </a:bodyPr>
+          <a:lstStyle/>
+          <a:p>
+            <a:pPr>
+              <a:defRPr sz="3200" b="1"/>
+            </a:pPr>
+            <a:r>
+              <a:t>4. LUCID: Learning-Enabled Uncertainty-Aware Certification of Stochastic Dy...</a:t>
+            </a:r>
+          </a:p>
+        </p:txBody>
+      </p:sp>
+      <p:sp>
+        <p:nvSpPr>
+          <p:cNvPr id="3" name="TextBox 2"/>
+          <p:cNvSpPr txBox="1"/>
+          <p:nvPr/>
+        </p:nvSpPr>
+        <p:spPr>
+          <a:xfrm>
+            <a:off x="457200" y="1371600"/>
+            <a:ext cx="8229600" cy="685800"/>
+          </a:xfrm>
+          <a:prstGeom prst="rect">
+            <a:avLst/>
+          </a:prstGeom>
+          <a:noFill/>
+        </p:spPr>
+        <p:txBody>
+          <a:bodyPr wrap="none">
+            <a:spAutoFit/>
+          </a:bodyPr>
+          <a:lstStyle/>
+          <a:p>
+            <a:pPr>
+              <a:defRPr sz="1300">
+                <a:solidFill>
+                  <a:srgbClr val="333333"/>
+                </a:solidFill>
+              </a:defRPr>
+            </a:pPr>
+            <a:r>
+              <a:t>Addresses the critical safety certification challenge for AI-enabled autonomous systems by</a:t>
+            </a:r>
+          </a:p>
+        </p:txBody>
+      </p:sp>
+      <p:sp>
+        <p:nvSpPr>
+          <p:cNvPr id="4" name="TextBox 3"/>
+          <p:cNvSpPr txBox="1"/>
+          <p:nvPr/>
+        </p:nvSpPr>
+        <p:spPr>
+          <a:xfrm>
+            <a:off x="457200" y="2057400"/>
+            <a:ext cx="8229600" cy="685800"/>
+          </a:xfrm>
+          <a:prstGeom prst="rect">
+            <a:avLst/>
+          </a:prstGeom>
+          <a:noFill/>
+        </p:spPr>
+        <p:txBody>
+          <a:bodyPr wrap="none">
+            <a:spAutoFit/>
+          </a:bodyPr>
+          <a:lstStyle/>
+          <a:p>
+            <a:pPr>
+              <a:defRPr sz="1300">
+                <a:solidFill>
+                  <a:srgbClr val="333333"/>
+                </a:solidFill>
+              </a:defRPr>
+            </a:pPr>
+            <a:r>
+              <a:t>combining learning with formal verification for stochastic environments.</a:t>
+            </a:r>
+          </a:p>
+        </p:txBody>
+      </p:sp>
+      <p:sp>
+        <p:nvSpPr>
+          <p:cNvPr id="5" name="TextBox 4"/>
+          <p:cNvSpPr txBox="1"/>
+          <p:nvPr/>
+        </p:nvSpPr>
+        <p:spPr>
+          <a:xfrm>
+            <a:off x="457200" y="2743200"/>
+            <a:ext cx="8229600" cy="685800"/>
+          </a:xfrm>
+          <a:prstGeom prst="rect">
+            <a:avLst/>
+          </a:prstGeom>
+          <a:noFill/>
+        </p:spPr>
+        <p:txBody>
+          <a:bodyPr wrap="none">
+            <a:spAutoFit/>
+          </a:bodyPr>
+          <a:lstStyle/>
+          <a:p>
+            <a:pPr>
+              <a:defRPr sz="1000"/>
+            </a:pPr>
+          </a:p>
+        </p:txBody>
+      </p:sp>
+      <p:sp>
+        <p:nvSpPr>
+          <p:cNvPr id="6" name="TextBox 5"/>
+          <p:cNvSpPr txBox="1"/>
+          <p:nvPr/>
+        </p:nvSpPr>
+        <p:spPr>
+          <a:xfrm>
+            <a:off x="457200" y="3429000"/>
+            <a:ext cx="8229600" cy="685800"/>
+          </a:xfrm>
+          <a:prstGeom prst="rect">
+            <a:avLst/>
+          </a:prstGeom>
+          <a:noFill/>
+        </p:spPr>
+        <p:txBody>
+          <a:bodyPr wrap="none">
+            <a:spAutoFit/>
+          </a:bodyPr>
+          <a:lstStyle/>
+          <a:p>
+            <a:pPr>
+              <a:defRPr sz="1000" i="1">
+                <a:solidFill>
+                  <a:srgbClr val="666666"/>
+                </a:solidFill>
+              </a:defRPr>
+            </a:pPr>
             <a:r>
               <a:t>Source: arXiv • Ernesto Casablanca, Oliver Schön, Paolo Zuliani</a:t>
             </a:r>
           </a:p>
-          <a:p>
-            <a:pPr/>
-            <a:r>
-              <a:t>Link: https://arxiv.org/abs/2512.11750v1</a:t>
-            </a:r>
-          </a:p>
-        </p:txBody>
-      </p:sp>
-      <p:sp>
-        <p:nvSpPr>
-          <p:cNvPr id="4" name="TextBox 3"/>
+        </p:txBody>
+      </p:sp>
+      <p:sp>
+        <p:nvSpPr>
+          <p:cNvPr id="7" name="TextBox 6"/>
+          <p:cNvSpPr txBox="1"/>
+          <p:nvPr/>
+        </p:nvSpPr>
+        <p:spPr>
+          <a:xfrm>
+            <a:off x="457200" y="4114800"/>
+            <a:ext cx="8229600" cy="685800"/>
+          </a:xfrm>
+          <a:prstGeom prst="rect">
+            <a:avLst/>
+          </a:prstGeom>
+          <a:noFill/>
+        </p:spPr>
+        <p:txBody>
+          <a:bodyPr wrap="none">
+            <a:spAutoFit/>
+          </a:bodyPr>
+          <a:lstStyle/>
+          <a:p>
+            <a:pPr>
+              <a:defRPr sz="900">
+                <a:solidFill>
+                  <a:srgbClr val="3498DB"/>
+                </a:solidFill>
+              </a:defRPr>
+            </a:pPr>
+            <a:r>
+              <a:t>🔗 https://arxiv.org/abs/2512.11750v1</a:t>
+            </a:r>
+          </a:p>
+        </p:txBody>
+      </p:sp>
+      <p:sp>
+        <p:nvSpPr>
+          <p:cNvPr id="8" name="TextBox 7"/>
           <p:cNvSpPr txBox="1"/>
           <p:nvPr/>
         </p:nvSpPr>
@@ -5707,6 +9039,14 @@
 <file path=ppt/slides/slide8.xml><?xml version="1.0" encoding="utf-8"?>
 <p:sld xmlns:a="http://schemas.openxmlformats.org/drawingml/2006/main" xmlns:p="http://schemas.openxmlformats.org/presentationml/2006/main" xmlns:r="http://schemas.openxmlformats.org/officeDocument/2006/relationships">
   <p:cSld>
+    <p:bg>
+      <p:bgPr>
+        <a:solidFill>
+          <a:srgbClr val="F8F9FA"/>
+        </a:solidFill>
+        <a:effectLst/>
+      </p:bgPr>
+    </p:bg>
     <p:spTree>
       <p:nvGrpSpPr>
         <p:cNvPr id="1" name=""/>
@@ -5716,69 +9056,241 @@
       <p:grpSpPr/>
       <p:sp>
         <p:nvSpPr>
-          <p:cNvPr id="2" name="Title 1"/>
-          <p:cNvSpPr>
-            <a:spLocks noGrp="1"/>
-          </p:cNvSpPr>
-          <p:nvPr>
-            <p:ph type="title"/>
-          </p:nvPr>
-        </p:nvSpPr>
-        <p:spPr/>
-        <p:txBody>
-          <a:bodyPr/>
-          <a:lstStyle/>
-          <a:p>
-            <a:r>
-              <a:t>5. High-Dimensional Surrogate Modeling for Closed-Loop Learning of Neu...</a:t>
-            </a:r>
-          </a:p>
-        </p:txBody>
-      </p:sp>
-      <p:sp>
-        <p:nvSpPr>
-          <p:cNvPr id="3" name="Content Placeholder 2"/>
-          <p:cNvSpPr>
-            <a:spLocks noGrp="1"/>
-          </p:cNvSpPr>
-          <p:nvPr>
-            <p:ph idx="1"/>
-          </p:nvPr>
-        </p:nvSpPr>
-        <p:spPr/>
-        <p:txBody>
-          <a:bodyPr/>
-          <a:lstStyle/>
-          <a:p>
-            <a:r>
-              <a:t>Enables sample-efficient learning for autonomous agents using model predictive</a:t>
-            </a:r>
-          </a:p>
-          <a:p>
-            <a:r>
-              <a:t>control with neural networks, improving closed-loop planning from limited data.</a:t>
-            </a:r>
-          </a:p>
-          <a:p>
-            <a:pPr/>
-          </a:p>
-          <a:p>
-            <a:pPr/>
+          <p:cNvPr id="2" name="TextBox 1"/>
+          <p:cNvSpPr txBox="1"/>
+          <p:nvPr/>
+        </p:nvSpPr>
+        <p:spPr>
+          <a:xfrm>
+            <a:off x="457200" y="457200"/>
+            <a:ext cx="8229600" cy="685800"/>
+          </a:xfrm>
+          <a:prstGeom prst="rect">
+            <a:avLst/>
+          </a:prstGeom>
+          <a:noFill/>
+        </p:spPr>
+        <p:txBody>
+          <a:bodyPr wrap="none">
+            <a:spAutoFit/>
+          </a:bodyPr>
+          <a:lstStyle/>
+          <a:p>
+            <a:pPr>
+              <a:defRPr sz="3200" b="1"/>
+            </a:pPr>
+            <a:r>
+              <a:t>5. High-Dimensional Surrogate Modeling for Closed-Loop Learning of Neural-N...</a:t>
+            </a:r>
+          </a:p>
+        </p:txBody>
+      </p:sp>
+      <p:sp>
+        <p:nvSpPr>
+          <p:cNvPr id="3" name="TextBox 2"/>
+          <p:cNvSpPr txBox="1"/>
+          <p:nvPr/>
+        </p:nvSpPr>
+        <p:spPr>
+          <a:xfrm>
+            <a:off x="457200" y="1371600"/>
+            <a:ext cx="8229600" cy="685800"/>
+          </a:xfrm>
+          <a:prstGeom prst="rect">
+            <a:avLst/>
+          </a:prstGeom>
+          <a:noFill/>
+        </p:spPr>
+        <p:txBody>
+          <a:bodyPr wrap="none">
+            <a:spAutoFit/>
+          </a:bodyPr>
+          <a:lstStyle/>
+          <a:p>
+            <a:pPr>
+              <a:defRPr sz="1300">
+                <a:solidFill>
+                  <a:srgbClr val="333333"/>
+                </a:solidFill>
+              </a:defRPr>
+            </a:pPr>
+            <a:r>
+              <a:t>Enables efficient learning of neural network controller parameters from closed-loop data,</a:t>
+            </a:r>
+          </a:p>
+        </p:txBody>
+      </p:sp>
+      <p:sp>
+        <p:nvSpPr>
+          <p:cNvPr id="4" name="TextBox 3"/>
+          <p:cNvSpPr txBox="1"/>
+          <p:nvPr/>
+        </p:nvSpPr>
+        <p:spPr>
+          <a:xfrm>
+            <a:off x="457200" y="2057400"/>
+            <a:ext cx="8229600" cy="685800"/>
+          </a:xfrm>
+          <a:prstGeom prst="rect">
+            <a:avLst/>
+          </a:prstGeom>
+          <a:noFill/>
+        </p:spPr>
+        <p:txBody>
+          <a:bodyPr wrap="none">
+            <a:spAutoFit/>
+          </a:bodyPr>
+          <a:lstStyle/>
+          <a:p>
+            <a:pPr>
+              <a:defRPr sz="1300">
+                <a:solidFill>
+                  <a:srgbClr val="333333"/>
+                </a:solidFill>
+              </a:defRPr>
+            </a:pPr>
+            <a:r>
+              <a:t>advancing autonomous system adaptation through Bayesian optimization of high-dimensional</a:t>
+            </a:r>
+          </a:p>
+        </p:txBody>
+      </p:sp>
+      <p:sp>
+        <p:nvSpPr>
+          <p:cNvPr id="5" name="TextBox 4"/>
+          <p:cNvSpPr txBox="1"/>
+          <p:nvPr/>
+        </p:nvSpPr>
+        <p:spPr>
+          <a:xfrm>
+            <a:off x="457200" y="2743200"/>
+            <a:ext cx="8229600" cy="685800"/>
+          </a:xfrm>
+          <a:prstGeom prst="rect">
+            <a:avLst/>
+          </a:prstGeom>
+          <a:noFill/>
+        </p:spPr>
+        <p:txBody>
+          <a:bodyPr wrap="none">
+            <a:spAutoFit/>
+          </a:bodyPr>
+          <a:lstStyle/>
+          <a:p>
+            <a:pPr>
+              <a:defRPr sz="1300">
+                <a:solidFill>
+                  <a:srgbClr val="333333"/>
+                </a:solidFill>
+              </a:defRPr>
+            </a:pPr>
+            <a:r>
+              <a:t>control policies.</a:t>
+            </a:r>
+          </a:p>
+        </p:txBody>
+      </p:sp>
+      <p:sp>
+        <p:nvSpPr>
+          <p:cNvPr id="6" name="TextBox 5"/>
+          <p:cNvSpPr txBox="1"/>
+          <p:nvPr/>
+        </p:nvSpPr>
+        <p:spPr>
+          <a:xfrm>
+            <a:off x="457200" y="3429000"/>
+            <a:ext cx="8229600" cy="685800"/>
+          </a:xfrm>
+          <a:prstGeom prst="rect">
+            <a:avLst/>
+          </a:prstGeom>
+          <a:noFill/>
+        </p:spPr>
+        <p:txBody>
+          <a:bodyPr wrap="none">
+            <a:spAutoFit/>
+          </a:bodyPr>
+          <a:lstStyle/>
+          <a:p>
+            <a:pPr>
+              <a:defRPr sz="1000"/>
+            </a:pPr>
+          </a:p>
+        </p:txBody>
+      </p:sp>
+      <p:sp>
+        <p:nvSpPr>
+          <p:cNvPr id="7" name="TextBox 6"/>
+          <p:cNvSpPr txBox="1"/>
+          <p:nvPr/>
+        </p:nvSpPr>
+        <p:spPr>
+          <a:xfrm>
+            <a:off x="457200" y="4114800"/>
+            <a:ext cx="8229600" cy="685800"/>
+          </a:xfrm>
+          <a:prstGeom prst="rect">
+            <a:avLst/>
+          </a:prstGeom>
+          <a:noFill/>
+        </p:spPr>
+        <p:txBody>
+          <a:bodyPr wrap="none">
+            <a:spAutoFit/>
+          </a:bodyPr>
+          <a:lstStyle/>
+          <a:p>
+            <a:pPr>
+              <a:defRPr sz="1000" i="1">
+                <a:solidFill>
+                  <a:srgbClr val="666666"/>
+                </a:solidFill>
+              </a:defRPr>
+            </a:pPr>
             <a:r>
               <a:t>Source: arXiv • Sebastian Hirt, Valentinus Suwanto, Hendrik Alsmeier</a:t>
             </a:r>
           </a:p>
-          <a:p>
-            <a:pPr/>
-            <a:r>
-              <a:t>Link: https://arxiv.org/abs/2512.11705v1</a:t>
-            </a:r>
-          </a:p>
-        </p:txBody>
-      </p:sp>
-      <p:sp>
-        <p:nvSpPr>
-          <p:cNvPr id="4" name="TextBox 3"/>
+        </p:txBody>
+      </p:sp>
+      <p:sp>
+        <p:nvSpPr>
+          <p:cNvPr id="8" name="TextBox 7"/>
+          <p:cNvSpPr txBox="1"/>
+          <p:nvPr/>
+        </p:nvSpPr>
+        <p:spPr>
+          <a:xfrm>
+            <a:off x="457200" y="4800600"/>
+            <a:ext cx="8229600" cy="685800"/>
+          </a:xfrm>
+          <a:prstGeom prst="rect">
+            <a:avLst/>
+          </a:prstGeom>
+          <a:noFill/>
+        </p:spPr>
+        <p:txBody>
+          <a:bodyPr wrap="none">
+            <a:spAutoFit/>
+          </a:bodyPr>
+          <a:lstStyle/>
+          <a:p>
+            <a:pPr>
+              <a:defRPr sz="900">
+                <a:solidFill>
+                  <a:srgbClr val="3498DB"/>
+                </a:solidFill>
+              </a:defRPr>
+            </a:pPr>
+            <a:r>
+              <a:t>🔗 https://arxiv.org/abs/2512.11705v1</a:t>
+            </a:r>
+          </a:p>
+        </p:txBody>
+      </p:sp>
+      <p:sp>
+        <p:nvSpPr>
+          <p:cNvPr id="9" name="TextBox 8"/>
           <p:cNvSpPr txBox="1"/>
           <p:nvPr/>
         </p:nvSpPr>
@@ -5818,6 +9330,14 @@
 <file path=ppt/slides/slide9.xml><?xml version="1.0" encoding="utf-8"?>
 <p:sld xmlns:a="http://schemas.openxmlformats.org/drawingml/2006/main" xmlns:p="http://schemas.openxmlformats.org/presentationml/2006/main" xmlns:r="http://schemas.openxmlformats.org/officeDocument/2006/relationships">
   <p:cSld>
+    <p:bg>
+      <p:bgPr>
+        <a:solidFill>
+          <a:srgbClr val="3498DB"/>
+        </a:solidFill>
+        <a:effectLst/>
+      </p:bgPr>
+    </p:bg>
     <p:spTree>
       <p:nvGrpSpPr>
         <p:cNvPr id="1" name=""/>
@@ -5827,19 +9347,29 @@
       <p:grpSpPr/>
       <p:sp>
         <p:nvSpPr>
-          <p:cNvPr id="2" name="Title 1"/>
-          <p:cNvSpPr>
-            <a:spLocks noGrp="1"/>
-          </p:cNvSpPr>
-          <p:nvPr>
-            <p:ph type="title"/>
-          </p:nvPr>
-        </p:nvSpPr>
-        <p:spPr/>
-        <p:txBody>
-          <a:bodyPr/>
-          <a:lstStyle/>
-          <a:p>
+          <p:cNvPr id="2" name="TextBox 1"/>
+          <p:cNvSpPr txBox="1"/>
+          <p:nvPr/>
+        </p:nvSpPr>
+        <p:spPr>
+          <a:xfrm>
+            <a:off x="457200" y="457200"/>
+            <a:ext cx="8229600" cy="685800"/>
+          </a:xfrm>
+          <a:prstGeom prst="rect">
+            <a:avLst/>
+          </a:prstGeom>
+          <a:noFill/>
+        </p:spPr>
+        <p:txBody>
+          <a:bodyPr wrap="none">
+            <a:spAutoFit/>
+          </a:bodyPr>
+          <a:lstStyle/>
+          <a:p>
+            <a:pPr>
+              <a:defRPr sz="3200" b="1"/>
+            </a:pPr>
             <a:r>
               <a:t>Industry Updates</a:t>
             </a:r>
@@ -5848,28 +9378,96 @@
       </p:sp>
       <p:sp>
         <p:nvSpPr>
-          <p:cNvPr id="3" name="Content Placeholder 2"/>
-          <p:cNvSpPr>
-            <a:spLocks noGrp="1"/>
-          </p:cNvSpPr>
-          <p:nvPr>
-            <p:ph idx="1"/>
-          </p:nvPr>
-        </p:nvSpPr>
-        <p:spPr/>
-        <p:txBody>
-          <a:bodyPr/>
-          <a:lstStyle/>
-          <a:p>
+          <p:cNvPr id="3" name="TextBox 2"/>
+          <p:cNvSpPr txBox="1"/>
+          <p:nvPr/>
+        </p:nvSpPr>
+        <p:spPr>
+          <a:xfrm>
+            <a:off x="457200" y="1371600"/>
+            <a:ext cx="8229600" cy="685800"/>
+          </a:xfrm>
+          <a:prstGeom prst="rect">
+            <a:avLst/>
+          </a:prstGeom>
+          <a:noFill/>
+        </p:spPr>
+        <p:txBody>
+          <a:bodyPr wrap="none">
+            <a:spAutoFit/>
+          </a:bodyPr>
+          <a:lstStyle/>
+          <a:p>
+            <a:pPr>
+              <a:defRPr sz="2000" b="1">
+                <a:solidFill>
+                  <a:srgbClr val="FFFFFF"/>
+                </a:solidFill>
+              </a:defRPr>
+            </a:pPr>
             <a:r>
               <a:t>5 key updates</a:t>
             </a:r>
           </a:p>
-          <a:p>
-            <a:pPr/>
-          </a:p>
-          <a:p>
-            <a:pPr/>
+        </p:txBody>
+      </p:sp>
+      <p:sp>
+        <p:nvSpPr>
+          <p:cNvPr id="4" name="TextBox 3"/>
+          <p:cNvSpPr txBox="1"/>
+          <p:nvPr/>
+        </p:nvSpPr>
+        <p:spPr>
+          <a:xfrm>
+            <a:off x="457200" y="2057400"/>
+            <a:ext cx="8229600" cy="685800"/>
+          </a:xfrm>
+          <a:prstGeom prst="rect">
+            <a:avLst/>
+          </a:prstGeom>
+          <a:noFill/>
+        </p:spPr>
+        <p:txBody>
+          <a:bodyPr wrap="none">
+            <a:spAutoFit/>
+          </a:bodyPr>
+          <a:lstStyle/>
+          <a:p>
+            <a:pPr>
+              <a:defRPr sz="1200"/>
+            </a:pPr>
+          </a:p>
+        </p:txBody>
+      </p:sp>
+      <p:sp>
+        <p:nvSpPr>
+          <p:cNvPr id="5" name="TextBox 4"/>
+          <p:cNvSpPr txBox="1"/>
+          <p:nvPr/>
+        </p:nvSpPr>
+        <p:spPr>
+          <a:xfrm>
+            <a:off x="457200" y="2743200"/>
+            <a:ext cx="8229600" cy="685800"/>
+          </a:xfrm>
+          <a:prstGeom prst="rect">
+            <a:avLst/>
+          </a:prstGeom>
+          <a:noFill/>
+        </p:spPr>
+        <p:txBody>
+          <a:bodyPr wrap="none">
+            <a:spAutoFit/>
+          </a:bodyPr>
+          <a:lstStyle/>
+          <a:p>
+            <a:pPr>
+              <a:defRPr sz="1600" i="1">
+                <a:solidFill>
+                  <a:srgbClr val="FFFFFF"/>
+                </a:solidFill>
+              </a:defRPr>
+            </a:pPr>
             <a:r>
               <a:t>Swipe to explore →</a:t>
             </a:r>
@@ -5878,7 +9476,7 @@
       </p:sp>
       <p:sp>
         <p:nvSpPr>
-          <p:cNvPr id="4" name="TextBox 3"/>
+          <p:cNvPr id="6" name="TextBox 5"/>
           <p:cNvSpPr txBox="1"/>
           <p:nvPr/>
         </p:nvSpPr>

--- a/AI_Weekly_2025-12-15.pptx
+++ b/AI_Weekly_2025-12-15.pptx
@@ -30,6 +30,8 @@
     <p:sldId id="278" r:id="rId29"/>
     <p:sldId id="279" r:id="rId30"/>
     <p:sldId id="280" r:id="rId31"/>
+    <p:sldId id="281" r:id="rId32"/>
+    <p:sldId id="282" r:id="rId33"/>
   </p:sldIdLst>
   <p:sldSz cx="9144000" cy="6858000" type="screen4x3"/>
   <p:notesSz cx="6858000" cy="9144000"/>
@@ -129,6 +131,125 @@
     </a:lvl9pPr>
   </p:defaultTextStyle>
 </p:presentation>
+</file>
+
+<file path=ppt/charts/chart1.xml><?xml version="1.0" encoding="utf-8"?>
+<c:chartSpace xmlns:c="http://schemas.openxmlformats.org/drawingml/2006/chart" xmlns:a="http://schemas.openxmlformats.org/drawingml/2006/main" xmlns:r="http://schemas.openxmlformats.org/officeDocument/2006/relationships">
+  <c:date1904 val="0"/>
+  <c:chart>
+    <c:autoTitleDeleted val="0"/>
+    <c:plotArea>
+      <c:barChart>
+        <c:barDir val="col"/>
+        <c:grouping val="clustered"/>
+        <c:ser>
+          <c:idx val="0"/>
+          <c:order val="0"/>
+          <c:tx>
+            <c:strRef>
+              <c:f>Sheet1!$B$1</c:f>
+              <c:strCache>
+                <c:ptCount val="1"/>
+                <c:pt idx="0">
+                  <c:v>Items</c:v>
+                </c:pt>
+              </c:strCache>
+            </c:strRef>
+          </c:tx>
+          <c:cat>
+            <c:strRef>
+              <c:f>Sheet1!$A$2:$A$5</c:f>
+              <c:strCache>
+                <c:ptCount val="4"/>
+                <c:pt idx="0">
+                  <c:v>Key Research Papers</c:v>
+                </c:pt>
+                <c:pt idx="1">
+                  <c:v>Industry Updates</c:v>
+                </c:pt>
+                <c:pt idx="2">
+                  <c:v>Tools &amp; Frameworks</c:v>
+                </c:pt>
+                <c:pt idx="3">
+                  <c:v>Notable Discussions</c:v>
+                </c:pt>
+              </c:strCache>
+            </c:strRef>
+          </c:cat>
+          <c:val>
+            <c:numRef>
+              <c:f>Sheet1!$B$2:$B$5</c:f>
+              <c:numCache>
+                <c:formatCode>General</c:formatCode>
+                <c:ptCount val="4"/>
+                <c:pt idx="0">
+                  <c:v>5</c:v>
+                </c:pt>
+                <c:pt idx="1">
+                  <c:v>5</c:v>
+                </c:pt>
+                <c:pt idx="2">
+                  <c:v>4</c:v>
+                </c:pt>
+                <c:pt idx="3">
+                  <c:v>4</c:v>
+                </c:pt>
+              </c:numCache>
+            </c:numRef>
+          </c:val>
+        </c:ser>
+        <c:axId val="-2068027336"/>
+        <c:axId val="-2113994440"/>
+      </c:barChart>
+      <c:catAx>
+        <c:axId val="-2068027336"/>
+        <c:scaling>
+          <c:orientation val="minMax"/>
+        </c:scaling>
+        <c:delete val="0"/>
+        <c:axPos val="b"/>
+        <c:majorTickMark val="out"/>
+        <c:minorTickMark val="none"/>
+        <c:tickLblPos val="nextTo"/>
+        <c:crossAx val="-2113994440"/>
+        <c:crosses val="autoZero"/>
+        <c:auto val="1"/>
+        <c:lblAlgn val="ctr"/>
+        <c:lblOffset val="100"/>
+        <c:noMultiLvlLbl val="0"/>
+      </c:catAx>
+      <c:valAx>
+        <c:axId val="-2113994440"/>
+        <c:scaling/>
+        <c:delete val="0"/>
+        <c:axPos val="l"/>
+        <c:majorGridlines/>
+        <c:majorTickMark val="out"/>
+        <c:minorTickMark val="none"/>
+        <c:tickLblPos val="nextTo"/>
+        <c:crossAx val="-2068027336"/>
+        <c:crosses val="autoZero"/>
+      </c:valAx>
+    </c:plotArea>
+    <c:legend>
+      <c:legendPos/>
+    </c:legend>
+    <c:dispBlanksAs val="gap"/>
+  </c:chart>
+  <c:txPr>
+    <a:bodyPr/>
+    <a:lstStyle/>
+    <a:p>
+      <a:pPr>
+        <a:defRPr sz="1800"/>
+      </a:pPr>
+      <a:endParaRPr lang="en-US"/>
+    </a:p>
+  </c:txPr>
+  <c:externalData r:id="rId1">
+    <c:autoUpdate val="0"/>
+  </c:externalData>
+</c:chartSpace>
 </file>
 
 <file path=ppt/slideLayouts/slideLayout1.xml><?xml version="1.0" encoding="utf-8"?>
@@ -3105,14 +3226,6 @@
 <file path=ppt/slides/slide1.xml><?xml version="1.0" encoding="utf-8"?>
 <p:sld xmlns:a="http://schemas.openxmlformats.org/drawingml/2006/main" xmlns:p="http://schemas.openxmlformats.org/presentationml/2006/main" xmlns:r="http://schemas.openxmlformats.org/officeDocument/2006/relationships">
   <p:cSld>
-    <p:bg>
-      <p:bgPr>
-        <a:solidFill>
-          <a:srgbClr val="667EEA"/>
-        </a:solidFill>
-        <a:effectLst/>
-      </p:bgPr>
-    </p:bg>
     <p:spTree>
       <p:nvGrpSpPr>
         <p:cNvPr id="1" name=""/>
@@ -3164,7 +3277,87 @@
       </p:sp>
       <p:sp>
         <p:nvSpPr>
-          <p:cNvPr id="4" name="TextBox 3"/>
+          <p:cNvPr id="4" name="Rectangle 3"/>
+          <p:cNvSpPr/>
+          <p:nvPr/>
+        </p:nvSpPr>
+        <p:spPr>
+          <a:xfrm>
+            <a:off x="457200" y="914400"/>
+            <a:ext cx="1371600" cy="274320"/>
+          </a:xfrm>
+          <a:prstGeom prst="rect">
+            <a:avLst/>
+          </a:prstGeom>
+          <a:solidFill>
+            <a:srgbClr val="667EEA"/>
+          </a:solidFill>
+        </p:spPr>
+        <p:style>
+          <a:lnRef idx="1">
+            <a:schemeClr val="accent1"/>
+          </a:lnRef>
+          <a:fillRef idx="3">
+            <a:schemeClr val="accent1"/>
+          </a:fillRef>
+          <a:effectRef idx="2">
+            <a:schemeClr val="accent1"/>
+          </a:effectRef>
+          <a:fontRef idx="minor">
+            <a:schemeClr val="lt1"/>
+          </a:fontRef>
+        </p:style>
+        <p:txBody>
+          <a:bodyPr rtlCol="0" anchor="ctr"/>
+          <a:lstStyle/>
+          <a:p>
+            <a:pPr algn="ctr"/>
+          </a:p>
+        </p:txBody>
+      </p:sp>
+      <p:sp>
+        <p:nvSpPr>
+          <p:cNvPr id="5" name="Rectangle 4"/>
+          <p:cNvSpPr/>
+          <p:nvPr/>
+        </p:nvSpPr>
+        <p:spPr>
+          <a:xfrm>
+            <a:off x="7315200" y="5486400"/>
+            <a:ext cx="1371600" cy="274320"/>
+          </a:xfrm>
+          <a:prstGeom prst="rect">
+            <a:avLst/>
+          </a:prstGeom>
+          <a:solidFill>
+            <a:srgbClr val="764BA2"/>
+          </a:solidFill>
+        </p:spPr>
+        <p:style>
+          <a:lnRef idx="1">
+            <a:schemeClr val="accent1"/>
+          </a:lnRef>
+          <a:fillRef idx="3">
+            <a:schemeClr val="accent1"/>
+          </a:fillRef>
+          <a:effectRef idx="2">
+            <a:schemeClr val="accent1"/>
+          </a:effectRef>
+          <a:fontRef idx="minor">
+            <a:schemeClr val="lt1"/>
+          </a:fontRef>
+        </p:style>
+        <p:txBody>
+          <a:bodyPr rtlCol="0" anchor="ctr"/>
+          <a:lstStyle/>
+          <a:p>
+            <a:pPr algn="ctr"/>
+          </a:p>
+        </p:txBody>
+      </p:sp>
+      <p:sp>
+        <p:nvSpPr>
+          <p:cNvPr id="6" name="TextBox 5"/>
           <p:cNvSpPr txBox="1"/>
           <p:nvPr/>
         </p:nvSpPr>
@@ -3207,7 +3400,7 @@
     <p:bg>
       <p:bgPr>
         <a:solidFill>
-          <a:srgbClr val="F8F9FA"/>
+          <a:srgbClr val="3498DB"/>
         </a:solidFill>
         <a:effectLst/>
       </p:bgPr>
@@ -3221,206 +3414,98 @@
       <p:grpSpPr/>
       <p:sp>
         <p:nvSpPr>
-          <p:cNvPr id="2" name="TextBox 1"/>
-          <p:cNvSpPr txBox="1"/>
+          <p:cNvPr id="2" name="Title 1"/>
+          <p:cNvSpPr>
+            <a:spLocks noGrp="1"/>
+          </p:cNvSpPr>
+          <p:nvPr>
+            <p:ph type="title"/>
+          </p:nvPr>
+        </p:nvSpPr>
+        <p:spPr/>
+        <p:txBody>
+          <a:bodyPr/>
+          <a:lstStyle/>
+          <a:p>
+            <a:r>
+              <a:t>🏢 Industry Updates</a:t>
+            </a:r>
+          </a:p>
+        </p:txBody>
+      </p:sp>
+      <p:sp>
+        <p:nvSpPr>
+          <p:cNvPr id="3" name="Content Placeholder 2"/>
+          <p:cNvSpPr>
+            <a:spLocks noGrp="1"/>
+          </p:cNvSpPr>
+          <p:nvPr>
+            <p:ph idx="1"/>
+          </p:nvPr>
+        </p:nvSpPr>
+        <p:spPr/>
+        <p:txBody>
+          <a:bodyPr/>
+          <a:lstStyle/>
+          <a:p>
+            <a:r>
+              <a:t>5 key updates this week</a:t>
+            </a:r>
+          </a:p>
+          <a:p>
+            <a:pPr/>
+          </a:p>
+          <a:p>
+            <a:pPr/>
+            <a:r>
+              <a:t>→ Swipe to explore</a:t>
+            </a:r>
+          </a:p>
+        </p:txBody>
+      </p:sp>
+      <p:sp>
+        <p:nvSpPr>
+          <p:cNvPr id="4" name="Oval 3"/>
+          <p:cNvSpPr/>
           <p:nvPr/>
         </p:nvSpPr>
         <p:spPr>
           <a:xfrm>
-            <a:off x="457200" y="457200"/>
-            <a:ext cx="8229600" cy="685800"/>
-          </a:xfrm>
-          <a:prstGeom prst="rect">
-            <a:avLst/>
-          </a:prstGeom>
-          <a:noFill/>
-        </p:spPr>
-        <p:txBody>
-          <a:bodyPr wrap="none">
-            <a:spAutoFit/>
-          </a:bodyPr>
-          <a:lstStyle/>
-          <a:p>
-            <a:pPr>
-              <a:defRPr sz="3200" b="1"/>
-            </a:pPr>
-            <a:r>
-              <a:t>1. AI agents are starting to eat SaaS</a:t>
-            </a:r>
-          </a:p>
-        </p:txBody>
-      </p:sp>
-      <p:sp>
-        <p:nvSpPr>
-          <p:cNvPr id="3" name="TextBox 2"/>
-          <p:cNvSpPr txBox="1"/>
-          <p:nvPr/>
-        </p:nvSpPr>
-        <p:spPr>
-          <a:xfrm>
-            <a:off x="457200" y="1371600"/>
-            <a:ext cx="8229600" cy="685800"/>
-          </a:xfrm>
-          <a:prstGeom prst="rect">
-            <a:avLst/>
-          </a:prstGeom>
-          <a:noFill/>
-        </p:spPr>
-        <p:txBody>
-          <a:bodyPr wrap="none">
-            <a:spAutoFit/>
-          </a:bodyPr>
-          <a:lstStyle/>
-          <a:p>
-            <a:pPr>
-              <a:defRPr sz="1300">
-                <a:solidFill>
-                  <a:srgbClr val="333333"/>
-                </a:solidFill>
-              </a:defRPr>
-            </a:pPr>
-            <a:r>
-              <a:t>Analyzes the emerging trend of AI agents replacing traditional SaaS applications, marking</a:t>
-            </a:r>
-          </a:p>
-        </p:txBody>
-      </p:sp>
-      <p:sp>
-        <p:nvSpPr>
-          <p:cNvPr id="4" name="TextBox 3"/>
-          <p:cNvSpPr txBox="1"/>
-          <p:nvPr/>
-        </p:nvSpPr>
-        <p:spPr>
-          <a:xfrm>
-            <a:off x="457200" y="2057400"/>
-            <a:ext cx="8229600" cy="685800"/>
-          </a:xfrm>
-          <a:prstGeom prst="rect">
-            <a:avLst/>
-          </a:prstGeom>
-          <a:noFill/>
-        </p:spPr>
-        <p:txBody>
-          <a:bodyPr wrap="none">
-            <a:spAutoFit/>
-          </a:bodyPr>
-          <a:lstStyle/>
-          <a:p>
-            <a:pPr>
-              <a:defRPr sz="1300">
-                <a:solidFill>
-                  <a:srgbClr val="333333"/>
-                </a:solidFill>
-              </a:defRPr>
-            </a:pPr>
-            <a:r>
-              <a:t>a fundamental shift in how software products are conceived and delivered.</a:t>
-            </a:r>
+            <a:off x="7315200" y="4572000"/>
+            <a:ext cx="1371600" cy="1371600"/>
+          </a:xfrm>
+          <a:prstGeom prst="ellipse">
+            <a:avLst/>
+          </a:prstGeom>
+          <a:solidFill>
+            <a:srgbClr val="FFFFFF"/>
+          </a:solidFill>
+        </p:spPr>
+        <p:style>
+          <a:lnRef idx="1">
+            <a:schemeClr val="accent1"/>
+          </a:lnRef>
+          <a:fillRef idx="3">
+            <a:schemeClr val="accent1"/>
+          </a:fillRef>
+          <a:effectRef idx="2">
+            <a:schemeClr val="accent1"/>
+          </a:effectRef>
+          <a:fontRef idx="minor">
+            <a:schemeClr val="lt1"/>
+          </a:fontRef>
+        </p:style>
+        <p:txBody>
+          <a:bodyPr rtlCol="0" anchor="ctr"/>
+          <a:lstStyle/>
+          <a:p>
+            <a:pPr algn="ctr"/>
           </a:p>
         </p:txBody>
       </p:sp>
       <p:sp>
         <p:nvSpPr>
           <p:cNvPr id="5" name="TextBox 4"/>
-          <p:cNvSpPr txBox="1"/>
-          <p:nvPr/>
-        </p:nvSpPr>
-        <p:spPr>
-          <a:xfrm>
-            <a:off x="457200" y="2743200"/>
-            <a:ext cx="8229600" cy="685800"/>
-          </a:xfrm>
-          <a:prstGeom prst="rect">
-            <a:avLst/>
-          </a:prstGeom>
-          <a:noFill/>
-        </p:spPr>
-        <p:txBody>
-          <a:bodyPr wrap="none">
-            <a:spAutoFit/>
-          </a:bodyPr>
-          <a:lstStyle/>
-          <a:p>
-            <a:pPr>
-              <a:defRPr sz="1000"/>
-            </a:pPr>
-          </a:p>
-        </p:txBody>
-      </p:sp>
-      <p:sp>
-        <p:nvSpPr>
-          <p:cNvPr id="6" name="TextBox 5"/>
-          <p:cNvSpPr txBox="1"/>
-          <p:nvPr/>
-        </p:nvSpPr>
-        <p:spPr>
-          <a:xfrm>
-            <a:off x="457200" y="3429000"/>
-            <a:ext cx="8229600" cy="685800"/>
-          </a:xfrm>
-          <a:prstGeom prst="rect">
-            <a:avLst/>
-          </a:prstGeom>
-          <a:noFill/>
-        </p:spPr>
-        <p:txBody>
-          <a:bodyPr wrap="none">
-            <a:spAutoFit/>
-          </a:bodyPr>
-          <a:lstStyle/>
-          <a:p>
-            <a:pPr>
-              <a:defRPr sz="1000" i="1">
-                <a:solidFill>
-                  <a:srgbClr val="666666"/>
-                </a:solidFill>
-              </a:defRPr>
-            </a:pPr>
-            <a:r>
-              <a:t>Source: Hacker News • 116 points • 134 comments</a:t>
-            </a:r>
-          </a:p>
-        </p:txBody>
-      </p:sp>
-      <p:sp>
-        <p:nvSpPr>
-          <p:cNvPr id="7" name="TextBox 6"/>
-          <p:cNvSpPr txBox="1"/>
-          <p:nvPr/>
-        </p:nvSpPr>
-        <p:spPr>
-          <a:xfrm>
-            <a:off x="457200" y="4114800"/>
-            <a:ext cx="8229600" cy="685800"/>
-          </a:xfrm>
-          <a:prstGeom prst="rect">
-            <a:avLst/>
-          </a:prstGeom>
-          <a:noFill/>
-        </p:spPr>
-        <p:txBody>
-          <a:bodyPr wrap="none">
-            <a:spAutoFit/>
-          </a:bodyPr>
-          <a:lstStyle/>
-          <a:p>
-            <a:pPr>
-              <a:defRPr sz="900">
-                <a:solidFill>
-                  <a:srgbClr val="3498DB"/>
-                </a:solidFill>
-              </a:defRPr>
-            </a:pPr>
-            <a:r>
-              <a:t>🔗 https://martinalderson.com/posts/ai-agents-are-starting-t...</a:t>
-            </a:r>
-          </a:p>
-        </p:txBody>
-      </p:sp>
-      <p:sp>
-        <p:nvSpPr>
-          <p:cNvPr id="8" name="TextBox 7"/>
           <p:cNvSpPr txBox="1"/>
           <p:nvPr/>
         </p:nvSpPr>
@@ -3477,206 +3562,116 @@
       <p:grpSpPr/>
       <p:sp>
         <p:nvSpPr>
-          <p:cNvPr id="2" name="TextBox 1"/>
-          <p:cNvSpPr txBox="1"/>
+          <p:cNvPr id="2" name="Title 1"/>
+          <p:cNvSpPr>
+            <a:spLocks noGrp="1"/>
+          </p:cNvSpPr>
+          <p:nvPr>
+            <p:ph type="title"/>
+          </p:nvPr>
+        </p:nvSpPr>
+        <p:spPr/>
+        <p:txBody>
+          <a:bodyPr/>
+          <a:lstStyle/>
+          <a:p>
+            <a:r>
+              <a:t>1. OpenAI are quietly adopting skills, now available in ChatGPT and Co...</a:t>
+            </a:r>
+          </a:p>
+        </p:txBody>
+      </p:sp>
+      <p:sp>
+        <p:nvSpPr>
+          <p:cNvPr id="3" name="Content Placeholder 2"/>
+          <p:cNvSpPr>
+            <a:spLocks noGrp="1"/>
+          </p:cNvSpPr>
+          <p:nvPr>
+            <p:ph idx="1"/>
+          </p:nvPr>
+        </p:nvSpPr>
+        <p:spPr/>
+        <p:txBody>
+          <a:bodyPr/>
+          <a:lstStyle/>
+          <a:p>
+            <a:r>
+              <a:t>OpenAI is rolling out 'skills' functionality that enables more modular and composable</a:t>
+            </a:r>
+          </a:p>
+          <a:p>
+            <a:pPr/>
+            <a:r>
+              <a:t>agent capabilities, representing a shift toward more structured tool use and planning</a:t>
+            </a:r>
+          </a:p>
+          <a:p>
+            <a:pPr/>
+            <a:r>
+              <a:t>in production systems.</a:t>
+            </a:r>
+          </a:p>
+          <a:p>
+            <a:pPr/>
+          </a:p>
+          <a:p>
+            <a:pPr/>
+            <a:r>
+              <a:t>📍 Hacker News • 568 points • 313 comments</a:t>
+            </a:r>
+          </a:p>
+          <a:p>
+            <a:pPr/>
+            <a:r>
+              <a:t>🔗 https://simonwillison.net/2025/Dec/12/openai-skills/</a:t>
+            </a:r>
+          </a:p>
+        </p:txBody>
+      </p:sp>
+      <p:sp>
+        <p:nvSpPr>
+          <p:cNvPr id="4" name="Rectangle 3"/>
+          <p:cNvSpPr/>
           <p:nvPr/>
         </p:nvSpPr>
         <p:spPr>
           <a:xfrm>
-            <a:off x="457200" y="457200"/>
-            <a:ext cx="8229600" cy="685800"/>
+            <a:off x="274320" y="731520"/>
+            <a:ext cx="365760" cy="365760"/>
           </a:xfrm>
           <a:prstGeom prst="rect">
             <a:avLst/>
           </a:prstGeom>
-          <a:noFill/>
-        </p:spPr>
-        <p:txBody>
-          <a:bodyPr wrap="none">
-            <a:spAutoFit/>
-          </a:bodyPr>
-          <a:lstStyle/>
-          <a:p>
-            <a:pPr>
-              <a:defRPr sz="3200" b="1"/>
-            </a:pPr>
-            <a:r>
-              <a:t>2. OpenAI are quietly adopting skills, now available in ChatGPT and Codex CLI</a:t>
-            </a:r>
-          </a:p>
-        </p:txBody>
-      </p:sp>
-      <p:sp>
-        <p:nvSpPr>
-          <p:cNvPr id="3" name="TextBox 2"/>
-          <p:cNvSpPr txBox="1"/>
-          <p:nvPr/>
-        </p:nvSpPr>
-        <p:spPr>
-          <a:xfrm>
-            <a:off x="457200" y="1371600"/>
-            <a:ext cx="8229600" cy="685800"/>
-          </a:xfrm>
-          <a:prstGeom prst="rect">
-            <a:avLst/>
-          </a:prstGeom>
-          <a:noFill/>
-        </p:spPr>
-        <p:txBody>
-          <a:bodyPr wrap="none">
-            <a:spAutoFit/>
-          </a:bodyPr>
-          <a:lstStyle/>
-          <a:p>
-            <a:pPr>
-              <a:defRPr sz="1300">
-                <a:solidFill>
-                  <a:srgbClr val="333333"/>
-                </a:solidFill>
-              </a:defRPr>
-            </a:pPr>
-            <a:r>
-              <a:t>OpenAI's introduction of 'skills' represents a modular approach to agent capabilities,</a:t>
-            </a:r>
-          </a:p>
-        </p:txBody>
-      </p:sp>
-      <p:sp>
-        <p:nvSpPr>
-          <p:cNvPr id="4" name="TextBox 3"/>
-          <p:cNvSpPr txBox="1"/>
-          <p:nvPr/>
-        </p:nvSpPr>
-        <p:spPr>
-          <a:xfrm>
-            <a:off x="457200" y="2057400"/>
-            <a:ext cx="8229600" cy="685800"/>
-          </a:xfrm>
-          <a:prstGeom prst="rect">
-            <a:avLst/>
-          </a:prstGeom>
-          <a:noFill/>
-        </p:spPr>
-        <p:txBody>
-          <a:bodyPr wrap="none">
-            <a:spAutoFit/>
-          </a:bodyPr>
-          <a:lstStyle/>
-          <a:p>
-            <a:pPr>
-              <a:defRPr sz="1300">
-                <a:solidFill>
-                  <a:srgbClr val="333333"/>
-                </a:solidFill>
-              </a:defRPr>
-            </a:pPr>
-            <a:r>
-              <a:t>allowing users to extend ChatGPT's tool use and functionality programmatically.</a:t>
-            </a:r>
+          <a:solidFill>
+            <a:srgbClr val="3498DB"/>
+          </a:solidFill>
+        </p:spPr>
+        <p:style>
+          <a:lnRef idx="1">
+            <a:schemeClr val="accent1"/>
+          </a:lnRef>
+          <a:fillRef idx="3">
+            <a:schemeClr val="accent1"/>
+          </a:fillRef>
+          <a:effectRef idx="2">
+            <a:schemeClr val="accent1"/>
+          </a:effectRef>
+          <a:fontRef idx="minor">
+            <a:schemeClr val="lt1"/>
+          </a:fontRef>
+        </p:style>
+        <p:txBody>
+          <a:bodyPr rtlCol="0" anchor="ctr"/>
+          <a:lstStyle/>
+          <a:p>
+            <a:pPr algn="ctr"/>
           </a:p>
         </p:txBody>
       </p:sp>
       <p:sp>
         <p:nvSpPr>
           <p:cNvPr id="5" name="TextBox 4"/>
-          <p:cNvSpPr txBox="1"/>
-          <p:nvPr/>
-        </p:nvSpPr>
-        <p:spPr>
-          <a:xfrm>
-            <a:off x="457200" y="2743200"/>
-            <a:ext cx="8229600" cy="685800"/>
-          </a:xfrm>
-          <a:prstGeom prst="rect">
-            <a:avLst/>
-          </a:prstGeom>
-          <a:noFill/>
-        </p:spPr>
-        <p:txBody>
-          <a:bodyPr wrap="none">
-            <a:spAutoFit/>
-          </a:bodyPr>
-          <a:lstStyle/>
-          <a:p>
-            <a:pPr>
-              <a:defRPr sz="1000"/>
-            </a:pPr>
-          </a:p>
-        </p:txBody>
-      </p:sp>
-      <p:sp>
-        <p:nvSpPr>
-          <p:cNvPr id="6" name="TextBox 5"/>
-          <p:cNvSpPr txBox="1"/>
-          <p:nvPr/>
-        </p:nvSpPr>
-        <p:spPr>
-          <a:xfrm>
-            <a:off x="457200" y="3429000"/>
-            <a:ext cx="8229600" cy="685800"/>
-          </a:xfrm>
-          <a:prstGeom prst="rect">
-            <a:avLst/>
-          </a:prstGeom>
-          <a:noFill/>
-        </p:spPr>
-        <p:txBody>
-          <a:bodyPr wrap="none">
-            <a:spAutoFit/>
-          </a:bodyPr>
-          <a:lstStyle/>
-          <a:p>
-            <a:pPr>
-              <a:defRPr sz="1000" i="1">
-                <a:solidFill>
-                  <a:srgbClr val="666666"/>
-                </a:solidFill>
-              </a:defRPr>
-            </a:pPr>
-            <a:r>
-              <a:t>Source: Hacker News • 568 points • 313 comments</a:t>
-            </a:r>
-          </a:p>
-        </p:txBody>
-      </p:sp>
-      <p:sp>
-        <p:nvSpPr>
-          <p:cNvPr id="7" name="TextBox 6"/>
-          <p:cNvSpPr txBox="1"/>
-          <p:nvPr/>
-        </p:nvSpPr>
-        <p:spPr>
-          <a:xfrm>
-            <a:off x="457200" y="4114800"/>
-            <a:ext cx="8229600" cy="685800"/>
-          </a:xfrm>
-          <a:prstGeom prst="rect">
-            <a:avLst/>
-          </a:prstGeom>
-          <a:noFill/>
-        </p:spPr>
-        <p:txBody>
-          <a:bodyPr wrap="none">
-            <a:spAutoFit/>
-          </a:bodyPr>
-          <a:lstStyle/>
-          <a:p>
-            <a:pPr>
-              <a:defRPr sz="900">
-                <a:solidFill>
-                  <a:srgbClr val="3498DB"/>
-                </a:solidFill>
-              </a:defRPr>
-            </a:pPr>
-            <a:r>
-              <a:t>🔗 https://simonwillison.net/2025/Dec/12/openai-skills/</a:t>
-            </a:r>
-          </a:p>
-        </p:txBody>
-      </p:sp>
-      <p:sp>
-        <p:nvSpPr>
-          <p:cNvPr id="8" name="TextBox 7"/>
           <p:cNvSpPr txBox="1"/>
           <p:nvPr/>
         </p:nvSpPr>
@@ -3733,206 +3728,110 @@
       <p:grpSpPr/>
       <p:sp>
         <p:nvSpPr>
-          <p:cNvPr id="2" name="TextBox 1"/>
-          <p:cNvSpPr txBox="1"/>
+          <p:cNvPr id="2" name="Title 1"/>
+          <p:cNvSpPr>
+            <a:spLocks noGrp="1"/>
+          </p:cNvSpPr>
+          <p:nvPr>
+            <p:ph type="title"/>
+          </p:nvPr>
+        </p:nvSpPr>
+        <p:spPr/>
+        <p:txBody>
+          <a:bodyPr/>
+          <a:lstStyle/>
+          <a:p>
+            <a:r>
+              <a:t>2. AI agents are starting to eat SaaS</a:t>
+            </a:r>
+          </a:p>
+        </p:txBody>
+      </p:sp>
+      <p:sp>
+        <p:nvSpPr>
+          <p:cNvPr id="3" name="Content Placeholder 2"/>
+          <p:cNvSpPr>
+            <a:spLocks noGrp="1"/>
+          </p:cNvSpPr>
+          <p:nvPr>
+            <p:ph idx="1"/>
+          </p:nvPr>
+        </p:nvSpPr>
+        <p:spPr/>
+        <p:txBody>
+          <a:bodyPr/>
+          <a:lstStyle/>
+          <a:p>
+            <a:r>
+              <a:t>Analysis of how autonomous AI agents are beginning to replace traditional SaaS</a:t>
+            </a:r>
+          </a:p>
+          <a:p>
+            <a:pPr/>
+            <a:r>
+              <a:t>workflows, marking a fundamental shift in software economics and business models.</a:t>
+            </a:r>
+          </a:p>
+          <a:p>
+            <a:pPr/>
+          </a:p>
+          <a:p>
+            <a:pPr/>
+            <a:r>
+              <a:t>📍 Hacker News • 118 points • 136 comments</a:t>
+            </a:r>
+          </a:p>
+          <a:p>
+            <a:pPr/>
+            <a:r>
+              <a:t>🔗 https://martinalderson.com/posts/ai-agents-are-starting-to-eat-saas/</a:t>
+            </a:r>
+          </a:p>
+        </p:txBody>
+      </p:sp>
+      <p:sp>
+        <p:nvSpPr>
+          <p:cNvPr id="4" name="Oval 3"/>
+          <p:cNvSpPr/>
           <p:nvPr/>
         </p:nvSpPr>
         <p:spPr>
           <a:xfrm>
-            <a:off x="457200" y="457200"/>
-            <a:ext cx="8229600" cy="685800"/>
-          </a:xfrm>
-          <a:prstGeom prst="rect">
-            <a:avLst/>
-          </a:prstGeom>
-          <a:noFill/>
-        </p:spPr>
-        <p:txBody>
-          <a:bodyPr wrap="none">
-            <a:spAutoFit/>
-          </a:bodyPr>
-          <a:lstStyle/>
-          <a:p>
-            <a:pPr>
-              <a:defRPr sz="3200" b="1"/>
-            </a:pPr>
-            <a:r>
-              <a:t>3. Claude CLI deleted my home directory and wiped my Mac</a:t>
-            </a:r>
-          </a:p>
-        </p:txBody>
-      </p:sp>
-      <p:sp>
-        <p:nvSpPr>
-          <p:cNvPr id="3" name="TextBox 2"/>
-          <p:cNvSpPr txBox="1"/>
-          <p:nvPr/>
-        </p:nvSpPr>
-        <p:spPr>
-          <a:xfrm>
-            <a:off x="457200" y="1371600"/>
-            <a:ext cx="8229600" cy="685800"/>
-          </a:xfrm>
-          <a:prstGeom prst="rect">
-            <a:avLst/>
-          </a:prstGeom>
-          <a:noFill/>
-        </p:spPr>
-        <p:txBody>
-          <a:bodyPr wrap="none">
-            <a:spAutoFit/>
-          </a:bodyPr>
-          <a:lstStyle/>
-          <a:p>
-            <a:pPr>
-              <a:defRPr sz="1300">
-                <a:solidFill>
-                  <a:srgbClr val="333333"/>
-                </a:solidFill>
-              </a:defRPr>
-            </a:pPr>
-            <a:r>
-              <a:t>A critical real-world incident highlighting the risks of autonomous tool use by AI agents,</a:t>
-            </a:r>
-          </a:p>
-        </p:txBody>
-      </p:sp>
-      <p:sp>
-        <p:nvSpPr>
-          <p:cNvPr id="4" name="TextBox 3"/>
-          <p:cNvSpPr txBox="1"/>
-          <p:nvPr/>
-        </p:nvSpPr>
-        <p:spPr>
-          <a:xfrm>
-            <a:off x="457200" y="2057400"/>
-            <a:ext cx="8229600" cy="685800"/>
-          </a:xfrm>
-          <a:prstGeom prst="rect">
-            <a:avLst/>
-          </a:prstGeom>
-          <a:noFill/>
-        </p:spPr>
-        <p:txBody>
-          <a:bodyPr wrap="none">
-            <a:spAutoFit/>
-          </a:bodyPr>
-          <a:lstStyle/>
-          <a:p>
-            <a:pPr>
-              <a:defRPr sz="1300">
-                <a:solidFill>
-                  <a:srgbClr val="333333"/>
-                </a:solidFill>
-              </a:defRPr>
-            </a:pPr>
-            <a:r>
-              <a:t>emphasizing the urgent need for better safety guardrails in agentic systems.</a:t>
-            </a:r>
+            <a:off x="274320" y="731520"/>
+            <a:ext cx="365760" cy="365760"/>
+          </a:xfrm>
+          <a:prstGeom prst="ellipse">
+            <a:avLst/>
+          </a:prstGeom>
+          <a:solidFill>
+            <a:srgbClr val="3498DB"/>
+          </a:solidFill>
+        </p:spPr>
+        <p:style>
+          <a:lnRef idx="1">
+            <a:schemeClr val="accent1"/>
+          </a:lnRef>
+          <a:fillRef idx="3">
+            <a:schemeClr val="accent1"/>
+          </a:fillRef>
+          <a:effectRef idx="2">
+            <a:schemeClr val="accent1"/>
+          </a:effectRef>
+          <a:fontRef idx="minor">
+            <a:schemeClr val="lt1"/>
+          </a:fontRef>
+        </p:style>
+        <p:txBody>
+          <a:bodyPr rtlCol="0" anchor="ctr"/>
+          <a:lstStyle/>
+          <a:p>
+            <a:pPr algn="ctr"/>
           </a:p>
         </p:txBody>
       </p:sp>
       <p:sp>
         <p:nvSpPr>
           <p:cNvPr id="5" name="TextBox 4"/>
-          <p:cNvSpPr txBox="1"/>
-          <p:nvPr/>
-        </p:nvSpPr>
-        <p:spPr>
-          <a:xfrm>
-            <a:off x="457200" y="2743200"/>
-            <a:ext cx="8229600" cy="685800"/>
-          </a:xfrm>
-          <a:prstGeom prst="rect">
-            <a:avLst/>
-          </a:prstGeom>
-          <a:noFill/>
-        </p:spPr>
-        <p:txBody>
-          <a:bodyPr wrap="none">
-            <a:spAutoFit/>
-          </a:bodyPr>
-          <a:lstStyle/>
-          <a:p>
-            <a:pPr>
-              <a:defRPr sz="1000"/>
-            </a:pPr>
-          </a:p>
-        </p:txBody>
-      </p:sp>
-      <p:sp>
-        <p:nvSpPr>
-          <p:cNvPr id="6" name="TextBox 5"/>
-          <p:cNvSpPr txBox="1"/>
-          <p:nvPr/>
-        </p:nvSpPr>
-        <p:spPr>
-          <a:xfrm>
-            <a:off x="457200" y="3429000"/>
-            <a:ext cx="8229600" cy="685800"/>
-          </a:xfrm>
-          <a:prstGeom prst="rect">
-            <a:avLst/>
-          </a:prstGeom>
-          <a:noFill/>
-        </p:spPr>
-        <p:txBody>
-          <a:bodyPr wrap="none">
-            <a:spAutoFit/>
-          </a:bodyPr>
-          <a:lstStyle/>
-          <a:p>
-            <a:pPr>
-              <a:defRPr sz="1000" i="1">
-                <a:solidFill>
-                  <a:srgbClr val="666666"/>
-                </a:solidFill>
-              </a:defRPr>
-            </a:pPr>
-            <a:r>
-              <a:t>Source: Hacker News • 220 points • 179 comments</a:t>
-            </a:r>
-          </a:p>
-        </p:txBody>
-      </p:sp>
-      <p:sp>
-        <p:nvSpPr>
-          <p:cNvPr id="7" name="TextBox 6"/>
-          <p:cNvSpPr txBox="1"/>
-          <p:nvPr/>
-        </p:nvSpPr>
-        <p:spPr>
-          <a:xfrm>
-            <a:off x="457200" y="4114800"/>
-            <a:ext cx="8229600" cy="685800"/>
-          </a:xfrm>
-          <a:prstGeom prst="rect">
-            <a:avLst/>
-          </a:prstGeom>
-          <a:noFill/>
-        </p:spPr>
-        <p:txBody>
-          <a:bodyPr wrap="none">
-            <a:spAutoFit/>
-          </a:bodyPr>
-          <a:lstStyle/>
-          <a:p>
-            <a:pPr>
-              <a:defRPr sz="900">
-                <a:solidFill>
-                  <a:srgbClr val="3498DB"/>
-                </a:solidFill>
-              </a:defRPr>
-            </a:pPr>
-            <a:r>
-              <a:t>🔗 https://old.reddit.com/r/ClaudeAI/comments/1pgxckk/claude...</a:t>
-            </a:r>
-          </a:p>
-        </p:txBody>
-      </p:sp>
-      <p:sp>
-        <p:nvSpPr>
-          <p:cNvPr id="8" name="TextBox 7"/>
           <p:cNvSpPr txBox="1"/>
           <p:nvPr/>
         </p:nvSpPr>
@@ -4013,7 +3912,7 @@
               <a:defRPr sz="3200" b="1"/>
             </a:pPr>
             <a:r>
-              <a:t>4. An AI agent spent 16 hours hacking Stanford's network. It outperformed h...</a:t>
+              <a:t>3. Claude CLI deleted my home directory and wiped my Mac</a:t>
             </a:r>
           </a:p>
         </p:txBody>
@@ -4027,7 +3926,7 @@
         <p:spPr>
           <a:xfrm>
             <a:off x="457200" y="1371600"/>
-            <a:ext cx="8229600" cy="685800"/>
+            <a:ext cx="3657600" cy="4114800"/>
           </a:xfrm>
           <a:prstGeom prst="rect">
             <a:avLst/>
@@ -4040,15 +3939,8 @@
           </a:bodyPr>
           <a:lstStyle/>
           <a:p>
-            <a:pPr>
-              <a:defRPr sz="1300">
-                <a:solidFill>
-                  <a:srgbClr val="333333"/>
-                </a:solidFill>
-              </a:defRPr>
-            </a:pPr>
-            <a:r>
-              <a:t>Demonstrates autonomous AI agents successfully performing complex, multi-step</a:t>
+            <a:r>
+              <a:t>Critical incident highlighting the safety challenges of giving AI agents file system</a:t>
             </a:r>
           </a:p>
         </p:txBody>
@@ -4061,8 +3953,8 @@
         </p:nvSpPr>
         <p:spPr>
           <a:xfrm>
-            <a:off x="457200" y="2057400"/>
-            <a:ext cx="8229600" cy="685800"/>
+            <a:off x="5029200" y="1371600"/>
+            <a:ext cx="3657600" cy="4114800"/>
           </a:xfrm>
           <a:prstGeom prst="rect">
             <a:avLst/>
@@ -4075,155 +3967,71 @@
           </a:bodyPr>
           <a:lstStyle/>
           <a:p>
-            <a:pPr>
-              <a:defRPr sz="1300">
-                <a:solidFill>
-                  <a:srgbClr val="333333"/>
-                </a:solidFill>
-              </a:defRPr>
-            </a:pPr>
-            <a:r>
-              <a:t>cybersecurity tasks at expert level, showing practical agent capability in specialized</a:t>
-            </a:r>
-          </a:p>
-        </p:txBody>
-      </p:sp>
-      <p:sp>
-        <p:nvSpPr>
-          <p:cNvPr id="5" name="TextBox 4"/>
-          <p:cNvSpPr txBox="1"/>
+            <a:r>
+              <a:t>access and tool-use capabilities, sparking important discussions about guardrails and</a:t>
+            </a:r>
+          </a:p>
+          <a:p>
+            <a:r>
+              <a:t>permission systems.</a:t>
+            </a:r>
+          </a:p>
+          <a:p/>
+          <a:p>
+            <a:r>
+              <a:t>📍 Hacker News • 220 points • 179 comments</a:t>
+            </a:r>
+          </a:p>
+          <a:p>
+            <a:r>
+              <a:t>🔗 https://old.reddit.com/r/ClaudeAI/comments/1pgxckk/claude_cli_delet...</a:t>
+            </a:r>
+          </a:p>
+        </p:txBody>
+      </p:sp>
+      <p:sp>
+        <p:nvSpPr>
+          <p:cNvPr id="5" name="Rectangle 4"/>
+          <p:cNvSpPr/>
           <p:nvPr/>
         </p:nvSpPr>
         <p:spPr>
           <a:xfrm>
-            <a:off x="457200" y="2743200"/>
-            <a:ext cx="8229600" cy="685800"/>
+            <a:off x="274320" y="731520"/>
+            <a:ext cx="365760" cy="365760"/>
           </a:xfrm>
           <a:prstGeom prst="rect">
             <a:avLst/>
           </a:prstGeom>
-          <a:noFill/>
-        </p:spPr>
-        <p:txBody>
-          <a:bodyPr wrap="none">
-            <a:spAutoFit/>
-          </a:bodyPr>
-          <a:lstStyle/>
-          <a:p>
-            <a:pPr>
-              <a:defRPr sz="1300">
-                <a:solidFill>
-                  <a:srgbClr val="333333"/>
-                </a:solidFill>
-              </a:defRPr>
-            </a:pPr>
-            <a:r>
-              <a:t>domains.</a:t>
-            </a:r>
+          <a:solidFill>
+            <a:srgbClr val="3498DB"/>
+          </a:solidFill>
+        </p:spPr>
+        <p:style>
+          <a:lnRef idx="1">
+            <a:schemeClr val="accent1"/>
+          </a:lnRef>
+          <a:fillRef idx="3">
+            <a:schemeClr val="accent1"/>
+          </a:fillRef>
+          <a:effectRef idx="2">
+            <a:schemeClr val="accent1"/>
+          </a:effectRef>
+          <a:fontRef idx="minor">
+            <a:schemeClr val="lt1"/>
+          </a:fontRef>
+        </p:style>
+        <p:txBody>
+          <a:bodyPr rtlCol="0" anchor="ctr"/>
+          <a:lstStyle/>
+          <a:p>
+            <a:pPr algn="ctr"/>
           </a:p>
         </p:txBody>
       </p:sp>
       <p:sp>
         <p:nvSpPr>
           <p:cNvPr id="6" name="TextBox 5"/>
-          <p:cNvSpPr txBox="1"/>
-          <p:nvPr/>
-        </p:nvSpPr>
-        <p:spPr>
-          <a:xfrm>
-            <a:off x="457200" y="3429000"/>
-            <a:ext cx="8229600" cy="685800"/>
-          </a:xfrm>
-          <a:prstGeom prst="rect">
-            <a:avLst/>
-          </a:prstGeom>
-          <a:noFill/>
-        </p:spPr>
-        <p:txBody>
-          <a:bodyPr wrap="none">
-            <a:spAutoFit/>
-          </a:bodyPr>
-          <a:lstStyle/>
-          <a:p>
-            <a:pPr>
-              <a:defRPr sz="1000"/>
-            </a:pPr>
-          </a:p>
-        </p:txBody>
-      </p:sp>
-      <p:sp>
-        <p:nvSpPr>
-          <p:cNvPr id="7" name="TextBox 6"/>
-          <p:cNvSpPr txBox="1"/>
-          <p:nvPr/>
-        </p:nvSpPr>
-        <p:spPr>
-          <a:xfrm>
-            <a:off x="457200" y="4114800"/>
-            <a:ext cx="8229600" cy="685800"/>
-          </a:xfrm>
-          <a:prstGeom prst="rect">
-            <a:avLst/>
-          </a:prstGeom>
-          <a:noFill/>
-        </p:spPr>
-        <p:txBody>
-          <a:bodyPr wrap="none">
-            <a:spAutoFit/>
-          </a:bodyPr>
-          <a:lstStyle/>
-          <a:p>
-            <a:pPr>
-              <a:defRPr sz="1000" i="1">
-                <a:solidFill>
-                  <a:srgbClr val="666666"/>
-                </a:solidFill>
-              </a:defRPr>
-            </a:pPr>
-            <a:r>
-              <a:t>Source: r/artificial • 210 upvotes • 32 comments</a:t>
-            </a:r>
-          </a:p>
-        </p:txBody>
-      </p:sp>
-      <p:sp>
-        <p:nvSpPr>
-          <p:cNvPr id="8" name="TextBox 7"/>
-          <p:cNvSpPr txBox="1"/>
-          <p:nvPr/>
-        </p:nvSpPr>
-        <p:spPr>
-          <a:xfrm>
-            <a:off x="457200" y="4800600"/>
-            <a:ext cx="8229600" cy="685800"/>
-          </a:xfrm>
-          <a:prstGeom prst="rect">
-            <a:avLst/>
-          </a:prstGeom>
-          <a:noFill/>
-        </p:spPr>
-        <p:txBody>
-          <a:bodyPr wrap="none">
-            <a:spAutoFit/>
-          </a:bodyPr>
-          <a:lstStyle/>
-          <a:p>
-            <a:pPr>
-              <a:defRPr sz="900">
-                <a:solidFill>
-                  <a:srgbClr val="3498DB"/>
-                </a:solidFill>
-              </a:defRPr>
-            </a:pPr>
-            <a:r>
-              <a:t>🔗 https://reddit.com/r/artificial/comments/1pkuaaq/an_ai_ag...</a:t>
-            </a:r>
-          </a:p>
-        </p:txBody>
-      </p:sp>
-      <p:sp>
-        <p:nvSpPr>
-          <p:cNvPr id="9" name="TextBox 8"/>
           <p:cNvSpPr txBox="1"/>
           <p:nvPr/>
         </p:nvSpPr>
@@ -4280,206 +4088,116 @@
       <p:grpSpPr/>
       <p:sp>
         <p:nvSpPr>
-          <p:cNvPr id="2" name="TextBox 1"/>
-          <p:cNvSpPr txBox="1"/>
+          <p:cNvPr id="2" name="Title 1"/>
+          <p:cNvSpPr>
+            <a:spLocks noGrp="1"/>
+          </p:cNvSpPr>
+          <p:nvPr>
+            <p:ph type="title"/>
+          </p:nvPr>
+        </p:nvSpPr>
+        <p:spPr/>
+        <p:txBody>
+          <a:bodyPr/>
+          <a:lstStyle/>
+          <a:p>
+            <a:r>
+              <a:t>4. An AI agent spent 16 hours hacking Stanford's network. It outperfor...</a:t>
+            </a:r>
+          </a:p>
+        </p:txBody>
+      </p:sp>
+      <p:sp>
+        <p:nvSpPr>
+          <p:cNvPr id="3" name="Content Placeholder 2"/>
+          <p:cNvSpPr>
+            <a:spLocks noGrp="1"/>
+          </p:cNvSpPr>
+          <p:nvPr>
+            <p:ph idx="1"/>
+          </p:nvPr>
+        </p:nvSpPr>
+        <p:spPr/>
+        <p:txBody>
+          <a:bodyPr/>
+          <a:lstStyle/>
+          <a:p>
+            <a:r>
+              <a:t>Demonstrates autonomous agents successfully executing complex, multi-step security</a:t>
+            </a:r>
+          </a:p>
+          <a:p>
+            <a:pPr/>
+            <a:r>
+              <a:t>penetration testing, showing practical viability of agents for specialized</a:t>
+            </a:r>
+          </a:p>
+          <a:p>
+            <a:pPr/>
+            <a:r>
+              <a:t>professional tasks requiring planning and tool use.</a:t>
+            </a:r>
+          </a:p>
+          <a:p>
+            <a:pPr/>
+          </a:p>
+          <a:p>
+            <a:pPr/>
+            <a:r>
+              <a:t>📍 r/artificial • 207 upvotes • 32 comments</a:t>
+            </a:r>
+          </a:p>
+          <a:p>
+            <a:pPr/>
+            <a:r>
+              <a:t>🔗 https://reddit.com/r/artificial/comments/1pkuaaq/an_ai_agent_spent_...</a:t>
+            </a:r>
+          </a:p>
+        </p:txBody>
+      </p:sp>
+      <p:sp>
+        <p:nvSpPr>
+          <p:cNvPr id="4" name="Oval 3"/>
+          <p:cNvSpPr/>
           <p:nvPr/>
         </p:nvSpPr>
         <p:spPr>
           <a:xfrm>
-            <a:off x="457200" y="457200"/>
-            <a:ext cx="8229600" cy="685800"/>
-          </a:xfrm>
-          <a:prstGeom prst="rect">
-            <a:avLst/>
-          </a:prstGeom>
-          <a:noFill/>
-        </p:spPr>
-        <p:txBody>
-          <a:bodyPr wrap="none">
-            <a:spAutoFit/>
-          </a:bodyPr>
-          <a:lstStyle/>
-          <a:p>
-            <a:pPr>
-              <a:defRPr sz="3200" b="1"/>
-            </a:pPr>
-            <a:r>
-              <a:t>5. Introducing: Devstral 2 and Mistral Vibe CLI</a:t>
-            </a:r>
-          </a:p>
-        </p:txBody>
-      </p:sp>
-      <p:sp>
-        <p:nvSpPr>
-          <p:cNvPr id="3" name="TextBox 2"/>
-          <p:cNvSpPr txBox="1"/>
-          <p:nvPr/>
-        </p:nvSpPr>
-        <p:spPr>
-          <a:xfrm>
-            <a:off x="457200" y="1371600"/>
-            <a:ext cx="8229600" cy="685800"/>
-          </a:xfrm>
-          <a:prstGeom prst="rect">
-            <a:avLst/>
-          </a:prstGeom>
-          <a:noFill/>
-        </p:spPr>
-        <p:txBody>
-          <a:bodyPr wrap="none">
-            <a:spAutoFit/>
-          </a:bodyPr>
-          <a:lstStyle/>
-          <a:p>
-            <a:pPr>
-              <a:defRPr sz="1300">
-                <a:solidFill>
-                  <a:srgbClr val="333333"/>
-                </a:solidFill>
-              </a:defRPr>
-            </a:pPr>
-            <a:r>
-              <a:t>Mistral launches a development-focused model with CLI integration, expanding the</a:t>
-            </a:r>
-          </a:p>
-        </p:txBody>
-      </p:sp>
-      <p:sp>
-        <p:nvSpPr>
-          <p:cNvPr id="4" name="TextBox 3"/>
-          <p:cNvSpPr txBox="1"/>
-          <p:nvPr/>
-        </p:nvSpPr>
-        <p:spPr>
-          <a:xfrm>
-            <a:off x="457200" y="2057400"/>
-            <a:ext cx="8229600" cy="685800"/>
-          </a:xfrm>
-          <a:prstGeom prst="rect">
-            <a:avLst/>
-          </a:prstGeom>
-          <a:noFill/>
-        </p:spPr>
-        <p:txBody>
-          <a:bodyPr wrap="none">
-            <a:spAutoFit/>
-          </a:bodyPr>
-          <a:lstStyle/>
-          <a:p>
-            <a:pPr>
-              <a:defRPr sz="1300">
-                <a:solidFill>
-                  <a:srgbClr val="333333"/>
-                </a:solidFill>
-              </a:defRPr>
-            </a:pPr>
-            <a:r>
-              <a:t>competitive landscape for agent-capable coding assistants.</a:t>
-            </a:r>
+            <a:off x="274320" y="731520"/>
+            <a:ext cx="365760" cy="365760"/>
+          </a:xfrm>
+          <a:prstGeom prst="ellipse">
+            <a:avLst/>
+          </a:prstGeom>
+          <a:solidFill>
+            <a:srgbClr val="3498DB"/>
+          </a:solidFill>
+        </p:spPr>
+        <p:style>
+          <a:lnRef idx="1">
+            <a:schemeClr val="accent1"/>
+          </a:lnRef>
+          <a:fillRef idx="3">
+            <a:schemeClr val="accent1"/>
+          </a:fillRef>
+          <a:effectRef idx="2">
+            <a:schemeClr val="accent1"/>
+          </a:effectRef>
+          <a:fontRef idx="minor">
+            <a:schemeClr val="lt1"/>
+          </a:fontRef>
+        </p:style>
+        <p:txBody>
+          <a:bodyPr rtlCol="0" anchor="ctr"/>
+          <a:lstStyle/>
+          <a:p>
+            <a:pPr algn="ctr"/>
           </a:p>
         </p:txBody>
       </p:sp>
       <p:sp>
         <p:nvSpPr>
           <p:cNvPr id="5" name="TextBox 4"/>
-          <p:cNvSpPr txBox="1"/>
-          <p:nvPr/>
-        </p:nvSpPr>
-        <p:spPr>
-          <a:xfrm>
-            <a:off x="457200" y="2743200"/>
-            <a:ext cx="8229600" cy="685800"/>
-          </a:xfrm>
-          <a:prstGeom prst="rect">
-            <a:avLst/>
-          </a:prstGeom>
-          <a:noFill/>
-        </p:spPr>
-        <p:txBody>
-          <a:bodyPr wrap="none">
-            <a:spAutoFit/>
-          </a:bodyPr>
-          <a:lstStyle/>
-          <a:p>
-            <a:pPr>
-              <a:defRPr sz="1000"/>
-            </a:pPr>
-          </a:p>
-        </p:txBody>
-      </p:sp>
-      <p:sp>
-        <p:nvSpPr>
-          <p:cNvPr id="6" name="TextBox 5"/>
-          <p:cNvSpPr txBox="1"/>
-          <p:nvPr/>
-        </p:nvSpPr>
-        <p:spPr>
-          <a:xfrm>
-            <a:off x="457200" y="3429000"/>
-            <a:ext cx="8229600" cy="685800"/>
-          </a:xfrm>
-          <a:prstGeom prst="rect">
-            <a:avLst/>
-          </a:prstGeom>
-          <a:noFill/>
-        </p:spPr>
-        <p:txBody>
-          <a:bodyPr wrap="none">
-            <a:spAutoFit/>
-          </a:bodyPr>
-          <a:lstStyle/>
-          <a:p>
-            <a:pPr>
-              <a:defRPr sz="1000" i="1">
-                <a:solidFill>
-                  <a:srgbClr val="666666"/>
-                </a:solidFill>
-              </a:defRPr>
-            </a:pPr>
-            <a:r>
-              <a:t>Source: r/LocalLLaMA • 686 upvotes • 218 comments</a:t>
-            </a:r>
-          </a:p>
-        </p:txBody>
-      </p:sp>
-      <p:sp>
-        <p:nvSpPr>
-          <p:cNvPr id="7" name="TextBox 6"/>
-          <p:cNvSpPr txBox="1"/>
-          <p:nvPr/>
-        </p:nvSpPr>
-        <p:spPr>
-          <a:xfrm>
-            <a:off x="457200" y="4114800"/>
-            <a:ext cx="8229600" cy="685800"/>
-          </a:xfrm>
-          <a:prstGeom prst="rect">
-            <a:avLst/>
-          </a:prstGeom>
-          <a:noFill/>
-        </p:spPr>
-        <p:txBody>
-          <a:bodyPr wrap="none">
-            <a:spAutoFit/>
-          </a:bodyPr>
-          <a:lstStyle/>
-          <a:p>
-            <a:pPr>
-              <a:defRPr sz="900">
-                <a:solidFill>
-                  <a:srgbClr val="3498DB"/>
-                </a:solidFill>
-              </a:defRPr>
-            </a:pPr>
-            <a:r>
-              <a:t>🔗 https://reddit.com/r/LocalLLaMA/comments/1pi9q3t/introduc...</a:t>
-            </a:r>
-          </a:p>
-        </p:txBody>
-      </p:sp>
-      <p:sp>
-        <p:nvSpPr>
-          <p:cNvPr id="8" name="TextBox 7"/>
           <p:cNvSpPr txBox="1"/>
           <p:nvPr/>
         </p:nvSpPr>
@@ -4517,6 +4235,172 @@
 </file>
 
 <file path=ppt/slides/slide15.xml><?xml version="1.0" encoding="utf-8"?>
+<p:sld xmlns:a="http://schemas.openxmlformats.org/drawingml/2006/main" xmlns:p="http://schemas.openxmlformats.org/presentationml/2006/main" xmlns:r="http://schemas.openxmlformats.org/officeDocument/2006/relationships">
+  <p:cSld>
+    <p:bg>
+      <p:bgPr>
+        <a:solidFill>
+          <a:srgbClr val="F8F9FA"/>
+        </a:solidFill>
+        <a:effectLst/>
+      </p:bgPr>
+    </p:bg>
+    <p:spTree>
+      <p:nvGrpSpPr>
+        <p:cNvPr id="1" name=""/>
+        <p:cNvGrpSpPr/>
+        <p:nvPr/>
+      </p:nvGrpSpPr>
+      <p:grpSpPr/>
+      <p:sp>
+        <p:nvSpPr>
+          <p:cNvPr id="2" name="Title 1"/>
+          <p:cNvSpPr>
+            <a:spLocks noGrp="1"/>
+          </p:cNvSpPr>
+          <p:nvPr>
+            <p:ph type="title"/>
+          </p:nvPr>
+        </p:nvSpPr>
+        <p:spPr/>
+        <p:txBody>
+          <a:bodyPr/>
+          <a:lstStyle/>
+          <a:p>
+            <a:r>
+              <a:t>5. Pete Hegseth Says the Pentagon's New Chatbot Will Make America 'Mor...</a:t>
+            </a:r>
+          </a:p>
+        </p:txBody>
+      </p:sp>
+      <p:sp>
+        <p:nvSpPr>
+          <p:cNvPr id="3" name="Content Placeholder 2"/>
+          <p:cNvSpPr>
+            <a:spLocks noGrp="1"/>
+          </p:cNvSpPr>
+          <p:nvPr>
+            <p:ph idx="1"/>
+          </p:nvPr>
+        </p:nvSpPr>
+        <p:spPr/>
+        <p:txBody>
+          <a:bodyPr/>
+          <a:lstStyle/>
+          <a:p>
+            <a:r>
+              <a:t>Major deployment of AI agent technology in military operations, representing</a:t>
+            </a:r>
+          </a:p>
+          <a:p>
+            <a:pPr/>
+            <a:r>
+              <a:t>high-stakes real-world application with significant implications for autonomous</a:t>
+            </a:r>
+          </a:p>
+          <a:p>
+            <a:pPr/>
+            <a:r>
+              <a:t>decision-making in critical scenarios.</a:t>
+            </a:r>
+          </a:p>
+          <a:p>
+            <a:pPr/>
+          </a:p>
+          <a:p>
+            <a:pPr/>
+            <a:r>
+              <a:t>📍 r/artificial • 260 upvotes • 125 comments</a:t>
+            </a:r>
+          </a:p>
+          <a:p>
+            <a:pPr/>
+            <a:r>
+              <a:t>🔗 https://reddit.com/r/artificial/comments/1piors1/pete_hegseth_says_...</a:t>
+            </a:r>
+          </a:p>
+        </p:txBody>
+      </p:sp>
+      <p:sp>
+        <p:nvSpPr>
+          <p:cNvPr id="4" name="Rectangle 3"/>
+          <p:cNvSpPr/>
+          <p:nvPr/>
+        </p:nvSpPr>
+        <p:spPr>
+          <a:xfrm>
+            <a:off x="274320" y="731520"/>
+            <a:ext cx="365760" cy="365760"/>
+          </a:xfrm>
+          <a:prstGeom prst="rect">
+            <a:avLst/>
+          </a:prstGeom>
+          <a:solidFill>
+            <a:srgbClr val="3498DB"/>
+          </a:solidFill>
+        </p:spPr>
+        <p:style>
+          <a:lnRef idx="1">
+            <a:schemeClr val="accent1"/>
+          </a:lnRef>
+          <a:fillRef idx="3">
+            <a:schemeClr val="accent1"/>
+          </a:fillRef>
+          <a:effectRef idx="2">
+            <a:schemeClr val="accent1"/>
+          </a:effectRef>
+          <a:fontRef idx="minor">
+            <a:schemeClr val="lt1"/>
+          </a:fontRef>
+        </p:style>
+        <p:txBody>
+          <a:bodyPr rtlCol="0" anchor="ctr"/>
+          <a:lstStyle/>
+          <a:p>
+            <a:pPr algn="ctr"/>
+          </a:p>
+        </p:txBody>
+      </p:sp>
+      <p:sp>
+        <p:nvSpPr>
+          <p:cNvPr id="5" name="TextBox 4"/>
+          <p:cNvSpPr txBox="1"/>
+          <p:nvPr/>
+        </p:nvSpPr>
+        <p:spPr>
+          <a:xfrm>
+            <a:off x="457200" y="6400800"/>
+            <a:ext cx="7315200" cy="274320"/>
+          </a:xfrm>
+          <a:prstGeom prst="rect">
+            <a:avLst/>
+          </a:prstGeom>
+          <a:noFill/>
+        </p:spPr>
+        <p:txBody>
+          <a:bodyPr wrap="none">
+            <a:spAutoFit/>
+          </a:bodyPr>
+          <a:lstStyle/>
+          <a:p>
+            <a:pPr algn="ctr">
+              <a:defRPr sz="1000"/>
+            </a:pPr>
+            <a:r>
+              <a:t>Slide 15</a:t>
+            </a:r>
+          </a:p>
+        </p:txBody>
+      </p:sp>
+    </p:spTree>
+  </p:cSld>
+  <p:clrMapOvr>
+    <a:masterClrMapping/>
+  </p:clrMapOvr>
+</p:sld>
+</file>
+
+<file path=ppt/slides/slide16.xml><?xml version="1.0" encoding="utf-8"?>
 <p:sld xmlns:a="http://schemas.openxmlformats.org/drawingml/2006/main" xmlns:p="http://schemas.openxmlformats.org/presentationml/2006/main" xmlns:r="http://schemas.openxmlformats.org/officeDocument/2006/relationships">
   <p:cSld>
     <p:bg>
@@ -4536,392 +4420,98 @@
       <p:grpSpPr/>
       <p:sp>
         <p:nvSpPr>
-          <p:cNvPr id="2" name="TextBox 1"/>
-          <p:cNvSpPr txBox="1"/>
+          <p:cNvPr id="2" name="Title 1"/>
+          <p:cNvSpPr>
+            <a:spLocks noGrp="1"/>
+          </p:cNvSpPr>
+          <p:nvPr>
+            <p:ph type="title"/>
+          </p:nvPr>
+        </p:nvSpPr>
+        <p:spPr/>
+        <p:txBody>
+          <a:bodyPr/>
+          <a:lstStyle/>
+          <a:p>
+            <a:r>
+              <a:t>🛠️ Tools &amp; Frameworks</a:t>
+            </a:r>
+          </a:p>
+        </p:txBody>
+      </p:sp>
+      <p:sp>
+        <p:nvSpPr>
+          <p:cNvPr id="3" name="Content Placeholder 2"/>
+          <p:cNvSpPr>
+            <a:spLocks noGrp="1"/>
+          </p:cNvSpPr>
+          <p:nvPr>
+            <p:ph idx="1"/>
+          </p:nvPr>
+        </p:nvSpPr>
+        <p:spPr/>
+        <p:txBody>
+          <a:bodyPr/>
+          <a:lstStyle/>
+          <a:p>
+            <a:r>
+              <a:t>4 key updates this week</a:t>
+            </a:r>
+          </a:p>
+          <a:p>
+            <a:pPr/>
+          </a:p>
+          <a:p>
+            <a:pPr/>
+            <a:r>
+              <a:t>→ Swipe to explore</a:t>
+            </a:r>
+          </a:p>
+        </p:txBody>
+      </p:sp>
+      <p:sp>
+        <p:nvSpPr>
+          <p:cNvPr id="4" name="Isosceles Triangle 3"/>
+          <p:cNvSpPr/>
           <p:nvPr/>
         </p:nvSpPr>
         <p:spPr>
           <a:xfrm>
-            <a:off x="457200" y="457200"/>
-            <a:ext cx="8229600" cy="685800"/>
-          </a:xfrm>
-          <a:prstGeom prst="rect">
-            <a:avLst/>
-          </a:prstGeom>
-          <a:noFill/>
-        </p:spPr>
-        <p:txBody>
-          <a:bodyPr wrap="none">
-            <a:spAutoFit/>
-          </a:bodyPr>
-          <a:lstStyle/>
-          <a:p>
-            <a:pPr>
-              <a:defRPr sz="3200" b="1"/>
-            </a:pPr>
-            <a:r>
-              <a:t>Tools &amp; Frameworks</a:t>
-            </a:r>
-          </a:p>
-        </p:txBody>
-      </p:sp>
-      <p:sp>
-        <p:nvSpPr>
-          <p:cNvPr id="3" name="TextBox 2"/>
-          <p:cNvSpPr txBox="1"/>
-          <p:nvPr/>
-        </p:nvSpPr>
-        <p:spPr>
-          <a:xfrm>
-            <a:off x="457200" y="1371600"/>
-            <a:ext cx="8229600" cy="685800"/>
-          </a:xfrm>
-          <a:prstGeom prst="rect">
-            <a:avLst/>
-          </a:prstGeom>
-          <a:noFill/>
-        </p:spPr>
-        <p:txBody>
-          <a:bodyPr wrap="none">
-            <a:spAutoFit/>
-          </a:bodyPr>
-          <a:lstStyle/>
-          <a:p>
-            <a:pPr>
-              <a:defRPr sz="2000" b="1">
-                <a:solidFill>
-                  <a:srgbClr val="FFFFFF"/>
-                </a:solidFill>
-              </a:defRPr>
-            </a:pPr>
-            <a:r>
-              <a:t>4 key updates</a:t>
-            </a:r>
-          </a:p>
-        </p:txBody>
-      </p:sp>
-      <p:sp>
-        <p:nvSpPr>
-          <p:cNvPr id="4" name="TextBox 3"/>
-          <p:cNvSpPr txBox="1"/>
-          <p:nvPr/>
-        </p:nvSpPr>
-        <p:spPr>
-          <a:xfrm>
-            <a:off x="457200" y="2057400"/>
-            <a:ext cx="8229600" cy="685800"/>
-          </a:xfrm>
-          <a:prstGeom prst="rect">
-            <a:avLst/>
-          </a:prstGeom>
-          <a:noFill/>
-        </p:spPr>
-        <p:txBody>
-          <a:bodyPr wrap="none">
-            <a:spAutoFit/>
-          </a:bodyPr>
-          <a:lstStyle/>
-          <a:p>
-            <a:pPr>
-              <a:defRPr sz="1200"/>
-            </a:pPr>
+            <a:off x="7315200" y="4572000"/>
+            <a:ext cx="1371600" cy="1371600"/>
+          </a:xfrm>
+          <a:prstGeom prst="triangle">
+            <a:avLst/>
+          </a:prstGeom>
+          <a:solidFill>
+            <a:srgbClr val="FFFFFF"/>
+          </a:solidFill>
+        </p:spPr>
+        <p:style>
+          <a:lnRef idx="1">
+            <a:schemeClr val="accent1"/>
+          </a:lnRef>
+          <a:fillRef idx="3">
+            <a:schemeClr val="accent1"/>
+          </a:fillRef>
+          <a:effectRef idx="2">
+            <a:schemeClr val="accent1"/>
+          </a:effectRef>
+          <a:fontRef idx="minor">
+            <a:schemeClr val="lt1"/>
+          </a:fontRef>
+        </p:style>
+        <p:txBody>
+          <a:bodyPr rtlCol="0" anchor="ctr"/>
+          <a:lstStyle/>
+          <a:p>
+            <a:pPr algn="ctr"/>
           </a:p>
         </p:txBody>
       </p:sp>
       <p:sp>
         <p:nvSpPr>
           <p:cNvPr id="5" name="TextBox 4"/>
-          <p:cNvSpPr txBox="1"/>
-          <p:nvPr/>
-        </p:nvSpPr>
-        <p:spPr>
-          <a:xfrm>
-            <a:off x="457200" y="2743200"/>
-            <a:ext cx="8229600" cy="685800"/>
-          </a:xfrm>
-          <a:prstGeom prst="rect">
-            <a:avLst/>
-          </a:prstGeom>
-          <a:noFill/>
-        </p:spPr>
-        <p:txBody>
-          <a:bodyPr wrap="none">
-            <a:spAutoFit/>
-          </a:bodyPr>
-          <a:lstStyle/>
-          <a:p>
-            <a:pPr>
-              <a:defRPr sz="1600" i="1">
-                <a:solidFill>
-                  <a:srgbClr val="FFFFFF"/>
-                </a:solidFill>
-              </a:defRPr>
-            </a:pPr>
-            <a:r>
-              <a:t>Swipe to explore →</a:t>
-            </a:r>
-          </a:p>
-        </p:txBody>
-      </p:sp>
-      <p:sp>
-        <p:nvSpPr>
-          <p:cNvPr id="6" name="TextBox 5"/>
-          <p:cNvSpPr txBox="1"/>
-          <p:nvPr/>
-        </p:nvSpPr>
-        <p:spPr>
-          <a:xfrm>
-            <a:off x="457200" y="6400800"/>
-            <a:ext cx="7315200" cy="274320"/>
-          </a:xfrm>
-          <a:prstGeom prst="rect">
-            <a:avLst/>
-          </a:prstGeom>
-          <a:noFill/>
-        </p:spPr>
-        <p:txBody>
-          <a:bodyPr wrap="none">
-            <a:spAutoFit/>
-          </a:bodyPr>
-          <a:lstStyle/>
-          <a:p>
-            <a:pPr algn="ctr">
-              <a:defRPr sz="1000"/>
-            </a:pPr>
-            <a:r>
-              <a:t>Slide 15</a:t>
-            </a:r>
-          </a:p>
-        </p:txBody>
-      </p:sp>
-    </p:spTree>
-  </p:cSld>
-  <p:clrMapOvr>
-    <a:masterClrMapping/>
-  </p:clrMapOvr>
-</p:sld>
-</file>
-
-<file path=ppt/slides/slide16.xml><?xml version="1.0" encoding="utf-8"?>
-<p:sld xmlns:a="http://schemas.openxmlformats.org/drawingml/2006/main" xmlns:p="http://schemas.openxmlformats.org/presentationml/2006/main" xmlns:r="http://schemas.openxmlformats.org/officeDocument/2006/relationships">
-  <p:cSld>
-    <p:bg>
-      <p:bgPr>
-        <a:solidFill>
-          <a:srgbClr val="F8F9FA"/>
-        </a:solidFill>
-        <a:effectLst/>
-      </p:bgPr>
-    </p:bg>
-    <p:spTree>
-      <p:nvGrpSpPr>
-        <p:cNvPr id="1" name=""/>
-        <p:cNvGrpSpPr/>
-        <p:nvPr/>
-      </p:nvGrpSpPr>
-      <p:grpSpPr/>
-      <p:sp>
-        <p:nvSpPr>
-          <p:cNvPr id="2" name="TextBox 1"/>
-          <p:cNvSpPr txBox="1"/>
-          <p:nvPr/>
-        </p:nvSpPr>
-        <p:spPr>
-          <a:xfrm>
-            <a:off x="457200" y="457200"/>
-            <a:ext cx="8229600" cy="685800"/>
-          </a:xfrm>
-          <a:prstGeom prst="rect">
-            <a:avLst/>
-          </a:prstGeom>
-          <a:noFill/>
-        </p:spPr>
-        <p:txBody>
-          <a:bodyPr wrap="none">
-            <a:spAutoFit/>
-          </a:bodyPr>
-          <a:lstStyle/>
-          <a:p>
-            <a:pPr>
-              <a:defRPr sz="3200" b="1"/>
-            </a:pPr>
-            <a:r>
-              <a:t>1. OpenAI are quietly adopting skills, now available in ChatGPT and Codex CLI</a:t>
-            </a:r>
-          </a:p>
-        </p:txBody>
-      </p:sp>
-      <p:sp>
-        <p:nvSpPr>
-          <p:cNvPr id="3" name="TextBox 2"/>
-          <p:cNvSpPr txBox="1"/>
-          <p:nvPr/>
-        </p:nvSpPr>
-        <p:spPr>
-          <a:xfrm>
-            <a:off x="457200" y="1371600"/>
-            <a:ext cx="8229600" cy="685800"/>
-          </a:xfrm>
-          <a:prstGeom prst="rect">
-            <a:avLst/>
-          </a:prstGeom>
-          <a:noFill/>
-        </p:spPr>
-        <p:txBody>
-          <a:bodyPr wrap="none">
-            <a:spAutoFit/>
-          </a:bodyPr>
-          <a:lstStyle/>
-          <a:p>
-            <a:pPr>
-              <a:defRPr sz="1300">
-                <a:solidFill>
-                  <a:srgbClr val="333333"/>
-                </a:solidFill>
-              </a:defRPr>
-            </a:pPr>
-            <a:r>
-              <a:t>OpenAI's skills system provides a framework for extending agent capabilities through</a:t>
-            </a:r>
-          </a:p>
-        </p:txBody>
-      </p:sp>
-      <p:sp>
-        <p:nvSpPr>
-          <p:cNvPr id="4" name="TextBox 3"/>
-          <p:cNvSpPr txBox="1"/>
-          <p:nvPr/>
-        </p:nvSpPr>
-        <p:spPr>
-          <a:xfrm>
-            <a:off x="457200" y="2057400"/>
-            <a:ext cx="8229600" cy="685800"/>
-          </a:xfrm>
-          <a:prstGeom prst="rect">
-            <a:avLst/>
-          </a:prstGeom>
-          <a:noFill/>
-        </p:spPr>
-        <p:txBody>
-          <a:bodyPr wrap="none">
-            <a:spAutoFit/>
-          </a:bodyPr>
-          <a:lstStyle/>
-          <a:p>
-            <a:pPr>
-              <a:defRPr sz="1300">
-                <a:solidFill>
-                  <a:srgbClr val="333333"/>
-                </a:solidFill>
-              </a:defRPr>
-            </a:pPr>
-            <a:r>
-              <a:t>composable, reusable tool definitions accessible via CLI and chat interfaces.</a:t>
-            </a:r>
-          </a:p>
-        </p:txBody>
-      </p:sp>
-      <p:sp>
-        <p:nvSpPr>
-          <p:cNvPr id="5" name="TextBox 4"/>
-          <p:cNvSpPr txBox="1"/>
-          <p:nvPr/>
-        </p:nvSpPr>
-        <p:spPr>
-          <a:xfrm>
-            <a:off x="457200" y="2743200"/>
-            <a:ext cx="8229600" cy="685800"/>
-          </a:xfrm>
-          <a:prstGeom prst="rect">
-            <a:avLst/>
-          </a:prstGeom>
-          <a:noFill/>
-        </p:spPr>
-        <p:txBody>
-          <a:bodyPr wrap="none">
-            <a:spAutoFit/>
-          </a:bodyPr>
-          <a:lstStyle/>
-          <a:p>
-            <a:pPr>
-              <a:defRPr sz="1000"/>
-            </a:pPr>
-          </a:p>
-        </p:txBody>
-      </p:sp>
-      <p:sp>
-        <p:nvSpPr>
-          <p:cNvPr id="6" name="TextBox 5"/>
-          <p:cNvSpPr txBox="1"/>
-          <p:nvPr/>
-        </p:nvSpPr>
-        <p:spPr>
-          <a:xfrm>
-            <a:off x="457200" y="3429000"/>
-            <a:ext cx="8229600" cy="685800"/>
-          </a:xfrm>
-          <a:prstGeom prst="rect">
-            <a:avLst/>
-          </a:prstGeom>
-          <a:noFill/>
-        </p:spPr>
-        <p:txBody>
-          <a:bodyPr wrap="none">
-            <a:spAutoFit/>
-          </a:bodyPr>
-          <a:lstStyle/>
-          <a:p>
-            <a:pPr>
-              <a:defRPr sz="1000" i="1">
-                <a:solidFill>
-                  <a:srgbClr val="666666"/>
-                </a:solidFill>
-              </a:defRPr>
-            </a:pPr>
-            <a:r>
-              <a:t>Source: Hacker News • 568 points • 313 comments</a:t>
-            </a:r>
-          </a:p>
-        </p:txBody>
-      </p:sp>
-      <p:sp>
-        <p:nvSpPr>
-          <p:cNvPr id="7" name="TextBox 6"/>
-          <p:cNvSpPr txBox="1"/>
-          <p:nvPr/>
-        </p:nvSpPr>
-        <p:spPr>
-          <a:xfrm>
-            <a:off x="457200" y="4114800"/>
-            <a:ext cx="8229600" cy="685800"/>
-          </a:xfrm>
-          <a:prstGeom prst="rect">
-            <a:avLst/>
-          </a:prstGeom>
-          <a:noFill/>
-        </p:spPr>
-        <p:txBody>
-          <a:bodyPr wrap="none">
-            <a:spAutoFit/>
-          </a:bodyPr>
-          <a:lstStyle/>
-          <a:p>
-            <a:pPr>
-              <a:defRPr sz="900">
-                <a:solidFill>
-                  <a:srgbClr val="3498DB"/>
-                </a:solidFill>
-              </a:defRPr>
-            </a:pPr>
-            <a:r>
-              <a:t>🔗 https://simonwillison.net/2025/Dec/12/openai-skills/</a:t>
-            </a:r>
-          </a:p>
-        </p:txBody>
-      </p:sp>
-      <p:sp>
-        <p:nvSpPr>
-          <p:cNvPr id="8" name="TextBox 7"/>
           <p:cNvSpPr txBox="1"/>
           <p:nvPr/>
         </p:nvSpPr>
@@ -4978,206 +4568,110 @@
       <p:grpSpPr/>
       <p:sp>
         <p:nvSpPr>
-          <p:cNvPr id="2" name="TextBox 1"/>
-          <p:cNvSpPr txBox="1"/>
+          <p:cNvPr id="2" name="Title 1"/>
+          <p:cNvSpPr>
+            <a:spLocks noGrp="1"/>
+          </p:cNvSpPr>
+          <p:nvPr>
+            <p:ph type="title"/>
+          </p:nvPr>
+        </p:nvSpPr>
+        <p:spPr/>
+        <p:txBody>
+          <a:bodyPr/>
+          <a:lstStyle/>
+          <a:p>
+            <a:r>
+              <a:t>1. Introducing: Devstral 2 and Mistral Vibe CLI</a:t>
+            </a:r>
+          </a:p>
+        </p:txBody>
+      </p:sp>
+      <p:sp>
+        <p:nvSpPr>
+          <p:cNvPr id="3" name="Content Placeholder 2"/>
+          <p:cNvSpPr>
+            <a:spLocks noGrp="1"/>
+          </p:cNvSpPr>
+          <p:nvPr>
+            <p:ph idx="1"/>
+          </p:nvPr>
+        </p:nvSpPr>
+        <p:spPr/>
+        <p:txBody>
+          <a:bodyPr/>
+          <a:lstStyle/>
+          <a:p>
+            <a:r>
+              <a:t>Mistral launches new developer-focused model and CLI tool, expanding the ecosystem of</a:t>
+            </a:r>
+          </a:p>
+          <a:p>
+            <a:pPr/>
+            <a:r>
+              <a:t>frameworks for building coding agents with improved tool integration.</a:t>
+            </a:r>
+          </a:p>
+          <a:p>
+            <a:pPr/>
+          </a:p>
+          <a:p>
+            <a:pPr/>
+            <a:r>
+              <a:t>📍 r/LocalLLaMA • 688 upvotes • 218 comments</a:t>
+            </a:r>
+          </a:p>
+          <a:p>
+            <a:pPr/>
+            <a:r>
+              <a:t>🔗 https://reddit.com/r/LocalLLaMA/comments/1pi9q3t/introducing_devstr...</a:t>
+            </a:r>
+          </a:p>
+        </p:txBody>
+      </p:sp>
+      <p:sp>
+        <p:nvSpPr>
+          <p:cNvPr id="4" name="Rectangle 3"/>
+          <p:cNvSpPr/>
           <p:nvPr/>
         </p:nvSpPr>
         <p:spPr>
           <a:xfrm>
-            <a:off x="457200" y="457200"/>
-            <a:ext cx="8229600" cy="685800"/>
+            <a:off x="274320" y="731520"/>
+            <a:ext cx="365760" cy="365760"/>
           </a:xfrm>
           <a:prstGeom prst="rect">
             <a:avLst/>
           </a:prstGeom>
-          <a:noFill/>
-        </p:spPr>
-        <p:txBody>
-          <a:bodyPr wrap="none">
-            <a:spAutoFit/>
-          </a:bodyPr>
-          <a:lstStyle/>
-          <a:p>
-            <a:pPr>
-              <a:defRPr sz="3200" b="1"/>
-            </a:pPr>
-            <a:r>
-              <a:t>2. Introducing: Devstral 2 and Mistral Vibe CLI</a:t>
-            </a:r>
-          </a:p>
-        </p:txBody>
-      </p:sp>
-      <p:sp>
-        <p:nvSpPr>
-          <p:cNvPr id="3" name="TextBox 2"/>
-          <p:cNvSpPr txBox="1"/>
-          <p:nvPr/>
-        </p:nvSpPr>
-        <p:spPr>
-          <a:xfrm>
-            <a:off x="457200" y="1371600"/>
-            <a:ext cx="8229600" cy="685800"/>
-          </a:xfrm>
-          <a:prstGeom prst="rect">
-            <a:avLst/>
-          </a:prstGeom>
-          <a:noFill/>
-        </p:spPr>
-        <p:txBody>
-          <a:bodyPr wrap="none">
-            <a:spAutoFit/>
-          </a:bodyPr>
-          <a:lstStyle/>
-          <a:p>
-            <a:pPr>
-              <a:defRPr sz="1300">
-                <a:solidFill>
-                  <a:srgbClr val="333333"/>
-                </a:solidFill>
-              </a:defRPr>
-            </a:pPr>
-            <a:r>
-              <a:t>Mistral's new CLI framework enables local agent deployment with development-focused</a:t>
-            </a:r>
-          </a:p>
-        </p:txBody>
-      </p:sp>
-      <p:sp>
-        <p:nvSpPr>
-          <p:cNvPr id="4" name="TextBox 3"/>
-          <p:cNvSpPr txBox="1"/>
-          <p:nvPr/>
-        </p:nvSpPr>
-        <p:spPr>
-          <a:xfrm>
-            <a:off x="457200" y="2057400"/>
-            <a:ext cx="8229600" cy="685800"/>
-          </a:xfrm>
-          <a:prstGeom prst="rect">
-            <a:avLst/>
-          </a:prstGeom>
-          <a:noFill/>
-        </p:spPr>
-        <p:txBody>
-          <a:bodyPr wrap="none">
-            <a:spAutoFit/>
-          </a:bodyPr>
-          <a:lstStyle/>
-          <a:p>
-            <a:pPr>
-              <a:defRPr sz="1300">
-                <a:solidFill>
-                  <a:srgbClr val="333333"/>
-                </a:solidFill>
-              </a:defRPr>
-            </a:pPr>
-            <a:r>
-              <a:t>capabilities, competing directly with OpenAI's tooling ecosystem.</a:t>
-            </a:r>
+          <a:solidFill>
+            <a:srgbClr val="1ABC9C"/>
+          </a:solidFill>
+        </p:spPr>
+        <p:style>
+          <a:lnRef idx="1">
+            <a:schemeClr val="accent1"/>
+          </a:lnRef>
+          <a:fillRef idx="3">
+            <a:schemeClr val="accent1"/>
+          </a:fillRef>
+          <a:effectRef idx="2">
+            <a:schemeClr val="accent1"/>
+          </a:effectRef>
+          <a:fontRef idx="minor">
+            <a:schemeClr val="lt1"/>
+          </a:fontRef>
+        </p:style>
+        <p:txBody>
+          <a:bodyPr rtlCol="0" anchor="ctr"/>
+          <a:lstStyle/>
+          <a:p>
+            <a:pPr algn="ctr"/>
           </a:p>
         </p:txBody>
       </p:sp>
       <p:sp>
         <p:nvSpPr>
           <p:cNvPr id="5" name="TextBox 4"/>
-          <p:cNvSpPr txBox="1"/>
-          <p:nvPr/>
-        </p:nvSpPr>
-        <p:spPr>
-          <a:xfrm>
-            <a:off x="457200" y="2743200"/>
-            <a:ext cx="8229600" cy="685800"/>
-          </a:xfrm>
-          <a:prstGeom prst="rect">
-            <a:avLst/>
-          </a:prstGeom>
-          <a:noFill/>
-        </p:spPr>
-        <p:txBody>
-          <a:bodyPr wrap="none">
-            <a:spAutoFit/>
-          </a:bodyPr>
-          <a:lstStyle/>
-          <a:p>
-            <a:pPr>
-              <a:defRPr sz="1000"/>
-            </a:pPr>
-          </a:p>
-        </p:txBody>
-      </p:sp>
-      <p:sp>
-        <p:nvSpPr>
-          <p:cNvPr id="6" name="TextBox 5"/>
-          <p:cNvSpPr txBox="1"/>
-          <p:nvPr/>
-        </p:nvSpPr>
-        <p:spPr>
-          <a:xfrm>
-            <a:off x="457200" y="3429000"/>
-            <a:ext cx="8229600" cy="685800"/>
-          </a:xfrm>
-          <a:prstGeom prst="rect">
-            <a:avLst/>
-          </a:prstGeom>
-          <a:noFill/>
-        </p:spPr>
-        <p:txBody>
-          <a:bodyPr wrap="none">
-            <a:spAutoFit/>
-          </a:bodyPr>
-          <a:lstStyle/>
-          <a:p>
-            <a:pPr>
-              <a:defRPr sz="1000" i="1">
-                <a:solidFill>
-                  <a:srgbClr val="666666"/>
-                </a:solidFill>
-              </a:defRPr>
-            </a:pPr>
-            <a:r>
-              <a:t>Source: r/LocalLLaMA • 686 upvotes • 218 comments</a:t>
-            </a:r>
-          </a:p>
-        </p:txBody>
-      </p:sp>
-      <p:sp>
-        <p:nvSpPr>
-          <p:cNvPr id="7" name="TextBox 6"/>
-          <p:cNvSpPr txBox="1"/>
-          <p:nvPr/>
-        </p:nvSpPr>
-        <p:spPr>
-          <a:xfrm>
-            <a:off x="457200" y="4114800"/>
-            <a:ext cx="8229600" cy="685800"/>
-          </a:xfrm>
-          <a:prstGeom prst="rect">
-            <a:avLst/>
-          </a:prstGeom>
-          <a:noFill/>
-        </p:spPr>
-        <p:txBody>
-          <a:bodyPr wrap="none">
-            <a:spAutoFit/>
-          </a:bodyPr>
-          <a:lstStyle/>
-          <a:p>
-            <a:pPr>
-              <a:defRPr sz="900">
-                <a:solidFill>
-                  <a:srgbClr val="3498DB"/>
-                </a:solidFill>
-              </a:defRPr>
-            </a:pPr>
-            <a:r>
-              <a:t>🔗 https://reddit.com/r/LocalLLaMA/comments/1pi9q3t/introduc...</a:t>
-            </a:r>
-          </a:p>
-        </p:txBody>
-      </p:sp>
-      <p:sp>
-        <p:nvSpPr>
-          <p:cNvPr id="8" name="TextBox 7"/>
           <p:cNvSpPr txBox="1"/>
           <p:nvPr/>
         </p:nvSpPr>
@@ -5234,206 +4728,110 @@
       <p:grpSpPr/>
       <p:sp>
         <p:nvSpPr>
-          <p:cNvPr id="2" name="TextBox 1"/>
-          <p:cNvSpPr txBox="1"/>
+          <p:cNvPr id="2" name="Title 1"/>
+          <p:cNvSpPr>
+            <a:spLocks noGrp="1"/>
+          </p:cNvSpPr>
+          <p:nvPr>
+            <p:ph type="title"/>
+          </p:nvPr>
+        </p:nvSpPr>
+        <p:spPr/>
+        <p:txBody>
+          <a:bodyPr/>
+          <a:lstStyle/>
+          <a:p>
+            <a:r>
+              <a:t>2. You can now train LLMs 3x faster with 30% less memory! (&lt;3.9GB VRAM)</a:t>
+            </a:r>
+          </a:p>
+        </p:txBody>
+      </p:sp>
+      <p:sp>
+        <p:nvSpPr>
+          <p:cNvPr id="3" name="Content Placeholder 2"/>
+          <p:cNvSpPr>
+            <a:spLocks noGrp="1"/>
+          </p:cNvSpPr>
+          <p:nvPr>
+            <p:ph idx="1"/>
+          </p:nvPr>
+        </p:nvSpPr>
+        <p:spPr/>
+        <p:txBody>
+          <a:bodyPr/>
+          <a:lstStyle/>
+          <a:p>
+            <a:r>
+              <a:t>Breakthrough in memory-efficient training enables fine-tuning agent models on</a:t>
+            </a:r>
+          </a:p>
+          <a:p>
+            <a:pPr/>
+            <a:r>
+              <a:t>consumer hardware, democratizing development of specialized autonomous agents.</a:t>
+            </a:r>
+          </a:p>
+          <a:p>
+            <a:pPr/>
+          </a:p>
+          <a:p>
+            <a:pPr/>
+            <a:r>
+              <a:t>📍 r/LocalLLaMA • 1025 upvotes • 114 comments</a:t>
+            </a:r>
+          </a:p>
+          <a:p>
+            <a:pPr/>
+            <a:r>
+              <a:t>🔗 https://reddit.com/r/LocalLLaMA/comments/1pj51tu/you_can_now_train_...</a:t>
+            </a:r>
+          </a:p>
+        </p:txBody>
+      </p:sp>
+      <p:sp>
+        <p:nvSpPr>
+          <p:cNvPr id="4" name="Oval 3"/>
+          <p:cNvSpPr/>
           <p:nvPr/>
         </p:nvSpPr>
         <p:spPr>
           <a:xfrm>
-            <a:off x="457200" y="457200"/>
-            <a:ext cx="8229600" cy="685800"/>
-          </a:xfrm>
-          <a:prstGeom prst="rect">
-            <a:avLst/>
-          </a:prstGeom>
-          <a:noFill/>
-        </p:spPr>
-        <p:txBody>
-          <a:bodyPr wrap="none">
-            <a:spAutoFit/>
-          </a:bodyPr>
-          <a:lstStyle/>
-          <a:p>
-            <a:pPr>
-              <a:defRPr sz="3200" b="1"/>
-            </a:pPr>
-            <a:r>
-              <a:t>3. You can now train LLMs 3x faster with 30% less memory! (&lt;3.9GB VRAM)</a:t>
-            </a:r>
-          </a:p>
-        </p:txBody>
-      </p:sp>
-      <p:sp>
-        <p:nvSpPr>
-          <p:cNvPr id="3" name="TextBox 2"/>
-          <p:cNvSpPr txBox="1"/>
-          <p:nvPr/>
-        </p:nvSpPr>
-        <p:spPr>
-          <a:xfrm>
-            <a:off x="457200" y="1371600"/>
-            <a:ext cx="8229600" cy="685800"/>
-          </a:xfrm>
-          <a:prstGeom prst="rect">
-            <a:avLst/>
-          </a:prstGeom>
-          <a:noFill/>
-        </p:spPr>
-        <p:txBody>
-          <a:bodyPr wrap="none">
-            <a:spAutoFit/>
-          </a:bodyPr>
-          <a:lstStyle/>
-          <a:p>
-            <a:pPr>
-              <a:defRPr sz="1300">
-                <a:solidFill>
-                  <a:srgbClr val="333333"/>
-                </a:solidFill>
-              </a:defRPr>
-            </a:pPr>
-            <a:r>
-              <a:t>New memory optimization techniques dramatically lower the barrier to training and</a:t>
-            </a:r>
-          </a:p>
-        </p:txBody>
-      </p:sp>
-      <p:sp>
-        <p:nvSpPr>
-          <p:cNvPr id="4" name="TextBox 3"/>
-          <p:cNvSpPr txBox="1"/>
-          <p:nvPr/>
-        </p:nvSpPr>
-        <p:spPr>
-          <a:xfrm>
-            <a:off x="457200" y="2057400"/>
-            <a:ext cx="8229600" cy="685800"/>
-          </a:xfrm>
-          <a:prstGeom prst="rect">
-            <a:avLst/>
-          </a:prstGeom>
-          <a:noFill/>
-        </p:spPr>
-        <p:txBody>
-          <a:bodyPr wrap="none">
-            <a:spAutoFit/>
-          </a:bodyPr>
-          <a:lstStyle/>
-          <a:p>
-            <a:pPr>
-              <a:defRPr sz="1300">
-                <a:solidFill>
-                  <a:srgbClr val="333333"/>
-                </a:solidFill>
-              </a:defRPr>
-            </a:pPr>
-            <a:r>
-              <a:t>fine-tuning specialized agent models on consumer hardware.</a:t>
-            </a:r>
+            <a:off x="274320" y="731520"/>
+            <a:ext cx="365760" cy="365760"/>
+          </a:xfrm>
+          <a:prstGeom prst="ellipse">
+            <a:avLst/>
+          </a:prstGeom>
+          <a:solidFill>
+            <a:srgbClr val="1ABC9C"/>
+          </a:solidFill>
+        </p:spPr>
+        <p:style>
+          <a:lnRef idx="1">
+            <a:schemeClr val="accent1"/>
+          </a:lnRef>
+          <a:fillRef idx="3">
+            <a:schemeClr val="accent1"/>
+          </a:fillRef>
+          <a:effectRef idx="2">
+            <a:schemeClr val="accent1"/>
+          </a:effectRef>
+          <a:fontRef idx="minor">
+            <a:schemeClr val="lt1"/>
+          </a:fontRef>
+        </p:style>
+        <p:txBody>
+          <a:bodyPr rtlCol="0" anchor="ctr"/>
+          <a:lstStyle/>
+          <a:p>
+            <a:pPr algn="ctr"/>
           </a:p>
         </p:txBody>
       </p:sp>
       <p:sp>
         <p:nvSpPr>
           <p:cNvPr id="5" name="TextBox 4"/>
-          <p:cNvSpPr txBox="1"/>
-          <p:nvPr/>
-        </p:nvSpPr>
-        <p:spPr>
-          <a:xfrm>
-            <a:off x="457200" y="2743200"/>
-            <a:ext cx="8229600" cy="685800"/>
-          </a:xfrm>
-          <a:prstGeom prst="rect">
-            <a:avLst/>
-          </a:prstGeom>
-          <a:noFill/>
-        </p:spPr>
-        <p:txBody>
-          <a:bodyPr wrap="none">
-            <a:spAutoFit/>
-          </a:bodyPr>
-          <a:lstStyle/>
-          <a:p>
-            <a:pPr>
-              <a:defRPr sz="1000"/>
-            </a:pPr>
-          </a:p>
-        </p:txBody>
-      </p:sp>
-      <p:sp>
-        <p:nvSpPr>
-          <p:cNvPr id="6" name="TextBox 5"/>
-          <p:cNvSpPr txBox="1"/>
-          <p:nvPr/>
-        </p:nvSpPr>
-        <p:spPr>
-          <a:xfrm>
-            <a:off x="457200" y="3429000"/>
-            <a:ext cx="8229600" cy="685800"/>
-          </a:xfrm>
-          <a:prstGeom prst="rect">
-            <a:avLst/>
-          </a:prstGeom>
-          <a:noFill/>
-        </p:spPr>
-        <p:txBody>
-          <a:bodyPr wrap="none">
-            <a:spAutoFit/>
-          </a:bodyPr>
-          <a:lstStyle/>
-          <a:p>
-            <a:pPr>
-              <a:defRPr sz="1000" i="1">
-                <a:solidFill>
-                  <a:srgbClr val="666666"/>
-                </a:solidFill>
-              </a:defRPr>
-            </a:pPr>
-            <a:r>
-              <a:t>Source: r/LocalLLaMA • 1020 upvotes • 114 comments</a:t>
-            </a:r>
-          </a:p>
-        </p:txBody>
-      </p:sp>
-      <p:sp>
-        <p:nvSpPr>
-          <p:cNvPr id="7" name="TextBox 6"/>
-          <p:cNvSpPr txBox="1"/>
-          <p:nvPr/>
-        </p:nvSpPr>
-        <p:spPr>
-          <a:xfrm>
-            <a:off x="457200" y="4114800"/>
-            <a:ext cx="8229600" cy="685800"/>
-          </a:xfrm>
-          <a:prstGeom prst="rect">
-            <a:avLst/>
-          </a:prstGeom>
-          <a:noFill/>
-        </p:spPr>
-        <p:txBody>
-          <a:bodyPr wrap="none">
-            <a:spAutoFit/>
-          </a:bodyPr>
-          <a:lstStyle/>
-          <a:p>
-            <a:pPr>
-              <a:defRPr sz="900">
-                <a:solidFill>
-                  <a:srgbClr val="3498DB"/>
-                </a:solidFill>
-              </a:defRPr>
-            </a:pPr>
-            <a:r>
-              <a:t>🔗 https://reddit.com/r/LocalLLaMA/comments/1pj51tu/you_can_...</a:t>
-            </a:r>
-          </a:p>
-        </p:txBody>
-      </p:sp>
-      <p:sp>
-        <p:nvSpPr>
-          <p:cNvPr id="8" name="TextBox 7"/>
           <p:cNvSpPr txBox="1"/>
           <p:nvPr/>
         </p:nvSpPr>
@@ -5514,7 +4912,7 @@
               <a:defRPr sz="3200" b="1"/>
             </a:pPr>
             <a:r>
-              <a:t>4. Claude CLI deleted my home directory and wiped my Mac</a:t>
+              <a:t>3. Mistral AI drops 3x as many LLMs in a single week as OpenAI did in ...</a:t>
             </a:r>
           </a:p>
         </p:txBody>
@@ -5528,7 +4926,7 @@
         <p:spPr>
           <a:xfrm>
             <a:off x="457200" y="1371600"/>
-            <a:ext cx="8229600" cy="685800"/>
+            <a:ext cx="3657600" cy="4114800"/>
           </a:xfrm>
           <a:prstGeom prst="rect">
             <a:avLst/>
@@ -5541,15 +4939,8 @@
           </a:bodyPr>
           <a:lstStyle/>
           <a:p>
-            <a:pPr>
-              <a:defRPr sz="1300">
-                <a:solidFill>
-                  <a:srgbClr val="333333"/>
-                </a:solidFill>
-              </a:defRPr>
-            </a:pPr>
-            <a:r>
-              <a:t>Reveals critical safety gaps in current CLI agent frameworks, highlighting the need for</a:t>
+            <a:r>
+              <a:t>Rapid release of multiple model variants provides diverse foundation options for</a:t>
             </a:r>
           </a:p>
         </p:txBody>
@@ -5562,8 +4953,8 @@
         </p:nvSpPr>
         <p:spPr>
           <a:xfrm>
-            <a:off x="457200" y="2057400"/>
-            <a:ext cx="8229600" cy="685800"/>
+            <a:off x="5029200" y="1371600"/>
+            <a:ext cx="3657600" cy="4114800"/>
           </a:xfrm>
           <a:prstGeom prst="rect">
             <a:avLst/>
@@ -5576,120 +4967,66 @@
           </a:bodyPr>
           <a:lstStyle/>
           <a:p>
-            <a:pPr>
-              <a:defRPr sz="1300">
-                <a:solidFill>
-                  <a:srgbClr val="333333"/>
-                </a:solidFill>
-              </a:defRPr>
-            </a:pPr>
-            <a:r>
-              <a:t>better permission systems and execution sandboxing in agent tools.</a:t>
-            </a:r>
-          </a:p>
-        </p:txBody>
-      </p:sp>
-      <p:sp>
-        <p:nvSpPr>
-          <p:cNvPr id="5" name="TextBox 4"/>
-          <p:cNvSpPr txBox="1"/>
+            <a:r>
+              <a:t>building specialized agents across different scales and capabilities.</a:t>
+            </a:r>
+          </a:p>
+          <a:p/>
+          <a:p>
+            <a:r>
+              <a:t>📍 r/LocalLLaMA • 843 upvotes • 112 comments</a:t>
+            </a:r>
+          </a:p>
+          <a:p>
+            <a:r>
+              <a:t>🔗 https://reddit.com/r/LocalLLaMA/comments/1pj8kb6/mistral_ai_drops_3...</a:t>
+            </a:r>
+          </a:p>
+        </p:txBody>
+      </p:sp>
+      <p:sp>
+        <p:nvSpPr>
+          <p:cNvPr id="5" name="Rectangle 4"/>
+          <p:cNvSpPr/>
           <p:nvPr/>
         </p:nvSpPr>
         <p:spPr>
           <a:xfrm>
-            <a:off x="457200" y="2743200"/>
-            <a:ext cx="8229600" cy="685800"/>
+            <a:off x="274320" y="731520"/>
+            <a:ext cx="365760" cy="365760"/>
           </a:xfrm>
           <a:prstGeom prst="rect">
             <a:avLst/>
           </a:prstGeom>
-          <a:noFill/>
-        </p:spPr>
-        <p:txBody>
-          <a:bodyPr wrap="none">
-            <a:spAutoFit/>
-          </a:bodyPr>
-          <a:lstStyle/>
-          <a:p>
-            <a:pPr>
-              <a:defRPr sz="1000"/>
-            </a:pPr>
+          <a:solidFill>
+            <a:srgbClr val="1ABC9C"/>
+          </a:solidFill>
+        </p:spPr>
+        <p:style>
+          <a:lnRef idx="1">
+            <a:schemeClr val="accent1"/>
+          </a:lnRef>
+          <a:fillRef idx="3">
+            <a:schemeClr val="accent1"/>
+          </a:fillRef>
+          <a:effectRef idx="2">
+            <a:schemeClr val="accent1"/>
+          </a:effectRef>
+          <a:fontRef idx="minor">
+            <a:schemeClr val="lt1"/>
+          </a:fontRef>
+        </p:style>
+        <p:txBody>
+          <a:bodyPr rtlCol="0" anchor="ctr"/>
+          <a:lstStyle/>
+          <a:p>
+            <a:pPr algn="ctr"/>
           </a:p>
         </p:txBody>
       </p:sp>
       <p:sp>
         <p:nvSpPr>
           <p:cNvPr id="6" name="TextBox 5"/>
-          <p:cNvSpPr txBox="1"/>
-          <p:nvPr/>
-        </p:nvSpPr>
-        <p:spPr>
-          <a:xfrm>
-            <a:off x="457200" y="3429000"/>
-            <a:ext cx="8229600" cy="685800"/>
-          </a:xfrm>
-          <a:prstGeom prst="rect">
-            <a:avLst/>
-          </a:prstGeom>
-          <a:noFill/>
-        </p:spPr>
-        <p:txBody>
-          <a:bodyPr wrap="none">
-            <a:spAutoFit/>
-          </a:bodyPr>
-          <a:lstStyle/>
-          <a:p>
-            <a:pPr>
-              <a:defRPr sz="1000" i="1">
-                <a:solidFill>
-                  <a:srgbClr val="666666"/>
-                </a:solidFill>
-              </a:defRPr>
-            </a:pPr>
-            <a:r>
-              <a:t>Source: Hacker News • 220 points • 179 comments</a:t>
-            </a:r>
-          </a:p>
-        </p:txBody>
-      </p:sp>
-      <p:sp>
-        <p:nvSpPr>
-          <p:cNvPr id="7" name="TextBox 6"/>
-          <p:cNvSpPr txBox="1"/>
-          <p:nvPr/>
-        </p:nvSpPr>
-        <p:spPr>
-          <a:xfrm>
-            <a:off x="457200" y="4114800"/>
-            <a:ext cx="8229600" cy="685800"/>
-          </a:xfrm>
-          <a:prstGeom prst="rect">
-            <a:avLst/>
-          </a:prstGeom>
-          <a:noFill/>
-        </p:spPr>
-        <p:txBody>
-          <a:bodyPr wrap="none">
-            <a:spAutoFit/>
-          </a:bodyPr>
-          <a:lstStyle/>
-          <a:p>
-            <a:pPr>
-              <a:defRPr sz="900">
-                <a:solidFill>
-                  <a:srgbClr val="3498DB"/>
-                </a:solidFill>
-              </a:defRPr>
-            </a:pPr>
-            <a:r>
-              <a:t>🔗 https://old.reddit.com/r/ClaudeAI/comments/1pgxckk/claude...</a:t>
-            </a:r>
-          </a:p>
-        </p:txBody>
-      </p:sp>
-      <p:sp>
-        <p:nvSpPr>
-          <p:cNvPr id="8" name="TextBox 7"/>
           <p:cNvSpPr txBox="1"/>
           <p:nvPr/>
         </p:nvSpPr>
@@ -5746,346 +5083,160 @@
       <p:grpSpPr/>
       <p:sp>
         <p:nvSpPr>
-          <p:cNvPr id="2" name="TextBox 1"/>
-          <p:cNvSpPr txBox="1"/>
+          <p:cNvPr id="2" name="Title 1"/>
+          <p:cNvSpPr>
+            <a:spLocks noGrp="1"/>
+          </p:cNvSpPr>
+          <p:nvPr>
+            <p:ph type="title"/>
+          </p:nvPr>
+        </p:nvSpPr>
+        <p:spPr/>
+        <p:txBody>
+          <a:bodyPr/>
+          <a:lstStyle/>
+          <a:p>
+            <a:r>
+              <a:t>🤖 This Week in Agentic AI</a:t>
+            </a:r>
+          </a:p>
+        </p:txBody>
+      </p:sp>
+      <p:sp>
+        <p:nvSpPr>
+          <p:cNvPr id="3" name="Content Placeholder 2"/>
+          <p:cNvSpPr>
+            <a:spLocks noGrp="1"/>
+          </p:cNvSpPr>
+          <p:nvPr>
+            <p:ph idx="1"/>
+          </p:nvPr>
+        </p:nvSpPr>
+        <p:spPr/>
+        <p:txBody>
+          <a:bodyPr/>
+          <a:lstStyle/>
+          <a:p>
+            <a:r>
+              <a:t>📊 This Week's Highlights:</a:t>
+            </a:r>
+          </a:p>
+          <a:p>
+            <a:pPr/>
+          </a:p>
+          <a:p>
+            <a:pPr/>
+            <a:r>
+              <a:t>This week highlighted the growing tension between agentic AI's technical capabilities</a:t>
+            </a:r>
+          </a:p>
+          <a:p>
+            <a:pPr/>
+            <a:r>
+              <a:t>and real-world deployment challenges. Multi-agent systems demonstrated breakthrough</a:t>
+            </a:r>
+          </a:p>
+          <a:p>
+            <a:pPr/>
+            <a:r>
+              <a:t>emergent behaviors in domains from drone racing to cybersecurity, while OpenAI's</a:t>
+            </a:r>
+          </a:p>
+          <a:p>
+            <a:pPr/>
+            <a:r>
+              <a:t>skills rollout and Claude CLI incidents underscored both the promise and critical</a:t>
+            </a:r>
+          </a:p>
+          <a:p>
+            <a:pPr/>
+            <a:r>
+              <a:t>safety concerns of giving agents tool access. Meanwhile, industry leaders like Ilya</a:t>
+            </a:r>
+          </a:p>
+          <a:p>
+            <a:pPr/>
+            <a:r>
+              <a:t>Sutskever questioned why impressive benchmark performance hasn't translated to</a:t>
+            </a:r>
+          </a:p>
+          <a:p>
+            <a:pPr/>
+            <a:r>
+              <a:t>proportional economic impact, pointing to a maturation phase where reliability,</a:t>
+            </a:r>
+          </a:p>
+          <a:p>
+            <a:pPr/>
+            <a:r>
+              <a:t>safety, and practical deployment matter as much as raw capabilities.</a:t>
+            </a:r>
+          </a:p>
+          <a:p>
+            <a:pPr/>
+          </a:p>
+          <a:p>
+            <a:pPr/>
+            <a:r>
+              <a:t>📚 Sources: arXiv • Hacker News • Reddit</a:t>
+            </a:r>
+          </a:p>
+          <a:p>
+            <a:pPr/>
+            <a:r>
+              <a:t>🗓️  2025-12-15</a:t>
+            </a:r>
+          </a:p>
+        </p:txBody>
+      </p:sp>
+      <p:sp>
+        <p:nvSpPr>
+          <p:cNvPr id="4" name="Oval 3"/>
+          <p:cNvSpPr/>
           <p:nvPr/>
         </p:nvSpPr>
         <p:spPr>
           <a:xfrm>
-            <a:off x="457200" y="457200"/>
-            <a:ext cx="8229600" cy="685800"/>
-          </a:xfrm>
-          <a:prstGeom prst="rect">
-            <a:avLst/>
-          </a:prstGeom>
-          <a:noFill/>
-        </p:spPr>
-        <p:txBody>
-          <a:bodyPr wrap="none">
-            <a:spAutoFit/>
-          </a:bodyPr>
-          <a:lstStyle/>
-          <a:p>
-            <a:pPr>
-              <a:defRPr sz="3200" b="1"/>
-            </a:pPr>
-            <a:r>
-              <a:t>This Week in Agentic AI</a:t>
-            </a:r>
-          </a:p>
-        </p:txBody>
-      </p:sp>
-      <p:sp>
-        <p:nvSpPr>
-          <p:cNvPr id="3" name="TextBox 2"/>
-          <p:cNvSpPr txBox="1"/>
-          <p:nvPr/>
-        </p:nvSpPr>
-        <p:spPr>
-          <a:xfrm>
-            <a:off x="457200" y="1371600"/>
-            <a:ext cx="8229600" cy="685800"/>
-          </a:xfrm>
-          <a:prstGeom prst="rect">
-            <a:avLst/>
-          </a:prstGeom>
-          <a:noFill/>
-        </p:spPr>
-        <p:txBody>
-          <a:bodyPr wrap="none">
-            <a:spAutoFit/>
-          </a:bodyPr>
-          <a:lstStyle/>
-          <a:p>
-            <a:pPr>
-              <a:defRPr sz="1400">
-                <a:solidFill>
-                  <a:srgbClr val="FFFFFF"/>
-                </a:solidFill>
-              </a:defRPr>
-            </a:pPr>
-            <a:r>
-              <a:t>This week saw significant momentum in agentic AI deployment with OpenAI and Mistral both launching</a:t>
-            </a:r>
-          </a:p>
-        </p:txBody>
-      </p:sp>
-      <p:sp>
-        <p:nvSpPr>
-          <p:cNvPr id="4" name="TextBox 3"/>
-          <p:cNvSpPr txBox="1"/>
-          <p:nvPr/>
-        </p:nvSpPr>
-        <p:spPr>
-          <a:xfrm>
-            <a:off x="457200" y="2057400"/>
-            <a:ext cx="8229600" cy="685800"/>
-          </a:xfrm>
-          <a:prstGeom prst="rect">
-            <a:avLst/>
-          </a:prstGeom>
-          <a:noFill/>
-        </p:spPr>
-        <p:txBody>
-          <a:bodyPr wrap="none">
-            <a:spAutoFit/>
-          </a:bodyPr>
-          <a:lstStyle/>
-          <a:p>
-            <a:pPr>
-              <a:defRPr sz="1400">
-                <a:solidFill>
-                  <a:srgbClr val="FFFFFF"/>
-                </a:solidFill>
-              </a:defRPr>
-            </a:pPr>
-            <a:r>
-              <a:t>CLI-based agent frameworks with extended tool use capabilities, while a serious Claude CLI incident</a:t>
-            </a:r>
+            <a:off x="7772400" y="5029200"/>
+            <a:ext cx="914400" cy="914400"/>
+          </a:xfrm>
+          <a:prstGeom prst="ellipse">
+            <a:avLst/>
+          </a:prstGeom>
+          <a:solidFill>
+            <a:srgbClr val="FFFFFF"/>
+          </a:solidFill>
+          <a:ln>
+            <a:solidFill>
+              <a:srgbClr val="3498DB"/>
+            </a:solidFill>
+          </a:ln>
+        </p:spPr>
+        <p:style>
+          <a:lnRef idx="1">
+            <a:schemeClr val="accent1"/>
+          </a:lnRef>
+          <a:fillRef idx="3">
+            <a:schemeClr val="accent1"/>
+          </a:fillRef>
+          <a:effectRef idx="2">
+            <a:schemeClr val="accent1"/>
+          </a:effectRef>
+          <a:fontRef idx="minor">
+            <a:schemeClr val="lt1"/>
+          </a:fontRef>
+        </p:style>
+        <p:txBody>
+          <a:bodyPr rtlCol="0" anchor="ctr"/>
+          <a:lstStyle/>
+          <a:p>
+            <a:pPr algn="ctr"/>
           </a:p>
         </p:txBody>
       </p:sp>
       <p:sp>
         <p:nvSpPr>
           <p:cNvPr id="5" name="TextBox 4"/>
-          <p:cNvSpPr txBox="1"/>
-          <p:nvPr/>
-        </p:nvSpPr>
-        <p:spPr>
-          <a:xfrm>
-            <a:off x="457200" y="2743200"/>
-            <a:ext cx="8229600" cy="685800"/>
-          </a:xfrm>
-          <a:prstGeom prst="rect">
-            <a:avLst/>
-          </a:prstGeom>
-          <a:noFill/>
-        </p:spPr>
-        <p:txBody>
-          <a:bodyPr wrap="none">
-            <a:spAutoFit/>
-          </a:bodyPr>
-          <a:lstStyle/>
-          <a:p>
-            <a:pPr>
-              <a:defRPr sz="1400">
-                <a:solidFill>
-                  <a:srgbClr val="FFFFFF"/>
-                </a:solidFill>
-              </a:defRPr>
-            </a:pPr>
-            <a:r>
-              <a:t>highlighted critical safety challenges in autonomous systems. Research advances demonstrated</a:t>
-            </a:r>
-          </a:p>
-        </p:txBody>
-      </p:sp>
-      <p:sp>
-        <p:nvSpPr>
-          <p:cNvPr id="6" name="TextBox 5"/>
-          <p:cNvSpPr txBox="1"/>
-          <p:nvPr/>
-        </p:nvSpPr>
-        <p:spPr>
-          <a:xfrm>
-            <a:off x="457200" y="3429000"/>
-            <a:ext cx="8229600" cy="685800"/>
-          </a:xfrm>
-          <a:prstGeom prst="rect">
-            <a:avLst/>
-          </a:prstGeom>
-          <a:noFill/>
-        </p:spPr>
-        <p:txBody>
-          <a:bodyPr wrap="none">
-            <a:spAutoFit/>
-          </a:bodyPr>
-          <a:lstStyle/>
-          <a:p>
-            <a:pPr>
-              <a:defRPr sz="1400">
-                <a:solidFill>
-                  <a:srgbClr val="FFFFFF"/>
-                </a:solidFill>
-              </a:defRPr>
-            </a:pPr>
-            <a:r>
-              <a:t>emergent complex behaviors from multi-agent competition and formal verification approaches for RAG</a:t>
-            </a:r>
-          </a:p>
-        </p:txBody>
-      </p:sp>
-      <p:sp>
-        <p:nvSpPr>
-          <p:cNvPr id="7" name="TextBox 6"/>
-          <p:cNvSpPr txBox="1"/>
-          <p:nvPr/>
-        </p:nvSpPr>
-        <p:spPr>
-          <a:xfrm>
-            <a:off x="457200" y="4114800"/>
-            <a:ext cx="8229600" cy="685800"/>
-          </a:xfrm>
-          <a:prstGeom prst="rect">
-            <a:avLst/>
-          </a:prstGeom>
-          <a:noFill/>
-        </p:spPr>
-        <p:txBody>
-          <a:bodyPr wrap="none">
-            <a:spAutoFit/>
-          </a:bodyPr>
-          <a:lstStyle/>
-          <a:p>
-            <a:pPr>
-              <a:defRPr sz="1400">
-                <a:solidFill>
-                  <a:srgbClr val="FFFFFF"/>
-                </a:solidFill>
-              </a:defRPr>
-            </a:pPr>
-            <a:r>
-              <a:t>systems, while industry discussions centered on agents potentially replacing traditional SaaS and</a:t>
-            </a:r>
-          </a:p>
-        </p:txBody>
-      </p:sp>
-      <p:sp>
-        <p:nvSpPr>
-          <p:cNvPr id="8" name="TextBox 7"/>
-          <p:cNvSpPr txBox="1"/>
-          <p:nvPr/>
-        </p:nvSpPr>
-        <p:spPr>
-          <a:xfrm>
-            <a:off x="457200" y="4800600"/>
-            <a:ext cx="8229600" cy="685800"/>
-          </a:xfrm>
-          <a:prstGeom prst="rect">
-            <a:avLst/>
-          </a:prstGeom>
-          <a:noFill/>
-        </p:spPr>
-        <p:txBody>
-          <a:bodyPr wrap="none">
-            <a:spAutoFit/>
-          </a:bodyPr>
-          <a:lstStyle/>
-          <a:p>
-            <a:pPr>
-              <a:defRPr sz="1400">
-                <a:solidFill>
-                  <a:srgbClr val="FFFFFF"/>
-                </a:solidFill>
-              </a:defRPr>
-            </a:pPr>
-            <a:r>
-              <a:t>the growing gap between benchmark performance and real-world economic impact.</a:t>
-            </a:r>
-          </a:p>
-        </p:txBody>
-      </p:sp>
-      <p:sp>
-        <p:nvSpPr>
-          <p:cNvPr id="9" name="TextBox 8"/>
-          <p:cNvSpPr txBox="1"/>
-          <p:nvPr/>
-        </p:nvSpPr>
-        <p:spPr>
-          <a:xfrm>
-            <a:off x="457200" y="5486400"/>
-            <a:ext cx="8229600" cy="685800"/>
-          </a:xfrm>
-          <a:prstGeom prst="rect">
-            <a:avLst/>
-          </a:prstGeom>
-          <a:noFill/>
-        </p:spPr>
-        <p:txBody>
-          <a:bodyPr wrap="none">
-            <a:spAutoFit/>
-          </a:bodyPr>
-          <a:lstStyle/>
-          <a:p>
-            <a:pPr>
-              <a:defRPr sz="1200"/>
-            </a:pPr>
-          </a:p>
-        </p:txBody>
-      </p:sp>
-      <p:sp>
-        <p:nvSpPr>
-          <p:cNvPr id="10" name="TextBox 9"/>
-          <p:cNvSpPr txBox="1"/>
-          <p:nvPr/>
-        </p:nvSpPr>
-        <p:spPr>
-          <a:xfrm>
-            <a:off x="457200" y="6172200"/>
-            <a:ext cx="8229600" cy="685800"/>
-          </a:xfrm>
-          <a:prstGeom prst="rect">
-            <a:avLst/>
-          </a:prstGeom>
-          <a:noFill/>
-        </p:spPr>
-        <p:txBody>
-          <a:bodyPr wrap="none">
-            <a:spAutoFit/>
-          </a:bodyPr>
-          <a:lstStyle/>
-          <a:p>
-            <a:pPr>
-              <a:defRPr sz="1100" i="1">
-                <a:solidFill>
-                  <a:srgbClr val="CCCCCC"/>
-                </a:solidFill>
-              </a:defRPr>
-            </a:pPr>
-            <a:r>
-              <a:t>Curated from arXiv, Hacker News, and Reddit</a:t>
-            </a:r>
-          </a:p>
-        </p:txBody>
-      </p:sp>
-      <p:sp>
-        <p:nvSpPr>
-          <p:cNvPr id="11" name="TextBox 10"/>
-          <p:cNvSpPr txBox="1"/>
-          <p:nvPr/>
-        </p:nvSpPr>
-        <p:spPr>
-          <a:xfrm>
-            <a:off x="457200" y="6858000"/>
-            <a:ext cx="8229600" cy="685800"/>
-          </a:xfrm>
-          <a:prstGeom prst="rect">
-            <a:avLst/>
-          </a:prstGeom>
-          <a:noFill/>
-        </p:spPr>
-        <p:txBody>
-          <a:bodyPr wrap="none">
-            <a:spAutoFit/>
-          </a:bodyPr>
-          <a:lstStyle/>
-          <a:p>
-            <a:pPr>
-              <a:defRPr sz="1100" i="1">
-                <a:solidFill>
-                  <a:srgbClr val="CCCCCC"/>
-                </a:solidFill>
-              </a:defRPr>
-            </a:pPr>
-            <a:r>
-              <a:t>Generated: 2025-12-15</a:t>
-            </a:r>
-          </a:p>
-        </p:txBody>
-      </p:sp>
-      <p:sp>
-        <p:nvSpPr>
-          <p:cNvPr id="12" name="TextBox 11"/>
           <p:cNvSpPr txBox="1"/>
           <p:nvPr/>
         </p:nvSpPr>
@@ -6123,6 +5274,166 @@
 </file>
 
 <file path=ppt/slides/slide20.xml><?xml version="1.0" encoding="utf-8"?>
+<p:sld xmlns:a="http://schemas.openxmlformats.org/drawingml/2006/main" xmlns:p="http://schemas.openxmlformats.org/presentationml/2006/main" xmlns:r="http://schemas.openxmlformats.org/officeDocument/2006/relationships">
+  <p:cSld>
+    <p:bg>
+      <p:bgPr>
+        <a:solidFill>
+          <a:srgbClr val="F8F9FA"/>
+        </a:solidFill>
+        <a:effectLst/>
+      </p:bgPr>
+    </p:bg>
+    <p:spTree>
+      <p:nvGrpSpPr>
+        <p:cNvPr id="1" name=""/>
+        <p:cNvGrpSpPr/>
+        <p:nvPr/>
+      </p:nvGrpSpPr>
+      <p:grpSpPr/>
+      <p:sp>
+        <p:nvSpPr>
+          <p:cNvPr id="2" name="Title 1"/>
+          <p:cNvSpPr>
+            <a:spLocks noGrp="1"/>
+          </p:cNvSpPr>
+          <p:nvPr>
+            <p:ph type="title"/>
+          </p:nvPr>
+        </p:nvSpPr>
+        <p:spPr/>
+        <p:txBody>
+          <a:bodyPr/>
+          <a:lstStyle/>
+          <a:p>
+            <a:r>
+              <a:t>4. 8x RTX Pro 6000 server complete</a:t>
+            </a:r>
+          </a:p>
+        </p:txBody>
+      </p:sp>
+      <p:sp>
+        <p:nvSpPr>
+          <p:cNvPr id="3" name="Content Placeholder 2"/>
+          <p:cNvSpPr>
+            <a:spLocks noGrp="1"/>
+          </p:cNvSpPr>
+          <p:nvPr>
+            <p:ph idx="1"/>
+          </p:nvPr>
+        </p:nvSpPr>
+        <p:spPr/>
+        <p:txBody>
+          <a:bodyPr/>
+          <a:lstStyle/>
+          <a:p>
+            <a:r>
+              <a:t>Community building high-memory local infrastructure enables running larger</a:t>
+            </a:r>
+          </a:p>
+          <a:p>
+            <a:pPr/>
+            <a:r>
+              <a:t>multi-agent systems and complex reasoning chains without cloud dependencies.</a:t>
+            </a:r>
+          </a:p>
+          <a:p>
+            <a:pPr/>
+          </a:p>
+          <a:p>
+            <a:pPr/>
+            <a:r>
+              <a:t>📍 r/LocalLLaMA • 609 upvotes • 264 comments</a:t>
+            </a:r>
+          </a:p>
+          <a:p>
+            <a:pPr/>
+            <a:r>
+              <a:t>🔗 https://reddit.com/r/LocalLLaMA/comments/1plwgun/8x_rtx_pro_6000_se...</a:t>
+            </a:r>
+          </a:p>
+        </p:txBody>
+      </p:sp>
+      <p:sp>
+        <p:nvSpPr>
+          <p:cNvPr id="4" name="Oval 3"/>
+          <p:cNvSpPr/>
+          <p:nvPr/>
+        </p:nvSpPr>
+        <p:spPr>
+          <a:xfrm>
+            <a:off x="274320" y="731520"/>
+            <a:ext cx="365760" cy="365760"/>
+          </a:xfrm>
+          <a:prstGeom prst="ellipse">
+            <a:avLst/>
+          </a:prstGeom>
+          <a:solidFill>
+            <a:srgbClr val="1ABC9C"/>
+          </a:solidFill>
+        </p:spPr>
+        <p:style>
+          <a:lnRef idx="1">
+            <a:schemeClr val="accent1"/>
+          </a:lnRef>
+          <a:fillRef idx="3">
+            <a:schemeClr val="accent1"/>
+          </a:fillRef>
+          <a:effectRef idx="2">
+            <a:schemeClr val="accent1"/>
+          </a:effectRef>
+          <a:fontRef idx="minor">
+            <a:schemeClr val="lt1"/>
+          </a:fontRef>
+        </p:style>
+        <p:txBody>
+          <a:bodyPr rtlCol="0" anchor="ctr"/>
+          <a:lstStyle/>
+          <a:p>
+            <a:pPr algn="ctr"/>
+          </a:p>
+        </p:txBody>
+      </p:sp>
+      <p:sp>
+        <p:nvSpPr>
+          <p:cNvPr id="5" name="TextBox 4"/>
+          <p:cNvSpPr txBox="1"/>
+          <p:nvPr/>
+        </p:nvSpPr>
+        <p:spPr>
+          <a:xfrm>
+            <a:off x="457200" y="6400800"/>
+            <a:ext cx="7315200" cy="274320"/>
+          </a:xfrm>
+          <a:prstGeom prst="rect">
+            <a:avLst/>
+          </a:prstGeom>
+          <a:noFill/>
+        </p:spPr>
+        <p:txBody>
+          <a:bodyPr wrap="none">
+            <a:spAutoFit/>
+          </a:bodyPr>
+          <a:lstStyle/>
+          <a:p>
+            <a:pPr algn="ctr">
+              <a:defRPr sz="1000"/>
+            </a:pPr>
+            <a:r>
+              <a:t>Slide 20</a:t>
+            </a:r>
+          </a:p>
+        </p:txBody>
+      </p:sp>
+    </p:spTree>
+  </p:cSld>
+  <p:clrMapOvr>
+    <a:masterClrMapping/>
+  </p:clrMapOvr>
+</p:sld>
+</file>
+
+<file path=ppt/slides/slide21.xml><?xml version="1.0" encoding="utf-8"?>
 <p:sld xmlns:a="http://schemas.openxmlformats.org/drawingml/2006/main" xmlns:p="http://schemas.openxmlformats.org/presentationml/2006/main" xmlns:r="http://schemas.openxmlformats.org/officeDocument/2006/relationships">
   <p:cSld>
     <p:bg>
@@ -6142,392 +5453,98 @@
       <p:grpSpPr/>
       <p:sp>
         <p:nvSpPr>
-          <p:cNvPr id="2" name="TextBox 1"/>
-          <p:cNvSpPr txBox="1"/>
+          <p:cNvPr id="2" name="Title 1"/>
+          <p:cNvSpPr>
+            <a:spLocks noGrp="1"/>
+          </p:cNvSpPr>
+          <p:nvPr>
+            <p:ph type="title"/>
+          </p:nvPr>
+        </p:nvSpPr>
+        <p:spPr/>
+        <p:txBody>
+          <a:bodyPr/>
+          <a:lstStyle/>
+          <a:p>
+            <a:r>
+              <a:t>💬 Notable Discussions</a:t>
+            </a:r>
+          </a:p>
+        </p:txBody>
+      </p:sp>
+      <p:sp>
+        <p:nvSpPr>
+          <p:cNvPr id="3" name="Content Placeholder 2"/>
+          <p:cNvSpPr>
+            <a:spLocks noGrp="1"/>
+          </p:cNvSpPr>
+          <p:nvPr>
+            <p:ph idx="1"/>
+          </p:nvPr>
+        </p:nvSpPr>
+        <p:spPr/>
+        <p:txBody>
+          <a:bodyPr/>
+          <a:lstStyle/>
+          <a:p>
+            <a:r>
+              <a:t>4 key updates this week</a:t>
+            </a:r>
+          </a:p>
+          <a:p>
+            <a:pPr/>
+          </a:p>
+          <a:p>
+            <a:pPr/>
+            <a:r>
+              <a:t>→ Swipe to explore</a:t>
+            </a:r>
+          </a:p>
+        </p:txBody>
+      </p:sp>
+      <p:sp>
+        <p:nvSpPr>
+          <p:cNvPr id="4" name="Rectangle 3"/>
+          <p:cNvSpPr/>
           <p:nvPr/>
         </p:nvSpPr>
         <p:spPr>
           <a:xfrm>
-            <a:off x="457200" y="457200"/>
-            <a:ext cx="8229600" cy="685800"/>
+            <a:off x="7315200" y="4572000"/>
+            <a:ext cx="1371600" cy="1371600"/>
           </a:xfrm>
           <a:prstGeom prst="rect">
             <a:avLst/>
           </a:prstGeom>
-          <a:noFill/>
-        </p:spPr>
-        <p:txBody>
-          <a:bodyPr wrap="none">
-            <a:spAutoFit/>
-          </a:bodyPr>
-          <a:lstStyle/>
-          <a:p>
-            <a:pPr>
-              <a:defRPr sz="3200" b="1"/>
-            </a:pPr>
-            <a:r>
-              <a:t>Notable Discussions</a:t>
-            </a:r>
-          </a:p>
-        </p:txBody>
-      </p:sp>
-      <p:sp>
-        <p:nvSpPr>
-          <p:cNvPr id="3" name="TextBox 2"/>
-          <p:cNvSpPr txBox="1"/>
-          <p:nvPr/>
-        </p:nvSpPr>
-        <p:spPr>
-          <a:xfrm>
-            <a:off x="457200" y="1371600"/>
-            <a:ext cx="8229600" cy="685800"/>
-          </a:xfrm>
-          <a:prstGeom prst="rect">
-            <a:avLst/>
-          </a:prstGeom>
-          <a:noFill/>
-        </p:spPr>
-        <p:txBody>
-          <a:bodyPr wrap="none">
-            <a:spAutoFit/>
-          </a:bodyPr>
-          <a:lstStyle/>
-          <a:p>
-            <a:pPr>
-              <a:defRPr sz="2000" b="1">
-                <a:solidFill>
-                  <a:srgbClr val="FFFFFF"/>
-                </a:solidFill>
-              </a:defRPr>
-            </a:pPr>
-            <a:r>
-              <a:t>4 key updates</a:t>
-            </a:r>
-          </a:p>
-        </p:txBody>
-      </p:sp>
-      <p:sp>
-        <p:nvSpPr>
-          <p:cNvPr id="4" name="TextBox 3"/>
-          <p:cNvSpPr txBox="1"/>
-          <p:nvPr/>
-        </p:nvSpPr>
-        <p:spPr>
-          <a:xfrm>
-            <a:off x="457200" y="2057400"/>
-            <a:ext cx="8229600" cy="685800"/>
-          </a:xfrm>
-          <a:prstGeom prst="rect">
-            <a:avLst/>
-          </a:prstGeom>
-          <a:noFill/>
-        </p:spPr>
-        <p:txBody>
-          <a:bodyPr wrap="none">
-            <a:spAutoFit/>
-          </a:bodyPr>
-          <a:lstStyle/>
-          <a:p>
-            <a:pPr>
-              <a:defRPr sz="1200"/>
-            </a:pPr>
+          <a:solidFill>
+            <a:srgbClr val="FFFFFF"/>
+          </a:solidFill>
+        </p:spPr>
+        <p:style>
+          <a:lnRef idx="1">
+            <a:schemeClr val="accent1"/>
+          </a:lnRef>
+          <a:fillRef idx="3">
+            <a:schemeClr val="accent1"/>
+          </a:fillRef>
+          <a:effectRef idx="2">
+            <a:schemeClr val="accent1"/>
+          </a:effectRef>
+          <a:fontRef idx="minor">
+            <a:schemeClr val="lt1"/>
+          </a:fontRef>
+        </p:style>
+        <p:txBody>
+          <a:bodyPr rtlCol="0" anchor="ctr"/>
+          <a:lstStyle/>
+          <a:p>
+            <a:pPr algn="ctr"/>
           </a:p>
         </p:txBody>
       </p:sp>
       <p:sp>
         <p:nvSpPr>
           <p:cNvPr id="5" name="TextBox 4"/>
-          <p:cNvSpPr txBox="1"/>
-          <p:nvPr/>
-        </p:nvSpPr>
-        <p:spPr>
-          <a:xfrm>
-            <a:off x="457200" y="2743200"/>
-            <a:ext cx="8229600" cy="685800"/>
-          </a:xfrm>
-          <a:prstGeom prst="rect">
-            <a:avLst/>
-          </a:prstGeom>
-          <a:noFill/>
-        </p:spPr>
-        <p:txBody>
-          <a:bodyPr wrap="none">
-            <a:spAutoFit/>
-          </a:bodyPr>
-          <a:lstStyle/>
-          <a:p>
-            <a:pPr>
-              <a:defRPr sz="1600" i="1">
-                <a:solidFill>
-                  <a:srgbClr val="FFFFFF"/>
-                </a:solidFill>
-              </a:defRPr>
-            </a:pPr>
-            <a:r>
-              <a:t>Swipe to explore →</a:t>
-            </a:r>
-          </a:p>
-        </p:txBody>
-      </p:sp>
-      <p:sp>
-        <p:nvSpPr>
-          <p:cNvPr id="6" name="TextBox 5"/>
-          <p:cNvSpPr txBox="1"/>
-          <p:nvPr/>
-        </p:nvSpPr>
-        <p:spPr>
-          <a:xfrm>
-            <a:off x="457200" y="6400800"/>
-            <a:ext cx="7315200" cy="274320"/>
-          </a:xfrm>
-          <a:prstGeom prst="rect">
-            <a:avLst/>
-          </a:prstGeom>
-          <a:noFill/>
-        </p:spPr>
-        <p:txBody>
-          <a:bodyPr wrap="none">
-            <a:spAutoFit/>
-          </a:bodyPr>
-          <a:lstStyle/>
-          <a:p>
-            <a:pPr algn="ctr">
-              <a:defRPr sz="1000"/>
-            </a:pPr>
-            <a:r>
-              <a:t>Slide 20</a:t>
-            </a:r>
-          </a:p>
-        </p:txBody>
-      </p:sp>
-    </p:spTree>
-  </p:cSld>
-  <p:clrMapOvr>
-    <a:masterClrMapping/>
-  </p:clrMapOvr>
-</p:sld>
-</file>
-
-<file path=ppt/slides/slide21.xml><?xml version="1.0" encoding="utf-8"?>
-<p:sld xmlns:a="http://schemas.openxmlformats.org/drawingml/2006/main" xmlns:p="http://schemas.openxmlformats.org/presentationml/2006/main" xmlns:r="http://schemas.openxmlformats.org/officeDocument/2006/relationships">
-  <p:cSld>
-    <p:bg>
-      <p:bgPr>
-        <a:solidFill>
-          <a:srgbClr val="F8F9FA"/>
-        </a:solidFill>
-        <a:effectLst/>
-      </p:bgPr>
-    </p:bg>
-    <p:spTree>
-      <p:nvGrpSpPr>
-        <p:cNvPr id="1" name=""/>
-        <p:cNvGrpSpPr/>
-        <p:nvPr/>
-      </p:nvGrpSpPr>
-      <p:grpSpPr/>
-      <p:sp>
-        <p:nvSpPr>
-          <p:cNvPr id="2" name="TextBox 1"/>
-          <p:cNvSpPr txBox="1"/>
-          <p:nvPr/>
-        </p:nvSpPr>
-        <p:spPr>
-          <a:xfrm>
-            <a:off x="457200" y="457200"/>
-            <a:ext cx="8229600" cy="685800"/>
-          </a:xfrm>
-          <a:prstGeom prst="rect">
-            <a:avLst/>
-          </a:prstGeom>
-          <a:noFill/>
-        </p:spPr>
-        <p:txBody>
-          <a:bodyPr wrap="none">
-            <a:spAutoFit/>
-          </a:bodyPr>
-          <a:lstStyle/>
-          <a:p>
-            <a:pPr>
-              <a:defRPr sz="3200" b="1"/>
-            </a:pPr>
-            <a:r>
-              <a:t>1. AI agents are starting to eat SaaS</a:t>
-            </a:r>
-          </a:p>
-        </p:txBody>
-      </p:sp>
-      <p:sp>
-        <p:nvSpPr>
-          <p:cNvPr id="3" name="TextBox 2"/>
-          <p:cNvSpPr txBox="1"/>
-          <p:nvPr/>
-        </p:nvSpPr>
-        <p:spPr>
-          <a:xfrm>
-            <a:off x="457200" y="1371600"/>
-            <a:ext cx="8229600" cy="685800"/>
-          </a:xfrm>
-          <a:prstGeom prst="rect">
-            <a:avLst/>
-          </a:prstGeom>
-          <a:noFill/>
-        </p:spPr>
-        <p:txBody>
-          <a:bodyPr wrap="none">
-            <a:spAutoFit/>
-          </a:bodyPr>
-          <a:lstStyle/>
-          <a:p>
-            <a:pPr>
-              <a:defRPr sz="1300">
-                <a:solidFill>
-                  <a:srgbClr val="333333"/>
-                </a:solidFill>
-              </a:defRPr>
-            </a:pPr>
-            <a:r>
-              <a:t>Industry analysis suggesting autonomous agents are beginning to replace traditional</a:t>
-            </a:r>
-          </a:p>
-        </p:txBody>
-      </p:sp>
-      <p:sp>
-        <p:nvSpPr>
-          <p:cNvPr id="4" name="TextBox 3"/>
-          <p:cNvSpPr txBox="1"/>
-          <p:nvPr/>
-        </p:nvSpPr>
-        <p:spPr>
-          <a:xfrm>
-            <a:off x="457200" y="2057400"/>
-            <a:ext cx="8229600" cy="685800"/>
-          </a:xfrm>
-          <a:prstGeom prst="rect">
-            <a:avLst/>
-          </a:prstGeom>
-          <a:noFill/>
-        </p:spPr>
-        <p:txBody>
-          <a:bodyPr wrap="none">
-            <a:spAutoFit/>
-          </a:bodyPr>
-          <a:lstStyle/>
-          <a:p>
-            <a:pPr>
-              <a:defRPr sz="1300">
-                <a:solidFill>
-                  <a:srgbClr val="333333"/>
-                </a:solidFill>
-              </a:defRPr>
-            </a:pPr>
-            <a:r>
-              <a:t>software products, representing a paradigm shift in software delivery and value creation.</a:t>
-            </a:r>
-          </a:p>
-        </p:txBody>
-      </p:sp>
-      <p:sp>
-        <p:nvSpPr>
-          <p:cNvPr id="5" name="TextBox 4"/>
-          <p:cNvSpPr txBox="1"/>
-          <p:nvPr/>
-        </p:nvSpPr>
-        <p:spPr>
-          <a:xfrm>
-            <a:off x="457200" y="2743200"/>
-            <a:ext cx="8229600" cy="685800"/>
-          </a:xfrm>
-          <a:prstGeom prst="rect">
-            <a:avLst/>
-          </a:prstGeom>
-          <a:noFill/>
-        </p:spPr>
-        <p:txBody>
-          <a:bodyPr wrap="none">
-            <a:spAutoFit/>
-          </a:bodyPr>
-          <a:lstStyle/>
-          <a:p>
-            <a:pPr>
-              <a:defRPr sz="1000"/>
-            </a:pPr>
-          </a:p>
-        </p:txBody>
-      </p:sp>
-      <p:sp>
-        <p:nvSpPr>
-          <p:cNvPr id="6" name="TextBox 5"/>
-          <p:cNvSpPr txBox="1"/>
-          <p:nvPr/>
-        </p:nvSpPr>
-        <p:spPr>
-          <a:xfrm>
-            <a:off x="457200" y="3429000"/>
-            <a:ext cx="8229600" cy="685800"/>
-          </a:xfrm>
-          <a:prstGeom prst="rect">
-            <a:avLst/>
-          </a:prstGeom>
-          <a:noFill/>
-        </p:spPr>
-        <p:txBody>
-          <a:bodyPr wrap="none">
-            <a:spAutoFit/>
-          </a:bodyPr>
-          <a:lstStyle/>
-          <a:p>
-            <a:pPr>
-              <a:defRPr sz="1000" i="1">
-                <a:solidFill>
-                  <a:srgbClr val="666666"/>
-                </a:solidFill>
-              </a:defRPr>
-            </a:pPr>
-            <a:r>
-              <a:t>Source: Hacker News • 116 points • 134 comments</a:t>
-            </a:r>
-          </a:p>
-        </p:txBody>
-      </p:sp>
-      <p:sp>
-        <p:nvSpPr>
-          <p:cNvPr id="7" name="TextBox 6"/>
-          <p:cNvSpPr txBox="1"/>
-          <p:nvPr/>
-        </p:nvSpPr>
-        <p:spPr>
-          <a:xfrm>
-            <a:off x="457200" y="4114800"/>
-            <a:ext cx="8229600" cy="685800"/>
-          </a:xfrm>
-          <a:prstGeom prst="rect">
-            <a:avLst/>
-          </a:prstGeom>
-          <a:noFill/>
-        </p:spPr>
-        <p:txBody>
-          <a:bodyPr wrap="none">
-            <a:spAutoFit/>
-          </a:bodyPr>
-          <a:lstStyle/>
-          <a:p>
-            <a:pPr>
-              <a:defRPr sz="900">
-                <a:solidFill>
-                  <a:srgbClr val="3498DB"/>
-                </a:solidFill>
-              </a:defRPr>
-            </a:pPr>
-            <a:r>
-              <a:t>🔗 https://martinalderson.com/posts/ai-agents-are-starting-t...</a:t>
-            </a:r>
-          </a:p>
-        </p:txBody>
-      </p:sp>
-      <p:sp>
-        <p:nvSpPr>
-          <p:cNvPr id="8" name="TextBox 7"/>
           <p:cNvSpPr txBox="1"/>
           <p:nvPr/>
         </p:nvSpPr>
@@ -6584,206 +5601,116 @@
       <p:grpSpPr/>
       <p:sp>
         <p:nvSpPr>
-          <p:cNvPr id="2" name="TextBox 1"/>
-          <p:cNvSpPr txBox="1"/>
+          <p:cNvPr id="2" name="Title 1"/>
+          <p:cNvSpPr>
+            <a:spLocks noGrp="1"/>
+          </p:cNvSpPr>
+          <p:nvPr>
+            <p:ph type="title"/>
+          </p:nvPr>
+        </p:nvSpPr>
+        <p:spPr/>
+        <p:txBody>
+          <a:bodyPr/>
+          <a:lstStyle/>
+          <a:p>
+            <a:r>
+              <a:t>1. Ilya Sutskever is puzzled by the gap between AI benchmarks and the ...</a:t>
+            </a:r>
+          </a:p>
+        </p:txBody>
+      </p:sp>
+      <p:sp>
+        <p:nvSpPr>
+          <p:cNvPr id="3" name="Content Placeholder 2"/>
+          <p:cNvSpPr>
+            <a:spLocks noGrp="1"/>
+          </p:cNvSpPr>
+          <p:nvPr>
+            <p:ph idx="1"/>
+          </p:nvPr>
+        </p:nvSpPr>
+        <p:spPr/>
+        <p:txBody>
+          <a:bodyPr/>
+          <a:lstStyle/>
+          <a:p>
+            <a:r>
+              <a:t>Leading AI researcher questions why impressive agent capabilities on benchmarks</a:t>
+            </a:r>
+          </a:p>
+          <a:p>
+            <a:pPr/>
+            <a:r>
+              <a:t>aren't translating to proportional economic value, highlighting deployment and</a:t>
+            </a:r>
+          </a:p>
+          <a:p>
+            <a:pPr/>
+            <a:r>
+              <a:t>reliability gaps.</a:t>
+            </a:r>
+          </a:p>
+          <a:p>
+            <a:pPr/>
+          </a:p>
+          <a:p>
+            <a:pPr/>
+            <a:r>
+              <a:t>📍 r/MachineLearning • 386 upvotes • 191 comments</a:t>
+            </a:r>
+          </a:p>
+          <a:p>
+            <a:pPr/>
+            <a:r>
+              <a:t>🔗 https://reddit.com/r/MachineLearning/comments/1pm2zsb/ilya_sutskeve...</a:t>
+            </a:r>
+          </a:p>
+        </p:txBody>
+      </p:sp>
+      <p:sp>
+        <p:nvSpPr>
+          <p:cNvPr id="4" name="Rectangle 3"/>
+          <p:cNvSpPr/>
           <p:nvPr/>
         </p:nvSpPr>
         <p:spPr>
           <a:xfrm>
-            <a:off x="457200" y="457200"/>
-            <a:ext cx="8229600" cy="685800"/>
+            <a:off x="274320" y="731520"/>
+            <a:ext cx="365760" cy="365760"/>
           </a:xfrm>
           <a:prstGeom prst="rect">
             <a:avLst/>
           </a:prstGeom>
-          <a:noFill/>
-        </p:spPr>
-        <p:txBody>
-          <a:bodyPr wrap="none">
-            <a:spAutoFit/>
-          </a:bodyPr>
-          <a:lstStyle/>
-          <a:p>
-            <a:pPr>
-              <a:defRPr sz="3200" b="1"/>
-            </a:pPr>
-            <a:r>
-              <a:t>2. Ilya Sutskever is puzzled by the gap between AI benchmarks and the econo...</a:t>
-            </a:r>
-          </a:p>
-        </p:txBody>
-      </p:sp>
-      <p:sp>
-        <p:nvSpPr>
-          <p:cNvPr id="3" name="TextBox 2"/>
-          <p:cNvSpPr txBox="1"/>
-          <p:nvPr/>
-        </p:nvSpPr>
-        <p:spPr>
-          <a:xfrm>
-            <a:off x="457200" y="1371600"/>
-            <a:ext cx="8229600" cy="685800"/>
-          </a:xfrm>
-          <a:prstGeom prst="rect">
-            <a:avLst/>
-          </a:prstGeom>
-          <a:noFill/>
-        </p:spPr>
-        <p:txBody>
-          <a:bodyPr wrap="none">
-            <a:spAutoFit/>
-          </a:bodyPr>
-          <a:lstStyle/>
-          <a:p>
-            <a:pPr>
-              <a:defRPr sz="1300">
-                <a:solidFill>
-                  <a:srgbClr val="333333"/>
-                </a:solidFill>
-              </a:defRPr>
-            </a:pPr>
-            <a:r>
-              <a:t>OpenAI co-founder's observation about the benchmark-to-deployment gap sparks critical</a:t>
-            </a:r>
-          </a:p>
-        </p:txBody>
-      </p:sp>
-      <p:sp>
-        <p:nvSpPr>
-          <p:cNvPr id="4" name="TextBox 3"/>
-          <p:cNvSpPr txBox="1"/>
-          <p:nvPr/>
-        </p:nvSpPr>
-        <p:spPr>
-          <a:xfrm>
-            <a:off x="457200" y="2057400"/>
-            <a:ext cx="8229600" cy="685800"/>
-          </a:xfrm>
-          <a:prstGeom prst="rect">
-            <a:avLst/>
-          </a:prstGeom>
-          <a:noFill/>
-        </p:spPr>
-        <p:txBody>
-          <a:bodyPr wrap="none">
-            <a:spAutoFit/>
-          </a:bodyPr>
-          <a:lstStyle/>
-          <a:p>
-            <a:pPr>
-              <a:defRPr sz="1300">
-                <a:solidFill>
-                  <a:srgbClr val="333333"/>
-                </a:solidFill>
-              </a:defRPr>
-            </a:pPr>
-            <a:r>
-              <a:t>discussion about measuring and translating agent capabilities into real-world value.</a:t>
-            </a:r>
+          <a:solidFill>
+            <a:srgbClr val="E74C3C"/>
+          </a:solidFill>
+        </p:spPr>
+        <p:style>
+          <a:lnRef idx="1">
+            <a:schemeClr val="accent1"/>
+          </a:lnRef>
+          <a:fillRef idx="3">
+            <a:schemeClr val="accent1"/>
+          </a:fillRef>
+          <a:effectRef idx="2">
+            <a:schemeClr val="accent1"/>
+          </a:effectRef>
+          <a:fontRef idx="minor">
+            <a:schemeClr val="lt1"/>
+          </a:fontRef>
+        </p:style>
+        <p:txBody>
+          <a:bodyPr rtlCol="0" anchor="ctr"/>
+          <a:lstStyle/>
+          <a:p>
+            <a:pPr algn="ctr"/>
           </a:p>
         </p:txBody>
       </p:sp>
       <p:sp>
         <p:nvSpPr>
           <p:cNvPr id="5" name="TextBox 4"/>
-          <p:cNvSpPr txBox="1"/>
-          <p:nvPr/>
-        </p:nvSpPr>
-        <p:spPr>
-          <a:xfrm>
-            <a:off x="457200" y="2743200"/>
-            <a:ext cx="8229600" cy="685800"/>
-          </a:xfrm>
-          <a:prstGeom prst="rect">
-            <a:avLst/>
-          </a:prstGeom>
-          <a:noFill/>
-        </p:spPr>
-        <p:txBody>
-          <a:bodyPr wrap="none">
-            <a:spAutoFit/>
-          </a:bodyPr>
-          <a:lstStyle/>
-          <a:p>
-            <a:pPr>
-              <a:defRPr sz="1000"/>
-            </a:pPr>
-          </a:p>
-        </p:txBody>
-      </p:sp>
-      <p:sp>
-        <p:nvSpPr>
-          <p:cNvPr id="6" name="TextBox 5"/>
-          <p:cNvSpPr txBox="1"/>
-          <p:nvPr/>
-        </p:nvSpPr>
-        <p:spPr>
-          <a:xfrm>
-            <a:off x="457200" y="3429000"/>
-            <a:ext cx="8229600" cy="685800"/>
-          </a:xfrm>
-          <a:prstGeom prst="rect">
-            <a:avLst/>
-          </a:prstGeom>
-          <a:noFill/>
-        </p:spPr>
-        <p:txBody>
-          <a:bodyPr wrap="none">
-            <a:spAutoFit/>
-          </a:bodyPr>
-          <a:lstStyle/>
-          <a:p>
-            <a:pPr>
-              <a:defRPr sz="1000" i="1">
-                <a:solidFill>
-                  <a:srgbClr val="666666"/>
-                </a:solidFill>
-              </a:defRPr>
-            </a:pPr>
-            <a:r>
-              <a:t>Source: r/MachineLearning • 381 upvotes • 191 comments</a:t>
-            </a:r>
-          </a:p>
-        </p:txBody>
-      </p:sp>
-      <p:sp>
-        <p:nvSpPr>
-          <p:cNvPr id="7" name="TextBox 6"/>
-          <p:cNvSpPr txBox="1"/>
-          <p:nvPr/>
-        </p:nvSpPr>
-        <p:spPr>
-          <a:xfrm>
-            <a:off x="457200" y="4114800"/>
-            <a:ext cx="8229600" cy="685800"/>
-          </a:xfrm>
-          <a:prstGeom prst="rect">
-            <a:avLst/>
-          </a:prstGeom>
-          <a:noFill/>
-        </p:spPr>
-        <p:txBody>
-          <a:bodyPr wrap="none">
-            <a:spAutoFit/>
-          </a:bodyPr>
-          <a:lstStyle/>
-          <a:p>
-            <a:pPr>
-              <a:defRPr sz="900">
-                <a:solidFill>
-                  <a:srgbClr val="3498DB"/>
-                </a:solidFill>
-              </a:defRPr>
-            </a:pPr>
-            <a:r>
-              <a:t>🔗 https://reddit.com/r/MachineLearning/comments/1pm2zsb/ily...</a:t>
-            </a:r>
-          </a:p>
-        </p:txBody>
-      </p:sp>
-      <p:sp>
-        <p:nvSpPr>
-          <p:cNvPr id="8" name="TextBox 7"/>
           <p:cNvSpPr txBox="1"/>
           <p:nvPr/>
         </p:nvSpPr>
@@ -6840,206 +5767,116 @@
       <p:grpSpPr/>
       <p:sp>
         <p:nvSpPr>
-          <p:cNvPr id="2" name="TextBox 1"/>
-          <p:cNvSpPr txBox="1"/>
+          <p:cNvPr id="2" name="Title 1"/>
+          <p:cNvSpPr>
+            <a:spLocks noGrp="1"/>
+          </p:cNvSpPr>
+          <p:nvPr>
+            <p:ph type="title"/>
+          </p:nvPr>
+        </p:nvSpPr>
+        <p:spPr/>
+        <p:txBody>
+          <a:bodyPr/>
+          <a:lstStyle/>
+          <a:p>
+            <a:r>
+              <a:t>2. [D] How does Claude perform so well without any proprietary data?</a:t>
+            </a:r>
+          </a:p>
+        </p:txBody>
+      </p:sp>
+      <p:sp>
+        <p:nvSpPr>
+          <p:cNvPr id="3" name="Content Placeholder 2"/>
+          <p:cNvSpPr>
+            <a:spLocks noGrp="1"/>
+          </p:cNvSpPr>
+          <p:nvPr>
+            <p:ph idx="1"/>
+          </p:nvPr>
+        </p:nvSpPr>
+        <p:spPr/>
+        <p:txBody>
+          <a:bodyPr/>
+          <a:lstStyle/>
+          <a:p>
+            <a:r>
+              <a:t>Community discussion on training methodologies that enable strong agent reasoning and</a:t>
+            </a:r>
+          </a:p>
+          <a:p>
+            <a:pPr/>
+            <a:r>
+              <a:t>tool use without proprietary datasets, suggesting architecture and RL techniques</a:t>
+            </a:r>
+          </a:p>
+          <a:p>
+            <a:pPr/>
+            <a:r>
+              <a:t>matter more than data scale.</a:t>
+            </a:r>
+          </a:p>
+          <a:p>
+            <a:pPr/>
+          </a:p>
+          <a:p>
+            <a:pPr/>
+            <a:r>
+              <a:t>📍 r/MachineLearning • 126 upvotes • 129 comments</a:t>
+            </a:r>
+          </a:p>
+          <a:p>
+            <a:pPr/>
+            <a:r>
+              <a:t>🔗 https://reddit.com/r/MachineLearning/comments/1plg1gs/d_how_does_cl...</a:t>
+            </a:r>
+          </a:p>
+        </p:txBody>
+      </p:sp>
+      <p:sp>
+        <p:nvSpPr>
+          <p:cNvPr id="4" name="Oval 3"/>
+          <p:cNvSpPr/>
           <p:nvPr/>
         </p:nvSpPr>
         <p:spPr>
           <a:xfrm>
-            <a:off x="457200" y="457200"/>
-            <a:ext cx="8229600" cy="685800"/>
-          </a:xfrm>
-          <a:prstGeom prst="rect">
-            <a:avLst/>
-          </a:prstGeom>
-          <a:noFill/>
-        </p:spPr>
-        <p:txBody>
-          <a:bodyPr wrap="none">
-            <a:spAutoFit/>
-          </a:bodyPr>
-          <a:lstStyle/>
-          <a:p>
-            <a:pPr>
-              <a:defRPr sz="3200" b="1"/>
-            </a:pPr>
-            <a:r>
-              <a:t>3. An AI agent spent 16 hours hacking Stanford's network. It outperformed h...</a:t>
-            </a:r>
-          </a:p>
-        </p:txBody>
-      </p:sp>
-      <p:sp>
-        <p:nvSpPr>
-          <p:cNvPr id="3" name="TextBox 2"/>
-          <p:cNvSpPr txBox="1"/>
-          <p:nvPr/>
-        </p:nvSpPr>
-        <p:spPr>
-          <a:xfrm>
-            <a:off x="457200" y="1371600"/>
-            <a:ext cx="8229600" cy="685800"/>
-          </a:xfrm>
-          <a:prstGeom prst="rect">
-            <a:avLst/>
-          </a:prstGeom>
-          <a:noFill/>
-        </p:spPr>
-        <p:txBody>
-          <a:bodyPr wrap="none">
-            <a:spAutoFit/>
-          </a:bodyPr>
-          <a:lstStyle/>
-          <a:p>
-            <a:pPr>
-              <a:defRPr sz="1300">
-                <a:solidFill>
-                  <a:srgbClr val="333333"/>
-                </a:solidFill>
-              </a:defRPr>
-            </a:pPr>
-            <a:r>
-              <a:t>Real-world demonstration of autonomous agents performing complex multi-step tasks in</a:t>
-            </a:r>
-          </a:p>
-        </p:txBody>
-      </p:sp>
-      <p:sp>
-        <p:nvSpPr>
-          <p:cNvPr id="4" name="TextBox 3"/>
-          <p:cNvSpPr txBox="1"/>
-          <p:nvPr/>
-        </p:nvSpPr>
-        <p:spPr>
-          <a:xfrm>
-            <a:off x="457200" y="2057400"/>
-            <a:ext cx="8229600" cy="685800"/>
-          </a:xfrm>
-          <a:prstGeom prst="rect">
-            <a:avLst/>
-          </a:prstGeom>
-          <a:noFill/>
-        </p:spPr>
-        <p:txBody>
-          <a:bodyPr wrap="none">
-            <a:spAutoFit/>
-          </a:bodyPr>
-          <a:lstStyle/>
-          <a:p>
-            <a:pPr>
-              <a:defRPr sz="1300">
-                <a:solidFill>
-                  <a:srgbClr val="333333"/>
-                </a:solidFill>
-              </a:defRPr>
-            </a:pPr>
-            <a:r>
-              <a:t>cybersecurity, raising discussions about agent reliability and economic implications.</a:t>
-            </a:r>
+            <a:off x="274320" y="731520"/>
+            <a:ext cx="365760" cy="365760"/>
+          </a:xfrm>
+          <a:prstGeom prst="ellipse">
+            <a:avLst/>
+          </a:prstGeom>
+          <a:solidFill>
+            <a:srgbClr val="E74C3C"/>
+          </a:solidFill>
+        </p:spPr>
+        <p:style>
+          <a:lnRef idx="1">
+            <a:schemeClr val="accent1"/>
+          </a:lnRef>
+          <a:fillRef idx="3">
+            <a:schemeClr val="accent1"/>
+          </a:fillRef>
+          <a:effectRef idx="2">
+            <a:schemeClr val="accent1"/>
+          </a:effectRef>
+          <a:fontRef idx="minor">
+            <a:schemeClr val="lt1"/>
+          </a:fontRef>
+        </p:style>
+        <p:txBody>
+          <a:bodyPr rtlCol="0" anchor="ctr"/>
+          <a:lstStyle/>
+          <a:p>
+            <a:pPr algn="ctr"/>
           </a:p>
         </p:txBody>
       </p:sp>
       <p:sp>
         <p:nvSpPr>
           <p:cNvPr id="5" name="TextBox 4"/>
-          <p:cNvSpPr txBox="1"/>
-          <p:nvPr/>
-        </p:nvSpPr>
-        <p:spPr>
-          <a:xfrm>
-            <a:off x="457200" y="2743200"/>
-            <a:ext cx="8229600" cy="685800"/>
-          </a:xfrm>
-          <a:prstGeom prst="rect">
-            <a:avLst/>
-          </a:prstGeom>
-          <a:noFill/>
-        </p:spPr>
-        <p:txBody>
-          <a:bodyPr wrap="none">
-            <a:spAutoFit/>
-          </a:bodyPr>
-          <a:lstStyle/>
-          <a:p>
-            <a:pPr>
-              <a:defRPr sz="1000"/>
-            </a:pPr>
-          </a:p>
-        </p:txBody>
-      </p:sp>
-      <p:sp>
-        <p:nvSpPr>
-          <p:cNvPr id="6" name="TextBox 5"/>
-          <p:cNvSpPr txBox="1"/>
-          <p:nvPr/>
-        </p:nvSpPr>
-        <p:spPr>
-          <a:xfrm>
-            <a:off x="457200" y="3429000"/>
-            <a:ext cx="8229600" cy="685800"/>
-          </a:xfrm>
-          <a:prstGeom prst="rect">
-            <a:avLst/>
-          </a:prstGeom>
-          <a:noFill/>
-        </p:spPr>
-        <p:txBody>
-          <a:bodyPr wrap="none">
-            <a:spAutoFit/>
-          </a:bodyPr>
-          <a:lstStyle/>
-          <a:p>
-            <a:pPr>
-              <a:defRPr sz="1000" i="1">
-                <a:solidFill>
-                  <a:srgbClr val="666666"/>
-                </a:solidFill>
-              </a:defRPr>
-            </a:pPr>
-            <a:r>
-              <a:t>Source: r/artificial • 210 upvotes • 32 comments</a:t>
-            </a:r>
-          </a:p>
-        </p:txBody>
-      </p:sp>
-      <p:sp>
-        <p:nvSpPr>
-          <p:cNvPr id="7" name="TextBox 6"/>
-          <p:cNvSpPr txBox="1"/>
-          <p:nvPr/>
-        </p:nvSpPr>
-        <p:spPr>
-          <a:xfrm>
-            <a:off x="457200" y="4114800"/>
-            <a:ext cx="8229600" cy="685800"/>
-          </a:xfrm>
-          <a:prstGeom prst="rect">
-            <a:avLst/>
-          </a:prstGeom>
-          <a:noFill/>
-        </p:spPr>
-        <p:txBody>
-          <a:bodyPr wrap="none">
-            <a:spAutoFit/>
-          </a:bodyPr>
-          <a:lstStyle/>
-          <a:p>
-            <a:pPr>
-              <a:defRPr sz="900">
-                <a:solidFill>
-                  <a:srgbClr val="3498DB"/>
-                </a:solidFill>
-              </a:defRPr>
-            </a:pPr>
-            <a:r>
-              <a:t>🔗 https://reddit.com/r/artificial/comments/1pkuaaq/an_ai_ag...</a:t>
-            </a:r>
-          </a:p>
-        </p:txBody>
-      </p:sp>
-      <p:sp>
-        <p:nvSpPr>
-          <p:cNvPr id="8" name="TextBox 7"/>
           <p:cNvSpPr txBox="1"/>
           <p:nvPr/>
         </p:nvSpPr>
@@ -7120,7 +5957,7 @@
               <a:defRPr sz="3200" b="1"/>
             </a:pPr>
             <a:r>
-              <a:t>4. Claude CLI deleted my home directory and wiped my Mac</a:t>
+              <a:t>3. Something Ominous Is Happening in the AI Economy</a:t>
             </a:r>
           </a:p>
         </p:txBody>
@@ -7134,7 +5971,7 @@
         <p:spPr>
           <a:xfrm>
             <a:off x="457200" y="1371600"/>
-            <a:ext cx="8229600" cy="685800"/>
+            <a:ext cx="3657600" cy="4114800"/>
           </a:xfrm>
           <a:prstGeom prst="rect">
             <a:avLst/>
@@ -7147,15 +5984,8 @@
           </a:bodyPr>
           <a:lstStyle/>
           <a:p>
-            <a:pPr>
-              <a:defRPr sz="1300">
-                <a:solidFill>
-                  <a:srgbClr val="333333"/>
-                </a:solidFill>
-              </a:defRPr>
-            </a:pPr>
-            <a:r>
-              <a:t>Catalyzes urgent community discussion about safety mechanisms, permission boundaries, and</a:t>
+            <a:r>
+              <a:t>Analysis of growing concerns about AI agent deployment economics, sustainability, and</a:t>
             </a:r>
           </a:p>
         </p:txBody>
@@ -7168,8 +5998,8 @@
         </p:nvSpPr>
         <p:spPr>
           <a:xfrm>
-            <a:off x="457200" y="2057400"/>
-            <a:ext cx="8229600" cy="685800"/>
+            <a:off x="5029200" y="1371600"/>
+            <a:ext cx="3657600" cy="4114800"/>
           </a:xfrm>
           <a:prstGeom prst="rect">
             <a:avLst/>
@@ -7182,120 +6012,66 @@
           </a:bodyPr>
           <a:lstStyle/>
           <a:p>
-            <a:pPr>
-              <a:defRPr sz="1300">
-                <a:solidFill>
-                  <a:srgbClr val="333333"/>
-                </a:solidFill>
-              </a:defRPr>
-            </a:pPr>
-            <a:r>
-              <a:t>responsible deployment practices for autonomous tool-using agents.</a:t>
-            </a:r>
-          </a:p>
-        </p:txBody>
-      </p:sp>
-      <p:sp>
-        <p:nvSpPr>
-          <p:cNvPr id="5" name="TextBox 4"/>
-          <p:cNvSpPr txBox="1"/>
+            <a:r>
+              <a:t>whether current autonomous systems can deliver on promised productivity gains.</a:t>
+            </a:r>
+          </a:p>
+          <a:p/>
+          <a:p>
+            <a:r>
+              <a:t>📍 r/artificial • 154 upvotes • 72 comments</a:t>
+            </a:r>
+          </a:p>
+          <a:p>
+            <a:r>
+              <a:t>🔗 https://reddit.com/r/artificial/comments/1pk6avk/something_ominous_...</a:t>
+            </a:r>
+          </a:p>
+        </p:txBody>
+      </p:sp>
+      <p:sp>
+        <p:nvSpPr>
+          <p:cNvPr id="5" name="Rectangle 4"/>
+          <p:cNvSpPr/>
           <p:nvPr/>
         </p:nvSpPr>
         <p:spPr>
           <a:xfrm>
-            <a:off x="457200" y="2743200"/>
-            <a:ext cx="8229600" cy="685800"/>
+            <a:off x="274320" y="731520"/>
+            <a:ext cx="365760" cy="365760"/>
           </a:xfrm>
           <a:prstGeom prst="rect">
             <a:avLst/>
           </a:prstGeom>
-          <a:noFill/>
-        </p:spPr>
-        <p:txBody>
-          <a:bodyPr wrap="none">
-            <a:spAutoFit/>
-          </a:bodyPr>
-          <a:lstStyle/>
-          <a:p>
-            <a:pPr>
-              <a:defRPr sz="1000"/>
-            </a:pPr>
+          <a:solidFill>
+            <a:srgbClr val="E74C3C"/>
+          </a:solidFill>
+        </p:spPr>
+        <p:style>
+          <a:lnRef idx="1">
+            <a:schemeClr val="accent1"/>
+          </a:lnRef>
+          <a:fillRef idx="3">
+            <a:schemeClr val="accent1"/>
+          </a:fillRef>
+          <a:effectRef idx="2">
+            <a:schemeClr val="accent1"/>
+          </a:effectRef>
+          <a:fontRef idx="minor">
+            <a:schemeClr val="lt1"/>
+          </a:fontRef>
+        </p:style>
+        <p:txBody>
+          <a:bodyPr rtlCol="0" anchor="ctr"/>
+          <a:lstStyle/>
+          <a:p>
+            <a:pPr algn="ctr"/>
           </a:p>
         </p:txBody>
       </p:sp>
       <p:sp>
         <p:nvSpPr>
           <p:cNvPr id="6" name="TextBox 5"/>
-          <p:cNvSpPr txBox="1"/>
-          <p:nvPr/>
-        </p:nvSpPr>
-        <p:spPr>
-          <a:xfrm>
-            <a:off x="457200" y="3429000"/>
-            <a:ext cx="8229600" cy="685800"/>
-          </a:xfrm>
-          <a:prstGeom prst="rect">
-            <a:avLst/>
-          </a:prstGeom>
-          <a:noFill/>
-        </p:spPr>
-        <p:txBody>
-          <a:bodyPr wrap="none">
-            <a:spAutoFit/>
-          </a:bodyPr>
-          <a:lstStyle/>
-          <a:p>
-            <a:pPr>
-              <a:defRPr sz="1000" i="1">
-                <a:solidFill>
-                  <a:srgbClr val="666666"/>
-                </a:solidFill>
-              </a:defRPr>
-            </a:pPr>
-            <a:r>
-              <a:t>Source: Hacker News • 220 points • 179 comments</a:t>
-            </a:r>
-          </a:p>
-        </p:txBody>
-      </p:sp>
-      <p:sp>
-        <p:nvSpPr>
-          <p:cNvPr id="7" name="TextBox 6"/>
-          <p:cNvSpPr txBox="1"/>
-          <p:nvPr/>
-        </p:nvSpPr>
-        <p:spPr>
-          <a:xfrm>
-            <a:off x="457200" y="4114800"/>
-            <a:ext cx="8229600" cy="685800"/>
-          </a:xfrm>
-          <a:prstGeom prst="rect">
-            <a:avLst/>
-          </a:prstGeom>
-          <a:noFill/>
-        </p:spPr>
-        <p:txBody>
-          <a:bodyPr wrap="none">
-            <a:spAutoFit/>
-          </a:bodyPr>
-          <a:lstStyle/>
-          <a:p>
-            <a:pPr>
-              <a:defRPr sz="900">
-                <a:solidFill>
-                  <a:srgbClr val="3498DB"/>
-                </a:solidFill>
-              </a:defRPr>
-            </a:pPr>
-            <a:r>
-              <a:t>🔗 https://old.reddit.com/r/ClaudeAI/comments/1pgxckk/claude...</a:t>
-            </a:r>
-          </a:p>
-        </p:txBody>
-      </p:sp>
-      <p:sp>
-        <p:nvSpPr>
-          <p:cNvPr id="8" name="TextBox 7"/>
           <p:cNvSpPr txBox="1"/>
           <p:nvPr/>
         </p:nvSpPr>
@@ -7333,6 +6109,723 @@
 </file>
 
 <file path=ppt/slides/slide25.xml><?xml version="1.0" encoding="utf-8"?>
+<p:sld xmlns:a="http://schemas.openxmlformats.org/drawingml/2006/main" xmlns:p="http://schemas.openxmlformats.org/presentationml/2006/main" xmlns:r="http://schemas.openxmlformats.org/officeDocument/2006/relationships">
+  <p:cSld>
+    <p:bg>
+      <p:bgPr>
+        <a:solidFill>
+          <a:srgbClr val="F8F9FA"/>
+        </a:solidFill>
+        <a:effectLst/>
+      </p:bgPr>
+    </p:bg>
+    <p:spTree>
+      <p:nvGrpSpPr>
+        <p:cNvPr id="1" name=""/>
+        <p:cNvGrpSpPr/>
+        <p:nvPr/>
+      </p:nvGrpSpPr>
+      <p:grpSpPr/>
+      <p:sp>
+        <p:nvSpPr>
+          <p:cNvPr id="2" name="Title 1"/>
+          <p:cNvSpPr>
+            <a:spLocks noGrp="1"/>
+          </p:cNvSpPr>
+          <p:nvPr>
+            <p:ph type="title"/>
+          </p:nvPr>
+        </p:nvSpPr>
+        <p:spPr/>
+        <p:txBody>
+          <a:bodyPr/>
+          <a:lstStyle/>
+          <a:p>
+            <a:r>
+              <a:t>4. LLMs can understand Base64 encoded instructions</a:t>
+            </a:r>
+          </a:p>
+        </p:txBody>
+      </p:sp>
+      <p:sp>
+        <p:nvSpPr>
+          <p:cNvPr id="3" name="Content Placeholder 2"/>
+          <p:cNvSpPr>
+            <a:spLocks noGrp="1"/>
+          </p:cNvSpPr>
+          <p:nvPr>
+            <p:ph idx="1"/>
+          </p:nvPr>
+        </p:nvSpPr>
+        <p:spPr/>
+        <p:txBody>
+          <a:bodyPr/>
+          <a:lstStyle/>
+          <a:p>
+            <a:r>
+              <a:t>Discovery reveals potential vulnerabilities in agent safety systems, as encoding can</a:t>
+            </a:r>
+          </a:p>
+          <a:p>
+            <a:pPr/>
+            <a:r>
+              <a:t>bypass instruction filters, raising concerns about reliable constraint enforcement in</a:t>
+            </a:r>
+          </a:p>
+          <a:p>
+            <a:pPr/>
+            <a:r>
+              <a:t>autonomous agents.</a:t>
+            </a:r>
+          </a:p>
+          <a:p>
+            <a:pPr/>
+          </a:p>
+          <a:p>
+            <a:pPr/>
+            <a:r>
+              <a:t>📍 r/artificial • 173 upvotes • 71 comments</a:t>
+            </a:r>
+          </a:p>
+          <a:p>
+            <a:pPr/>
+            <a:r>
+              <a:t>🔗 https://reddit.com/r/artificial/comments/1pioxt4/llms_can_understan...</a:t>
+            </a:r>
+          </a:p>
+        </p:txBody>
+      </p:sp>
+      <p:sp>
+        <p:nvSpPr>
+          <p:cNvPr id="4" name="Oval 3"/>
+          <p:cNvSpPr/>
+          <p:nvPr/>
+        </p:nvSpPr>
+        <p:spPr>
+          <a:xfrm>
+            <a:off x="274320" y="731520"/>
+            <a:ext cx="365760" cy="365760"/>
+          </a:xfrm>
+          <a:prstGeom prst="ellipse">
+            <a:avLst/>
+          </a:prstGeom>
+          <a:solidFill>
+            <a:srgbClr val="E74C3C"/>
+          </a:solidFill>
+        </p:spPr>
+        <p:style>
+          <a:lnRef idx="1">
+            <a:schemeClr val="accent1"/>
+          </a:lnRef>
+          <a:fillRef idx="3">
+            <a:schemeClr val="accent1"/>
+          </a:fillRef>
+          <a:effectRef idx="2">
+            <a:schemeClr val="accent1"/>
+          </a:effectRef>
+          <a:fontRef idx="minor">
+            <a:schemeClr val="lt1"/>
+          </a:fontRef>
+        </p:style>
+        <p:txBody>
+          <a:bodyPr rtlCol="0" anchor="ctr"/>
+          <a:lstStyle/>
+          <a:p>
+            <a:pPr algn="ctr"/>
+          </a:p>
+        </p:txBody>
+      </p:sp>
+      <p:sp>
+        <p:nvSpPr>
+          <p:cNvPr id="5" name="TextBox 4"/>
+          <p:cNvSpPr txBox="1"/>
+          <p:nvPr/>
+        </p:nvSpPr>
+        <p:spPr>
+          <a:xfrm>
+            <a:off x="457200" y="6400800"/>
+            <a:ext cx="7315200" cy="274320"/>
+          </a:xfrm>
+          <a:prstGeom prst="rect">
+            <a:avLst/>
+          </a:prstGeom>
+          <a:noFill/>
+        </p:spPr>
+        <p:txBody>
+          <a:bodyPr wrap="none">
+            <a:spAutoFit/>
+          </a:bodyPr>
+          <a:lstStyle/>
+          <a:p>
+            <a:pPr algn="ctr">
+              <a:defRPr sz="1000"/>
+            </a:pPr>
+            <a:r>
+              <a:t>Slide 25</a:t>
+            </a:r>
+          </a:p>
+        </p:txBody>
+      </p:sp>
+    </p:spTree>
+  </p:cSld>
+  <p:clrMapOvr>
+    <a:masterClrMapping/>
+  </p:clrMapOvr>
+</p:sld>
+</file>
+
+<file path=ppt/slides/slide26.xml><?xml version="1.0" encoding="utf-8"?>
+<p:sld xmlns:a="http://schemas.openxmlformats.org/drawingml/2006/main" xmlns:p="http://schemas.openxmlformats.org/presentationml/2006/main" xmlns:r="http://schemas.openxmlformats.org/officeDocument/2006/relationships">
+  <p:cSld>
+    <p:bg>
+      <p:bgPr>
+        <a:solidFill>
+          <a:srgbClr val="3498DB"/>
+        </a:solidFill>
+        <a:effectLst/>
+      </p:bgPr>
+    </p:bg>
+    <p:spTree>
+      <p:nvGrpSpPr>
+        <p:cNvPr id="1" name=""/>
+        <p:cNvGrpSpPr/>
+        <p:nvPr/>
+      </p:nvGrpSpPr>
+      <p:grpSpPr/>
+      <p:sp>
+        <p:nvSpPr>
+          <p:cNvPr id="2" name="TextBox 1"/>
+          <p:cNvSpPr txBox="1"/>
+          <p:nvPr/>
+        </p:nvSpPr>
+        <p:spPr>
+          <a:xfrm>
+            <a:off x="457200" y="457200"/>
+            <a:ext cx="8229600" cy="685800"/>
+          </a:xfrm>
+          <a:prstGeom prst="rect">
+            <a:avLst/>
+          </a:prstGeom>
+          <a:noFill/>
+        </p:spPr>
+        <p:txBody>
+          <a:bodyPr wrap="none">
+            <a:spAutoFit/>
+          </a:bodyPr>
+          <a:lstStyle/>
+          <a:p>
+            <a:pPr>
+              <a:defRPr sz="3200" b="1"/>
+            </a:pPr>
+            <a:r>
+              <a:t>📅 Upcoming Editions</a:t>
+            </a:r>
+          </a:p>
+        </p:txBody>
+      </p:sp>
+      <p:cxnSp>
+        <p:nvCxnSpPr>
+          <p:cNvPr id="3" name="Connector 2"/>
+          <p:cNvCxnSpPr/>
+          <p:nvPr/>
+        </p:nvCxnSpPr>
+        <p:spPr>
+          <a:xfrm>
+            <a:off x="914400" y="3200400"/>
+            <a:ext cx="7315200" cy="0"/>
+          </a:xfrm>
+          <a:prstGeom prst="line">
+            <a:avLst/>
+          </a:prstGeom>
+          <a:ln w="38100">
+            <a:solidFill>
+              <a:srgbClr val="4472C4"/>
+            </a:solidFill>
+          </a:ln>
+        </p:spPr>
+        <p:style>
+          <a:lnRef idx="2">
+            <a:schemeClr val="accent1"/>
+          </a:lnRef>
+          <a:fillRef idx="0">
+            <a:schemeClr val="accent1"/>
+          </a:fillRef>
+          <a:effectRef idx="1">
+            <a:schemeClr val="accent1"/>
+          </a:effectRef>
+          <a:fontRef idx="minor">
+            <a:schemeClr val="tx1"/>
+          </a:fontRef>
+        </p:style>
+      </p:cxnSp>
+      <p:sp>
+        <p:nvSpPr>
+          <p:cNvPr id="4" name="Oval 3"/>
+          <p:cNvSpPr/>
+          <p:nvPr/>
+        </p:nvSpPr>
+        <p:spPr>
+          <a:xfrm>
+            <a:off x="777240" y="3063240"/>
+            <a:ext cx="274320" cy="274320"/>
+          </a:xfrm>
+          <a:prstGeom prst="ellipse">
+            <a:avLst/>
+          </a:prstGeom>
+          <a:solidFill>
+            <a:srgbClr val="4472C4"/>
+          </a:solidFill>
+          <a:ln>
+            <a:solidFill>
+              <a:srgbClr val="4472C4"/>
+            </a:solidFill>
+          </a:ln>
+        </p:spPr>
+        <p:style>
+          <a:lnRef idx="1">
+            <a:schemeClr val="accent1"/>
+          </a:lnRef>
+          <a:fillRef idx="3">
+            <a:schemeClr val="accent1"/>
+          </a:fillRef>
+          <a:effectRef idx="2">
+            <a:schemeClr val="accent1"/>
+          </a:effectRef>
+          <a:fontRef idx="minor">
+            <a:schemeClr val="lt1"/>
+          </a:fontRef>
+        </p:style>
+        <p:txBody>
+          <a:bodyPr rtlCol="0" anchor="ctr"/>
+          <a:lstStyle/>
+          <a:p>
+            <a:pPr algn="ctr"/>
+          </a:p>
+        </p:txBody>
+      </p:sp>
+      <p:sp>
+        <p:nvSpPr>
+          <p:cNvPr id="5" name="TextBox 4"/>
+          <p:cNvSpPr txBox="1"/>
+          <p:nvPr/>
+        </p:nvSpPr>
+        <p:spPr>
+          <a:xfrm>
+            <a:off x="457200" y="2286000"/>
+            <a:ext cx="914400" cy="457200"/>
+          </a:xfrm>
+          <a:prstGeom prst="rect">
+            <a:avLst/>
+          </a:prstGeom>
+          <a:noFill/>
+        </p:spPr>
+        <p:txBody>
+          <a:bodyPr wrap="none">
+            <a:spAutoFit/>
+          </a:bodyPr>
+          <a:lstStyle/>
+          <a:p>
+            <a:pPr algn="ctr">
+              <a:defRPr sz="1200" b="1"/>
+            </a:pPr>
+            <a:r>
+              <a:t>Dec 22</a:t>
+            </a:r>
+          </a:p>
+        </p:txBody>
+      </p:sp>
+      <p:sp>
+        <p:nvSpPr>
+          <p:cNvPr id="6" name="TextBox 5"/>
+          <p:cNvSpPr txBox="1"/>
+          <p:nvPr/>
+        </p:nvSpPr>
+        <p:spPr>
+          <a:xfrm>
+            <a:off x="228600" y="3657600"/>
+            <a:ext cx="1371600" cy="1371600"/>
+          </a:xfrm>
+          <a:prstGeom prst="rect">
+            <a:avLst/>
+          </a:prstGeom>
+          <a:noFill/>
+        </p:spPr>
+        <p:txBody>
+          <a:bodyPr wrap="square">
+            <a:spAutoFit/>
+          </a:bodyPr>
+          <a:lstStyle/>
+          <a:p>
+            <a:pPr algn="ctr">
+              <a:defRPr sz="1000"/>
+            </a:pPr>
+            <a:r>
+              <a:t>Week 1 Digest</a:t>
+            </a:r>
+          </a:p>
+        </p:txBody>
+      </p:sp>
+      <p:sp>
+        <p:nvSpPr>
+          <p:cNvPr id="7" name="Oval 6"/>
+          <p:cNvSpPr/>
+          <p:nvPr/>
+        </p:nvSpPr>
+        <p:spPr>
+          <a:xfrm>
+            <a:off x="3215640" y="3063240"/>
+            <a:ext cx="274320" cy="274320"/>
+          </a:xfrm>
+          <a:prstGeom prst="ellipse">
+            <a:avLst/>
+          </a:prstGeom>
+          <a:solidFill>
+            <a:srgbClr val="4472C4"/>
+          </a:solidFill>
+          <a:ln>
+            <a:solidFill>
+              <a:srgbClr val="4472C4"/>
+            </a:solidFill>
+          </a:ln>
+        </p:spPr>
+        <p:style>
+          <a:lnRef idx="1">
+            <a:schemeClr val="accent1"/>
+          </a:lnRef>
+          <a:fillRef idx="3">
+            <a:schemeClr val="accent1"/>
+          </a:fillRef>
+          <a:effectRef idx="2">
+            <a:schemeClr val="accent1"/>
+          </a:effectRef>
+          <a:fontRef idx="minor">
+            <a:schemeClr val="lt1"/>
+          </a:fontRef>
+        </p:style>
+        <p:txBody>
+          <a:bodyPr rtlCol="0" anchor="ctr"/>
+          <a:lstStyle/>
+          <a:p>
+            <a:pPr algn="ctr"/>
+          </a:p>
+        </p:txBody>
+      </p:sp>
+      <p:sp>
+        <p:nvSpPr>
+          <p:cNvPr id="8" name="TextBox 7"/>
+          <p:cNvSpPr txBox="1"/>
+          <p:nvPr/>
+        </p:nvSpPr>
+        <p:spPr>
+          <a:xfrm>
+            <a:off x="2895600" y="2286000"/>
+            <a:ext cx="914400" cy="457200"/>
+          </a:xfrm>
+          <a:prstGeom prst="rect">
+            <a:avLst/>
+          </a:prstGeom>
+          <a:noFill/>
+        </p:spPr>
+        <p:txBody>
+          <a:bodyPr wrap="none">
+            <a:spAutoFit/>
+          </a:bodyPr>
+          <a:lstStyle/>
+          <a:p>
+            <a:pPr algn="ctr">
+              <a:defRPr sz="1200" b="1"/>
+            </a:pPr>
+            <a:r>
+              <a:t>Dec 29</a:t>
+            </a:r>
+          </a:p>
+        </p:txBody>
+      </p:sp>
+      <p:sp>
+        <p:nvSpPr>
+          <p:cNvPr id="9" name="TextBox 8"/>
+          <p:cNvSpPr txBox="1"/>
+          <p:nvPr/>
+        </p:nvSpPr>
+        <p:spPr>
+          <a:xfrm>
+            <a:off x="2667000" y="3657600"/>
+            <a:ext cx="1371600" cy="1371600"/>
+          </a:xfrm>
+          <a:prstGeom prst="rect">
+            <a:avLst/>
+          </a:prstGeom>
+          <a:noFill/>
+        </p:spPr>
+        <p:txBody>
+          <a:bodyPr wrap="square">
+            <a:spAutoFit/>
+          </a:bodyPr>
+          <a:lstStyle/>
+          <a:p>
+            <a:pPr algn="ctr">
+              <a:defRPr sz="1000"/>
+            </a:pPr>
+            <a:r>
+              <a:t>Week 2 Digest</a:t>
+            </a:r>
+          </a:p>
+        </p:txBody>
+      </p:sp>
+      <p:sp>
+        <p:nvSpPr>
+          <p:cNvPr id="10" name="Oval 9"/>
+          <p:cNvSpPr/>
+          <p:nvPr/>
+        </p:nvSpPr>
+        <p:spPr>
+          <a:xfrm>
+            <a:off x="5654039" y="3063240"/>
+            <a:ext cx="274320" cy="274320"/>
+          </a:xfrm>
+          <a:prstGeom prst="ellipse">
+            <a:avLst/>
+          </a:prstGeom>
+          <a:solidFill>
+            <a:srgbClr val="4472C4"/>
+          </a:solidFill>
+          <a:ln>
+            <a:solidFill>
+              <a:srgbClr val="4472C4"/>
+            </a:solidFill>
+          </a:ln>
+        </p:spPr>
+        <p:style>
+          <a:lnRef idx="1">
+            <a:schemeClr val="accent1"/>
+          </a:lnRef>
+          <a:fillRef idx="3">
+            <a:schemeClr val="accent1"/>
+          </a:fillRef>
+          <a:effectRef idx="2">
+            <a:schemeClr val="accent1"/>
+          </a:effectRef>
+          <a:fontRef idx="minor">
+            <a:schemeClr val="lt1"/>
+          </a:fontRef>
+        </p:style>
+        <p:txBody>
+          <a:bodyPr rtlCol="0" anchor="ctr"/>
+          <a:lstStyle/>
+          <a:p>
+            <a:pPr algn="ctr"/>
+          </a:p>
+        </p:txBody>
+      </p:sp>
+      <p:sp>
+        <p:nvSpPr>
+          <p:cNvPr id="11" name="TextBox 10"/>
+          <p:cNvSpPr txBox="1"/>
+          <p:nvPr/>
+        </p:nvSpPr>
+        <p:spPr>
+          <a:xfrm>
+            <a:off x="5334000" y="2286000"/>
+            <a:ext cx="914400" cy="457200"/>
+          </a:xfrm>
+          <a:prstGeom prst="rect">
+            <a:avLst/>
+          </a:prstGeom>
+          <a:noFill/>
+        </p:spPr>
+        <p:txBody>
+          <a:bodyPr wrap="none">
+            <a:spAutoFit/>
+          </a:bodyPr>
+          <a:lstStyle/>
+          <a:p>
+            <a:pPr algn="ctr">
+              <a:defRPr sz="1200" b="1"/>
+            </a:pPr>
+            <a:r>
+              <a:t>Jan 05</a:t>
+            </a:r>
+          </a:p>
+        </p:txBody>
+      </p:sp>
+      <p:sp>
+        <p:nvSpPr>
+          <p:cNvPr id="12" name="TextBox 11"/>
+          <p:cNvSpPr txBox="1"/>
+          <p:nvPr/>
+        </p:nvSpPr>
+        <p:spPr>
+          <a:xfrm>
+            <a:off x="5105400" y="3657600"/>
+            <a:ext cx="1371600" cy="1371600"/>
+          </a:xfrm>
+          <a:prstGeom prst="rect">
+            <a:avLst/>
+          </a:prstGeom>
+          <a:noFill/>
+        </p:spPr>
+        <p:txBody>
+          <a:bodyPr wrap="square">
+            <a:spAutoFit/>
+          </a:bodyPr>
+          <a:lstStyle/>
+          <a:p>
+            <a:pPr algn="ctr">
+              <a:defRPr sz="1000"/>
+            </a:pPr>
+            <a:r>
+              <a:t>Week 3 Digest</a:t>
+            </a:r>
+          </a:p>
+        </p:txBody>
+      </p:sp>
+      <p:sp>
+        <p:nvSpPr>
+          <p:cNvPr id="13" name="Oval 12"/>
+          <p:cNvSpPr/>
+          <p:nvPr/>
+        </p:nvSpPr>
+        <p:spPr>
+          <a:xfrm>
+            <a:off x="8092440" y="3063240"/>
+            <a:ext cx="274320" cy="274320"/>
+          </a:xfrm>
+          <a:prstGeom prst="ellipse">
+            <a:avLst/>
+          </a:prstGeom>
+          <a:solidFill>
+            <a:srgbClr val="4472C4"/>
+          </a:solidFill>
+          <a:ln>
+            <a:solidFill>
+              <a:srgbClr val="4472C4"/>
+            </a:solidFill>
+          </a:ln>
+        </p:spPr>
+        <p:style>
+          <a:lnRef idx="1">
+            <a:schemeClr val="accent1"/>
+          </a:lnRef>
+          <a:fillRef idx="3">
+            <a:schemeClr val="accent1"/>
+          </a:fillRef>
+          <a:effectRef idx="2">
+            <a:schemeClr val="accent1"/>
+          </a:effectRef>
+          <a:fontRef idx="minor">
+            <a:schemeClr val="lt1"/>
+          </a:fontRef>
+        </p:style>
+        <p:txBody>
+          <a:bodyPr rtlCol="0" anchor="ctr"/>
+          <a:lstStyle/>
+          <a:p>
+            <a:pPr algn="ctr"/>
+          </a:p>
+        </p:txBody>
+      </p:sp>
+      <p:sp>
+        <p:nvSpPr>
+          <p:cNvPr id="14" name="TextBox 13"/>
+          <p:cNvSpPr txBox="1"/>
+          <p:nvPr/>
+        </p:nvSpPr>
+        <p:spPr>
+          <a:xfrm>
+            <a:off x="7772400" y="2286000"/>
+            <a:ext cx="914400" cy="457200"/>
+          </a:xfrm>
+          <a:prstGeom prst="rect">
+            <a:avLst/>
+          </a:prstGeom>
+          <a:noFill/>
+        </p:spPr>
+        <p:txBody>
+          <a:bodyPr wrap="none">
+            <a:spAutoFit/>
+          </a:bodyPr>
+          <a:lstStyle/>
+          <a:p>
+            <a:pPr algn="ctr">
+              <a:defRPr sz="1200" b="1"/>
+            </a:pPr>
+            <a:r>
+              <a:t>Jan 12</a:t>
+            </a:r>
+          </a:p>
+        </p:txBody>
+      </p:sp>
+      <p:sp>
+        <p:nvSpPr>
+          <p:cNvPr id="15" name="TextBox 14"/>
+          <p:cNvSpPr txBox="1"/>
+          <p:nvPr/>
+        </p:nvSpPr>
+        <p:spPr>
+          <a:xfrm>
+            <a:off x="7543800" y="3657600"/>
+            <a:ext cx="1371600" cy="1371600"/>
+          </a:xfrm>
+          <a:prstGeom prst="rect">
+            <a:avLst/>
+          </a:prstGeom>
+          <a:noFill/>
+        </p:spPr>
+        <p:txBody>
+          <a:bodyPr wrap="square">
+            <a:spAutoFit/>
+          </a:bodyPr>
+          <a:lstStyle/>
+          <a:p>
+            <a:pPr algn="ctr">
+              <a:defRPr sz="1000"/>
+            </a:pPr>
+            <a:r>
+              <a:t>Week 4 Digest</a:t>
+            </a:r>
+          </a:p>
+        </p:txBody>
+      </p:sp>
+      <p:sp>
+        <p:nvSpPr>
+          <p:cNvPr id="16" name="TextBox 15"/>
+          <p:cNvSpPr txBox="1"/>
+          <p:nvPr/>
+        </p:nvSpPr>
+        <p:spPr>
+          <a:xfrm>
+            <a:off x="457200" y="6400800"/>
+            <a:ext cx="7315200" cy="274320"/>
+          </a:xfrm>
+          <a:prstGeom prst="rect">
+            <a:avLst/>
+          </a:prstGeom>
+          <a:noFill/>
+        </p:spPr>
+        <p:txBody>
+          <a:bodyPr wrap="none">
+            <a:spAutoFit/>
+          </a:bodyPr>
+          <a:lstStyle/>
+          <a:p>
+            <a:pPr algn="ctr">
+              <a:defRPr sz="1000"/>
+            </a:pPr>
+            <a:r>
+              <a:t>Slide 26</a:t>
+            </a:r>
+          </a:p>
+        </p:txBody>
+      </p:sp>
+    </p:spTree>
+  </p:cSld>
+  <p:clrMapOvr>
+    <a:masterClrMapping/>
+  </p:clrMapOvr>
+</p:sld>
+</file>
+
+<file path=ppt/slides/slide27.xml><?xml version="1.0" encoding="utf-8"?>
 <p:sld xmlns:a="http://schemas.openxmlformats.org/drawingml/2006/main" xmlns:p="http://schemas.openxmlformats.org/presentationml/2006/main" xmlns:r="http://schemas.openxmlformats.org/officeDocument/2006/relationships">
   <p:cSld>
     <p:bg>
@@ -7352,14 +6845,178 @@
       <p:grpSpPr/>
       <p:sp>
         <p:nvSpPr>
-          <p:cNvPr id="2" name="TextBox 1"/>
+          <p:cNvPr id="2" name="Title 1"/>
+          <p:cNvSpPr>
+            <a:spLocks noGrp="1"/>
+          </p:cNvSpPr>
+          <p:nvPr>
+            <p:ph type="title"/>
+          </p:nvPr>
+        </p:nvSpPr>
+        <p:spPr/>
+        <p:txBody>
+          <a:bodyPr/>
+          <a:lstStyle/>
+          <a:p>
+            <a:r>
+              <a:t>✨ Stay Curious</a:t>
+            </a:r>
+          </a:p>
+        </p:txBody>
+      </p:sp>
+      <p:sp>
+        <p:nvSpPr>
+          <p:cNvPr id="3" name="Content Placeholder 2"/>
+          <p:cNvSpPr>
+            <a:spLocks noGrp="1"/>
+          </p:cNvSpPr>
+          <p:nvPr>
+            <p:ph idx="1"/>
+          </p:nvPr>
+        </p:nvSpPr>
+        <p:spPr/>
+        <p:txBody>
+          <a:bodyPr/>
+          <a:lstStyle/>
+          <a:p>
+            <a:r>
+              <a:t>Your weekly AI digest</a:t>
+            </a:r>
+          </a:p>
+          <a:p>
+            <a:pPr/>
+            <a:r>
+              <a:t>Automatically curated every Sunday at 6 PM</a:t>
+            </a:r>
+          </a:p>
+          <a:p>
+            <a:pPr/>
+          </a:p>
+          <a:p>
+            <a:pPr/>
+            <a:r>
+              <a:t>🔬 Data Sources:</a:t>
+            </a:r>
+          </a:p>
+          <a:p>
+            <a:pPr/>
+            <a:r>
+              <a:t>  • arXiv Research Papers</a:t>
+            </a:r>
+          </a:p>
+          <a:p>
+            <a:pPr/>
+            <a:r>
+              <a:t>  • Hacker News</a:t>
+            </a:r>
+          </a:p>
+          <a:p>
+            <a:pPr/>
+            <a:r>
+              <a:t>  • Reddit ML Communities</a:t>
+            </a:r>
+          </a:p>
+          <a:p>
+            <a:pPr/>
+          </a:p>
+          <a:p>
+            <a:pPr/>
+            <a:r>
+              <a:t>📅 Next edition: December 21, 2025</a:t>
+            </a:r>
+          </a:p>
+        </p:txBody>
+      </p:sp>
+      <p:sp>
+        <p:nvSpPr>
+          <p:cNvPr id="4" name="Oval 3"/>
+          <p:cNvSpPr/>
+          <p:nvPr/>
+        </p:nvSpPr>
+        <p:spPr>
+          <a:xfrm>
+            <a:off x="914400" y="4572000"/>
+            <a:ext cx="731520" cy="731520"/>
+          </a:xfrm>
+          <a:prstGeom prst="ellipse">
+            <a:avLst/>
+          </a:prstGeom>
+          <a:solidFill>
+            <a:srgbClr val="FFFFFF"/>
+          </a:solidFill>
+        </p:spPr>
+        <p:style>
+          <a:lnRef idx="1">
+            <a:schemeClr val="accent1"/>
+          </a:lnRef>
+          <a:fillRef idx="3">
+            <a:schemeClr val="accent1"/>
+          </a:fillRef>
+          <a:effectRef idx="2">
+            <a:schemeClr val="accent1"/>
+          </a:effectRef>
+          <a:fontRef idx="minor">
+            <a:schemeClr val="lt1"/>
+          </a:fontRef>
+        </p:style>
+        <p:txBody>
+          <a:bodyPr rtlCol="0" anchor="ctr"/>
+          <a:lstStyle/>
+          <a:p>
+            <a:pPr algn="ctr"/>
+          </a:p>
+        </p:txBody>
+      </p:sp>
+      <p:sp>
+        <p:nvSpPr>
+          <p:cNvPr id="5" name="Rectangle 4"/>
+          <p:cNvSpPr/>
+          <p:nvPr/>
+        </p:nvSpPr>
+        <p:spPr>
+          <a:xfrm>
+            <a:off x="7772400" y="1371600"/>
+            <a:ext cx="914400" cy="457200"/>
+          </a:xfrm>
+          <a:prstGeom prst="rect">
+            <a:avLst/>
+          </a:prstGeom>
+          <a:solidFill>
+            <a:srgbClr val="667EEA"/>
+          </a:solidFill>
+        </p:spPr>
+        <p:style>
+          <a:lnRef idx="1">
+            <a:schemeClr val="accent1"/>
+          </a:lnRef>
+          <a:fillRef idx="3">
+            <a:schemeClr val="accent1"/>
+          </a:fillRef>
+          <a:effectRef idx="2">
+            <a:schemeClr val="accent1"/>
+          </a:effectRef>
+          <a:fontRef idx="minor">
+            <a:schemeClr val="lt1"/>
+          </a:fontRef>
+        </p:style>
+        <p:txBody>
+          <a:bodyPr rtlCol="0" anchor="ctr"/>
+          <a:lstStyle/>
+          <a:p>
+            <a:pPr algn="ctr"/>
+          </a:p>
+        </p:txBody>
+      </p:sp>
+      <p:sp>
+        <p:nvSpPr>
+          <p:cNvPr id="6" name="TextBox 5"/>
           <p:cNvSpPr txBox="1"/>
           <p:nvPr/>
         </p:nvSpPr>
         <p:spPr>
           <a:xfrm>
-            <a:off x="457200" y="457200"/>
-            <a:ext cx="8229600" cy="685800"/>
+            <a:off x="457200" y="6400800"/>
+            <a:ext cx="7315200" cy="274320"/>
           </a:xfrm>
           <a:prstGeom prst="rect">
             <a:avLst/>
@@ -7372,343 +7029,11 @@
           </a:bodyPr>
           <a:lstStyle/>
           <a:p>
-            <a:pPr>
-              <a:defRPr sz="3200" b="1"/>
-            </a:pPr>
-            <a:r>
-              <a:t>Stay Curious</a:t>
-            </a:r>
-          </a:p>
-        </p:txBody>
-      </p:sp>
-      <p:sp>
-        <p:nvSpPr>
-          <p:cNvPr id="3" name="TextBox 2"/>
-          <p:cNvSpPr txBox="1"/>
-          <p:nvPr/>
-        </p:nvSpPr>
-        <p:spPr>
-          <a:xfrm>
-            <a:off x="457200" y="1371600"/>
-            <a:ext cx="8229600" cy="685800"/>
-          </a:xfrm>
-          <a:prstGeom prst="rect">
-            <a:avLst/>
-          </a:prstGeom>
-          <a:noFill/>
-        </p:spPr>
-        <p:txBody>
-          <a:bodyPr wrap="none">
-            <a:spAutoFit/>
-          </a:bodyPr>
-          <a:lstStyle/>
-          <a:p>
-            <a:pPr>
-              <a:defRPr sz="1800" b="1">
-                <a:solidFill>
-                  <a:srgbClr val="FFFFFF"/>
-                </a:solidFill>
-              </a:defRPr>
-            </a:pPr>
-            <a:r>
-              <a:t>Your weekly AI digest</a:t>
-            </a:r>
-          </a:p>
-        </p:txBody>
-      </p:sp>
-      <p:sp>
-        <p:nvSpPr>
-          <p:cNvPr id="4" name="TextBox 3"/>
-          <p:cNvSpPr txBox="1"/>
-          <p:nvPr/>
-        </p:nvSpPr>
-        <p:spPr>
-          <a:xfrm>
-            <a:off x="457200" y="2057400"/>
-            <a:ext cx="8229600" cy="685800"/>
-          </a:xfrm>
-          <a:prstGeom prst="rect">
-            <a:avLst/>
-          </a:prstGeom>
-          <a:noFill/>
-        </p:spPr>
-        <p:txBody>
-          <a:bodyPr wrap="none">
-            <a:spAutoFit/>
-          </a:bodyPr>
-          <a:lstStyle/>
-          <a:p>
-            <a:pPr>
-              <a:defRPr sz="1400" i="1">
-                <a:solidFill>
-                  <a:srgbClr val="EEEEEE"/>
-                </a:solidFill>
-              </a:defRPr>
-            </a:pPr>
-            <a:r>
-              <a:t>Automatically curated every Sunday</a:t>
-            </a:r>
-          </a:p>
-        </p:txBody>
-      </p:sp>
-      <p:sp>
-        <p:nvSpPr>
-          <p:cNvPr id="5" name="TextBox 4"/>
-          <p:cNvSpPr txBox="1"/>
-          <p:nvPr/>
-        </p:nvSpPr>
-        <p:spPr>
-          <a:xfrm>
-            <a:off x="457200" y="2743200"/>
-            <a:ext cx="8229600" cy="685800"/>
-          </a:xfrm>
-          <a:prstGeom prst="rect">
-            <a:avLst/>
-          </a:prstGeom>
-          <a:noFill/>
-        </p:spPr>
-        <p:txBody>
-          <a:bodyPr wrap="none">
-            <a:spAutoFit/>
-          </a:bodyPr>
-          <a:lstStyle/>
-          <a:p>
-            <a:pPr>
-              <a:defRPr sz="1200"/>
-            </a:pPr>
-          </a:p>
-        </p:txBody>
-      </p:sp>
-      <p:sp>
-        <p:nvSpPr>
-          <p:cNvPr id="6" name="TextBox 5"/>
-          <p:cNvSpPr txBox="1"/>
-          <p:nvPr/>
-        </p:nvSpPr>
-        <p:spPr>
-          <a:xfrm>
-            <a:off x="457200" y="3429000"/>
-            <a:ext cx="8229600" cy="685800"/>
-          </a:xfrm>
-          <a:prstGeom prst="rect">
-            <a:avLst/>
-          </a:prstGeom>
-          <a:noFill/>
-        </p:spPr>
-        <p:txBody>
-          <a:bodyPr wrap="none">
-            <a:spAutoFit/>
-          </a:bodyPr>
-          <a:lstStyle/>
-          <a:p>
-            <a:pPr>
-              <a:defRPr sz="1400" b="1">
-                <a:solidFill>
-                  <a:srgbClr val="FFFFFF"/>
-                </a:solidFill>
-              </a:defRPr>
-            </a:pPr>
-            <a:r>
-              <a:t>Data Sources:</a:t>
-            </a:r>
-          </a:p>
-        </p:txBody>
-      </p:sp>
-      <p:sp>
-        <p:nvSpPr>
-          <p:cNvPr id="7" name="TextBox 6"/>
-          <p:cNvSpPr txBox="1"/>
-          <p:nvPr/>
-        </p:nvSpPr>
-        <p:spPr>
-          <a:xfrm>
-            <a:off x="457200" y="4114800"/>
-            <a:ext cx="8229600" cy="685800"/>
-          </a:xfrm>
-          <a:prstGeom prst="rect">
-            <a:avLst/>
-          </a:prstGeom>
-          <a:noFill/>
-        </p:spPr>
-        <p:txBody>
-          <a:bodyPr wrap="none">
-            <a:spAutoFit/>
-          </a:bodyPr>
-          <a:lstStyle/>
-          <a:p>
-            <a:pPr>
-              <a:defRPr sz="1200">
-                <a:solidFill>
-                  <a:srgbClr val="EEEEEE"/>
-                </a:solidFill>
-              </a:defRPr>
-            </a:pPr>
-            <a:r>
-              <a:t>  → arXiv Research Papers</a:t>
-            </a:r>
-          </a:p>
-        </p:txBody>
-      </p:sp>
-      <p:sp>
-        <p:nvSpPr>
-          <p:cNvPr id="8" name="TextBox 7"/>
-          <p:cNvSpPr txBox="1"/>
-          <p:nvPr/>
-        </p:nvSpPr>
-        <p:spPr>
-          <a:xfrm>
-            <a:off x="457200" y="4800600"/>
-            <a:ext cx="8229600" cy="685800"/>
-          </a:xfrm>
-          <a:prstGeom prst="rect">
-            <a:avLst/>
-          </a:prstGeom>
-          <a:noFill/>
-        </p:spPr>
-        <p:txBody>
-          <a:bodyPr wrap="none">
-            <a:spAutoFit/>
-          </a:bodyPr>
-          <a:lstStyle/>
-          <a:p>
-            <a:pPr>
-              <a:defRPr sz="1200">
-                <a:solidFill>
-                  <a:srgbClr val="EEEEEE"/>
-                </a:solidFill>
-              </a:defRPr>
-            </a:pPr>
-            <a:r>
-              <a:t>  → Hacker News</a:t>
-            </a:r>
-          </a:p>
-        </p:txBody>
-      </p:sp>
-      <p:sp>
-        <p:nvSpPr>
-          <p:cNvPr id="9" name="TextBox 8"/>
-          <p:cNvSpPr txBox="1"/>
-          <p:nvPr/>
-        </p:nvSpPr>
-        <p:spPr>
-          <a:xfrm>
-            <a:off x="457200" y="5486400"/>
-            <a:ext cx="8229600" cy="685800"/>
-          </a:xfrm>
-          <a:prstGeom prst="rect">
-            <a:avLst/>
-          </a:prstGeom>
-          <a:noFill/>
-        </p:spPr>
-        <p:txBody>
-          <a:bodyPr wrap="none">
-            <a:spAutoFit/>
-          </a:bodyPr>
-          <a:lstStyle/>
-          <a:p>
-            <a:pPr>
-              <a:defRPr sz="1200">
-                <a:solidFill>
-                  <a:srgbClr val="EEEEEE"/>
-                </a:solidFill>
-              </a:defRPr>
-            </a:pPr>
-            <a:r>
-              <a:t>  → Reddit ML Communities</a:t>
-            </a:r>
-          </a:p>
-        </p:txBody>
-      </p:sp>
-      <p:sp>
-        <p:nvSpPr>
-          <p:cNvPr id="10" name="TextBox 9"/>
-          <p:cNvSpPr txBox="1"/>
-          <p:nvPr/>
-        </p:nvSpPr>
-        <p:spPr>
-          <a:xfrm>
-            <a:off x="457200" y="6172200"/>
-            <a:ext cx="8229600" cy="685800"/>
-          </a:xfrm>
-          <a:prstGeom prst="rect">
-            <a:avLst/>
-          </a:prstGeom>
-          <a:noFill/>
-        </p:spPr>
-        <p:txBody>
-          <a:bodyPr wrap="none">
-            <a:spAutoFit/>
-          </a:bodyPr>
-          <a:lstStyle/>
-          <a:p>
-            <a:pPr>
-              <a:defRPr sz="1200"/>
-            </a:pPr>
-          </a:p>
-        </p:txBody>
-      </p:sp>
-      <p:sp>
-        <p:nvSpPr>
-          <p:cNvPr id="11" name="TextBox 10"/>
-          <p:cNvSpPr txBox="1"/>
-          <p:nvPr/>
-        </p:nvSpPr>
-        <p:spPr>
-          <a:xfrm>
-            <a:off x="457200" y="6858000"/>
-            <a:ext cx="8229600" cy="685800"/>
-          </a:xfrm>
-          <a:prstGeom prst="rect">
-            <a:avLst/>
-          </a:prstGeom>
-          <a:noFill/>
-        </p:spPr>
-        <p:txBody>
-          <a:bodyPr wrap="none">
-            <a:spAutoFit/>
-          </a:bodyPr>
-          <a:lstStyle/>
-          <a:p>
-            <a:pPr>
-              <a:defRPr sz="1300" i="1">
-                <a:solidFill>
-                  <a:srgbClr val="CCCCCC"/>
-                </a:solidFill>
-              </a:defRPr>
-            </a:pPr>
-            <a:r>
-              <a:t>Next edition: December 21, 2025</a:t>
-            </a:r>
-          </a:p>
-        </p:txBody>
-      </p:sp>
-      <p:sp>
-        <p:nvSpPr>
-          <p:cNvPr id="12" name="TextBox 11"/>
-          <p:cNvSpPr txBox="1"/>
-          <p:nvPr/>
-        </p:nvSpPr>
-        <p:spPr>
-          <a:xfrm>
-            <a:off x="457200" y="6400800"/>
-            <a:ext cx="7315200" cy="274320"/>
-          </a:xfrm>
-          <a:prstGeom prst="rect">
-            <a:avLst/>
-          </a:prstGeom>
-          <a:noFill/>
-        </p:spPr>
-        <p:txBody>
-          <a:bodyPr wrap="none">
-            <a:spAutoFit/>
-          </a:bodyPr>
-          <a:lstStyle/>
-          <a:p>
             <a:pPr algn="ctr">
               <a:defRPr sz="1000"/>
             </a:pPr>
             <a:r>
-              <a:t>Slide 25</a:t>
+              <a:t>Slide 27</a:t>
             </a:r>
           </a:p>
         </p:txBody>
@@ -7722,6 +7047,112 @@
 </file>
 
 <file path=ppt/slides/slide3.xml><?xml version="1.0" encoding="utf-8"?>
+<p:sld xmlns:a="http://schemas.openxmlformats.org/drawingml/2006/main" xmlns:p="http://schemas.openxmlformats.org/presentationml/2006/main" xmlns:r="http://schemas.openxmlformats.org/officeDocument/2006/relationships">
+  <p:cSld>
+    <p:bg>
+      <p:bgPr>
+        <a:solidFill>
+          <a:srgbClr val="1ABC9C"/>
+        </a:solidFill>
+        <a:effectLst/>
+      </p:bgPr>
+    </p:bg>
+    <p:spTree>
+      <p:nvGrpSpPr>
+        <p:cNvPr id="1" name=""/>
+        <p:cNvGrpSpPr/>
+        <p:nvPr/>
+      </p:nvGrpSpPr>
+      <p:grpSpPr/>
+      <p:sp>
+        <p:nvSpPr>
+          <p:cNvPr id="2" name="TextBox 1"/>
+          <p:cNvSpPr txBox="1"/>
+          <p:nvPr/>
+        </p:nvSpPr>
+        <p:spPr>
+          <a:xfrm>
+            <a:off x="457200" y="457200"/>
+            <a:ext cx="8229600" cy="685800"/>
+          </a:xfrm>
+          <a:prstGeom prst="rect">
+            <a:avLst/>
+          </a:prstGeom>
+          <a:noFill/>
+        </p:spPr>
+        <p:txBody>
+          <a:bodyPr wrap="none">
+            <a:spAutoFit/>
+          </a:bodyPr>
+          <a:lstStyle/>
+          <a:p>
+            <a:pPr>
+              <a:defRPr sz="3200" b="1"/>
+            </a:pPr>
+            <a:r>
+              <a:t>📈 Content Distribution</a:t>
+            </a:r>
+          </a:p>
+        </p:txBody>
+      </p:sp>
+      <p:graphicFrame>
+        <p:nvGraphicFramePr>
+          <p:cNvPr id="3" name="Chart 2"/>
+          <p:cNvGraphicFramePr>
+            <a:graphicFrameLocks noGrp="1"/>
+          </p:cNvGraphicFramePr>
+          <p:nvPr/>
+        </p:nvGraphicFramePr>
+        <p:xfrm>
+          <a:off x="914400" y="1371600"/>
+          <a:ext cx="7315200" cy="4572000"/>
+        </p:xfrm>
+        <a:graphic>
+          <a:graphicData uri="http://schemas.openxmlformats.org/drawingml/2006/chart">
+            <c:chart xmlns:c="http://schemas.openxmlformats.org/drawingml/2006/chart" r:id="rId2"/>
+          </a:graphicData>
+        </a:graphic>
+      </p:graphicFrame>
+      <p:sp>
+        <p:nvSpPr>
+          <p:cNvPr id="4" name="TextBox 3"/>
+          <p:cNvSpPr txBox="1"/>
+          <p:nvPr/>
+        </p:nvSpPr>
+        <p:spPr>
+          <a:xfrm>
+            <a:off x="457200" y="6400800"/>
+            <a:ext cx="7315200" cy="274320"/>
+          </a:xfrm>
+          <a:prstGeom prst="rect">
+            <a:avLst/>
+          </a:prstGeom>
+          <a:noFill/>
+        </p:spPr>
+        <p:txBody>
+          <a:bodyPr wrap="none">
+            <a:spAutoFit/>
+          </a:bodyPr>
+          <a:lstStyle/>
+          <a:p>
+            <a:pPr algn="ctr">
+              <a:defRPr sz="1000"/>
+            </a:pPr>
+            <a:r>
+              <a:t>Slide 3</a:t>
+            </a:r>
+          </a:p>
+        </p:txBody>
+      </p:sp>
+    </p:spTree>
+  </p:cSld>
+  <p:clrMapOvr>
+    <a:masterClrMapping/>
+  </p:clrMapOvr>
+</p:sld>
+</file>
+
+<file path=ppt/slides/slide4.xml><?xml version="1.0" encoding="utf-8"?>
 <p:sld xmlns:a="http://schemas.openxmlformats.org/drawingml/2006/main" xmlns:p="http://schemas.openxmlformats.org/presentationml/2006/main" xmlns:r="http://schemas.openxmlformats.org/officeDocument/2006/relationships">
   <p:cSld>
     <p:bg>
@@ -7741,427 +7172,98 @@
       <p:grpSpPr/>
       <p:sp>
         <p:nvSpPr>
-          <p:cNvPr id="2" name="TextBox 1"/>
-          <p:cNvSpPr txBox="1"/>
+          <p:cNvPr id="2" name="Title 1"/>
+          <p:cNvSpPr>
+            <a:spLocks noGrp="1"/>
+          </p:cNvSpPr>
+          <p:nvPr>
+            <p:ph type="title"/>
+          </p:nvPr>
+        </p:nvSpPr>
+        <p:spPr/>
+        <p:txBody>
+          <a:bodyPr/>
+          <a:lstStyle/>
+          <a:p>
+            <a:r>
+              <a:t>🔬 Key Research Papers</a:t>
+            </a:r>
+          </a:p>
+        </p:txBody>
+      </p:sp>
+      <p:sp>
+        <p:nvSpPr>
+          <p:cNvPr id="3" name="Content Placeholder 2"/>
+          <p:cNvSpPr>
+            <a:spLocks noGrp="1"/>
+          </p:cNvSpPr>
+          <p:nvPr>
+            <p:ph idx="1"/>
+          </p:nvPr>
+        </p:nvSpPr>
+        <p:spPr/>
+        <p:txBody>
+          <a:bodyPr/>
+          <a:lstStyle/>
+          <a:p>
+            <a:r>
+              <a:t>5 key updates this week</a:t>
+            </a:r>
+          </a:p>
+          <a:p>
+            <a:pPr/>
+          </a:p>
+          <a:p>
+            <a:pPr/>
+            <a:r>
+              <a:t>→ Swipe to explore</a:t>
+            </a:r>
+          </a:p>
+        </p:txBody>
+      </p:sp>
+      <p:sp>
+        <p:nvSpPr>
+          <p:cNvPr id="4" name="Rectangle 3"/>
+          <p:cNvSpPr/>
           <p:nvPr/>
         </p:nvSpPr>
         <p:spPr>
           <a:xfrm>
-            <a:off x="457200" y="457200"/>
-            <a:ext cx="8229600" cy="685800"/>
+            <a:off x="7315200" y="4572000"/>
+            <a:ext cx="1371600" cy="1371600"/>
           </a:xfrm>
           <a:prstGeom prst="rect">
             <a:avLst/>
           </a:prstGeom>
-          <a:noFill/>
-        </p:spPr>
-        <p:txBody>
-          <a:bodyPr wrap="none">
-            <a:spAutoFit/>
-          </a:bodyPr>
-          <a:lstStyle/>
-          <a:p>
-            <a:pPr>
-              <a:defRPr sz="3200" b="1"/>
-            </a:pPr>
-            <a:r>
-              <a:t>Key Research Papers</a:t>
-            </a:r>
-          </a:p>
-        </p:txBody>
-      </p:sp>
-      <p:sp>
-        <p:nvSpPr>
-          <p:cNvPr id="3" name="TextBox 2"/>
-          <p:cNvSpPr txBox="1"/>
-          <p:nvPr/>
-        </p:nvSpPr>
-        <p:spPr>
-          <a:xfrm>
-            <a:off x="457200" y="1371600"/>
-            <a:ext cx="8229600" cy="685800"/>
-          </a:xfrm>
-          <a:prstGeom prst="rect">
-            <a:avLst/>
-          </a:prstGeom>
-          <a:noFill/>
-        </p:spPr>
-        <p:txBody>
-          <a:bodyPr wrap="none">
-            <a:spAutoFit/>
-          </a:bodyPr>
-          <a:lstStyle/>
-          <a:p>
-            <a:pPr>
-              <a:defRPr sz="2000" b="1">
-                <a:solidFill>
-                  <a:srgbClr val="FFFFFF"/>
-                </a:solidFill>
-              </a:defRPr>
-            </a:pPr>
-            <a:r>
-              <a:t>5 key updates</a:t>
-            </a:r>
-          </a:p>
-        </p:txBody>
-      </p:sp>
-      <p:sp>
-        <p:nvSpPr>
-          <p:cNvPr id="4" name="TextBox 3"/>
-          <p:cNvSpPr txBox="1"/>
-          <p:nvPr/>
-        </p:nvSpPr>
-        <p:spPr>
-          <a:xfrm>
-            <a:off x="457200" y="2057400"/>
-            <a:ext cx="8229600" cy="685800"/>
-          </a:xfrm>
-          <a:prstGeom prst="rect">
-            <a:avLst/>
-          </a:prstGeom>
-          <a:noFill/>
-        </p:spPr>
-        <p:txBody>
-          <a:bodyPr wrap="none">
-            <a:spAutoFit/>
-          </a:bodyPr>
-          <a:lstStyle/>
-          <a:p>
-            <a:pPr>
-              <a:defRPr sz="1200"/>
-            </a:pPr>
+          <a:solidFill>
+            <a:srgbClr val="FFFFFF"/>
+          </a:solidFill>
+        </p:spPr>
+        <p:style>
+          <a:lnRef idx="1">
+            <a:schemeClr val="accent1"/>
+          </a:lnRef>
+          <a:fillRef idx="3">
+            <a:schemeClr val="accent1"/>
+          </a:fillRef>
+          <a:effectRef idx="2">
+            <a:schemeClr val="accent1"/>
+          </a:effectRef>
+          <a:fontRef idx="minor">
+            <a:schemeClr val="lt1"/>
+          </a:fontRef>
+        </p:style>
+        <p:txBody>
+          <a:bodyPr rtlCol="0" anchor="ctr"/>
+          <a:lstStyle/>
+          <a:p>
+            <a:pPr algn="ctr"/>
           </a:p>
         </p:txBody>
       </p:sp>
       <p:sp>
         <p:nvSpPr>
           <p:cNvPr id="5" name="TextBox 4"/>
-          <p:cNvSpPr txBox="1"/>
-          <p:nvPr/>
-        </p:nvSpPr>
-        <p:spPr>
-          <a:xfrm>
-            <a:off x="457200" y="2743200"/>
-            <a:ext cx="8229600" cy="685800"/>
-          </a:xfrm>
-          <a:prstGeom prst="rect">
-            <a:avLst/>
-          </a:prstGeom>
-          <a:noFill/>
-        </p:spPr>
-        <p:txBody>
-          <a:bodyPr wrap="none">
-            <a:spAutoFit/>
-          </a:bodyPr>
-          <a:lstStyle/>
-          <a:p>
-            <a:pPr>
-              <a:defRPr sz="1600" i="1">
-                <a:solidFill>
-                  <a:srgbClr val="FFFFFF"/>
-                </a:solidFill>
-              </a:defRPr>
-            </a:pPr>
-            <a:r>
-              <a:t>Swipe to explore →</a:t>
-            </a:r>
-          </a:p>
-        </p:txBody>
-      </p:sp>
-      <p:sp>
-        <p:nvSpPr>
-          <p:cNvPr id="6" name="TextBox 5"/>
-          <p:cNvSpPr txBox="1"/>
-          <p:nvPr/>
-        </p:nvSpPr>
-        <p:spPr>
-          <a:xfrm>
-            <a:off x="457200" y="6400800"/>
-            <a:ext cx="7315200" cy="274320"/>
-          </a:xfrm>
-          <a:prstGeom prst="rect">
-            <a:avLst/>
-          </a:prstGeom>
-          <a:noFill/>
-        </p:spPr>
-        <p:txBody>
-          <a:bodyPr wrap="none">
-            <a:spAutoFit/>
-          </a:bodyPr>
-          <a:lstStyle/>
-          <a:p>
-            <a:pPr algn="ctr">
-              <a:defRPr sz="1000"/>
-            </a:pPr>
-            <a:r>
-              <a:t>Slide 3</a:t>
-            </a:r>
-          </a:p>
-        </p:txBody>
-      </p:sp>
-    </p:spTree>
-  </p:cSld>
-  <p:clrMapOvr>
-    <a:masterClrMapping/>
-  </p:clrMapOvr>
-</p:sld>
-</file>
-
-<file path=ppt/slides/slide4.xml><?xml version="1.0" encoding="utf-8"?>
-<p:sld xmlns:a="http://schemas.openxmlformats.org/drawingml/2006/main" xmlns:p="http://schemas.openxmlformats.org/presentationml/2006/main" xmlns:r="http://schemas.openxmlformats.org/officeDocument/2006/relationships">
-  <p:cSld>
-    <p:bg>
-      <p:bgPr>
-        <a:solidFill>
-          <a:srgbClr val="F8F9FA"/>
-        </a:solidFill>
-        <a:effectLst/>
-      </p:bgPr>
-    </p:bg>
-    <p:spTree>
-      <p:nvGrpSpPr>
-        <p:cNvPr id="1" name=""/>
-        <p:cNvGrpSpPr/>
-        <p:nvPr/>
-      </p:nvGrpSpPr>
-      <p:grpSpPr/>
-      <p:sp>
-        <p:nvSpPr>
-          <p:cNvPr id="2" name="TextBox 1"/>
-          <p:cNvSpPr txBox="1"/>
-          <p:nvPr/>
-        </p:nvSpPr>
-        <p:spPr>
-          <a:xfrm>
-            <a:off x="457200" y="457200"/>
-            <a:ext cx="8229600" cy="685800"/>
-          </a:xfrm>
-          <a:prstGeom prst="rect">
-            <a:avLst/>
-          </a:prstGeom>
-          <a:noFill/>
-        </p:spPr>
-        <p:txBody>
-          <a:bodyPr wrap="none">
-            <a:spAutoFit/>
-          </a:bodyPr>
-          <a:lstStyle/>
-          <a:p>
-            <a:pPr>
-              <a:defRPr sz="3200" b="1"/>
-            </a:pPr>
-            <a:r>
-              <a:t>1. Agile Flight Emerges from Multi-Agent Competitive Racing</a:t>
-            </a:r>
-          </a:p>
-        </p:txBody>
-      </p:sp>
-      <p:sp>
-        <p:nvSpPr>
-          <p:cNvPr id="3" name="TextBox 2"/>
-          <p:cNvSpPr txBox="1"/>
-          <p:nvPr/>
-        </p:nvSpPr>
-        <p:spPr>
-          <a:xfrm>
-            <a:off x="457200" y="1371600"/>
-            <a:ext cx="8229600" cy="685800"/>
-          </a:xfrm>
-          <a:prstGeom prst="rect">
-            <a:avLst/>
-          </a:prstGeom>
-          <a:noFill/>
-        </p:spPr>
-        <p:txBody>
-          <a:bodyPr wrap="none">
-            <a:spAutoFit/>
-          </a:bodyPr>
-          <a:lstStyle/>
-          <a:p>
-            <a:pPr>
-              <a:defRPr sz="1300">
-                <a:solidFill>
-                  <a:srgbClr val="333333"/>
-                </a:solidFill>
-              </a:defRPr>
-            </a:pPr>
-            <a:r>
-              <a:t>Demonstrates that complex agile flight behaviors and strategic decision-making emerge</a:t>
-            </a:r>
-          </a:p>
-        </p:txBody>
-      </p:sp>
-      <p:sp>
-        <p:nvSpPr>
-          <p:cNvPr id="4" name="TextBox 3"/>
-          <p:cNvSpPr txBox="1"/>
-          <p:nvPr/>
-        </p:nvSpPr>
-        <p:spPr>
-          <a:xfrm>
-            <a:off x="457200" y="2057400"/>
-            <a:ext cx="8229600" cy="685800"/>
-          </a:xfrm>
-          <a:prstGeom prst="rect">
-            <a:avLst/>
-          </a:prstGeom>
-          <a:noFill/>
-        </p:spPr>
-        <p:txBody>
-          <a:bodyPr wrap="none">
-            <a:spAutoFit/>
-          </a:bodyPr>
-          <a:lstStyle/>
-          <a:p>
-            <a:pPr>
-              <a:defRPr sz="1300">
-                <a:solidFill>
-                  <a:srgbClr val="333333"/>
-                </a:solidFill>
-              </a:defRPr>
-            </a:pPr>
-            <a:r>
-              <a:t>purely from multi-agent competition with sparse rewards, showing how agent interaction</a:t>
-            </a:r>
-          </a:p>
-        </p:txBody>
-      </p:sp>
-      <p:sp>
-        <p:nvSpPr>
-          <p:cNvPr id="5" name="TextBox 4"/>
-          <p:cNvSpPr txBox="1"/>
-          <p:nvPr/>
-        </p:nvSpPr>
-        <p:spPr>
-          <a:xfrm>
-            <a:off x="457200" y="2743200"/>
-            <a:ext cx="8229600" cy="685800"/>
-          </a:xfrm>
-          <a:prstGeom prst="rect">
-            <a:avLst/>
-          </a:prstGeom>
-          <a:noFill/>
-        </p:spPr>
-        <p:txBody>
-          <a:bodyPr wrap="none">
-            <a:spAutoFit/>
-          </a:bodyPr>
-          <a:lstStyle/>
-          <a:p>
-            <a:pPr>
-              <a:defRPr sz="1300">
-                <a:solidFill>
-                  <a:srgbClr val="333333"/>
-                </a:solidFill>
-              </a:defRPr>
-            </a:pPr>
-            <a:r>
-              <a:t>drives capability development.</a:t>
-            </a:r>
-          </a:p>
-        </p:txBody>
-      </p:sp>
-      <p:sp>
-        <p:nvSpPr>
-          <p:cNvPr id="6" name="TextBox 5"/>
-          <p:cNvSpPr txBox="1"/>
-          <p:nvPr/>
-        </p:nvSpPr>
-        <p:spPr>
-          <a:xfrm>
-            <a:off x="457200" y="3429000"/>
-            <a:ext cx="8229600" cy="685800"/>
-          </a:xfrm>
-          <a:prstGeom prst="rect">
-            <a:avLst/>
-          </a:prstGeom>
-          <a:noFill/>
-        </p:spPr>
-        <p:txBody>
-          <a:bodyPr wrap="none">
-            <a:spAutoFit/>
-          </a:bodyPr>
-          <a:lstStyle/>
-          <a:p>
-            <a:pPr>
-              <a:defRPr sz="1000"/>
-            </a:pPr>
-          </a:p>
-        </p:txBody>
-      </p:sp>
-      <p:sp>
-        <p:nvSpPr>
-          <p:cNvPr id="7" name="TextBox 6"/>
-          <p:cNvSpPr txBox="1"/>
-          <p:nvPr/>
-        </p:nvSpPr>
-        <p:spPr>
-          <a:xfrm>
-            <a:off x="457200" y="4114800"/>
-            <a:ext cx="8229600" cy="685800"/>
-          </a:xfrm>
-          <a:prstGeom prst="rect">
-            <a:avLst/>
-          </a:prstGeom>
-          <a:noFill/>
-        </p:spPr>
-        <p:txBody>
-          <a:bodyPr wrap="none">
-            <a:spAutoFit/>
-          </a:bodyPr>
-          <a:lstStyle/>
-          <a:p>
-            <a:pPr>
-              <a:defRPr sz="1000" i="1">
-                <a:solidFill>
-                  <a:srgbClr val="666666"/>
-                </a:solidFill>
-              </a:defRPr>
-            </a:pPr>
-            <a:r>
-              <a:t>Source: arXiv • Vineet Pasumarti, Lorenzo Bianchi, Antonio Loquercio</a:t>
-            </a:r>
-          </a:p>
-        </p:txBody>
-      </p:sp>
-      <p:sp>
-        <p:nvSpPr>
-          <p:cNvPr id="8" name="TextBox 7"/>
-          <p:cNvSpPr txBox="1"/>
-          <p:nvPr/>
-        </p:nvSpPr>
-        <p:spPr>
-          <a:xfrm>
-            <a:off x="457200" y="4800600"/>
-            <a:ext cx="8229600" cy="685800"/>
-          </a:xfrm>
-          <a:prstGeom prst="rect">
-            <a:avLst/>
-          </a:prstGeom>
-          <a:noFill/>
-        </p:spPr>
-        <p:txBody>
-          <a:bodyPr wrap="none">
-            <a:spAutoFit/>
-          </a:bodyPr>
-          <a:lstStyle/>
-          <a:p>
-            <a:pPr>
-              <a:defRPr sz="900">
-                <a:solidFill>
-                  <a:srgbClr val="3498DB"/>
-                </a:solidFill>
-              </a:defRPr>
-            </a:pPr>
-            <a:r>
-              <a:t>🔗 https://arxiv.org/abs/2512.11781v1</a:t>
-            </a:r>
-          </a:p>
-        </p:txBody>
-      </p:sp>
-      <p:sp>
-        <p:nvSpPr>
-          <p:cNvPr id="9" name="TextBox 8"/>
           <p:cNvSpPr txBox="1"/>
           <p:nvPr/>
         </p:nvSpPr>
@@ -8218,241 +7320,116 @@
       <p:grpSpPr/>
       <p:sp>
         <p:nvSpPr>
-          <p:cNvPr id="2" name="TextBox 1"/>
-          <p:cNvSpPr txBox="1"/>
+          <p:cNvPr id="2" name="Title 1"/>
+          <p:cNvSpPr>
+            <a:spLocks noGrp="1"/>
+          </p:cNvSpPr>
+          <p:nvPr>
+            <p:ph type="title"/>
+          </p:nvPr>
+        </p:nvSpPr>
+        <p:spPr/>
+        <p:txBody>
+          <a:bodyPr/>
+          <a:lstStyle/>
+          <a:p>
+            <a:r>
+              <a:t>1. Agile Flight Emerges from Multi-Agent Competitive Racing</a:t>
+            </a:r>
+          </a:p>
+        </p:txBody>
+      </p:sp>
+      <p:sp>
+        <p:nvSpPr>
+          <p:cNvPr id="3" name="Content Placeholder 2"/>
+          <p:cNvSpPr>
+            <a:spLocks noGrp="1"/>
+          </p:cNvSpPr>
+          <p:nvPr>
+            <p:ph idx="1"/>
+          </p:nvPr>
+        </p:nvSpPr>
+        <p:spPr/>
+        <p:txBody>
+          <a:bodyPr/>
+          <a:lstStyle/>
+          <a:p>
+            <a:r>
+              <a:t>Demonstrates that sophisticated agile flight behaviors and strategic decision-making</a:t>
+            </a:r>
+          </a:p>
+          <a:p>
+            <a:pPr/>
+            <a:r>
+              <a:t>can emerge purely from multi-agent competition with sparse rewards, pushing platforms</a:t>
+            </a:r>
+          </a:p>
+          <a:p>
+            <a:pPr/>
+            <a:r>
+              <a:t>to physical limits through adversarial learning.</a:t>
+            </a:r>
+          </a:p>
+          <a:p>
+            <a:pPr/>
+          </a:p>
+          <a:p>
+            <a:pPr/>
+            <a:r>
+              <a:t>📍 arXiv • Vineet Pasumarti, Lorenzo Bianchi, Antonio Loquercio</a:t>
+            </a:r>
+          </a:p>
+          <a:p>
+            <a:pPr/>
+            <a:r>
+              <a:t>🔗 https://arxiv.org/abs/2512.11781v1</a:t>
+            </a:r>
+          </a:p>
+        </p:txBody>
+      </p:sp>
+      <p:sp>
+        <p:nvSpPr>
+          <p:cNvPr id="4" name="Rectangle 3"/>
+          <p:cNvSpPr/>
           <p:nvPr/>
         </p:nvSpPr>
         <p:spPr>
           <a:xfrm>
-            <a:off x="457200" y="457200"/>
-            <a:ext cx="8229600" cy="685800"/>
+            <a:off x="274320" y="731520"/>
+            <a:ext cx="365760" cy="365760"/>
           </a:xfrm>
           <a:prstGeom prst="rect">
             <a:avLst/>
           </a:prstGeom>
-          <a:noFill/>
-        </p:spPr>
-        <p:txBody>
-          <a:bodyPr wrap="none">
-            <a:spAutoFit/>
-          </a:bodyPr>
-          <a:lstStyle/>
-          <a:p>
-            <a:pPr>
-              <a:defRPr sz="3200" b="1"/>
-            </a:pPr>
-            <a:r>
-              <a:t>2. MedAI: Evaluating TxAgent's Therapeutic Agentic Reasoning in the NeurIPS...</a:t>
-            </a:r>
-          </a:p>
-        </p:txBody>
-      </p:sp>
-      <p:sp>
-        <p:nvSpPr>
-          <p:cNvPr id="3" name="TextBox 2"/>
-          <p:cNvSpPr txBox="1"/>
-          <p:nvPr/>
-        </p:nvSpPr>
-        <p:spPr>
-          <a:xfrm>
-            <a:off x="457200" y="1371600"/>
-            <a:ext cx="8229600" cy="685800"/>
-          </a:xfrm>
-          <a:prstGeom prst="rect">
-            <a:avLst/>
-          </a:prstGeom>
-          <a:noFill/>
-        </p:spPr>
-        <p:txBody>
-          <a:bodyPr wrap="none">
-            <a:spAutoFit/>
-          </a:bodyPr>
-          <a:lstStyle/>
-          <a:p>
-            <a:pPr>
-              <a:defRPr sz="1300">
-                <a:solidFill>
-                  <a:srgbClr val="333333"/>
-                </a:solidFill>
-              </a:defRPr>
-            </a:pPr>
-            <a:r>
-              <a:t>Introduces TxAgent, an agentic system specifically designed for therapeutic</a:t>
-            </a:r>
-          </a:p>
-        </p:txBody>
-      </p:sp>
-      <p:sp>
-        <p:nvSpPr>
-          <p:cNvPr id="4" name="TextBox 3"/>
-          <p:cNvSpPr txBox="1"/>
-          <p:nvPr/>
-        </p:nvSpPr>
-        <p:spPr>
-          <a:xfrm>
-            <a:off x="457200" y="2057400"/>
-            <a:ext cx="8229600" cy="685800"/>
-          </a:xfrm>
-          <a:prstGeom prst="rect">
-            <a:avLst/>
-          </a:prstGeom>
-          <a:noFill/>
-        </p:spPr>
-        <p:txBody>
-          <a:bodyPr wrap="none">
-            <a:spAutoFit/>
-          </a:bodyPr>
-          <a:lstStyle/>
-          <a:p>
-            <a:pPr>
-              <a:defRPr sz="1300">
-                <a:solidFill>
-                  <a:srgbClr val="333333"/>
-                </a:solidFill>
-              </a:defRPr>
-            </a:pPr>
-            <a:r>
-              <a:t>decision-making, representing a critical application of agentic reasoning in high-stakes</a:t>
-            </a:r>
+          <a:solidFill>
+            <a:srgbClr val="9B59B6"/>
+          </a:solidFill>
+        </p:spPr>
+        <p:style>
+          <a:lnRef idx="1">
+            <a:schemeClr val="accent1"/>
+          </a:lnRef>
+          <a:fillRef idx="3">
+            <a:schemeClr val="accent1"/>
+          </a:fillRef>
+          <a:effectRef idx="2">
+            <a:schemeClr val="accent1"/>
+          </a:effectRef>
+          <a:fontRef idx="minor">
+            <a:schemeClr val="lt1"/>
+          </a:fontRef>
+        </p:style>
+        <p:txBody>
+          <a:bodyPr rtlCol="0" anchor="ctr"/>
+          <a:lstStyle/>
+          <a:p>
+            <a:pPr algn="ctr"/>
           </a:p>
         </p:txBody>
       </p:sp>
       <p:sp>
         <p:nvSpPr>
           <p:cNvPr id="5" name="TextBox 4"/>
-          <p:cNvSpPr txBox="1"/>
-          <p:nvPr/>
-        </p:nvSpPr>
-        <p:spPr>
-          <a:xfrm>
-            <a:off x="457200" y="2743200"/>
-            <a:ext cx="8229600" cy="685800"/>
-          </a:xfrm>
-          <a:prstGeom prst="rect">
-            <a:avLst/>
-          </a:prstGeom>
-          <a:noFill/>
-        </p:spPr>
-        <p:txBody>
-          <a:bodyPr wrap="none">
-            <a:spAutoFit/>
-          </a:bodyPr>
-          <a:lstStyle/>
-          <a:p>
-            <a:pPr>
-              <a:defRPr sz="1300">
-                <a:solidFill>
-                  <a:srgbClr val="333333"/>
-                </a:solidFill>
-              </a:defRPr>
-            </a:pPr>
-            <a:r>
-              <a:t>medical domains.</a:t>
-            </a:r>
-          </a:p>
-        </p:txBody>
-      </p:sp>
-      <p:sp>
-        <p:nvSpPr>
-          <p:cNvPr id="6" name="TextBox 5"/>
-          <p:cNvSpPr txBox="1"/>
-          <p:nvPr/>
-        </p:nvSpPr>
-        <p:spPr>
-          <a:xfrm>
-            <a:off x="457200" y="3429000"/>
-            <a:ext cx="8229600" cy="685800"/>
-          </a:xfrm>
-          <a:prstGeom prst="rect">
-            <a:avLst/>
-          </a:prstGeom>
-          <a:noFill/>
-        </p:spPr>
-        <p:txBody>
-          <a:bodyPr wrap="none">
-            <a:spAutoFit/>
-          </a:bodyPr>
-          <a:lstStyle/>
-          <a:p>
-            <a:pPr>
-              <a:defRPr sz="1000"/>
-            </a:pPr>
-          </a:p>
-        </p:txBody>
-      </p:sp>
-      <p:sp>
-        <p:nvSpPr>
-          <p:cNvPr id="7" name="TextBox 6"/>
-          <p:cNvSpPr txBox="1"/>
-          <p:nvPr/>
-        </p:nvSpPr>
-        <p:spPr>
-          <a:xfrm>
-            <a:off x="457200" y="4114800"/>
-            <a:ext cx="8229600" cy="685800"/>
-          </a:xfrm>
-          <a:prstGeom prst="rect">
-            <a:avLst/>
-          </a:prstGeom>
-          <a:noFill/>
-        </p:spPr>
-        <p:txBody>
-          <a:bodyPr wrap="none">
-            <a:spAutoFit/>
-          </a:bodyPr>
-          <a:lstStyle/>
-          <a:p>
-            <a:pPr>
-              <a:defRPr sz="1000" i="1">
-                <a:solidFill>
-                  <a:srgbClr val="666666"/>
-                </a:solidFill>
-              </a:defRPr>
-            </a:pPr>
-            <a:r>
-              <a:t>Source: arXiv • Tim Cofala, Christian Kalfar, Jingge Xiao</a:t>
-            </a:r>
-          </a:p>
-        </p:txBody>
-      </p:sp>
-      <p:sp>
-        <p:nvSpPr>
-          <p:cNvPr id="8" name="TextBox 7"/>
-          <p:cNvSpPr txBox="1"/>
-          <p:nvPr/>
-        </p:nvSpPr>
-        <p:spPr>
-          <a:xfrm>
-            <a:off x="457200" y="4800600"/>
-            <a:ext cx="8229600" cy="685800"/>
-          </a:xfrm>
-          <a:prstGeom prst="rect">
-            <a:avLst/>
-          </a:prstGeom>
-          <a:noFill/>
-        </p:spPr>
-        <p:txBody>
-          <a:bodyPr wrap="none">
-            <a:spAutoFit/>
-          </a:bodyPr>
-          <a:lstStyle/>
-          <a:p>
-            <a:pPr>
-              <a:defRPr sz="900">
-                <a:solidFill>
-                  <a:srgbClr val="3498DB"/>
-                </a:solidFill>
-              </a:defRPr>
-            </a:pPr>
-            <a:r>
-              <a:t>🔗 https://arxiv.org/abs/2512.11682v1</a:t>
-            </a:r>
-          </a:p>
-        </p:txBody>
-      </p:sp>
-      <p:sp>
-        <p:nvSpPr>
-          <p:cNvPr id="9" name="TextBox 8"/>
           <p:cNvSpPr txBox="1"/>
           <p:nvPr/>
         </p:nvSpPr>
@@ -8509,241 +7486,116 @@
       <p:grpSpPr/>
       <p:sp>
         <p:nvSpPr>
-          <p:cNvPr id="2" name="TextBox 1"/>
-          <p:cNvSpPr txBox="1"/>
+          <p:cNvPr id="2" name="Title 1"/>
+          <p:cNvSpPr>
+            <a:spLocks noGrp="1"/>
+          </p:cNvSpPr>
+          <p:nvPr>
+            <p:ph type="title"/>
+          </p:nvPr>
+        </p:nvSpPr>
+        <p:spPr/>
+        <p:txBody>
+          <a:bodyPr/>
+          <a:lstStyle/>
+          <a:p>
+            <a:r>
+              <a:t>2. MedAI: Evaluating TxAgent's Therapeutic Agentic Reasoning in the Ne...</a:t>
+            </a:r>
+          </a:p>
+        </p:txBody>
+      </p:sp>
+      <p:sp>
+        <p:nvSpPr>
+          <p:cNvPr id="3" name="Content Placeholder 2"/>
+          <p:cNvSpPr>
+            <a:spLocks noGrp="1"/>
+          </p:cNvSpPr>
+          <p:nvPr>
+            <p:ph idx="1"/>
+          </p:nvPr>
+        </p:nvSpPr>
+        <p:spPr/>
+        <p:txBody>
+          <a:bodyPr/>
+          <a:lstStyle/>
+          <a:p>
+            <a:r>
+              <a:t>Benchmarks agentic reasoning capabilities in high-stakes therapeutic decision-making,</a:t>
+            </a:r>
+          </a:p>
+          <a:p>
+            <a:pPr/>
+            <a:r>
+              <a:t>evaluating how AI agents handle complex interactions between patient characteristics,</a:t>
+            </a:r>
+          </a:p>
+          <a:p>
+            <a:pPr/>
+            <a:r>
+              <a:t>diseases, and pharmacological interventions.</a:t>
+            </a:r>
+          </a:p>
+          <a:p>
+            <a:pPr/>
+          </a:p>
+          <a:p>
+            <a:pPr/>
+            <a:r>
+              <a:t>📍 arXiv • Tim Cofala, Christian Kalfar, Jingge Xiao</a:t>
+            </a:r>
+          </a:p>
+          <a:p>
+            <a:pPr/>
+            <a:r>
+              <a:t>🔗 https://arxiv.org/abs/2512.11682v1</a:t>
+            </a:r>
+          </a:p>
+        </p:txBody>
+      </p:sp>
+      <p:sp>
+        <p:nvSpPr>
+          <p:cNvPr id="4" name="Oval 3"/>
+          <p:cNvSpPr/>
           <p:nvPr/>
         </p:nvSpPr>
         <p:spPr>
           <a:xfrm>
-            <a:off x="457200" y="457200"/>
-            <a:ext cx="8229600" cy="685800"/>
-          </a:xfrm>
-          <a:prstGeom prst="rect">
-            <a:avLst/>
-          </a:prstGeom>
-          <a:noFill/>
-        </p:spPr>
-        <p:txBody>
-          <a:bodyPr wrap="none">
-            <a:spAutoFit/>
-          </a:bodyPr>
-          <a:lstStyle/>
-          <a:p>
-            <a:pPr>
-              <a:defRPr sz="3200" b="1"/>
-            </a:pPr>
-            <a:r>
-              <a:t>3. Bounding Hallucinations: Information-Theoretic Guarantees for RAG System...</a:t>
-            </a:r>
-          </a:p>
-        </p:txBody>
-      </p:sp>
-      <p:sp>
-        <p:nvSpPr>
-          <p:cNvPr id="3" name="TextBox 2"/>
-          <p:cNvSpPr txBox="1"/>
-          <p:nvPr/>
-        </p:nvSpPr>
-        <p:spPr>
-          <a:xfrm>
-            <a:off x="457200" y="1371600"/>
-            <a:ext cx="8229600" cy="685800"/>
-          </a:xfrm>
-          <a:prstGeom prst="rect">
-            <a:avLst/>
-          </a:prstGeom>
-          <a:noFill/>
-        </p:spPr>
-        <p:txBody>
-          <a:bodyPr wrap="none">
-            <a:spAutoFit/>
-          </a:bodyPr>
-          <a:lstStyle/>
-          <a:p>
-            <a:pPr>
-              <a:defRPr sz="1300">
-                <a:solidFill>
-                  <a:srgbClr val="333333"/>
-                </a:solidFill>
-              </a:defRPr>
-            </a:pPr>
-            <a:r>
-              <a:t>Provides formal information-theoretic guarantees for RAG systems, transforming retrieval</a:t>
-            </a:r>
-          </a:p>
-        </p:txBody>
-      </p:sp>
-      <p:sp>
-        <p:nvSpPr>
-          <p:cNvPr id="4" name="TextBox 3"/>
-          <p:cNvSpPr txBox="1"/>
-          <p:nvPr/>
-        </p:nvSpPr>
-        <p:spPr>
-          <a:xfrm>
-            <a:off x="457200" y="2057400"/>
-            <a:ext cx="8229600" cy="685800"/>
-          </a:xfrm>
-          <a:prstGeom prst="rect">
-            <a:avLst/>
-          </a:prstGeom>
-          <a:noFill/>
-        </p:spPr>
-        <p:txBody>
-          <a:bodyPr wrap="none">
-            <a:spAutoFit/>
-          </a:bodyPr>
-          <a:lstStyle/>
-          <a:p>
-            <a:pPr>
-              <a:defRPr sz="1300">
-                <a:solidFill>
-                  <a:srgbClr val="333333"/>
-                </a:solidFill>
-              </a:defRPr>
-            </a:pPr>
-            <a:r>
-              <a:t>from a heuristic into verifiable evidence—critical for reliable agentic systems that must</a:t>
-            </a:r>
+            <a:off x="274320" y="731520"/>
+            <a:ext cx="365760" cy="365760"/>
+          </a:xfrm>
+          <a:prstGeom prst="ellipse">
+            <a:avLst/>
+          </a:prstGeom>
+          <a:solidFill>
+            <a:srgbClr val="9B59B6"/>
+          </a:solidFill>
+        </p:spPr>
+        <p:style>
+          <a:lnRef idx="1">
+            <a:schemeClr val="accent1"/>
+          </a:lnRef>
+          <a:fillRef idx="3">
+            <a:schemeClr val="accent1"/>
+          </a:fillRef>
+          <a:effectRef idx="2">
+            <a:schemeClr val="accent1"/>
+          </a:effectRef>
+          <a:fontRef idx="minor">
+            <a:schemeClr val="lt1"/>
+          </a:fontRef>
+        </p:style>
+        <p:txBody>
+          <a:bodyPr rtlCol="0" anchor="ctr"/>
+          <a:lstStyle/>
+          <a:p>
+            <a:pPr algn="ctr"/>
           </a:p>
         </p:txBody>
       </p:sp>
       <p:sp>
         <p:nvSpPr>
           <p:cNvPr id="5" name="TextBox 4"/>
-          <p:cNvSpPr txBox="1"/>
-          <p:nvPr/>
-        </p:nvSpPr>
-        <p:spPr>
-          <a:xfrm>
-            <a:off x="457200" y="2743200"/>
-            <a:ext cx="8229600" cy="685800"/>
-          </a:xfrm>
-          <a:prstGeom prst="rect">
-            <a:avLst/>
-          </a:prstGeom>
-          <a:noFill/>
-        </p:spPr>
-        <p:txBody>
-          <a:bodyPr wrap="none">
-            <a:spAutoFit/>
-          </a:bodyPr>
-          <a:lstStyle/>
-          <a:p>
-            <a:pPr>
-              <a:defRPr sz="1300">
-                <a:solidFill>
-                  <a:srgbClr val="333333"/>
-                </a:solidFill>
-              </a:defRPr>
-            </a:pPr>
-            <a:r>
-              <a:t>reason over retrieved information.</a:t>
-            </a:r>
-          </a:p>
-        </p:txBody>
-      </p:sp>
-      <p:sp>
-        <p:nvSpPr>
-          <p:cNvPr id="6" name="TextBox 5"/>
-          <p:cNvSpPr txBox="1"/>
-          <p:nvPr/>
-        </p:nvSpPr>
-        <p:spPr>
-          <a:xfrm>
-            <a:off x="457200" y="3429000"/>
-            <a:ext cx="8229600" cy="685800"/>
-          </a:xfrm>
-          <a:prstGeom prst="rect">
-            <a:avLst/>
-          </a:prstGeom>
-          <a:noFill/>
-        </p:spPr>
-        <p:txBody>
-          <a:bodyPr wrap="none">
-            <a:spAutoFit/>
-          </a:bodyPr>
-          <a:lstStyle/>
-          <a:p>
-            <a:pPr>
-              <a:defRPr sz="1000"/>
-            </a:pPr>
-          </a:p>
-        </p:txBody>
-      </p:sp>
-      <p:sp>
-        <p:nvSpPr>
-          <p:cNvPr id="7" name="TextBox 6"/>
-          <p:cNvSpPr txBox="1"/>
-          <p:nvPr/>
-        </p:nvSpPr>
-        <p:spPr>
-          <a:xfrm>
-            <a:off x="457200" y="4114800"/>
-            <a:ext cx="8229600" cy="685800"/>
-          </a:xfrm>
-          <a:prstGeom prst="rect">
-            <a:avLst/>
-          </a:prstGeom>
-          <a:noFill/>
-        </p:spPr>
-        <p:txBody>
-          <a:bodyPr wrap="none">
-            <a:spAutoFit/>
-          </a:bodyPr>
-          <a:lstStyle/>
-          <a:p>
-            <a:pPr>
-              <a:defRPr sz="1000" i="1">
-                <a:solidFill>
-                  <a:srgbClr val="666666"/>
-                </a:solidFill>
-              </a:defRPr>
-            </a:pPr>
-            <a:r>
-              <a:t>Source: arXiv • Björn Deiseroth, Max Henning Höth, Kristian Kersting</a:t>
-            </a:r>
-          </a:p>
-        </p:txBody>
-      </p:sp>
-      <p:sp>
-        <p:nvSpPr>
-          <p:cNvPr id="8" name="TextBox 7"/>
-          <p:cNvSpPr txBox="1"/>
-          <p:nvPr/>
-        </p:nvSpPr>
-        <p:spPr>
-          <a:xfrm>
-            <a:off x="457200" y="4800600"/>
-            <a:ext cx="8229600" cy="685800"/>
-          </a:xfrm>
-          <a:prstGeom prst="rect">
-            <a:avLst/>
-          </a:prstGeom>
-          <a:noFill/>
-        </p:spPr>
-        <p:txBody>
-          <a:bodyPr wrap="none">
-            <a:spAutoFit/>
-          </a:bodyPr>
-          <a:lstStyle/>
-          <a:p>
-            <a:pPr>
-              <a:defRPr sz="900">
-                <a:solidFill>
-                  <a:srgbClr val="3498DB"/>
-                </a:solidFill>
-              </a:defRPr>
-            </a:pPr>
-            <a:r>
-              <a:t>🔗 https://arxiv.org/abs/2512.11614v1</a:t>
-            </a:r>
-          </a:p>
-        </p:txBody>
-      </p:sp>
-      <p:sp>
-        <p:nvSpPr>
-          <p:cNvPr id="9" name="TextBox 8"/>
           <p:cNvSpPr txBox="1"/>
           <p:nvPr/>
         </p:nvSpPr>
@@ -8824,7 +7676,7 @@
               <a:defRPr sz="3200" b="1"/>
             </a:pPr>
             <a:r>
-              <a:t>4. LUCID: Learning-Enabled Uncertainty-Aware Certification of Stochastic Dy...</a:t>
+              <a:t>3. Bounding Hallucinations: Information-Theoretic Guarantees for RAG S...</a:t>
             </a:r>
           </a:p>
         </p:txBody>
@@ -8838,7 +7690,7 @@
         <p:spPr>
           <a:xfrm>
             <a:off x="457200" y="1371600"/>
-            <a:ext cx="8229600" cy="685800"/>
+            <a:ext cx="3657600" cy="4114800"/>
           </a:xfrm>
           <a:prstGeom prst="rect">
             <a:avLst/>
@@ -8851,15 +7703,8 @@
           </a:bodyPr>
           <a:lstStyle/>
           <a:p>
-            <a:pPr>
-              <a:defRPr sz="1300">
-                <a:solidFill>
-                  <a:srgbClr val="333333"/>
-                </a:solidFill>
-              </a:defRPr>
-            </a:pPr>
-            <a:r>
-              <a:t>Addresses the critical safety certification challenge for AI-enabled autonomous systems by</a:t>
+            <a:r>
+              <a:t>Provides theoretical framework for verifiable retrieval in RAG systems by treating</a:t>
             </a:r>
           </a:p>
         </p:txBody>
@@ -8872,8 +7717,8 @@
         </p:nvSpPr>
         <p:spPr>
           <a:xfrm>
-            <a:off x="457200" y="2057400"/>
-            <a:ext cx="8229600" cy="685800"/>
+            <a:off x="5029200" y="1371600"/>
+            <a:ext cx="3657600" cy="4114800"/>
           </a:xfrm>
           <a:prstGeom prst="rect">
             <a:avLst/>
@@ -8886,120 +7731,71 @@
           </a:bodyPr>
           <a:lstStyle/>
           <a:p>
-            <a:pPr>
-              <a:defRPr sz="1300">
-                <a:solidFill>
-                  <a:srgbClr val="333333"/>
-                </a:solidFill>
-              </a:defRPr>
-            </a:pPr>
-            <a:r>
-              <a:t>combining learning with formal verification for stochastic environments.</a:t>
-            </a:r>
-          </a:p>
-        </p:txBody>
-      </p:sp>
-      <p:sp>
-        <p:nvSpPr>
-          <p:cNvPr id="5" name="TextBox 4"/>
-          <p:cNvSpPr txBox="1"/>
+            <a:r>
+              <a:t>retrieval as provable evidence rather than heuristics, addressing a critical</a:t>
+            </a:r>
+          </a:p>
+          <a:p>
+            <a:r>
+              <a:t>reliability challenge for agent systems.</a:t>
+            </a:r>
+          </a:p>
+          <a:p/>
+          <a:p>
+            <a:r>
+              <a:t>📍 arXiv • Björn Deiseroth, Max Henning Höth, Kristian Kersting</a:t>
+            </a:r>
+          </a:p>
+          <a:p>
+            <a:r>
+              <a:t>🔗 https://arxiv.org/abs/2512.11614v1</a:t>
+            </a:r>
+          </a:p>
+        </p:txBody>
+      </p:sp>
+      <p:sp>
+        <p:nvSpPr>
+          <p:cNvPr id="5" name="Rectangle 4"/>
+          <p:cNvSpPr/>
           <p:nvPr/>
         </p:nvSpPr>
         <p:spPr>
           <a:xfrm>
-            <a:off x="457200" y="2743200"/>
-            <a:ext cx="8229600" cy="685800"/>
+            <a:off x="274320" y="731520"/>
+            <a:ext cx="365760" cy="365760"/>
           </a:xfrm>
           <a:prstGeom prst="rect">
             <a:avLst/>
           </a:prstGeom>
-          <a:noFill/>
-        </p:spPr>
-        <p:txBody>
-          <a:bodyPr wrap="none">
-            <a:spAutoFit/>
-          </a:bodyPr>
-          <a:lstStyle/>
-          <a:p>
-            <a:pPr>
-              <a:defRPr sz="1000"/>
-            </a:pPr>
+          <a:solidFill>
+            <a:srgbClr val="9B59B6"/>
+          </a:solidFill>
+        </p:spPr>
+        <p:style>
+          <a:lnRef idx="1">
+            <a:schemeClr val="accent1"/>
+          </a:lnRef>
+          <a:fillRef idx="3">
+            <a:schemeClr val="accent1"/>
+          </a:fillRef>
+          <a:effectRef idx="2">
+            <a:schemeClr val="accent1"/>
+          </a:effectRef>
+          <a:fontRef idx="minor">
+            <a:schemeClr val="lt1"/>
+          </a:fontRef>
+        </p:style>
+        <p:txBody>
+          <a:bodyPr rtlCol="0" anchor="ctr"/>
+          <a:lstStyle/>
+          <a:p>
+            <a:pPr algn="ctr"/>
           </a:p>
         </p:txBody>
       </p:sp>
       <p:sp>
         <p:nvSpPr>
           <p:cNvPr id="6" name="TextBox 5"/>
-          <p:cNvSpPr txBox="1"/>
-          <p:nvPr/>
-        </p:nvSpPr>
-        <p:spPr>
-          <a:xfrm>
-            <a:off x="457200" y="3429000"/>
-            <a:ext cx="8229600" cy="685800"/>
-          </a:xfrm>
-          <a:prstGeom prst="rect">
-            <a:avLst/>
-          </a:prstGeom>
-          <a:noFill/>
-        </p:spPr>
-        <p:txBody>
-          <a:bodyPr wrap="none">
-            <a:spAutoFit/>
-          </a:bodyPr>
-          <a:lstStyle/>
-          <a:p>
-            <a:pPr>
-              <a:defRPr sz="1000" i="1">
-                <a:solidFill>
-                  <a:srgbClr val="666666"/>
-                </a:solidFill>
-              </a:defRPr>
-            </a:pPr>
-            <a:r>
-              <a:t>Source: arXiv • Ernesto Casablanca, Oliver Schön, Paolo Zuliani</a:t>
-            </a:r>
-          </a:p>
-        </p:txBody>
-      </p:sp>
-      <p:sp>
-        <p:nvSpPr>
-          <p:cNvPr id="7" name="TextBox 6"/>
-          <p:cNvSpPr txBox="1"/>
-          <p:nvPr/>
-        </p:nvSpPr>
-        <p:spPr>
-          <a:xfrm>
-            <a:off x="457200" y="4114800"/>
-            <a:ext cx="8229600" cy="685800"/>
-          </a:xfrm>
-          <a:prstGeom prst="rect">
-            <a:avLst/>
-          </a:prstGeom>
-          <a:noFill/>
-        </p:spPr>
-        <p:txBody>
-          <a:bodyPr wrap="none">
-            <a:spAutoFit/>
-          </a:bodyPr>
-          <a:lstStyle/>
-          <a:p>
-            <a:pPr>
-              <a:defRPr sz="900">
-                <a:solidFill>
-                  <a:srgbClr val="3498DB"/>
-                </a:solidFill>
-              </a:defRPr>
-            </a:pPr>
-            <a:r>
-              <a:t>🔗 https://arxiv.org/abs/2512.11750v1</a:t>
-            </a:r>
-          </a:p>
-        </p:txBody>
-      </p:sp>
-      <p:sp>
-        <p:nvSpPr>
-          <p:cNvPr id="8" name="TextBox 7"/>
           <p:cNvSpPr txBox="1"/>
           <p:nvPr/>
         </p:nvSpPr>
@@ -9056,241 +7852,116 @@
       <p:grpSpPr/>
       <p:sp>
         <p:nvSpPr>
-          <p:cNvPr id="2" name="TextBox 1"/>
-          <p:cNvSpPr txBox="1"/>
+          <p:cNvPr id="2" name="Title 1"/>
+          <p:cNvSpPr>
+            <a:spLocks noGrp="1"/>
+          </p:cNvSpPr>
+          <p:nvPr>
+            <p:ph type="title"/>
+          </p:nvPr>
+        </p:nvSpPr>
+        <p:spPr/>
+        <p:txBody>
+          <a:bodyPr/>
+          <a:lstStyle/>
+          <a:p>
+            <a:r>
+              <a:t>4. LUCID: Learning-Enabled Uncertainty-Aware Certification of Stochast...</a:t>
+            </a:r>
+          </a:p>
+        </p:txBody>
+      </p:sp>
+      <p:sp>
+        <p:nvSpPr>
+          <p:cNvPr id="3" name="Content Placeholder 2"/>
+          <p:cNvSpPr>
+            <a:spLocks noGrp="1"/>
+          </p:cNvSpPr>
+          <p:nvPr>
+            <p:ph idx="1"/>
+          </p:nvPr>
+        </p:nvSpPr>
+        <p:spPr/>
+        <p:txBody>
+          <a:bodyPr/>
+          <a:lstStyle/>
+          <a:p>
+            <a:r>
+              <a:t>Advances formal verification for AI-enabled autonomous systems by addressing</a:t>
+            </a:r>
+          </a:p>
+          <a:p>
+            <a:pPr/>
+            <a:r>
+              <a:t>uncertainty in stochastic environments, crucial for safe deployment of agents in</a:t>
+            </a:r>
+          </a:p>
+          <a:p>
+            <a:pPr/>
+            <a:r>
+              <a:t>high-stakes domains like autonomous driving.</a:t>
+            </a:r>
+          </a:p>
+          <a:p>
+            <a:pPr/>
+          </a:p>
+          <a:p>
+            <a:pPr/>
+            <a:r>
+              <a:t>📍 arXiv • Ernesto Casablanca, Oliver Schön, Paolo Zuliani</a:t>
+            </a:r>
+          </a:p>
+          <a:p>
+            <a:pPr/>
+            <a:r>
+              <a:t>🔗 https://arxiv.org/abs/2512.11750v1</a:t>
+            </a:r>
+          </a:p>
+        </p:txBody>
+      </p:sp>
+      <p:sp>
+        <p:nvSpPr>
+          <p:cNvPr id="4" name="Oval 3"/>
+          <p:cNvSpPr/>
           <p:nvPr/>
         </p:nvSpPr>
         <p:spPr>
           <a:xfrm>
-            <a:off x="457200" y="457200"/>
-            <a:ext cx="8229600" cy="685800"/>
-          </a:xfrm>
-          <a:prstGeom prst="rect">
-            <a:avLst/>
-          </a:prstGeom>
-          <a:noFill/>
-        </p:spPr>
-        <p:txBody>
-          <a:bodyPr wrap="none">
-            <a:spAutoFit/>
-          </a:bodyPr>
-          <a:lstStyle/>
-          <a:p>
-            <a:pPr>
-              <a:defRPr sz="3200" b="1"/>
-            </a:pPr>
-            <a:r>
-              <a:t>5. High-Dimensional Surrogate Modeling for Closed-Loop Learning of Neural-N...</a:t>
-            </a:r>
-          </a:p>
-        </p:txBody>
-      </p:sp>
-      <p:sp>
-        <p:nvSpPr>
-          <p:cNvPr id="3" name="TextBox 2"/>
-          <p:cNvSpPr txBox="1"/>
-          <p:nvPr/>
-        </p:nvSpPr>
-        <p:spPr>
-          <a:xfrm>
-            <a:off x="457200" y="1371600"/>
-            <a:ext cx="8229600" cy="685800"/>
-          </a:xfrm>
-          <a:prstGeom prst="rect">
-            <a:avLst/>
-          </a:prstGeom>
-          <a:noFill/>
-        </p:spPr>
-        <p:txBody>
-          <a:bodyPr wrap="none">
-            <a:spAutoFit/>
-          </a:bodyPr>
-          <a:lstStyle/>
-          <a:p>
-            <a:pPr>
-              <a:defRPr sz="1300">
-                <a:solidFill>
-                  <a:srgbClr val="333333"/>
-                </a:solidFill>
-              </a:defRPr>
-            </a:pPr>
-            <a:r>
-              <a:t>Enables efficient learning of neural network controller parameters from closed-loop data,</a:t>
-            </a:r>
-          </a:p>
-        </p:txBody>
-      </p:sp>
-      <p:sp>
-        <p:nvSpPr>
-          <p:cNvPr id="4" name="TextBox 3"/>
-          <p:cNvSpPr txBox="1"/>
-          <p:nvPr/>
-        </p:nvSpPr>
-        <p:spPr>
-          <a:xfrm>
-            <a:off x="457200" y="2057400"/>
-            <a:ext cx="8229600" cy="685800"/>
-          </a:xfrm>
-          <a:prstGeom prst="rect">
-            <a:avLst/>
-          </a:prstGeom>
-          <a:noFill/>
-        </p:spPr>
-        <p:txBody>
-          <a:bodyPr wrap="none">
-            <a:spAutoFit/>
-          </a:bodyPr>
-          <a:lstStyle/>
-          <a:p>
-            <a:pPr>
-              <a:defRPr sz="1300">
-                <a:solidFill>
-                  <a:srgbClr val="333333"/>
-                </a:solidFill>
-              </a:defRPr>
-            </a:pPr>
-            <a:r>
-              <a:t>advancing autonomous system adaptation through Bayesian optimization of high-dimensional</a:t>
-            </a:r>
+            <a:off x="274320" y="731520"/>
+            <a:ext cx="365760" cy="365760"/>
+          </a:xfrm>
+          <a:prstGeom prst="ellipse">
+            <a:avLst/>
+          </a:prstGeom>
+          <a:solidFill>
+            <a:srgbClr val="9B59B6"/>
+          </a:solidFill>
+        </p:spPr>
+        <p:style>
+          <a:lnRef idx="1">
+            <a:schemeClr val="accent1"/>
+          </a:lnRef>
+          <a:fillRef idx="3">
+            <a:schemeClr val="accent1"/>
+          </a:fillRef>
+          <a:effectRef idx="2">
+            <a:schemeClr val="accent1"/>
+          </a:effectRef>
+          <a:fontRef idx="minor">
+            <a:schemeClr val="lt1"/>
+          </a:fontRef>
+        </p:style>
+        <p:txBody>
+          <a:bodyPr rtlCol="0" anchor="ctr"/>
+          <a:lstStyle/>
+          <a:p>
+            <a:pPr algn="ctr"/>
           </a:p>
         </p:txBody>
       </p:sp>
       <p:sp>
         <p:nvSpPr>
           <p:cNvPr id="5" name="TextBox 4"/>
-          <p:cNvSpPr txBox="1"/>
-          <p:nvPr/>
-        </p:nvSpPr>
-        <p:spPr>
-          <a:xfrm>
-            <a:off x="457200" y="2743200"/>
-            <a:ext cx="8229600" cy="685800"/>
-          </a:xfrm>
-          <a:prstGeom prst="rect">
-            <a:avLst/>
-          </a:prstGeom>
-          <a:noFill/>
-        </p:spPr>
-        <p:txBody>
-          <a:bodyPr wrap="none">
-            <a:spAutoFit/>
-          </a:bodyPr>
-          <a:lstStyle/>
-          <a:p>
-            <a:pPr>
-              <a:defRPr sz="1300">
-                <a:solidFill>
-                  <a:srgbClr val="333333"/>
-                </a:solidFill>
-              </a:defRPr>
-            </a:pPr>
-            <a:r>
-              <a:t>control policies.</a:t>
-            </a:r>
-          </a:p>
-        </p:txBody>
-      </p:sp>
-      <p:sp>
-        <p:nvSpPr>
-          <p:cNvPr id="6" name="TextBox 5"/>
-          <p:cNvSpPr txBox="1"/>
-          <p:nvPr/>
-        </p:nvSpPr>
-        <p:spPr>
-          <a:xfrm>
-            <a:off x="457200" y="3429000"/>
-            <a:ext cx="8229600" cy="685800"/>
-          </a:xfrm>
-          <a:prstGeom prst="rect">
-            <a:avLst/>
-          </a:prstGeom>
-          <a:noFill/>
-        </p:spPr>
-        <p:txBody>
-          <a:bodyPr wrap="none">
-            <a:spAutoFit/>
-          </a:bodyPr>
-          <a:lstStyle/>
-          <a:p>
-            <a:pPr>
-              <a:defRPr sz="1000"/>
-            </a:pPr>
-          </a:p>
-        </p:txBody>
-      </p:sp>
-      <p:sp>
-        <p:nvSpPr>
-          <p:cNvPr id="7" name="TextBox 6"/>
-          <p:cNvSpPr txBox="1"/>
-          <p:nvPr/>
-        </p:nvSpPr>
-        <p:spPr>
-          <a:xfrm>
-            <a:off x="457200" y="4114800"/>
-            <a:ext cx="8229600" cy="685800"/>
-          </a:xfrm>
-          <a:prstGeom prst="rect">
-            <a:avLst/>
-          </a:prstGeom>
-          <a:noFill/>
-        </p:spPr>
-        <p:txBody>
-          <a:bodyPr wrap="none">
-            <a:spAutoFit/>
-          </a:bodyPr>
-          <a:lstStyle/>
-          <a:p>
-            <a:pPr>
-              <a:defRPr sz="1000" i="1">
-                <a:solidFill>
-                  <a:srgbClr val="666666"/>
-                </a:solidFill>
-              </a:defRPr>
-            </a:pPr>
-            <a:r>
-              <a:t>Source: arXiv • Sebastian Hirt, Valentinus Suwanto, Hendrik Alsmeier</a:t>
-            </a:r>
-          </a:p>
-        </p:txBody>
-      </p:sp>
-      <p:sp>
-        <p:nvSpPr>
-          <p:cNvPr id="8" name="TextBox 7"/>
-          <p:cNvSpPr txBox="1"/>
-          <p:nvPr/>
-        </p:nvSpPr>
-        <p:spPr>
-          <a:xfrm>
-            <a:off x="457200" y="4800600"/>
-            <a:ext cx="8229600" cy="685800"/>
-          </a:xfrm>
-          <a:prstGeom prst="rect">
-            <a:avLst/>
-          </a:prstGeom>
-          <a:noFill/>
-        </p:spPr>
-        <p:txBody>
-          <a:bodyPr wrap="none">
-            <a:spAutoFit/>
-          </a:bodyPr>
-          <a:lstStyle/>
-          <a:p>
-            <a:pPr>
-              <a:defRPr sz="900">
-                <a:solidFill>
-                  <a:srgbClr val="3498DB"/>
-                </a:solidFill>
-              </a:defRPr>
-            </a:pPr>
-            <a:r>
-              <a:t>🔗 https://arxiv.org/abs/2512.11705v1</a:t>
-            </a:r>
-          </a:p>
-        </p:txBody>
-      </p:sp>
-      <p:sp>
-        <p:nvSpPr>
-          <p:cNvPr id="9" name="TextBox 8"/>
           <p:cNvSpPr txBox="1"/>
           <p:nvPr/>
         </p:nvSpPr>
@@ -9333,7 +8004,7 @@
     <p:bg>
       <p:bgPr>
         <a:solidFill>
-          <a:srgbClr val="3498DB"/>
+          <a:srgbClr val="F8F9FA"/>
         </a:solidFill>
         <a:effectLst/>
       </p:bgPr>
@@ -9347,136 +8018,116 @@
       <p:grpSpPr/>
       <p:sp>
         <p:nvSpPr>
-          <p:cNvPr id="2" name="TextBox 1"/>
-          <p:cNvSpPr txBox="1"/>
+          <p:cNvPr id="2" name="Title 1"/>
+          <p:cNvSpPr>
+            <a:spLocks noGrp="1"/>
+          </p:cNvSpPr>
+          <p:nvPr>
+            <p:ph type="title"/>
+          </p:nvPr>
+        </p:nvSpPr>
+        <p:spPr/>
+        <p:txBody>
+          <a:bodyPr/>
+          <a:lstStyle/>
+          <a:p>
+            <a:r>
+              <a:t>5. High-Dimensional Surrogate Modeling for Closed-Loop Learning of Neu...</a:t>
+            </a:r>
+          </a:p>
+        </p:txBody>
+      </p:sp>
+      <p:sp>
+        <p:nvSpPr>
+          <p:cNvPr id="3" name="Content Placeholder 2"/>
+          <p:cNvSpPr>
+            <a:spLocks noGrp="1"/>
+          </p:cNvSpPr>
+          <p:nvPr>
+            <p:ph idx="1"/>
+          </p:nvPr>
+        </p:nvSpPr>
+        <p:spPr/>
+        <p:txBody>
+          <a:bodyPr/>
+          <a:lstStyle/>
+          <a:p>
+            <a:r>
+              <a:t>Enables efficient learning of controller parameters from closed-loop data using</a:t>
+            </a:r>
+          </a:p>
+          <a:p>
+            <a:pPr/>
+            <a:r>
+              <a:t>Bayesian optimization with surrogate models, improving autonomous agent control in</a:t>
+            </a:r>
+          </a:p>
+          <a:p>
+            <a:pPr/>
+            <a:r>
+              <a:t>complex decision spaces.</a:t>
+            </a:r>
+          </a:p>
+          <a:p>
+            <a:pPr/>
+          </a:p>
+          <a:p>
+            <a:pPr/>
+            <a:r>
+              <a:t>📍 arXiv • Sebastian Hirt, Valentinus Suwanto, Hendrik Alsmeier</a:t>
+            </a:r>
+          </a:p>
+          <a:p>
+            <a:pPr/>
+            <a:r>
+              <a:t>🔗 https://arxiv.org/abs/2512.11705v1</a:t>
+            </a:r>
+          </a:p>
+        </p:txBody>
+      </p:sp>
+      <p:sp>
+        <p:nvSpPr>
+          <p:cNvPr id="4" name="Rectangle 3"/>
+          <p:cNvSpPr/>
           <p:nvPr/>
         </p:nvSpPr>
         <p:spPr>
           <a:xfrm>
-            <a:off x="457200" y="457200"/>
-            <a:ext cx="8229600" cy="685800"/>
+            <a:off x="274320" y="731520"/>
+            <a:ext cx="365760" cy="365760"/>
           </a:xfrm>
           <a:prstGeom prst="rect">
             <a:avLst/>
           </a:prstGeom>
-          <a:noFill/>
-        </p:spPr>
-        <p:txBody>
-          <a:bodyPr wrap="none">
-            <a:spAutoFit/>
-          </a:bodyPr>
-          <a:lstStyle/>
-          <a:p>
-            <a:pPr>
-              <a:defRPr sz="3200" b="1"/>
-            </a:pPr>
-            <a:r>
-              <a:t>Industry Updates</a:t>
-            </a:r>
-          </a:p>
-        </p:txBody>
-      </p:sp>
-      <p:sp>
-        <p:nvSpPr>
-          <p:cNvPr id="3" name="TextBox 2"/>
-          <p:cNvSpPr txBox="1"/>
-          <p:nvPr/>
-        </p:nvSpPr>
-        <p:spPr>
-          <a:xfrm>
-            <a:off x="457200" y="1371600"/>
-            <a:ext cx="8229600" cy="685800"/>
-          </a:xfrm>
-          <a:prstGeom prst="rect">
-            <a:avLst/>
-          </a:prstGeom>
-          <a:noFill/>
-        </p:spPr>
-        <p:txBody>
-          <a:bodyPr wrap="none">
-            <a:spAutoFit/>
-          </a:bodyPr>
-          <a:lstStyle/>
-          <a:p>
-            <a:pPr>
-              <a:defRPr sz="2000" b="1">
-                <a:solidFill>
-                  <a:srgbClr val="FFFFFF"/>
-                </a:solidFill>
-              </a:defRPr>
-            </a:pPr>
-            <a:r>
-              <a:t>5 key updates</a:t>
-            </a:r>
-          </a:p>
-        </p:txBody>
-      </p:sp>
-      <p:sp>
-        <p:nvSpPr>
-          <p:cNvPr id="4" name="TextBox 3"/>
-          <p:cNvSpPr txBox="1"/>
-          <p:nvPr/>
-        </p:nvSpPr>
-        <p:spPr>
-          <a:xfrm>
-            <a:off x="457200" y="2057400"/>
-            <a:ext cx="8229600" cy="685800"/>
-          </a:xfrm>
-          <a:prstGeom prst="rect">
-            <a:avLst/>
-          </a:prstGeom>
-          <a:noFill/>
-        </p:spPr>
-        <p:txBody>
-          <a:bodyPr wrap="none">
-            <a:spAutoFit/>
-          </a:bodyPr>
-          <a:lstStyle/>
-          <a:p>
-            <a:pPr>
-              <a:defRPr sz="1200"/>
-            </a:pPr>
+          <a:solidFill>
+            <a:srgbClr val="9B59B6"/>
+          </a:solidFill>
+        </p:spPr>
+        <p:style>
+          <a:lnRef idx="1">
+            <a:schemeClr val="accent1"/>
+          </a:lnRef>
+          <a:fillRef idx="3">
+            <a:schemeClr val="accent1"/>
+          </a:fillRef>
+          <a:effectRef idx="2">
+            <a:schemeClr val="accent1"/>
+          </a:effectRef>
+          <a:fontRef idx="minor">
+            <a:schemeClr val="lt1"/>
+          </a:fontRef>
+        </p:style>
+        <p:txBody>
+          <a:bodyPr rtlCol="0" anchor="ctr"/>
+          <a:lstStyle/>
+          <a:p>
+            <a:pPr algn="ctr"/>
           </a:p>
         </p:txBody>
       </p:sp>
       <p:sp>
         <p:nvSpPr>
           <p:cNvPr id="5" name="TextBox 4"/>
-          <p:cNvSpPr txBox="1"/>
-          <p:nvPr/>
-        </p:nvSpPr>
-        <p:spPr>
-          <a:xfrm>
-            <a:off x="457200" y="2743200"/>
-            <a:ext cx="8229600" cy="685800"/>
-          </a:xfrm>
-          <a:prstGeom prst="rect">
-            <a:avLst/>
-          </a:prstGeom>
-          <a:noFill/>
-        </p:spPr>
-        <p:txBody>
-          <a:bodyPr wrap="none">
-            <a:spAutoFit/>
-          </a:bodyPr>
-          <a:lstStyle/>
-          <a:p>
-            <a:pPr>
-              <a:defRPr sz="1600" i="1">
-                <a:solidFill>
-                  <a:srgbClr val="FFFFFF"/>
-                </a:solidFill>
-              </a:defRPr>
-            </a:pPr>
-            <a:r>
-              <a:t>Swipe to explore →</a:t>
-            </a:r>
-          </a:p>
-        </p:txBody>
-      </p:sp>
-      <p:sp>
-        <p:nvSpPr>
-          <p:cNvPr id="6" name="TextBox 5"/>
           <p:cNvSpPr txBox="1"/>
           <p:nvPr/>
         </p:nvSpPr>

--- a/AI_Weekly_2025-12-15.pptx
+++ b/AI_Weekly_2025-12-15.pptx
@@ -25,11 +25,6 @@
     <p:sldId id="273" r:id="rId24"/>
     <p:sldId id="274" r:id="rId25"/>
     <p:sldId id="275" r:id="rId26"/>
-    <p:sldId id="276" r:id="rId27"/>
-    <p:sldId id="277" r:id="rId28"/>
-    <p:sldId id="278" r:id="rId29"/>
-    <p:sldId id="279" r:id="rId30"/>
-    <p:sldId id="280" r:id="rId31"/>
   </p:sldIdLst>
   <p:sldSz cx="9144000" cy="6858000" type="screen4x3"/>
   <p:notesSz cx="6858000" cy="9144000"/>
@@ -3221,63 +3216,66 @@
       <p:grpSpPr/>
       <p:sp>
         <p:nvSpPr>
-          <p:cNvPr id="2" name="Title 1"/>
-          <p:cNvSpPr>
-            <a:spLocks noGrp="1"/>
-          </p:cNvSpPr>
-          <p:nvPr>
-            <p:ph type="title"/>
-          </p:nvPr>
-        </p:nvSpPr>
-        <p:spPr/>
-        <p:txBody>
-          <a:bodyPr/>
-          <a:lstStyle/>
-          <a:p>
-            <a:r>
-              <a:t>1. AI agents are starting to eat SaaS</a:t>
-            </a:r>
-          </a:p>
-        </p:txBody>
-      </p:sp>
-      <p:sp>
-        <p:nvSpPr>
-          <p:cNvPr id="3" name="Content Placeholder 2"/>
-          <p:cNvSpPr>
-            <a:spLocks noGrp="1"/>
-          </p:cNvSpPr>
-          <p:nvPr>
-            <p:ph idx="1"/>
-          </p:nvPr>
-        </p:nvSpPr>
-        <p:spPr/>
-        <p:txBody>
-          <a:bodyPr/>
-          <a:lstStyle/>
-          <a:p>
-            <a:r>
-              <a:t>Signals the beginning of AI agents disrupting traditional SaaS business models by</a:t>
-            </a:r>
-          </a:p>
-          <a:p>
-            <a:pPr/>
-            <a:r>
-              <a:t>automating tasks previously requiring dedicated software platforms.</a:t>
-            </a:r>
-          </a:p>
-          <a:p>
-            <a:pPr/>
-          </a:p>
-          <a:p>
-            <a:pPr/>
-            <a:r>
-              <a:t>📍 Hacker News • 119 points • 138 comments</a:t>
-            </a:r>
-          </a:p>
-          <a:p>
-            <a:pPr/>
-            <a:r>
-              <a:t>🔗 https://martinalderson.com/posts/ai-agents-are-starting-to-eat-saas/</a:t>
+          <p:cNvPr id="2" name="TextBox 1"/>
+          <p:cNvSpPr txBox="1"/>
+          <p:nvPr/>
+        </p:nvSpPr>
+        <p:spPr>
+          <a:xfrm>
+            <a:off x="457200" y="457200"/>
+            <a:ext cx="8229600" cy="685800"/>
+          </a:xfrm>
+          <a:prstGeom prst="rect">
+            <a:avLst/>
+          </a:prstGeom>
+          <a:noFill/>
+        </p:spPr>
+        <p:txBody>
+          <a:bodyPr wrap="none">
+            <a:spAutoFit/>
+          </a:bodyPr>
+          <a:lstStyle/>
+          <a:p>
+            <a:pPr>
+              <a:defRPr sz="3200" b="1"/>
+            </a:pPr>
+            <a:r>
+              <a:t>1. OpenAI are quietly adopting skills, now available in ChatGPT and Codex CLI</a:t>
+            </a:r>
+          </a:p>
+        </p:txBody>
+      </p:sp>
+      <p:sp>
+        <p:nvSpPr>
+          <p:cNvPr id="3" name="TextBox 2"/>
+          <p:cNvSpPr txBox="1"/>
+          <p:nvPr/>
+        </p:nvSpPr>
+        <p:spPr>
+          <a:xfrm>
+            <a:off x="457200" y="1371600"/>
+            <a:ext cx="8229600" cy="685800"/>
+          </a:xfrm>
+          <a:prstGeom prst="rect">
+            <a:avLst/>
+          </a:prstGeom>
+          <a:noFill/>
+        </p:spPr>
+        <p:txBody>
+          <a:bodyPr wrap="none">
+            <a:spAutoFit/>
+          </a:bodyPr>
+          <a:lstStyle/>
+          <a:p>
+            <a:pPr>
+              <a:defRPr sz="1100">
+                <a:solidFill>
+                  <a:srgbClr val="333333"/>
+                </a:solidFill>
+              </a:defRPr>
+            </a:pPr>
+            <a:r>
+              <a:t>OpenAI's stealth launch of 'skills' represents a significant shift toward modular agent capabilities, enabling ChatGPT to perform specialized tool-based tasks through composable functions.</a:t>
             </a:r>
           </a:p>
         </p:txBody>
@@ -3285,6 +3283,104 @@
       <p:sp>
         <p:nvSpPr>
           <p:cNvPr id="4" name="TextBox 3"/>
+          <p:cNvSpPr txBox="1"/>
+          <p:nvPr/>
+        </p:nvSpPr>
+        <p:spPr>
+          <a:xfrm>
+            <a:off x="457200" y="2057400"/>
+            <a:ext cx="8229600" cy="685800"/>
+          </a:xfrm>
+          <a:prstGeom prst="rect">
+            <a:avLst/>
+          </a:prstGeom>
+          <a:noFill/>
+        </p:spPr>
+        <p:txBody>
+          <a:bodyPr wrap="none">
+            <a:spAutoFit/>
+          </a:bodyPr>
+          <a:lstStyle/>
+          <a:p>
+            <a:pPr>
+              <a:defRPr sz="800"/>
+            </a:pPr>
+          </a:p>
+        </p:txBody>
+      </p:sp>
+      <p:sp>
+        <p:nvSpPr>
+          <p:cNvPr id="5" name="TextBox 4"/>
+          <p:cNvSpPr txBox="1"/>
+          <p:nvPr/>
+        </p:nvSpPr>
+        <p:spPr>
+          <a:xfrm>
+            <a:off x="457200" y="2743200"/>
+            <a:ext cx="8229600" cy="685800"/>
+          </a:xfrm>
+          <a:prstGeom prst="rect">
+            <a:avLst/>
+          </a:prstGeom>
+          <a:noFill/>
+        </p:spPr>
+        <p:txBody>
+          <a:bodyPr wrap="none">
+            <a:spAutoFit/>
+          </a:bodyPr>
+          <a:lstStyle/>
+          <a:p>
+            <a:pPr>
+              <a:defRPr sz="900" i="1">
+                <a:solidFill>
+                  <a:srgbClr val="666666"/>
+                </a:solidFill>
+              </a:defRPr>
+            </a:pPr>
+            <a:r>
+              <a:t>📍 Hacker News • 568 points • 314 comments</a:t>
+            </a:r>
+          </a:p>
+        </p:txBody>
+      </p:sp>
+      <p:sp>
+        <p:nvSpPr>
+          <p:cNvPr id="6" name="TextBox 5"/>
+          <p:cNvSpPr txBox="1"/>
+          <p:nvPr/>
+        </p:nvSpPr>
+        <p:spPr>
+          <a:xfrm>
+            <a:off x="457200" y="3429000"/>
+            <a:ext cx="8229600" cy="685800"/>
+          </a:xfrm>
+          <a:prstGeom prst="rect">
+            <a:avLst/>
+          </a:prstGeom>
+          <a:noFill/>
+        </p:spPr>
+        <p:txBody>
+          <a:bodyPr wrap="none">
+            <a:spAutoFit/>
+          </a:bodyPr>
+          <a:lstStyle/>
+          <a:p>
+            <a:pPr>
+              <a:defRPr sz="800">
+                <a:solidFill>
+                  <a:srgbClr val="3498DB"/>
+                </a:solidFill>
+              </a:defRPr>
+            </a:pPr>
+            <a:r>
+              <a:t>🔗 https://simonwillison.net/2025/Dec/12/openai-skills/</a:t>
+            </a:r>
+          </a:p>
+        </p:txBody>
+      </p:sp>
+      <p:sp>
+        <p:nvSpPr>
+          <p:cNvPr id="7" name="TextBox 6"/>
           <p:cNvSpPr txBox="1"/>
           <p:nvPr/>
         </p:nvSpPr>
@@ -3341,69 +3437,66 @@
       <p:grpSpPr/>
       <p:sp>
         <p:nvSpPr>
-          <p:cNvPr id="2" name="Title 1"/>
-          <p:cNvSpPr>
-            <a:spLocks noGrp="1"/>
-          </p:cNvSpPr>
-          <p:nvPr>
-            <p:ph type="title"/>
-          </p:nvPr>
-        </p:nvSpPr>
-        <p:spPr/>
-        <p:txBody>
-          <a:bodyPr/>
-          <a:lstStyle/>
-          <a:p>
-            <a:r>
-              <a:t>2. OpenAI are quietly adopting skills, now available in ChatGPT and Codex CLI</a:t>
-            </a:r>
-          </a:p>
-        </p:txBody>
-      </p:sp>
-      <p:sp>
-        <p:nvSpPr>
-          <p:cNvPr id="3" name="Content Placeholder 2"/>
-          <p:cNvSpPr>
-            <a:spLocks noGrp="1"/>
-          </p:cNvSpPr>
-          <p:nvPr>
-            <p:ph idx="1"/>
-          </p:nvPr>
-        </p:nvSpPr>
-        <p:spPr/>
-        <p:txBody>
-          <a:bodyPr/>
-          <a:lstStyle/>
-          <a:p>
-            <a:r>
-              <a:t>OpenAI introduces 'skills' functionality enabling more modular and extensible agent</a:t>
-            </a:r>
-          </a:p>
-          <a:p>
-            <a:pPr/>
-            <a:r>
-              <a:t>capabilities in their production systems, indicating shift toward agent-based</a:t>
-            </a:r>
-          </a:p>
-          <a:p>
-            <a:pPr/>
-            <a:r>
-              <a:t>architectures.</a:t>
-            </a:r>
-          </a:p>
-          <a:p>
-            <a:pPr/>
-          </a:p>
-          <a:p>
-            <a:pPr/>
-            <a:r>
-              <a:t>📍 Hacker News • 568 points • 313 comments</a:t>
-            </a:r>
-          </a:p>
-          <a:p>
-            <a:pPr/>
-            <a:r>
-              <a:t>🔗 https://simonwillison.net/2025/Dec/12/openai-skills/</a:t>
+          <p:cNvPr id="2" name="TextBox 1"/>
+          <p:cNvSpPr txBox="1"/>
+          <p:nvPr/>
+        </p:nvSpPr>
+        <p:spPr>
+          <a:xfrm>
+            <a:off x="457200" y="457200"/>
+            <a:ext cx="8229600" cy="685800"/>
+          </a:xfrm>
+          <a:prstGeom prst="rect">
+            <a:avLst/>
+          </a:prstGeom>
+          <a:noFill/>
+        </p:spPr>
+        <p:txBody>
+          <a:bodyPr wrap="none">
+            <a:spAutoFit/>
+          </a:bodyPr>
+          <a:lstStyle/>
+          <a:p>
+            <a:pPr>
+              <a:defRPr sz="3200" b="1"/>
+            </a:pPr>
+            <a:r>
+              <a:t>2. AI agents are starting to eat SaaS</a:t>
+            </a:r>
+          </a:p>
+        </p:txBody>
+      </p:sp>
+      <p:sp>
+        <p:nvSpPr>
+          <p:cNvPr id="3" name="TextBox 2"/>
+          <p:cNvSpPr txBox="1"/>
+          <p:nvPr/>
+        </p:nvSpPr>
+        <p:spPr>
+          <a:xfrm>
+            <a:off x="457200" y="1371600"/>
+            <a:ext cx="8229600" cy="685800"/>
+          </a:xfrm>
+          <a:prstGeom prst="rect">
+            <a:avLst/>
+          </a:prstGeom>
+          <a:noFill/>
+        </p:spPr>
+        <p:txBody>
+          <a:bodyPr wrap="none">
+            <a:spAutoFit/>
+          </a:bodyPr>
+          <a:lstStyle/>
+          <a:p>
+            <a:pPr>
+              <a:defRPr sz="1100">
+                <a:solidFill>
+                  <a:srgbClr val="333333"/>
+                </a:solidFill>
+              </a:defRPr>
+            </a:pPr>
+            <a:r>
+              <a:t>Analysis of how autonomous AI agents are beginning to replace traditional SaaS products by automating entire workflows rather than just individual tasks.</a:t>
             </a:r>
           </a:p>
         </p:txBody>
@@ -3411,6 +3504,104 @@
       <p:sp>
         <p:nvSpPr>
           <p:cNvPr id="4" name="TextBox 3"/>
+          <p:cNvSpPr txBox="1"/>
+          <p:nvPr/>
+        </p:nvSpPr>
+        <p:spPr>
+          <a:xfrm>
+            <a:off x="457200" y="2057400"/>
+            <a:ext cx="8229600" cy="685800"/>
+          </a:xfrm>
+          <a:prstGeom prst="rect">
+            <a:avLst/>
+          </a:prstGeom>
+          <a:noFill/>
+        </p:spPr>
+        <p:txBody>
+          <a:bodyPr wrap="none">
+            <a:spAutoFit/>
+          </a:bodyPr>
+          <a:lstStyle/>
+          <a:p>
+            <a:pPr>
+              <a:defRPr sz="800"/>
+            </a:pPr>
+          </a:p>
+        </p:txBody>
+      </p:sp>
+      <p:sp>
+        <p:nvSpPr>
+          <p:cNvPr id="5" name="TextBox 4"/>
+          <p:cNvSpPr txBox="1"/>
+          <p:nvPr/>
+        </p:nvSpPr>
+        <p:spPr>
+          <a:xfrm>
+            <a:off x="457200" y="2743200"/>
+            <a:ext cx="8229600" cy="685800"/>
+          </a:xfrm>
+          <a:prstGeom prst="rect">
+            <a:avLst/>
+          </a:prstGeom>
+          <a:noFill/>
+        </p:spPr>
+        <p:txBody>
+          <a:bodyPr wrap="none">
+            <a:spAutoFit/>
+          </a:bodyPr>
+          <a:lstStyle/>
+          <a:p>
+            <a:pPr>
+              <a:defRPr sz="900" i="1">
+                <a:solidFill>
+                  <a:srgbClr val="666666"/>
+                </a:solidFill>
+              </a:defRPr>
+            </a:pPr>
+            <a:r>
+              <a:t>📍 Hacker News • 123 points • 144 comments</a:t>
+            </a:r>
+          </a:p>
+        </p:txBody>
+      </p:sp>
+      <p:sp>
+        <p:nvSpPr>
+          <p:cNvPr id="6" name="TextBox 5"/>
+          <p:cNvSpPr txBox="1"/>
+          <p:nvPr/>
+        </p:nvSpPr>
+        <p:spPr>
+          <a:xfrm>
+            <a:off x="457200" y="3429000"/>
+            <a:ext cx="8229600" cy="685800"/>
+          </a:xfrm>
+          <a:prstGeom prst="rect">
+            <a:avLst/>
+          </a:prstGeom>
+          <a:noFill/>
+        </p:spPr>
+        <p:txBody>
+          <a:bodyPr wrap="none">
+            <a:spAutoFit/>
+          </a:bodyPr>
+          <a:lstStyle/>
+          <a:p>
+            <a:pPr>
+              <a:defRPr sz="800">
+                <a:solidFill>
+                  <a:srgbClr val="3498DB"/>
+                </a:solidFill>
+              </a:defRPr>
+            </a:pPr>
+            <a:r>
+              <a:t>🔗 https://martinalderson.com/posts/ai-agents-are-starting-t...</a:t>
+            </a:r>
+          </a:p>
+        </p:txBody>
+      </p:sp>
+      <p:sp>
+        <p:nvSpPr>
+          <p:cNvPr id="7" name="TextBox 6"/>
           <p:cNvSpPr txBox="1"/>
           <p:nvPr/>
         </p:nvSpPr>
@@ -3467,19 +3658,29 @@
       <p:grpSpPr/>
       <p:sp>
         <p:nvSpPr>
-          <p:cNvPr id="2" name="Title 1"/>
-          <p:cNvSpPr>
-            <a:spLocks noGrp="1"/>
-          </p:cNvSpPr>
-          <p:nvPr>
-            <p:ph type="title"/>
-          </p:nvPr>
-        </p:nvSpPr>
-        <p:spPr/>
-        <p:txBody>
-          <a:bodyPr/>
-          <a:lstStyle/>
-          <a:p>
+          <p:cNvPr id="2" name="TextBox 1"/>
+          <p:cNvSpPr txBox="1"/>
+          <p:nvPr/>
+        </p:nvSpPr>
+        <p:spPr>
+          <a:xfrm>
+            <a:off x="457200" y="457200"/>
+            <a:ext cx="8229600" cy="685800"/>
+          </a:xfrm>
+          <a:prstGeom prst="rect">
+            <a:avLst/>
+          </a:prstGeom>
+          <a:noFill/>
+        </p:spPr>
+        <p:txBody>
+          <a:bodyPr wrap="none">
+            <a:spAutoFit/>
+          </a:bodyPr>
+          <a:lstStyle/>
+          <a:p>
+            <a:pPr>
+              <a:defRPr sz="3200" b="1"/>
+            </a:pPr>
             <a:r>
               <a:t>3. Claude CLI deleted my home directory and wiped my Mac</a:t>
             </a:r>
@@ -3488,42 +3689,35 @@
       </p:sp>
       <p:sp>
         <p:nvSpPr>
-          <p:cNvPr id="3" name="Content Placeholder 2"/>
-          <p:cNvSpPr>
-            <a:spLocks noGrp="1"/>
-          </p:cNvSpPr>
-          <p:nvPr>
-            <p:ph idx="1"/>
-          </p:nvPr>
-        </p:nvSpPr>
-        <p:spPr/>
-        <p:txBody>
-          <a:bodyPr/>
-          <a:lstStyle/>
-          <a:p>
-            <a:r>
-              <a:t>Highlights critical safety challenges in tool-using agents with system access,</a:t>
-            </a:r>
-          </a:p>
-          <a:p>
-            <a:pPr/>
-            <a:r>
-              <a:t>demonstrating urgent need for better guardrails in autonomous agent deployments.</a:t>
-            </a:r>
-          </a:p>
-          <a:p>
-            <a:pPr/>
-          </a:p>
-          <a:p>
-            <a:pPr/>
-            <a:r>
-              <a:t>📍 Hacker News • 220 points • 179 comments</a:t>
-            </a:r>
-          </a:p>
-          <a:p>
-            <a:pPr/>
-            <a:r>
-              <a:t>🔗 https://old.reddit.com/r/ClaudeAI/comments/1pgxckk/claude_cli_deleted_my...</a:t>
+          <p:cNvPr id="3" name="TextBox 2"/>
+          <p:cNvSpPr txBox="1"/>
+          <p:nvPr/>
+        </p:nvSpPr>
+        <p:spPr>
+          <a:xfrm>
+            <a:off x="457200" y="1371600"/>
+            <a:ext cx="8229600" cy="685800"/>
+          </a:xfrm>
+          <a:prstGeom prst="rect">
+            <a:avLst/>
+          </a:prstGeom>
+          <a:noFill/>
+        </p:spPr>
+        <p:txBody>
+          <a:bodyPr wrap="none">
+            <a:spAutoFit/>
+          </a:bodyPr>
+          <a:lstStyle/>
+          <a:p>
+            <a:pPr>
+              <a:defRPr sz="1100">
+                <a:solidFill>
+                  <a:srgbClr val="333333"/>
+                </a:solidFill>
+              </a:defRPr>
+            </a:pPr>
+            <a:r>
+              <a:t>Critical incident highlighting the safety challenges of giving AI agents unrestricted tool access and file system permissions, underscoring the need for better guardrails in agentic systems.</a:t>
             </a:r>
           </a:p>
         </p:txBody>
@@ -3531,6 +3725,104 @@
       <p:sp>
         <p:nvSpPr>
           <p:cNvPr id="4" name="TextBox 3"/>
+          <p:cNvSpPr txBox="1"/>
+          <p:nvPr/>
+        </p:nvSpPr>
+        <p:spPr>
+          <a:xfrm>
+            <a:off x="457200" y="2057400"/>
+            <a:ext cx="8229600" cy="685800"/>
+          </a:xfrm>
+          <a:prstGeom prst="rect">
+            <a:avLst/>
+          </a:prstGeom>
+          <a:noFill/>
+        </p:spPr>
+        <p:txBody>
+          <a:bodyPr wrap="none">
+            <a:spAutoFit/>
+          </a:bodyPr>
+          <a:lstStyle/>
+          <a:p>
+            <a:pPr>
+              <a:defRPr sz="800"/>
+            </a:pPr>
+          </a:p>
+        </p:txBody>
+      </p:sp>
+      <p:sp>
+        <p:nvSpPr>
+          <p:cNvPr id="5" name="TextBox 4"/>
+          <p:cNvSpPr txBox="1"/>
+          <p:nvPr/>
+        </p:nvSpPr>
+        <p:spPr>
+          <a:xfrm>
+            <a:off x="457200" y="2743200"/>
+            <a:ext cx="8229600" cy="685800"/>
+          </a:xfrm>
+          <a:prstGeom prst="rect">
+            <a:avLst/>
+          </a:prstGeom>
+          <a:noFill/>
+        </p:spPr>
+        <p:txBody>
+          <a:bodyPr wrap="none">
+            <a:spAutoFit/>
+          </a:bodyPr>
+          <a:lstStyle/>
+          <a:p>
+            <a:pPr>
+              <a:defRPr sz="900" i="1">
+                <a:solidFill>
+                  <a:srgbClr val="666666"/>
+                </a:solidFill>
+              </a:defRPr>
+            </a:pPr>
+            <a:r>
+              <a:t>📍 Hacker News • 221 points • 181 comments</a:t>
+            </a:r>
+          </a:p>
+        </p:txBody>
+      </p:sp>
+      <p:sp>
+        <p:nvSpPr>
+          <p:cNvPr id="6" name="TextBox 5"/>
+          <p:cNvSpPr txBox="1"/>
+          <p:nvPr/>
+        </p:nvSpPr>
+        <p:spPr>
+          <a:xfrm>
+            <a:off x="457200" y="3429000"/>
+            <a:ext cx="8229600" cy="685800"/>
+          </a:xfrm>
+          <a:prstGeom prst="rect">
+            <a:avLst/>
+          </a:prstGeom>
+          <a:noFill/>
+        </p:spPr>
+        <p:txBody>
+          <a:bodyPr wrap="none">
+            <a:spAutoFit/>
+          </a:bodyPr>
+          <a:lstStyle/>
+          <a:p>
+            <a:pPr>
+              <a:defRPr sz="800">
+                <a:solidFill>
+                  <a:srgbClr val="3498DB"/>
+                </a:solidFill>
+              </a:defRPr>
+            </a:pPr>
+            <a:r>
+              <a:t>🔗 https://old.reddit.com/r/ClaudeAI/comments/1pgxckk/claude...</a:t>
+            </a:r>
+          </a:p>
+        </p:txBody>
+      </p:sp>
+      <p:sp>
+        <p:nvSpPr>
+          <p:cNvPr id="7" name="TextBox 6"/>
           <p:cNvSpPr txBox="1"/>
           <p:nvPr/>
         </p:nvSpPr>
@@ -3587,69 +3879,66 @@
       <p:grpSpPr/>
       <p:sp>
         <p:nvSpPr>
-          <p:cNvPr id="2" name="Title 1"/>
-          <p:cNvSpPr>
-            <a:spLocks noGrp="1"/>
-          </p:cNvSpPr>
-          <p:nvPr>
-            <p:ph type="title"/>
-          </p:nvPr>
-        </p:nvSpPr>
-        <p:spPr/>
-        <p:txBody>
-          <a:bodyPr/>
-          <a:lstStyle/>
-          <a:p>
-            <a:r>
-              <a:t>4. An AI agent spent 16 hours hacking Stanford's network. It outperformed h...</a:t>
-            </a:r>
-          </a:p>
-        </p:txBody>
-      </p:sp>
-      <p:sp>
-        <p:nvSpPr>
-          <p:cNvPr id="3" name="Content Placeholder 2"/>
-          <p:cNvSpPr>
-            <a:spLocks noGrp="1"/>
-          </p:cNvSpPr>
-          <p:nvPr>
-            <p:ph idx="1"/>
-          </p:nvPr>
-        </p:nvSpPr>
-        <p:spPr/>
-        <p:txBody>
-          <a:bodyPr/>
-          <a:lstStyle/>
-          <a:p>
-            <a:r>
-              <a:t>Demonstrates autonomous AI agents achieving expert-level performance in complex</a:t>
-            </a:r>
-          </a:p>
-          <a:p>
-            <a:pPr/>
-            <a:r>
-              <a:t>cybersecurity tasks, showcasing practical planning and tool-use capabilities in real-world</a:t>
-            </a:r>
-          </a:p>
-          <a:p>
-            <a:pPr/>
-            <a:r>
-              <a:t>adversarial scenarios.</a:t>
-            </a:r>
-          </a:p>
-          <a:p>
-            <a:pPr/>
-          </a:p>
-          <a:p>
-            <a:pPr/>
-            <a:r>
-              <a:t>📍 r/artificial • 206 upvotes • 32 comments</a:t>
-            </a:r>
-          </a:p>
-          <a:p>
-            <a:pPr/>
-            <a:r>
-              <a:t>🔗 https://reddit.com/r/artificial/comments/1pkuaaq/an_ai_agent_spent_16_ho...</a:t>
+          <p:cNvPr id="2" name="TextBox 1"/>
+          <p:cNvSpPr txBox="1"/>
+          <p:nvPr/>
+        </p:nvSpPr>
+        <p:spPr>
+          <a:xfrm>
+            <a:off x="457200" y="457200"/>
+            <a:ext cx="8229600" cy="685800"/>
+          </a:xfrm>
+          <a:prstGeom prst="rect">
+            <a:avLst/>
+          </a:prstGeom>
+          <a:noFill/>
+        </p:spPr>
+        <p:txBody>
+          <a:bodyPr wrap="none">
+            <a:spAutoFit/>
+          </a:bodyPr>
+          <a:lstStyle/>
+          <a:p>
+            <a:pPr>
+              <a:defRPr sz="3200" b="1"/>
+            </a:pPr>
+            <a:r>
+              <a:t>4. An AI agent spent 16 hours hacking Stanford's network. It outperformed human pros for much less than their 6-figure salaries.</a:t>
+            </a:r>
+          </a:p>
+        </p:txBody>
+      </p:sp>
+      <p:sp>
+        <p:nvSpPr>
+          <p:cNvPr id="3" name="TextBox 2"/>
+          <p:cNvSpPr txBox="1"/>
+          <p:nvPr/>
+        </p:nvSpPr>
+        <p:spPr>
+          <a:xfrm>
+            <a:off x="457200" y="1371600"/>
+            <a:ext cx="8229600" cy="685800"/>
+          </a:xfrm>
+          <a:prstGeom prst="rect">
+            <a:avLst/>
+          </a:prstGeom>
+          <a:noFill/>
+        </p:spPr>
+        <p:txBody>
+          <a:bodyPr wrap="none">
+            <a:spAutoFit/>
+          </a:bodyPr>
+          <a:lstStyle/>
+          <a:p>
+            <a:pPr>
+              <a:defRPr sz="1100">
+                <a:solidFill>
+                  <a:srgbClr val="333333"/>
+                </a:solidFill>
+              </a:defRPr>
+            </a:pPr>
+            <a:r>
+              <a:t>Demonstrates autonomous AI agent successfully executing complex multi-step cybersecurity penetration testing, showing agents can match professional-level strategic planning and tool orchestration.</a:t>
             </a:r>
           </a:p>
         </p:txBody>
@@ -3657,6 +3946,104 @@
       <p:sp>
         <p:nvSpPr>
           <p:cNvPr id="4" name="TextBox 3"/>
+          <p:cNvSpPr txBox="1"/>
+          <p:nvPr/>
+        </p:nvSpPr>
+        <p:spPr>
+          <a:xfrm>
+            <a:off x="457200" y="2057400"/>
+            <a:ext cx="8229600" cy="685800"/>
+          </a:xfrm>
+          <a:prstGeom prst="rect">
+            <a:avLst/>
+          </a:prstGeom>
+          <a:noFill/>
+        </p:spPr>
+        <p:txBody>
+          <a:bodyPr wrap="none">
+            <a:spAutoFit/>
+          </a:bodyPr>
+          <a:lstStyle/>
+          <a:p>
+            <a:pPr>
+              <a:defRPr sz="800"/>
+            </a:pPr>
+          </a:p>
+        </p:txBody>
+      </p:sp>
+      <p:sp>
+        <p:nvSpPr>
+          <p:cNvPr id="5" name="TextBox 4"/>
+          <p:cNvSpPr txBox="1"/>
+          <p:nvPr/>
+        </p:nvSpPr>
+        <p:spPr>
+          <a:xfrm>
+            <a:off x="457200" y="2743200"/>
+            <a:ext cx="8229600" cy="685800"/>
+          </a:xfrm>
+          <a:prstGeom prst="rect">
+            <a:avLst/>
+          </a:prstGeom>
+          <a:noFill/>
+        </p:spPr>
+        <p:txBody>
+          <a:bodyPr wrap="none">
+            <a:spAutoFit/>
+          </a:bodyPr>
+          <a:lstStyle/>
+          <a:p>
+            <a:pPr>
+              <a:defRPr sz="900" i="1">
+                <a:solidFill>
+                  <a:srgbClr val="666666"/>
+                </a:solidFill>
+              </a:defRPr>
+            </a:pPr>
+            <a:r>
+              <a:t>📍 r/artificial • 205 upvotes • 32 comments</a:t>
+            </a:r>
+          </a:p>
+        </p:txBody>
+      </p:sp>
+      <p:sp>
+        <p:nvSpPr>
+          <p:cNvPr id="6" name="TextBox 5"/>
+          <p:cNvSpPr txBox="1"/>
+          <p:nvPr/>
+        </p:nvSpPr>
+        <p:spPr>
+          <a:xfrm>
+            <a:off x="457200" y="3429000"/>
+            <a:ext cx="8229600" cy="685800"/>
+          </a:xfrm>
+          <a:prstGeom prst="rect">
+            <a:avLst/>
+          </a:prstGeom>
+          <a:noFill/>
+        </p:spPr>
+        <p:txBody>
+          <a:bodyPr wrap="none">
+            <a:spAutoFit/>
+          </a:bodyPr>
+          <a:lstStyle/>
+          <a:p>
+            <a:pPr>
+              <a:defRPr sz="800">
+                <a:solidFill>
+                  <a:srgbClr val="3498DB"/>
+                </a:solidFill>
+              </a:defRPr>
+            </a:pPr>
+            <a:r>
+              <a:t>🔗 https://reddit.com/r/artificial/comments/1pkuaaq/an_ai_ag...</a:t>
+            </a:r>
+          </a:p>
+        </p:txBody>
+      </p:sp>
+      <p:sp>
+        <p:nvSpPr>
+          <p:cNvPr id="7" name="TextBox 6"/>
           <p:cNvSpPr txBox="1"/>
           <p:nvPr/>
         </p:nvSpPr>
@@ -3713,63 +4100,66 @@
       <p:grpSpPr/>
       <p:sp>
         <p:nvSpPr>
-          <p:cNvPr id="2" name="Title 1"/>
-          <p:cNvSpPr>
-            <a:spLocks noGrp="1"/>
-          </p:cNvSpPr>
-          <p:nvPr>
-            <p:ph type="title"/>
-          </p:nvPr>
-        </p:nvSpPr>
-        <p:spPr/>
-        <p:txBody>
-          <a:bodyPr/>
-          <a:lstStyle/>
-          <a:p>
-            <a:r>
-              <a:t>5. Microsoft Scales Back AI Goals Because Almost Nobody Is Using Copilot</a:t>
-            </a:r>
-          </a:p>
-        </p:txBody>
-      </p:sp>
-      <p:sp>
-        <p:nvSpPr>
-          <p:cNvPr id="3" name="Content Placeholder 2"/>
-          <p:cNvSpPr>
-            <a:spLocks noGrp="1"/>
-          </p:cNvSpPr>
-          <p:nvPr>
-            <p:ph idx="1"/>
-          </p:nvPr>
-        </p:nvSpPr>
-        <p:spPr/>
-        <p:txBody>
-          <a:bodyPr/>
-          <a:lstStyle/>
-          <a:p>
-            <a:r>
-              <a:t>Reveals adoption challenges for AI agent assistants in enterprise settings, highlighting</a:t>
-            </a:r>
-          </a:p>
-          <a:p>
-            <a:pPr/>
-            <a:r>
-              <a:t>the gap between agent capabilities and practical workplace integration.</a:t>
-            </a:r>
-          </a:p>
-          <a:p>
-            <a:pPr/>
-          </a:p>
-          <a:p>
-            <a:pPr/>
-            <a:r>
-              <a:t>📍 r/artificial • 265 upvotes • 66 comments</a:t>
-            </a:r>
-          </a:p>
-          <a:p>
-            <a:pPr/>
-            <a:r>
-              <a:t>🔗 https://reddit.com/r/artificial/comments/1pmuboi/microsoft_scales_back_a...</a:t>
+          <p:cNvPr id="2" name="TextBox 1"/>
+          <p:cNvSpPr txBox="1"/>
+          <p:nvPr/>
+        </p:nvSpPr>
+        <p:spPr>
+          <a:xfrm>
+            <a:off x="457200" y="457200"/>
+            <a:ext cx="8229600" cy="685800"/>
+          </a:xfrm>
+          <a:prstGeom prst="rect">
+            <a:avLst/>
+          </a:prstGeom>
+          <a:noFill/>
+        </p:spPr>
+        <p:txBody>
+          <a:bodyPr wrap="none">
+            <a:spAutoFit/>
+          </a:bodyPr>
+          <a:lstStyle/>
+          <a:p>
+            <a:pPr>
+              <a:defRPr sz="3200" b="1"/>
+            </a:pPr>
+            <a:r>
+              <a:t>5. Pete Hegseth Says the Pentagon's New Chatbot Will Make America 'More Lethal'. The Department of War aims to put Google Gemini 'directly into the hands of every American warrior.'</a:t>
+            </a:r>
+          </a:p>
+        </p:txBody>
+      </p:sp>
+      <p:sp>
+        <p:nvSpPr>
+          <p:cNvPr id="3" name="TextBox 2"/>
+          <p:cNvSpPr txBox="1"/>
+          <p:nvPr/>
+        </p:nvSpPr>
+        <p:spPr>
+          <a:xfrm>
+            <a:off x="457200" y="1371600"/>
+            <a:ext cx="8229600" cy="685800"/>
+          </a:xfrm>
+          <a:prstGeom prst="rect">
+            <a:avLst/>
+          </a:prstGeom>
+          <a:noFill/>
+        </p:spPr>
+        <p:txBody>
+          <a:bodyPr wrap="none">
+            <a:spAutoFit/>
+          </a:bodyPr>
+          <a:lstStyle/>
+          <a:p>
+            <a:pPr>
+              <a:defRPr sz="1100">
+                <a:solidFill>
+                  <a:srgbClr val="333333"/>
+                </a:solidFill>
+              </a:defRPr>
+            </a:pPr>
+            <a:r>
+              <a:t>Pentagon's deployment of Google Gemini to military personnel represents large-scale institutional adoption of AI agents for tactical decision support and operational planning.</a:t>
             </a:r>
           </a:p>
         </p:txBody>
@@ -3777,6 +4167,104 @@
       <p:sp>
         <p:nvSpPr>
           <p:cNvPr id="4" name="TextBox 3"/>
+          <p:cNvSpPr txBox="1"/>
+          <p:nvPr/>
+        </p:nvSpPr>
+        <p:spPr>
+          <a:xfrm>
+            <a:off x="457200" y="2057400"/>
+            <a:ext cx="8229600" cy="685800"/>
+          </a:xfrm>
+          <a:prstGeom prst="rect">
+            <a:avLst/>
+          </a:prstGeom>
+          <a:noFill/>
+        </p:spPr>
+        <p:txBody>
+          <a:bodyPr wrap="none">
+            <a:spAutoFit/>
+          </a:bodyPr>
+          <a:lstStyle/>
+          <a:p>
+            <a:pPr>
+              <a:defRPr sz="800"/>
+            </a:pPr>
+          </a:p>
+        </p:txBody>
+      </p:sp>
+      <p:sp>
+        <p:nvSpPr>
+          <p:cNvPr id="5" name="TextBox 4"/>
+          <p:cNvSpPr txBox="1"/>
+          <p:nvPr/>
+        </p:nvSpPr>
+        <p:spPr>
+          <a:xfrm>
+            <a:off x="457200" y="2743200"/>
+            <a:ext cx="8229600" cy="685800"/>
+          </a:xfrm>
+          <a:prstGeom prst="rect">
+            <a:avLst/>
+          </a:prstGeom>
+          <a:noFill/>
+        </p:spPr>
+        <p:txBody>
+          <a:bodyPr wrap="none">
+            <a:spAutoFit/>
+          </a:bodyPr>
+          <a:lstStyle/>
+          <a:p>
+            <a:pPr>
+              <a:defRPr sz="900" i="1">
+                <a:solidFill>
+                  <a:srgbClr val="666666"/>
+                </a:solidFill>
+              </a:defRPr>
+            </a:pPr>
+            <a:r>
+              <a:t>📍 r/artificial • 256 upvotes • 125 comments</a:t>
+            </a:r>
+          </a:p>
+        </p:txBody>
+      </p:sp>
+      <p:sp>
+        <p:nvSpPr>
+          <p:cNvPr id="6" name="TextBox 5"/>
+          <p:cNvSpPr txBox="1"/>
+          <p:nvPr/>
+        </p:nvSpPr>
+        <p:spPr>
+          <a:xfrm>
+            <a:off x="457200" y="3429000"/>
+            <a:ext cx="8229600" cy="685800"/>
+          </a:xfrm>
+          <a:prstGeom prst="rect">
+            <a:avLst/>
+          </a:prstGeom>
+          <a:noFill/>
+        </p:spPr>
+        <p:txBody>
+          <a:bodyPr wrap="none">
+            <a:spAutoFit/>
+          </a:bodyPr>
+          <a:lstStyle/>
+          <a:p>
+            <a:pPr>
+              <a:defRPr sz="800">
+                <a:solidFill>
+                  <a:srgbClr val="3498DB"/>
+                </a:solidFill>
+              </a:defRPr>
+            </a:pPr>
+            <a:r>
+              <a:t>🔗 https://reddit.com/r/artificial/comments/1piors1/pete_heg...</a:t>
+            </a:r>
+          </a:p>
+        </p:txBody>
+      </p:sp>
+      <p:sp>
+        <p:nvSpPr>
+          <p:cNvPr id="7" name="TextBox 6"/>
           <p:cNvSpPr txBox="1"/>
           <p:nvPr/>
         </p:nvSpPr>
@@ -3833,19 +4321,29 @@
       <p:grpSpPr/>
       <p:sp>
         <p:nvSpPr>
-          <p:cNvPr id="2" name="Title 1"/>
-          <p:cNvSpPr>
-            <a:spLocks noGrp="1"/>
-          </p:cNvSpPr>
-          <p:nvPr>
-            <p:ph type="title"/>
-          </p:nvPr>
-        </p:nvSpPr>
-        <p:spPr/>
-        <p:txBody>
-          <a:bodyPr/>
-          <a:lstStyle/>
-          <a:p>
+          <p:cNvPr id="2" name="TextBox 1"/>
+          <p:cNvSpPr txBox="1"/>
+          <p:nvPr/>
+        </p:nvSpPr>
+        <p:spPr>
+          <a:xfrm>
+            <a:off x="457200" y="457200"/>
+            <a:ext cx="8229600" cy="685800"/>
+          </a:xfrm>
+          <a:prstGeom prst="rect">
+            <a:avLst/>
+          </a:prstGeom>
+          <a:noFill/>
+        </p:spPr>
+        <p:txBody>
+          <a:bodyPr wrap="none">
+            <a:spAutoFit/>
+          </a:bodyPr>
+          <a:lstStyle/>
+          <a:p>
+            <a:pPr>
+              <a:defRPr sz="3200" b="1"/>
+            </a:pPr>
             <a:r>
               <a:t>🛠️ Tools &amp; Frameworks</a:t>
             </a:r>
@@ -3854,28 +4352,96 @@
       </p:sp>
       <p:sp>
         <p:nvSpPr>
-          <p:cNvPr id="3" name="Content Placeholder 2"/>
-          <p:cNvSpPr>
-            <a:spLocks noGrp="1"/>
-          </p:cNvSpPr>
-          <p:nvPr>
-            <p:ph idx="1"/>
-          </p:nvPr>
-        </p:nvSpPr>
-        <p:spPr/>
-        <p:txBody>
-          <a:bodyPr/>
-          <a:lstStyle/>
-          <a:p>
+          <p:cNvPr id="3" name="TextBox 2"/>
+          <p:cNvSpPr txBox="1"/>
+          <p:nvPr/>
+        </p:nvSpPr>
+        <p:spPr>
+          <a:xfrm>
+            <a:off x="457200" y="1371600"/>
+            <a:ext cx="8229600" cy="685800"/>
+          </a:xfrm>
+          <a:prstGeom prst="rect">
+            <a:avLst/>
+          </a:prstGeom>
+          <a:noFill/>
+        </p:spPr>
+        <p:txBody>
+          <a:bodyPr wrap="none">
+            <a:spAutoFit/>
+          </a:bodyPr>
+          <a:lstStyle/>
+          <a:p>
+            <a:pPr>
+              <a:defRPr sz="1800" b="1">
+                <a:solidFill>
+                  <a:srgbClr val="FFFFFF"/>
+                </a:solidFill>
+              </a:defRPr>
+            </a:pPr>
             <a:r>
               <a:t>4 key updates this week</a:t>
             </a:r>
           </a:p>
-          <a:p>
-            <a:pPr/>
-          </a:p>
-          <a:p>
-            <a:pPr/>
+        </p:txBody>
+      </p:sp>
+      <p:sp>
+        <p:nvSpPr>
+          <p:cNvPr id="4" name="TextBox 3"/>
+          <p:cNvSpPr txBox="1"/>
+          <p:nvPr/>
+        </p:nvSpPr>
+        <p:spPr>
+          <a:xfrm>
+            <a:off x="457200" y="2057400"/>
+            <a:ext cx="8229600" cy="685800"/>
+          </a:xfrm>
+          <a:prstGeom prst="rect">
+            <a:avLst/>
+          </a:prstGeom>
+          <a:noFill/>
+        </p:spPr>
+        <p:txBody>
+          <a:bodyPr wrap="none">
+            <a:spAutoFit/>
+          </a:bodyPr>
+          <a:lstStyle/>
+          <a:p>
+            <a:pPr>
+              <a:defRPr sz="1200"/>
+            </a:pPr>
+          </a:p>
+        </p:txBody>
+      </p:sp>
+      <p:sp>
+        <p:nvSpPr>
+          <p:cNvPr id="5" name="TextBox 4"/>
+          <p:cNvSpPr txBox="1"/>
+          <p:nvPr/>
+        </p:nvSpPr>
+        <p:spPr>
+          <a:xfrm>
+            <a:off x="457200" y="2743200"/>
+            <a:ext cx="8229600" cy="685800"/>
+          </a:xfrm>
+          <a:prstGeom prst="rect">
+            <a:avLst/>
+          </a:prstGeom>
+          <a:noFill/>
+        </p:spPr>
+        <p:txBody>
+          <a:bodyPr wrap="none">
+            <a:spAutoFit/>
+          </a:bodyPr>
+          <a:lstStyle/>
+          <a:p>
+            <a:pPr>
+              <a:defRPr sz="1400" i="1">
+                <a:solidFill>
+                  <a:srgbClr val="FFFFFF"/>
+                </a:solidFill>
+              </a:defRPr>
+            </a:pPr>
             <a:r>
               <a:t>→ Swipe to explore</a:t>
             </a:r>
@@ -3884,7 +4450,7 @@
       </p:sp>
       <p:sp>
         <p:nvSpPr>
-          <p:cNvPr id="4" name="TextBox 3"/>
+          <p:cNvPr id="6" name="TextBox 5"/>
           <p:cNvSpPr txBox="1"/>
           <p:nvPr/>
         </p:nvSpPr>
@@ -3941,19 +4507,29 @@
       <p:grpSpPr/>
       <p:sp>
         <p:nvSpPr>
-          <p:cNvPr id="2" name="Title 1"/>
-          <p:cNvSpPr>
-            <a:spLocks noGrp="1"/>
-          </p:cNvSpPr>
-          <p:nvPr>
-            <p:ph type="title"/>
-          </p:nvPr>
-        </p:nvSpPr>
-        <p:spPr/>
-        <p:txBody>
-          <a:bodyPr/>
-          <a:lstStyle/>
-          <a:p>
+          <p:cNvPr id="2" name="TextBox 1"/>
+          <p:cNvSpPr txBox="1"/>
+          <p:nvPr/>
+        </p:nvSpPr>
+        <p:spPr>
+          <a:xfrm>
+            <a:off x="457200" y="457200"/>
+            <a:ext cx="8229600" cy="685800"/>
+          </a:xfrm>
+          <a:prstGeom prst="rect">
+            <a:avLst/>
+          </a:prstGeom>
+          <a:noFill/>
+        </p:spPr>
+        <p:txBody>
+          <a:bodyPr wrap="none">
+            <a:spAutoFit/>
+          </a:bodyPr>
+          <a:lstStyle/>
+          <a:p>
+            <a:pPr>
+              <a:defRPr sz="3200" b="1"/>
+            </a:pPr>
             <a:r>
               <a:t>1. Introducing: Devstral 2 and Mistral Vibe CLI</a:t>
             </a:r>
@@ -3962,42 +4538,35 @@
       </p:sp>
       <p:sp>
         <p:nvSpPr>
-          <p:cNvPr id="3" name="Content Placeholder 2"/>
-          <p:cNvSpPr>
-            <a:spLocks noGrp="1"/>
-          </p:cNvSpPr>
-          <p:nvPr>
-            <p:ph idx="1"/>
-          </p:nvPr>
-        </p:nvSpPr>
-        <p:spPr/>
-        <p:txBody>
-          <a:bodyPr/>
-          <a:lstStyle/>
-          <a:p>
-            <a:r>
-              <a:t>Mistral releases new coding-focused model with CLI interface, expanding the ecosystem of</a:t>
-            </a:r>
-          </a:p>
-          <a:p>
-            <a:pPr/>
-            <a:r>
-              <a:t>developer-oriented agent tools with open-source alternatives.</a:t>
-            </a:r>
-          </a:p>
-          <a:p>
-            <a:pPr/>
-          </a:p>
-          <a:p>
-            <a:pPr/>
-            <a:r>
-              <a:t>📍 r/LocalLLaMA • 687 upvotes • 218 comments</a:t>
-            </a:r>
-          </a:p>
-          <a:p>
-            <a:pPr/>
-            <a:r>
-              <a:t>🔗 https://reddit.com/r/LocalLLaMA/comments/1pi9q3t/introducing_devstral_2_...</a:t>
+          <p:cNvPr id="3" name="TextBox 2"/>
+          <p:cNvSpPr txBox="1"/>
+          <p:nvPr/>
+        </p:nvSpPr>
+        <p:spPr>
+          <a:xfrm>
+            <a:off x="457200" y="1371600"/>
+            <a:ext cx="8229600" cy="685800"/>
+          </a:xfrm>
+          <a:prstGeom prst="rect">
+            <a:avLst/>
+          </a:prstGeom>
+          <a:noFill/>
+        </p:spPr>
+        <p:txBody>
+          <a:bodyPr wrap="none">
+            <a:spAutoFit/>
+          </a:bodyPr>
+          <a:lstStyle/>
+          <a:p>
+            <a:pPr>
+              <a:defRPr sz="1100">
+                <a:solidFill>
+                  <a:srgbClr val="333333"/>
+                </a:solidFill>
+              </a:defRPr>
+            </a:pPr>
+            <a:r>
+              <a:t>Mistral launches Devstral 2 with CLI interface for agentic coding workflows, joining the wave of command-line agent frameworks for developer automation.</a:t>
             </a:r>
           </a:p>
         </p:txBody>
@@ -4005,6 +4574,104 @@
       <p:sp>
         <p:nvSpPr>
           <p:cNvPr id="4" name="TextBox 3"/>
+          <p:cNvSpPr txBox="1"/>
+          <p:nvPr/>
+        </p:nvSpPr>
+        <p:spPr>
+          <a:xfrm>
+            <a:off x="457200" y="2057400"/>
+            <a:ext cx="8229600" cy="685800"/>
+          </a:xfrm>
+          <a:prstGeom prst="rect">
+            <a:avLst/>
+          </a:prstGeom>
+          <a:noFill/>
+        </p:spPr>
+        <p:txBody>
+          <a:bodyPr wrap="none">
+            <a:spAutoFit/>
+          </a:bodyPr>
+          <a:lstStyle/>
+          <a:p>
+            <a:pPr>
+              <a:defRPr sz="800"/>
+            </a:pPr>
+          </a:p>
+        </p:txBody>
+      </p:sp>
+      <p:sp>
+        <p:nvSpPr>
+          <p:cNvPr id="5" name="TextBox 4"/>
+          <p:cNvSpPr txBox="1"/>
+          <p:nvPr/>
+        </p:nvSpPr>
+        <p:spPr>
+          <a:xfrm>
+            <a:off x="457200" y="2743200"/>
+            <a:ext cx="8229600" cy="685800"/>
+          </a:xfrm>
+          <a:prstGeom prst="rect">
+            <a:avLst/>
+          </a:prstGeom>
+          <a:noFill/>
+        </p:spPr>
+        <p:txBody>
+          <a:bodyPr wrap="none">
+            <a:spAutoFit/>
+          </a:bodyPr>
+          <a:lstStyle/>
+          <a:p>
+            <a:pPr>
+              <a:defRPr sz="900" i="1">
+                <a:solidFill>
+                  <a:srgbClr val="666666"/>
+                </a:solidFill>
+              </a:defRPr>
+            </a:pPr>
+            <a:r>
+              <a:t>📍 r/LocalLLaMA • 692 upvotes • 218 comments</a:t>
+            </a:r>
+          </a:p>
+        </p:txBody>
+      </p:sp>
+      <p:sp>
+        <p:nvSpPr>
+          <p:cNvPr id="6" name="TextBox 5"/>
+          <p:cNvSpPr txBox="1"/>
+          <p:nvPr/>
+        </p:nvSpPr>
+        <p:spPr>
+          <a:xfrm>
+            <a:off x="457200" y="3429000"/>
+            <a:ext cx="8229600" cy="685800"/>
+          </a:xfrm>
+          <a:prstGeom prst="rect">
+            <a:avLst/>
+          </a:prstGeom>
+          <a:noFill/>
+        </p:spPr>
+        <p:txBody>
+          <a:bodyPr wrap="none">
+            <a:spAutoFit/>
+          </a:bodyPr>
+          <a:lstStyle/>
+          <a:p>
+            <a:pPr>
+              <a:defRPr sz="800">
+                <a:solidFill>
+                  <a:srgbClr val="3498DB"/>
+                </a:solidFill>
+              </a:defRPr>
+            </a:pPr>
+            <a:r>
+              <a:t>🔗 https://reddit.com/r/LocalLLaMA/comments/1pi9q3t/introduc...</a:t>
+            </a:r>
+          </a:p>
+        </p:txBody>
+      </p:sp>
+      <p:sp>
+        <p:nvSpPr>
+          <p:cNvPr id="7" name="TextBox 6"/>
           <p:cNvSpPr txBox="1"/>
           <p:nvPr/>
         </p:nvSpPr>
@@ -4061,63 +4728,66 @@
       <p:grpSpPr/>
       <p:sp>
         <p:nvSpPr>
-          <p:cNvPr id="2" name="Title 1"/>
-          <p:cNvSpPr>
-            <a:spLocks noGrp="1"/>
-          </p:cNvSpPr>
-          <p:nvPr>
-            <p:ph type="title"/>
-          </p:nvPr>
-        </p:nvSpPr>
-        <p:spPr/>
-        <p:txBody>
-          <a:bodyPr/>
-          <a:lstStyle/>
-          <a:p>
-            <a:r>
-              <a:t>2. OpenAI Skills in ChatGPT and Codex CLI</a:t>
-            </a:r>
-          </a:p>
-        </p:txBody>
-      </p:sp>
-      <p:sp>
-        <p:nvSpPr>
-          <p:cNvPr id="3" name="Content Placeholder 2"/>
-          <p:cNvSpPr>
-            <a:spLocks noGrp="1"/>
-          </p:cNvSpPr>
-          <p:nvPr>
-            <p:ph idx="1"/>
-          </p:nvPr>
-        </p:nvSpPr>
-        <p:spPr/>
-        <p:txBody>
-          <a:bodyPr/>
-          <a:lstStyle/>
-          <a:p>
-            <a:r>
-              <a:t>Introduction of modular 'skills' system enables composable agent capabilities and tool</a:t>
-            </a:r>
-          </a:p>
-          <a:p>
-            <a:pPr/>
-            <a:r>
-              <a:t>integration, representing architectural shift toward more flexible agent frameworks.</a:t>
-            </a:r>
-          </a:p>
-          <a:p>
-            <a:pPr/>
-          </a:p>
-          <a:p>
-            <a:pPr/>
-            <a:r>
-              <a:t>📍 Hacker News • 568 points • 313 comments</a:t>
-            </a:r>
-          </a:p>
-          <a:p>
-            <a:pPr/>
-            <a:r>
-              <a:t>🔗 https://simonwillison.net/2025/Dec/12/openai-skills/</a:t>
+          <p:cNvPr id="2" name="TextBox 1"/>
+          <p:cNvSpPr txBox="1"/>
+          <p:nvPr/>
+        </p:nvSpPr>
+        <p:spPr>
+          <a:xfrm>
+            <a:off x="457200" y="457200"/>
+            <a:ext cx="8229600" cy="685800"/>
+          </a:xfrm>
+          <a:prstGeom prst="rect">
+            <a:avLst/>
+          </a:prstGeom>
+          <a:noFill/>
+        </p:spPr>
+        <p:txBody>
+          <a:bodyPr wrap="none">
+            <a:spAutoFit/>
+          </a:bodyPr>
+          <a:lstStyle/>
+          <a:p>
+            <a:pPr>
+              <a:defRPr sz="3200" b="1"/>
+            </a:pPr>
+            <a:r>
+              <a:t>2. You can now train LLMs 3x faster with 30% less memory! (&lt;3.9GB VRAM)</a:t>
+            </a:r>
+          </a:p>
+        </p:txBody>
+      </p:sp>
+      <p:sp>
+        <p:nvSpPr>
+          <p:cNvPr id="3" name="TextBox 2"/>
+          <p:cNvSpPr txBox="1"/>
+          <p:nvPr/>
+        </p:nvSpPr>
+        <p:spPr>
+          <a:xfrm>
+            <a:off x="457200" y="1371600"/>
+            <a:ext cx="8229600" cy="685800"/>
+          </a:xfrm>
+          <a:prstGeom prst="rect">
+            <a:avLst/>
+          </a:prstGeom>
+          <a:noFill/>
+        </p:spPr>
+        <p:txBody>
+          <a:bodyPr wrap="none">
+            <a:spAutoFit/>
+          </a:bodyPr>
+          <a:lstStyle/>
+          <a:p>
+            <a:pPr>
+              <a:defRPr sz="1100">
+                <a:solidFill>
+                  <a:srgbClr val="333333"/>
+                </a:solidFill>
+              </a:defRPr>
+            </a:pPr>
+            <a:r>
+              <a:t>Memory optimization breakthrough enables local training of agent models on consumer hardware, democratizing development of custom agentic systems.</a:t>
             </a:r>
           </a:p>
         </p:txBody>
@@ -4125,6 +4795,104 @@
       <p:sp>
         <p:nvSpPr>
           <p:cNvPr id="4" name="TextBox 3"/>
+          <p:cNvSpPr txBox="1"/>
+          <p:nvPr/>
+        </p:nvSpPr>
+        <p:spPr>
+          <a:xfrm>
+            <a:off x="457200" y="2057400"/>
+            <a:ext cx="8229600" cy="685800"/>
+          </a:xfrm>
+          <a:prstGeom prst="rect">
+            <a:avLst/>
+          </a:prstGeom>
+          <a:noFill/>
+        </p:spPr>
+        <p:txBody>
+          <a:bodyPr wrap="none">
+            <a:spAutoFit/>
+          </a:bodyPr>
+          <a:lstStyle/>
+          <a:p>
+            <a:pPr>
+              <a:defRPr sz="800"/>
+            </a:pPr>
+          </a:p>
+        </p:txBody>
+      </p:sp>
+      <p:sp>
+        <p:nvSpPr>
+          <p:cNvPr id="5" name="TextBox 4"/>
+          <p:cNvSpPr txBox="1"/>
+          <p:nvPr/>
+        </p:nvSpPr>
+        <p:spPr>
+          <a:xfrm>
+            <a:off x="457200" y="2743200"/>
+            <a:ext cx="8229600" cy="685800"/>
+          </a:xfrm>
+          <a:prstGeom prst="rect">
+            <a:avLst/>
+          </a:prstGeom>
+          <a:noFill/>
+        </p:spPr>
+        <p:txBody>
+          <a:bodyPr wrap="none">
+            <a:spAutoFit/>
+          </a:bodyPr>
+          <a:lstStyle/>
+          <a:p>
+            <a:pPr>
+              <a:defRPr sz="900" i="1">
+                <a:solidFill>
+                  <a:srgbClr val="666666"/>
+                </a:solidFill>
+              </a:defRPr>
+            </a:pPr>
+            <a:r>
+              <a:t>📍 r/LocalLLaMA • 1027 upvotes • 114 comments</a:t>
+            </a:r>
+          </a:p>
+        </p:txBody>
+      </p:sp>
+      <p:sp>
+        <p:nvSpPr>
+          <p:cNvPr id="6" name="TextBox 5"/>
+          <p:cNvSpPr txBox="1"/>
+          <p:nvPr/>
+        </p:nvSpPr>
+        <p:spPr>
+          <a:xfrm>
+            <a:off x="457200" y="3429000"/>
+            <a:ext cx="8229600" cy="685800"/>
+          </a:xfrm>
+          <a:prstGeom prst="rect">
+            <a:avLst/>
+          </a:prstGeom>
+          <a:noFill/>
+        </p:spPr>
+        <p:txBody>
+          <a:bodyPr wrap="none">
+            <a:spAutoFit/>
+          </a:bodyPr>
+          <a:lstStyle/>
+          <a:p>
+            <a:pPr>
+              <a:defRPr sz="800">
+                <a:solidFill>
+                  <a:srgbClr val="3498DB"/>
+                </a:solidFill>
+              </a:defRPr>
+            </a:pPr>
+            <a:r>
+              <a:t>🔗 https://reddit.com/r/LocalLLaMA/comments/1pj51tu/you_can_...</a:t>
+            </a:r>
+          </a:p>
+        </p:txBody>
+      </p:sp>
+      <p:sp>
+        <p:nvSpPr>
+          <p:cNvPr id="7" name="TextBox 6"/>
           <p:cNvSpPr txBox="1"/>
           <p:nvPr/>
         </p:nvSpPr>
@@ -4181,63 +4949,66 @@
       <p:grpSpPr/>
       <p:sp>
         <p:nvSpPr>
-          <p:cNvPr id="2" name="Title 1"/>
-          <p:cNvSpPr>
-            <a:spLocks noGrp="1"/>
-          </p:cNvSpPr>
-          <p:nvPr>
-            <p:ph type="title"/>
-          </p:nvPr>
-        </p:nvSpPr>
-        <p:spPr/>
-        <p:txBody>
-          <a:bodyPr/>
-          <a:lstStyle/>
-          <a:p>
-            <a:r>
-              <a:t>3. You can now train LLMs 3x faster with 30% less memory! (&lt;3.9GB VRAM)</a:t>
-            </a:r>
-          </a:p>
-        </p:txBody>
-      </p:sp>
-      <p:sp>
-        <p:nvSpPr>
-          <p:cNvPr id="3" name="Content Placeholder 2"/>
-          <p:cNvSpPr>
-            <a:spLocks noGrp="1"/>
-          </p:cNvSpPr>
-          <p:nvPr>
-            <p:ph idx="1"/>
-          </p:nvPr>
-        </p:nvSpPr>
-        <p:spPr/>
-        <p:txBody>
-          <a:bodyPr/>
-          <a:lstStyle/>
-          <a:p>
-            <a:r>
-              <a:t>Major efficiency breakthrough enabling local training and fine-tuning of agent models on</a:t>
-            </a:r>
-          </a:p>
-          <a:p>
-            <a:pPr/>
-            <a:r>
-              <a:t>consumer hardware, democratizing agent development.</a:t>
-            </a:r>
-          </a:p>
-          <a:p>
-            <a:pPr/>
-          </a:p>
-          <a:p>
-            <a:pPr/>
-            <a:r>
-              <a:t>📍 r/LocalLLaMA • 1028 upvotes • 114 comments</a:t>
-            </a:r>
-          </a:p>
-          <a:p>
-            <a:pPr/>
-            <a:r>
-              <a:t>🔗 https://reddit.com/r/LocalLLaMA/comments/1pj51tu/you_can_now_train_llms_...</a:t>
+          <p:cNvPr id="2" name="TextBox 1"/>
+          <p:cNvSpPr txBox="1"/>
+          <p:nvPr/>
+        </p:nvSpPr>
+        <p:spPr>
+          <a:xfrm>
+            <a:off x="457200" y="457200"/>
+            <a:ext cx="8229600" cy="685800"/>
+          </a:xfrm>
+          <a:prstGeom prst="rect">
+            <a:avLst/>
+          </a:prstGeom>
+          <a:noFill/>
+        </p:spPr>
+        <p:txBody>
+          <a:bodyPr wrap="none">
+            <a:spAutoFit/>
+          </a:bodyPr>
+          <a:lstStyle/>
+          <a:p>
+            <a:pPr>
+              <a:defRPr sz="3200" b="1"/>
+            </a:pPr>
+            <a:r>
+              <a:t>3. SUMFORU: An LLM-Based Review Summarization Framework for Personalized Purchase Decision Support</a:t>
+            </a:r>
+          </a:p>
+        </p:txBody>
+      </p:sp>
+      <p:sp>
+        <p:nvSpPr>
+          <p:cNvPr id="3" name="TextBox 2"/>
+          <p:cNvSpPr txBox="1"/>
+          <p:nvPr/>
+        </p:nvSpPr>
+        <p:spPr>
+          <a:xfrm>
+            <a:off x="457200" y="1371600"/>
+            <a:ext cx="8229600" cy="685800"/>
+          </a:xfrm>
+          <a:prstGeom prst="rect">
+            <a:avLst/>
+          </a:prstGeom>
+          <a:noFill/>
+        </p:spPr>
+        <p:txBody>
+          <a:bodyPr wrap="none">
+            <a:spAutoFit/>
+          </a:bodyPr>
+          <a:lstStyle/>
+          <a:p>
+            <a:pPr>
+              <a:defRPr sz="1100">
+                <a:solidFill>
+                  <a:srgbClr val="333333"/>
+                </a:solidFill>
+              </a:defRPr>
+            </a:pPr>
+            <a:r>
+              <a:t>Framework for personalized decision-support agents that aggregate information and reason about user preferences, demonstrating practical agentic reasoning for consumer applications.</a:t>
             </a:r>
           </a:p>
         </p:txBody>
@@ -4245,6 +5016,104 @@
       <p:sp>
         <p:nvSpPr>
           <p:cNvPr id="4" name="TextBox 3"/>
+          <p:cNvSpPr txBox="1"/>
+          <p:nvPr/>
+        </p:nvSpPr>
+        <p:spPr>
+          <a:xfrm>
+            <a:off x="457200" y="2057400"/>
+            <a:ext cx="8229600" cy="685800"/>
+          </a:xfrm>
+          <a:prstGeom prst="rect">
+            <a:avLst/>
+          </a:prstGeom>
+          <a:noFill/>
+        </p:spPr>
+        <p:txBody>
+          <a:bodyPr wrap="none">
+            <a:spAutoFit/>
+          </a:bodyPr>
+          <a:lstStyle/>
+          <a:p>
+            <a:pPr>
+              <a:defRPr sz="800"/>
+            </a:pPr>
+          </a:p>
+        </p:txBody>
+      </p:sp>
+      <p:sp>
+        <p:nvSpPr>
+          <p:cNvPr id="5" name="TextBox 4"/>
+          <p:cNvSpPr txBox="1"/>
+          <p:nvPr/>
+        </p:nvSpPr>
+        <p:spPr>
+          <a:xfrm>
+            <a:off x="457200" y="2743200"/>
+            <a:ext cx="8229600" cy="685800"/>
+          </a:xfrm>
+          <a:prstGeom prst="rect">
+            <a:avLst/>
+          </a:prstGeom>
+          <a:noFill/>
+        </p:spPr>
+        <p:txBody>
+          <a:bodyPr wrap="none">
+            <a:spAutoFit/>
+          </a:bodyPr>
+          <a:lstStyle/>
+          <a:p>
+            <a:pPr>
+              <a:defRPr sz="900" i="1">
+                <a:solidFill>
+                  <a:srgbClr val="666666"/>
+                </a:solidFill>
+              </a:defRPr>
+            </a:pPr>
+            <a:r>
+              <a:t>📍 arXiv • Yuming Feng, Xinrui Jiang</a:t>
+            </a:r>
+          </a:p>
+        </p:txBody>
+      </p:sp>
+      <p:sp>
+        <p:nvSpPr>
+          <p:cNvPr id="6" name="TextBox 5"/>
+          <p:cNvSpPr txBox="1"/>
+          <p:nvPr/>
+        </p:nvSpPr>
+        <p:spPr>
+          <a:xfrm>
+            <a:off x="457200" y="3429000"/>
+            <a:ext cx="8229600" cy="685800"/>
+          </a:xfrm>
+          <a:prstGeom prst="rect">
+            <a:avLst/>
+          </a:prstGeom>
+          <a:noFill/>
+        </p:spPr>
+        <p:txBody>
+          <a:bodyPr wrap="none">
+            <a:spAutoFit/>
+          </a:bodyPr>
+          <a:lstStyle/>
+          <a:p>
+            <a:pPr>
+              <a:defRPr sz="800">
+                <a:solidFill>
+                  <a:srgbClr val="3498DB"/>
+                </a:solidFill>
+              </a:defRPr>
+            </a:pPr>
+            <a:r>
+              <a:t>🔗 https://arxiv.org/abs/2512.11755v1</a:t>
+            </a:r>
+          </a:p>
+        </p:txBody>
+      </p:sp>
+      <p:sp>
+        <p:nvSpPr>
+          <p:cNvPr id="7" name="TextBox 6"/>
           <p:cNvSpPr txBox="1"/>
           <p:nvPr/>
         </p:nvSpPr>
@@ -4301,63 +5170,66 @@
       <p:grpSpPr/>
       <p:sp>
         <p:nvSpPr>
-          <p:cNvPr id="2" name="Title 1"/>
-          <p:cNvSpPr>
-            <a:spLocks noGrp="1"/>
-          </p:cNvSpPr>
-          <p:nvPr>
-            <p:ph type="title"/>
-          </p:nvPr>
-        </p:nvSpPr>
-        <p:spPr/>
-        <p:txBody>
-          <a:bodyPr/>
-          <a:lstStyle/>
-          <a:p>
-            <a:r>
-              <a:t>4. Claude CLI Tool</a:t>
-            </a:r>
-          </a:p>
-        </p:txBody>
-      </p:sp>
-      <p:sp>
-        <p:nvSpPr>
-          <p:cNvPr id="3" name="Content Placeholder 2"/>
-          <p:cNvSpPr>
-            <a:spLocks noGrp="1"/>
-          </p:cNvSpPr>
-          <p:nvPr>
-            <p:ph idx="1"/>
-          </p:nvPr>
-        </p:nvSpPr>
-        <p:spPr/>
-        <p:txBody>
-          <a:bodyPr/>
-          <a:lstStyle/>
-          <a:p>
-            <a:r>
-              <a:t>Despite safety incident, represents growing trend of CLI-based agent frameworks for</a:t>
-            </a:r>
-          </a:p>
-          <a:p>
-            <a:pPr/>
-            <a:r>
-              <a:t>developer workflows, highlighting both potential and risks of tool-using agents.</a:t>
-            </a:r>
-          </a:p>
-          <a:p>
-            <a:pPr/>
-          </a:p>
-          <a:p>
-            <a:pPr/>
-            <a:r>
-              <a:t>📍 Hacker News • 220 points • 179 comments</a:t>
-            </a:r>
-          </a:p>
-          <a:p>
-            <a:pPr/>
-            <a:r>
-              <a:t>🔗 https://old.reddit.com/r/ClaudeAI/comments/1pgxckk/claude_cli_deleted_my...</a:t>
+          <p:cNvPr id="2" name="TextBox 1"/>
+          <p:cNvSpPr txBox="1"/>
+          <p:nvPr/>
+        </p:nvSpPr>
+        <p:spPr>
+          <a:xfrm>
+            <a:off x="457200" y="457200"/>
+            <a:ext cx="8229600" cy="685800"/>
+          </a:xfrm>
+          <a:prstGeom prst="rect">
+            <a:avLst/>
+          </a:prstGeom>
+          <a:noFill/>
+        </p:spPr>
+        <p:txBody>
+          <a:bodyPr wrap="none">
+            <a:spAutoFit/>
+          </a:bodyPr>
+          <a:lstStyle/>
+          <a:p>
+            <a:pPr>
+              <a:defRPr sz="3200" b="1"/>
+            </a:pPr>
+            <a:r>
+              <a:t>4. 8x RTX Pro 6000 server complete</a:t>
+            </a:r>
+          </a:p>
+        </p:txBody>
+      </p:sp>
+      <p:sp>
+        <p:nvSpPr>
+          <p:cNvPr id="3" name="TextBox 2"/>
+          <p:cNvSpPr txBox="1"/>
+          <p:nvPr/>
+        </p:nvSpPr>
+        <p:spPr>
+          <a:xfrm>
+            <a:off x="457200" y="1371600"/>
+            <a:ext cx="8229600" cy="685800"/>
+          </a:xfrm>
+          <a:prstGeom prst="rect">
+            <a:avLst/>
+          </a:prstGeom>
+          <a:noFill/>
+        </p:spPr>
+        <p:txBody>
+          <a:bodyPr wrap="none">
+            <a:spAutoFit/>
+          </a:bodyPr>
+          <a:lstStyle/>
+          <a:p>
+            <a:pPr>
+              <a:defRPr sz="1100">
+                <a:solidFill>
+                  <a:srgbClr val="333333"/>
+                </a:solidFill>
+              </a:defRPr>
+            </a:pPr>
+            <a:r>
+              <a:t>Community build showcasing infrastructure for running multi-agent systems and large agentic models locally, reflecting growing interest in self-hosted agent deployments.</a:t>
             </a:r>
           </a:p>
         </p:txBody>
@@ -4365,6 +5237,104 @@
       <p:sp>
         <p:nvSpPr>
           <p:cNvPr id="4" name="TextBox 3"/>
+          <p:cNvSpPr txBox="1"/>
+          <p:nvPr/>
+        </p:nvSpPr>
+        <p:spPr>
+          <a:xfrm>
+            <a:off x="457200" y="2057400"/>
+            <a:ext cx="8229600" cy="685800"/>
+          </a:xfrm>
+          <a:prstGeom prst="rect">
+            <a:avLst/>
+          </a:prstGeom>
+          <a:noFill/>
+        </p:spPr>
+        <p:txBody>
+          <a:bodyPr wrap="none">
+            <a:spAutoFit/>
+          </a:bodyPr>
+          <a:lstStyle/>
+          <a:p>
+            <a:pPr>
+              <a:defRPr sz="800"/>
+            </a:pPr>
+          </a:p>
+        </p:txBody>
+      </p:sp>
+      <p:sp>
+        <p:nvSpPr>
+          <p:cNvPr id="5" name="TextBox 4"/>
+          <p:cNvSpPr txBox="1"/>
+          <p:nvPr/>
+        </p:nvSpPr>
+        <p:spPr>
+          <a:xfrm>
+            <a:off x="457200" y="2743200"/>
+            <a:ext cx="8229600" cy="685800"/>
+          </a:xfrm>
+          <a:prstGeom prst="rect">
+            <a:avLst/>
+          </a:prstGeom>
+          <a:noFill/>
+        </p:spPr>
+        <p:txBody>
+          <a:bodyPr wrap="none">
+            <a:spAutoFit/>
+          </a:bodyPr>
+          <a:lstStyle/>
+          <a:p>
+            <a:pPr>
+              <a:defRPr sz="900" i="1">
+                <a:solidFill>
+                  <a:srgbClr val="666666"/>
+                </a:solidFill>
+              </a:defRPr>
+            </a:pPr>
+            <a:r>
+              <a:t>📍 r/LocalLLaMA • 607 upvotes • 264 comments</a:t>
+            </a:r>
+          </a:p>
+        </p:txBody>
+      </p:sp>
+      <p:sp>
+        <p:nvSpPr>
+          <p:cNvPr id="6" name="TextBox 5"/>
+          <p:cNvSpPr txBox="1"/>
+          <p:nvPr/>
+        </p:nvSpPr>
+        <p:spPr>
+          <a:xfrm>
+            <a:off x="457200" y="3429000"/>
+            <a:ext cx="8229600" cy="685800"/>
+          </a:xfrm>
+          <a:prstGeom prst="rect">
+            <a:avLst/>
+          </a:prstGeom>
+          <a:noFill/>
+        </p:spPr>
+        <p:txBody>
+          <a:bodyPr wrap="none">
+            <a:spAutoFit/>
+          </a:bodyPr>
+          <a:lstStyle/>
+          <a:p>
+            <a:pPr>
+              <a:defRPr sz="800">
+                <a:solidFill>
+                  <a:srgbClr val="3498DB"/>
+                </a:solidFill>
+              </a:defRPr>
+            </a:pPr>
+            <a:r>
+              <a:t>🔗 https://reddit.com/r/LocalLLaMA/comments/1plwgun/8x_rtx_p...</a:t>
+            </a:r>
+          </a:p>
+        </p:txBody>
+      </p:sp>
+      <p:sp>
+        <p:nvSpPr>
+          <p:cNvPr id="7" name="TextBox 6"/>
           <p:cNvSpPr txBox="1"/>
           <p:nvPr/>
         </p:nvSpPr>
@@ -4421,19 +5391,29 @@
       <p:grpSpPr/>
       <p:sp>
         <p:nvSpPr>
-          <p:cNvPr id="2" name="Title 1"/>
-          <p:cNvSpPr>
-            <a:spLocks noGrp="1"/>
-          </p:cNvSpPr>
-          <p:nvPr>
-            <p:ph type="title"/>
-          </p:nvPr>
-        </p:nvSpPr>
-        <p:spPr/>
-        <p:txBody>
-          <a:bodyPr/>
-          <a:lstStyle/>
-          <a:p>
+          <p:cNvPr id="2" name="TextBox 1"/>
+          <p:cNvSpPr txBox="1"/>
+          <p:nvPr/>
+        </p:nvSpPr>
+        <p:spPr>
+          <a:xfrm>
+            <a:off x="457200" y="457200"/>
+            <a:ext cx="8229600" cy="685800"/>
+          </a:xfrm>
+          <a:prstGeom prst="rect">
+            <a:avLst/>
+          </a:prstGeom>
+          <a:noFill/>
+        </p:spPr>
+        <p:txBody>
+          <a:bodyPr wrap="none">
+            <a:spAutoFit/>
+          </a:bodyPr>
+          <a:lstStyle/>
+          <a:p>
+            <a:pPr>
+              <a:defRPr sz="3200" b="1"/>
+            </a:pPr>
             <a:r>
               <a:t>🤖 This Week in Agentic AI</a:t>
             </a:r>
@@ -4442,67 +5422,166 @@
       </p:sp>
       <p:sp>
         <p:nvSpPr>
-          <p:cNvPr id="3" name="Content Placeholder 2"/>
-          <p:cNvSpPr>
-            <a:spLocks noGrp="1"/>
-          </p:cNvSpPr>
-          <p:nvPr>
-            <p:ph idx="1"/>
-          </p:nvPr>
-        </p:nvSpPr>
-        <p:spPr/>
-        <p:txBody>
-          <a:bodyPr/>
-          <a:lstStyle/>
-          <a:p>
-            <a:r>
-              <a:t>📊 This Week's Highlights</a:t>
-            </a:r>
-          </a:p>
-          <a:p>
-            <a:pPr/>
-          </a:p>
-          <a:p>
-            <a:pPr/>
-            <a:r>
-              <a:t>This week highlighted both the promise and peril of autonomous AI agents, with OpenAI</a:t>
-            </a:r>
-          </a:p>
-          <a:p>
-            <a:pPr/>
-            <a:r>
-              <a:t>introducing modular 'skills' while Claude's CLI incident exposed critical safety gaps in</a:t>
-            </a:r>
-          </a:p>
-          <a:p>
-            <a:pPr/>
-            <a:r>
-              <a:t>tool-using agents. Research advanced multi-agent learning and formal verification methods,</a:t>
-            </a:r>
-          </a:p>
-          <a:p>
-            <a:pPr/>
-            <a:r>
-              <a:t>while industry debates centered on the growing gap between impressive benchmarks and</a:t>
-            </a:r>
-          </a:p>
-          <a:p>
-            <a:pPr/>
-            <a:r>
-              <a:t>practical deployment challenges, particularly in enterprise SaaS replacement scenarios.</a:t>
-            </a:r>
-          </a:p>
-          <a:p>
-            <a:pPr/>
-          </a:p>
-          <a:p>
-            <a:pPr/>
+          <p:cNvPr id="3" name="TextBox 2"/>
+          <p:cNvSpPr txBox="1"/>
+          <p:nvPr/>
+        </p:nvSpPr>
+        <p:spPr>
+          <a:xfrm>
+            <a:off x="457200" y="1371600"/>
+            <a:ext cx="8229600" cy="685800"/>
+          </a:xfrm>
+          <a:prstGeom prst="rect">
+            <a:avLst/>
+          </a:prstGeom>
+          <a:noFill/>
+        </p:spPr>
+        <p:txBody>
+          <a:bodyPr wrap="none">
+            <a:spAutoFit/>
+          </a:bodyPr>
+          <a:lstStyle/>
+          <a:p>
+            <a:pPr>
+              <a:defRPr sz="1600" b="1">
+                <a:solidFill>
+                  <a:srgbClr val="FFFFFF"/>
+                </a:solidFill>
+              </a:defRPr>
+            </a:pPr>
+            <a:r>
+              <a:t>This Week's Highlights</a:t>
+            </a:r>
+          </a:p>
+        </p:txBody>
+      </p:sp>
+      <p:sp>
+        <p:nvSpPr>
+          <p:cNvPr id="4" name="TextBox 3"/>
+          <p:cNvSpPr txBox="1"/>
+          <p:nvPr/>
+        </p:nvSpPr>
+        <p:spPr>
+          <a:xfrm>
+            <a:off x="457200" y="2057400"/>
+            <a:ext cx="8229600" cy="685800"/>
+          </a:xfrm>
+          <a:prstGeom prst="rect">
+            <a:avLst/>
+          </a:prstGeom>
+          <a:noFill/>
+        </p:spPr>
+        <p:txBody>
+          <a:bodyPr wrap="none">
+            <a:spAutoFit/>
+          </a:bodyPr>
+          <a:lstStyle/>
+          <a:p>
+            <a:pPr>
+              <a:defRPr sz="1200">
+                <a:solidFill>
+                  <a:srgbClr val="FFFFFF"/>
+                </a:solidFill>
+              </a:defRPr>
+            </a:pPr>
+            <a:r>
+              <a:t>This week highlighted the rapid maturation of agentic AI with OpenAI quietly launching 'skills' for modular agent capabilities while safety concerns intensified following Claude CLI's file deletion incident. Multi-agent systems demonstrated breakthrough capabilities in competitive drone racing and cybersecurity penetration testing, signaling agents are moving from research demos to practical applications that can match human expert performance.</a:t>
+            </a:r>
+          </a:p>
+        </p:txBody>
+      </p:sp>
+      <p:sp>
+        <p:nvSpPr>
+          <p:cNvPr id="5" name="TextBox 4"/>
+          <p:cNvSpPr txBox="1"/>
+          <p:nvPr/>
+        </p:nvSpPr>
+        <p:spPr>
+          <a:xfrm>
+            <a:off x="457200" y="2743200"/>
+            <a:ext cx="8229600" cy="685800"/>
+          </a:xfrm>
+          <a:prstGeom prst="rect">
+            <a:avLst/>
+          </a:prstGeom>
+          <a:noFill/>
+        </p:spPr>
+        <p:txBody>
+          <a:bodyPr wrap="none">
+            <a:spAutoFit/>
+          </a:bodyPr>
+          <a:lstStyle/>
+          <a:p>
+            <a:pPr>
+              <a:defRPr sz="1000"/>
+            </a:pPr>
+          </a:p>
+        </p:txBody>
+      </p:sp>
+      <p:sp>
+        <p:nvSpPr>
+          <p:cNvPr id="6" name="TextBox 5"/>
+          <p:cNvSpPr txBox="1"/>
+          <p:nvPr/>
+        </p:nvSpPr>
+        <p:spPr>
+          <a:xfrm>
+            <a:off x="457200" y="3429000"/>
+            <a:ext cx="8229600" cy="685800"/>
+          </a:xfrm>
+          <a:prstGeom prst="rect">
+            <a:avLst/>
+          </a:prstGeom>
+          <a:noFill/>
+        </p:spPr>
+        <p:txBody>
+          <a:bodyPr wrap="none">
+            <a:spAutoFit/>
+          </a:bodyPr>
+          <a:lstStyle/>
+          <a:p>
+            <a:pPr>
+              <a:defRPr sz="1000" i="1">
+                <a:solidFill>
+                  <a:srgbClr val="CCCCCC"/>
+                </a:solidFill>
+              </a:defRPr>
+            </a:pPr>
             <a:r>
               <a:t>📚 arXiv • Hacker News • Reddit</a:t>
             </a:r>
           </a:p>
-          <a:p>
-            <a:pPr/>
+        </p:txBody>
+      </p:sp>
+      <p:sp>
+        <p:nvSpPr>
+          <p:cNvPr id="7" name="TextBox 6"/>
+          <p:cNvSpPr txBox="1"/>
+          <p:nvPr/>
+        </p:nvSpPr>
+        <p:spPr>
+          <a:xfrm>
+            <a:off x="457200" y="4114800"/>
+            <a:ext cx="8229600" cy="685800"/>
+          </a:xfrm>
+          <a:prstGeom prst="rect">
+            <a:avLst/>
+          </a:prstGeom>
+          <a:noFill/>
+        </p:spPr>
+        <p:txBody>
+          <a:bodyPr wrap="none">
+            <a:spAutoFit/>
+          </a:bodyPr>
+          <a:lstStyle/>
+          <a:p>
+            <a:pPr>
+              <a:defRPr sz="1000" i="1">
+                <a:solidFill>
+                  <a:srgbClr val="CCCCCC"/>
+                </a:solidFill>
+              </a:defRPr>
+            </a:pPr>
             <a:r>
               <a:t>🗓️  2025-12-15</a:t>
             </a:r>
@@ -4511,7 +5590,7 @@
       </p:sp>
       <p:sp>
         <p:nvSpPr>
-          <p:cNvPr id="4" name="TextBox 3"/>
+          <p:cNvPr id="8" name="TextBox 7"/>
           <p:cNvSpPr txBox="1"/>
           <p:nvPr/>
         </p:nvSpPr>
@@ -4549,594 +5628,6 @@
 </file>
 
 <file path=ppt/slides/slide20.xml><?xml version="1.0" encoding="utf-8"?>
-<p:sld xmlns:a="http://schemas.openxmlformats.org/drawingml/2006/main" xmlns:p="http://schemas.openxmlformats.org/presentationml/2006/main" xmlns:r="http://schemas.openxmlformats.org/officeDocument/2006/relationships">
-  <p:cSld>
-    <p:bg>
-      <p:bgPr>
-        <a:solidFill>
-          <a:srgbClr val="E67E22"/>
-        </a:solidFill>
-        <a:effectLst/>
-      </p:bgPr>
-    </p:bg>
-    <p:spTree>
-      <p:nvGrpSpPr>
-        <p:cNvPr id="1" name=""/>
-        <p:cNvGrpSpPr/>
-        <p:nvPr/>
-      </p:nvGrpSpPr>
-      <p:grpSpPr/>
-      <p:sp>
-        <p:nvSpPr>
-          <p:cNvPr id="2" name="Title 1"/>
-          <p:cNvSpPr>
-            <a:spLocks noGrp="1"/>
-          </p:cNvSpPr>
-          <p:nvPr>
-            <p:ph type="title"/>
-          </p:nvPr>
-        </p:nvSpPr>
-        <p:spPr/>
-        <p:txBody>
-          <a:bodyPr/>
-          <a:lstStyle/>
-          <a:p>
-            <a:r>
-              <a:t>💬 Notable Discussions</a:t>
-            </a:r>
-          </a:p>
-        </p:txBody>
-      </p:sp>
-      <p:sp>
-        <p:nvSpPr>
-          <p:cNvPr id="3" name="Content Placeholder 2"/>
-          <p:cNvSpPr>
-            <a:spLocks noGrp="1"/>
-          </p:cNvSpPr>
-          <p:nvPr>
-            <p:ph idx="1"/>
-          </p:nvPr>
-        </p:nvSpPr>
-        <p:spPr/>
-        <p:txBody>
-          <a:bodyPr/>
-          <a:lstStyle/>
-          <a:p>
-            <a:r>
-              <a:t>4 key updates this week</a:t>
-            </a:r>
-          </a:p>
-          <a:p>
-            <a:pPr/>
-          </a:p>
-          <a:p>
-            <a:pPr/>
-            <a:r>
-              <a:t>→ Swipe to explore</a:t>
-            </a:r>
-          </a:p>
-        </p:txBody>
-      </p:sp>
-      <p:sp>
-        <p:nvSpPr>
-          <p:cNvPr id="4" name="TextBox 3"/>
-          <p:cNvSpPr txBox="1"/>
-          <p:nvPr/>
-        </p:nvSpPr>
-        <p:spPr>
-          <a:xfrm>
-            <a:off x="457200" y="6400800"/>
-            <a:ext cx="7315200" cy="274320"/>
-          </a:xfrm>
-          <a:prstGeom prst="rect">
-            <a:avLst/>
-          </a:prstGeom>
-          <a:noFill/>
-        </p:spPr>
-        <p:txBody>
-          <a:bodyPr wrap="none">
-            <a:spAutoFit/>
-          </a:bodyPr>
-          <a:lstStyle/>
-          <a:p>
-            <a:pPr algn="ctr">
-              <a:defRPr sz="1000"/>
-            </a:pPr>
-            <a:r>
-              <a:t>Slide 20</a:t>
-            </a:r>
-          </a:p>
-        </p:txBody>
-      </p:sp>
-    </p:spTree>
-  </p:cSld>
-  <p:clrMapOvr>
-    <a:masterClrMapping/>
-  </p:clrMapOvr>
-</p:sld>
-</file>
-
-<file path=ppt/slides/slide21.xml><?xml version="1.0" encoding="utf-8"?>
-<p:sld xmlns:a="http://schemas.openxmlformats.org/drawingml/2006/main" xmlns:p="http://schemas.openxmlformats.org/presentationml/2006/main" xmlns:r="http://schemas.openxmlformats.org/officeDocument/2006/relationships">
-  <p:cSld>
-    <p:bg>
-      <p:bgPr>
-        <a:solidFill>
-          <a:srgbClr val="F5F7FA"/>
-        </a:solidFill>
-        <a:effectLst/>
-      </p:bgPr>
-    </p:bg>
-    <p:spTree>
-      <p:nvGrpSpPr>
-        <p:cNvPr id="1" name=""/>
-        <p:cNvGrpSpPr/>
-        <p:nvPr/>
-      </p:nvGrpSpPr>
-      <p:grpSpPr/>
-      <p:sp>
-        <p:nvSpPr>
-          <p:cNvPr id="2" name="Title 1"/>
-          <p:cNvSpPr>
-            <a:spLocks noGrp="1"/>
-          </p:cNvSpPr>
-          <p:nvPr>
-            <p:ph type="title"/>
-          </p:nvPr>
-        </p:nvSpPr>
-        <p:spPr/>
-        <p:txBody>
-          <a:bodyPr/>
-          <a:lstStyle/>
-          <a:p>
-            <a:r>
-              <a:t>1. Ilya Sutskever is puzzled by the gap between AI benchmarks and the econo...</a:t>
-            </a:r>
-          </a:p>
-        </p:txBody>
-      </p:sp>
-      <p:sp>
-        <p:nvSpPr>
-          <p:cNvPr id="3" name="Content Placeholder 2"/>
-          <p:cNvSpPr>
-            <a:spLocks noGrp="1"/>
-          </p:cNvSpPr>
-          <p:nvPr>
-            <p:ph idx="1"/>
-          </p:nvPr>
-        </p:nvSpPr>
-        <p:spPr/>
-        <p:txBody>
-          <a:bodyPr/>
-          <a:lstStyle/>
-          <a:p>
-            <a:r>
-              <a:t>Key AI researcher questions why impressive agent benchmarks haven't translated to</a:t>
-            </a:r>
-          </a:p>
-          <a:p>
-            <a:pPr/>
-            <a:r>
-              <a:t>proportional real-world impact, highlighting deployment and integration challenges.</a:t>
-            </a:r>
-          </a:p>
-          <a:p>
-            <a:pPr/>
-          </a:p>
-          <a:p>
-            <a:pPr/>
-            <a:r>
-              <a:t>📍 r/MachineLearning • 384 upvotes • 191 comments</a:t>
-            </a:r>
-          </a:p>
-          <a:p>
-            <a:pPr/>
-            <a:r>
-              <a:t>🔗 https://reddit.com/r/MachineLearning/comments/1pm2zsb/ilya_sutskever_is_...</a:t>
-            </a:r>
-          </a:p>
-        </p:txBody>
-      </p:sp>
-      <p:sp>
-        <p:nvSpPr>
-          <p:cNvPr id="4" name="TextBox 3"/>
-          <p:cNvSpPr txBox="1"/>
-          <p:nvPr/>
-        </p:nvSpPr>
-        <p:spPr>
-          <a:xfrm>
-            <a:off x="457200" y="6400800"/>
-            <a:ext cx="7315200" cy="274320"/>
-          </a:xfrm>
-          <a:prstGeom prst="rect">
-            <a:avLst/>
-          </a:prstGeom>
-          <a:noFill/>
-        </p:spPr>
-        <p:txBody>
-          <a:bodyPr wrap="none">
-            <a:spAutoFit/>
-          </a:bodyPr>
-          <a:lstStyle/>
-          <a:p>
-            <a:pPr algn="ctr">
-              <a:defRPr sz="1000"/>
-            </a:pPr>
-            <a:r>
-              <a:t>Slide 21</a:t>
-            </a:r>
-          </a:p>
-        </p:txBody>
-      </p:sp>
-    </p:spTree>
-  </p:cSld>
-  <p:clrMapOvr>
-    <a:masterClrMapping/>
-  </p:clrMapOvr>
-</p:sld>
-</file>
-
-<file path=ppt/slides/slide22.xml><?xml version="1.0" encoding="utf-8"?>
-<p:sld xmlns:a="http://schemas.openxmlformats.org/drawingml/2006/main" xmlns:p="http://schemas.openxmlformats.org/presentationml/2006/main" xmlns:r="http://schemas.openxmlformats.org/officeDocument/2006/relationships">
-  <p:cSld>
-    <p:bg>
-      <p:bgPr>
-        <a:solidFill>
-          <a:srgbClr val="F5F7FA"/>
-        </a:solidFill>
-        <a:effectLst/>
-      </p:bgPr>
-    </p:bg>
-    <p:spTree>
-      <p:nvGrpSpPr>
-        <p:cNvPr id="1" name=""/>
-        <p:cNvGrpSpPr/>
-        <p:nvPr/>
-      </p:nvGrpSpPr>
-      <p:grpSpPr/>
-      <p:sp>
-        <p:nvSpPr>
-          <p:cNvPr id="2" name="Title 1"/>
-          <p:cNvSpPr>
-            <a:spLocks noGrp="1"/>
-          </p:cNvSpPr>
-          <p:nvPr>
-            <p:ph type="title"/>
-          </p:nvPr>
-        </p:nvSpPr>
-        <p:spPr/>
-        <p:txBody>
-          <a:bodyPr/>
-          <a:lstStyle/>
-          <a:p>
-            <a:r>
-              <a:t>2. AI agents are starting to eat SaaS - Discussion</a:t>
-            </a:r>
-          </a:p>
-        </p:txBody>
-      </p:sp>
-      <p:sp>
-        <p:nvSpPr>
-          <p:cNvPr id="3" name="Content Placeholder 2"/>
-          <p:cNvSpPr>
-            <a:spLocks noGrp="1"/>
-          </p:cNvSpPr>
-          <p:nvPr>
-            <p:ph idx="1"/>
-          </p:nvPr>
-        </p:nvSpPr>
-        <p:spPr/>
-        <p:txBody>
-          <a:bodyPr/>
-          <a:lstStyle/>
-          <a:p>
-            <a:r>
-              <a:t>Community debate on whether autonomous agents will replace traditional SaaS tools,</a:t>
-            </a:r>
-          </a:p>
-          <a:p>
-            <a:pPr/>
-            <a:r>
-              <a:t>exploring implications for software architecture and business models.</a:t>
-            </a:r>
-          </a:p>
-          <a:p>
-            <a:pPr/>
-          </a:p>
-          <a:p>
-            <a:pPr/>
-            <a:r>
-              <a:t>📍 Hacker News • 119 points • 138 comments</a:t>
-            </a:r>
-          </a:p>
-          <a:p>
-            <a:pPr/>
-            <a:r>
-              <a:t>🔗 https://martinalderson.com/posts/ai-agents-are-starting-to-eat-saas/</a:t>
-            </a:r>
-          </a:p>
-        </p:txBody>
-      </p:sp>
-      <p:sp>
-        <p:nvSpPr>
-          <p:cNvPr id="4" name="TextBox 3"/>
-          <p:cNvSpPr txBox="1"/>
-          <p:nvPr/>
-        </p:nvSpPr>
-        <p:spPr>
-          <a:xfrm>
-            <a:off x="457200" y="6400800"/>
-            <a:ext cx="7315200" cy="274320"/>
-          </a:xfrm>
-          <a:prstGeom prst="rect">
-            <a:avLst/>
-          </a:prstGeom>
-          <a:noFill/>
-        </p:spPr>
-        <p:txBody>
-          <a:bodyPr wrap="none">
-            <a:spAutoFit/>
-          </a:bodyPr>
-          <a:lstStyle/>
-          <a:p>
-            <a:pPr algn="ctr">
-              <a:defRPr sz="1000"/>
-            </a:pPr>
-            <a:r>
-              <a:t>Slide 22</a:t>
-            </a:r>
-          </a:p>
-        </p:txBody>
-      </p:sp>
-    </p:spTree>
-  </p:cSld>
-  <p:clrMapOvr>
-    <a:masterClrMapping/>
-  </p:clrMapOvr>
-</p:sld>
-</file>
-
-<file path=ppt/slides/slide23.xml><?xml version="1.0" encoding="utf-8"?>
-<p:sld xmlns:a="http://schemas.openxmlformats.org/drawingml/2006/main" xmlns:p="http://schemas.openxmlformats.org/presentationml/2006/main" xmlns:r="http://schemas.openxmlformats.org/officeDocument/2006/relationships">
-  <p:cSld>
-    <p:bg>
-      <p:bgPr>
-        <a:solidFill>
-          <a:srgbClr val="F5F7FA"/>
-        </a:solidFill>
-        <a:effectLst/>
-      </p:bgPr>
-    </p:bg>
-    <p:spTree>
-      <p:nvGrpSpPr>
-        <p:cNvPr id="1" name=""/>
-        <p:cNvGrpSpPr/>
-        <p:nvPr/>
-      </p:nvGrpSpPr>
-      <p:grpSpPr/>
-      <p:sp>
-        <p:nvSpPr>
-          <p:cNvPr id="2" name="Title 1"/>
-          <p:cNvSpPr>
-            <a:spLocks noGrp="1"/>
-          </p:cNvSpPr>
-          <p:nvPr>
-            <p:ph type="title"/>
-          </p:nvPr>
-        </p:nvSpPr>
-        <p:spPr/>
-        <p:txBody>
-          <a:bodyPr/>
-          <a:lstStyle/>
-          <a:p>
-            <a:r>
-              <a:t>3. Claude CLI Safety Incident Discussion</a:t>
-            </a:r>
-          </a:p>
-        </p:txBody>
-      </p:sp>
-      <p:sp>
-        <p:nvSpPr>
-          <p:cNvPr id="3" name="Content Placeholder 2"/>
-          <p:cNvSpPr>
-            <a:spLocks noGrp="1"/>
-          </p:cNvSpPr>
-          <p:nvPr>
-            <p:ph idx="1"/>
-          </p:nvPr>
-        </p:nvSpPr>
-        <p:spPr/>
-        <p:txBody>
-          <a:bodyPr/>
-          <a:lstStyle/>
-          <a:p>
-            <a:r>
-              <a:t>Critical community discussion on safety mechanisms for tool-using agents, revealing urgent</a:t>
-            </a:r>
-          </a:p>
-          <a:p>
-            <a:pPr/>
-            <a:r>
-              <a:t>need for better sandboxing and permission systems in agent frameworks.</a:t>
-            </a:r>
-          </a:p>
-          <a:p>
-            <a:pPr/>
-          </a:p>
-          <a:p>
-            <a:pPr/>
-            <a:r>
-              <a:t>📍 Hacker News • 220 points • 179 comments</a:t>
-            </a:r>
-          </a:p>
-          <a:p>
-            <a:pPr/>
-            <a:r>
-              <a:t>🔗 https://old.reddit.com/r/ClaudeAI/comments/1pgxckk/claude_cli_deleted_my...</a:t>
-            </a:r>
-          </a:p>
-        </p:txBody>
-      </p:sp>
-      <p:sp>
-        <p:nvSpPr>
-          <p:cNvPr id="4" name="TextBox 3"/>
-          <p:cNvSpPr txBox="1"/>
-          <p:nvPr/>
-        </p:nvSpPr>
-        <p:spPr>
-          <a:xfrm>
-            <a:off x="457200" y="6400800"/>
-            <a:ext cx="7315200" cy="274320"/>
-          </a:xfrm>
-          <a:prstGeom prst="rect">
-            <a:avLst/>
-          </a:prstGeom>
-          <a:noFill/>
-        </p:spPr>
-        <p:txBody>
-          <a:bodyPr wrap="none">
-            <a:spAutoFit/>
-          </a:bodyPr>
-          <a:lstStyle/>
-          <a:p>
-            <a:pPr algn="ctr">
-              <a:defRPr sz="1000"/>
-            </a:pPr>
-            <a:r>
-              <a:t>Slide 23</a:t>
-            </a:r>
-          </a:p>
-        </p:txBody>
-      </p:sp>
-    </p:spTree>
-  </p:cSld>
-  <p:clrMapOvr>
-    <a:masterClrMapping/>
-  </p:clrMapOvr>
-</p:sld>
-</file>
-
-<file path=ppt/slides/slide24.xml><?xml version="1.0" encoding="utf-8"?>
-<p:sld xmlns:a="http://schemas.openxmlformats.org/drawingml/2006/main" xmlns:p="http://schemas.openxmlformats.org/presentationml/2006/main" xmlns:r="http://schemas.openxmlformats.org/officeDocument/2006/relationships">
-  <p:cSld>
-    <p:bg>
-      <p:bgPr>
-        <a:solidFill>
-          <a:srgbClr val="F5F7FA"/>
-        </a:solidFill>
-        <a:effectLst/>
-      </p:bgPr>
-    </p:bg>
-    <p:spTree>
-      <p:nvGrpSpPr>
-        <p:cNvPr id="1" name=""/>
-        <p:cNvGrpSpPr/>
-        <p:nvPr/>
-      </p:nvGrpSpPr>
-      <p:grpSpPr/>
-      <p:sp>
-        <p:nvSpPr>
-          <p:cNvPr id="2" name="Title 1"/>
-          <p:cNvSpPr>
-            <a:spLocks noGrp="1"/>
-          </p:cNvSpPr>
-          <p:nvPr>
-            <p:ph type="title"/>
-          </p:nvPr>
-        </p:nvSpPr>
-        <p:spPr/>
-        <p:txBody>
-          <a:bodyPr/>
-          <a:lstStyle/>
-          <a:p>
-            <a:r>
-              <a:t>4. Stanford AI Agent Penetration Testing Success</a:t>
-            </a:r>
-          </a:p>
-        </p:txBody>
-      </p:sp>
-      <p:sp>
-        <p:nvSpPr>
-          <p:cNvPr id="3" name="Content Placeholder 2"/>
-          <p:cNvSpPr>
-            <a:spLocks noGrp="1"/>
-          </p:cNvSpPr>
-          <p:nvPr>
-            <p:ph idx="1"/>
-          </p:nvPr>
-        </p:nvSpPr>
-        <p:spPr/>
-        <p:txBody>
-          <a:bodyPr/>
-          <a:lstStyle/>
-          <a:p>
-            <a:r>
-              <a:t>Discussion explores implications of autonomous agents matching expert performance in</a:t>
-            </a:r>
-          </a:p>
-          <a:p>
-            <a:pPr/>
-            <a:r>
-              <a:t>complex planning tasks, raising questions about agent reliability and economic disruption.</a:t>
-            </a:r>
-          </a:p>
-          <a:p>
-            <a:pPr/>
-          </a:p>
-          <a:p>
-            <a:pPr/>
-            <a:r>
-              <a:t>📍 r/artificial • 206 upvotes • 32 comments</a:t>
-            </a:r>
-          </a:p>
-          <a:p>
-            <a:pPr/>
-            <a:r>
-              <a:t>🔗 https://reddit.com/r/artificial/comments/1pkuaaq/an_ai_agent_spent_16_ho...</a:t>
-            </a:r>
-          </a:p>
-        </p:txBody>
-      </p:sp>
-      <p:sp>
-        <p:nvSpPr>
-          <p:cNvPr id="4" name="TextBox 3"/>
-          <p:cNvSpPr txBox="1"/>
-          <p:nvPr/>
-        </p:nvSpPr>
-        <p:spPr>
-          <a:xfrm>
-            <a:off x="457200" y="6400800"/>
-            <a:ext cx="7315200" cy="274320"/>
-          </a:xfrm>
-          <a:prstGeom prst="rect">
-            <a:avLst/>
-          </a:prstGeom>
-          <a:noFill/>
-        </p:spPr>
-        <p:txBody>
-          <a:bodyPr wrap="none">
-            <a:spAutoFit/>
-          </a:bodyPr>
-          <a:lstStyle/>
-          <a:p>
-            <a:pPr algn="ctr">
-              <a:defRPr sz="1000"/>
-            </a:pPr>
-            <a:r>
-              <a:t>Slide 24</a:t>
-            </a:r>
-          </a:p>
-        </p:txBody>
-      </p:sp>
-    </p:spTree>
-  </p:cSld>
-  <p:clrMapOvr>
-    <a:masterClrMapping/>
-  </p:clrMapOvr>
-</p:sld>
-</file>
-
-<file path=ppt/slides/slide25.xml><?xml version="1.0" encoding="utf-8"?>
 <p:sld xmlns:a="http://schemas.openxmlformats.org/drawingml/2006/main" xmlns:p="http://schemas.openxmlformats.org/presentationml/2006/main" xmlns:r="http://schemas.openxmlformats.org/officeDocument/2006/relationships">
   <p:cSld>
     <p:bg>
@@ -5156,19 +5647,29 @@
       <p:grpSpPr/>
       <p:sp>
         <p:nvSpPr>
-          <p:cNvPr id="2" name="Title 1"/>
-          <p:cNvSpPr>
-            <a:spLocks noGrp="1"/>
-          </p:cNvSpPr>
-          <p:nvPr>
-            <p:ph type="title"/>
-          </p:nvPr>
-        </p:nvSpPr>
-        <p:spPr/>
-        <p:txBody>
-          <a:bodyPr/>
-          <a:lstStyle/>
-          <a:p>
+          <p:cNvPr id="2" name="TextBox 1"/>
+          <p:cNvSpPr txBox="1"/>
+          <p:nvPr/>
+        </p:nvSpPr>
+        <p:spPr>
+          <a:xfrm>
+            <a:off x="457200" y="457200"/>
+            <a:ext cx="8229600" cy="685800"/>
+          </a:xfrm>
+          <a:prstGeom prst="rect">
+            <a:avLst/>
+          </a:prstGeom>
+          <a:noFill/>
+        </p:spPr>
+        <p:txBody>
+          <a:bodyPr wrap="none">
+            <a:spAutoFit/>
+          </a:bodyPr>
+          <a:lstStyle/>
+          <a:p>
+            <a:pPr>
+              <a:defRPr sz="3200" b="1"/>
+            </a:pPr>
             <a:r>
               <a:t>✨ Stay Curious</a:t>
             </a:r>
@@ -5177,61 +5678,229 @@
       </p:sp>
       <p:sp>
         <p:nvSpPr>
-          <p:cNvPr id="3" name="Content Placeholder 2"/>
-          <p:cNvSpPr>
-            <a:spLocks noGrp="1"/>
-          </p:cNvSpPr>
-          <p:nvPr>
-            <p:ph idx="1"/>
-          </p:nvPr>
-        </p:nvSpPr>
-        <p:spPr/>
-        <p:txBody>
-          <a:bodyPr/>
-          <a:lstStyle/>
-          <a:p>
+          <p:cNvPr id="3" name="TextBox 2"/>
+          <p:cNvSpPr txBox="1"/>
+          <p:nvPr/>
+        </p:nvSpPr>
+        <p:spPr>
+          <a:xfrm>
+            <a:off x="457200" y="1371600"/>
+            <a:ext cx="8229600" cy="685800"/>
+          </a:xfrm>
+          <a:prstGeom prst="rect">
+            <a:avLst/>
+          </a:prstGeom>
+          <a:noFill/>
+        </p:spPr>
+        <p:txBody>
+          <a:bodyPr wrap="none">
+            <a:spAutoFit/>
+          </a:bodyPr>
+          <a:lstStyle/>
+          <a:p>
+            <a:pPr>
+              <a:defRPr sz="1600" b="1">
+                <a:solidFill>
+                  <a:srgbClr val="FFFFFF"/>
+                </a:solidFill>
+              </a:defRPr>
+            </a:pPr>
             <a:r>
               <a:t>Your weekly AI digest</a:t>
             </a:r>
           </a:p>
-          <a:p>
-            <a:pPr/>
+        </p:txBody>
+      </p:sp>
+      <p:sp>
+        <p:nvSpPr>
+          <p:cNvPr id="4" name="TextBox 3"/>
+          <p:cNvSpPr txBox="1"/>
+          <p:nvPr/>
+        </p:nvSpPr>
+        <p:spPr>
+          <a:xfrm>
+            <a:off x="457200" y="2057400"/>
+            <a:ext cx="8229600" cy="685800"/>
+          </a:xfrm>
+          <a:prstGeom prst="rect">
+            <a:avLst/>
+          </a:prstGeom>
+          <a:noFill/>
+        </p:spPr>
+        <p:txBody>
+          <a:bodyPr wrap="none">
+            <a:spAutoFit/>
+          </a:bodyPr>
+          <a:lstStyle/>
+          <a:p>
+            <a:pPr>
+              <a:defRPr sz="1200" i="1">
+                <a:solidFill>
+                  <a:srgbClr val="EEEEEE"/>
+                </a:solidFill>
+              </a:defRPr>
+            </a:pPr>
             <a:r>
               <a:t>Automatically curated every Sunday at 6 PM</a:t>
             </a:r>
           </a:p>
-          <a:p>
-            <a:pPr/>
-          </a:p>
-          <a:p>
-            <a:pPr/>
+        </p:txBody>
+      </p:sp>
+      <p:sp>
+        <p:nvSpPr>
+          <p:cNvPr id="5" name="TextBox 4"/>
+          <p:cNvSpPr txBox="1"/>
+          <p:nvPr/>
+        </p:nvSpPr>
+        <p:spPr>
+          <a:xfrm>
+            <a:off x="457200" y="2743200"/>
+            <a:ext cx="8229600" cy="685800"/>
+          </a:xfrm>
+          <a:prstGeom prst="rect">
+            <a:avLst/>
+          </a:prstGeom>
+          <a:noFill/>
+        </p:spPr>
+        <p:txBody>
+          <a:bodyPr wrap="none">
+            <a:spAutoFit/>
+          </a:bodyPr>
+          <a:lstStyle/>
+          <a:p>
+            <a:pPr>
+              <a:defRPr sz="1000"/>
+            </a:pPr>
+          </a:p>
+        </p:txBody>
+      </p:sp>
+      <p:sp>
+        <p:nvSpPr>
+          <p:cNvPr id="6" name="TextBox 5"/>
+          <p:cNvSpPr txBox="1"/>
+          <p:nvPr/>
+        </p:nvSpPr>
+        <p:spPr>
+          <a:xfrm>
+            <a:off x="457200" y="3429000"/>
+            <a:ext cx="8229600" cy="685800"/>
+          </a:xfrm>
+          <a:prstGeom prst="rect">
+            <a:avLst/>
+          </a:prstGeom>
+          <a:noFill/>
+        </p:spPr>
+        <p:txBody>
+          <a:bodyPr wrap="none">
+            <a:spAutoFit/>
+          </a:bodyPr>
+          <a:lstStyle/>
+          <a:p>
+            <a:pPr>
+              <a:defRPr sz="1200" b="1">
+                <a:solidFill>
+                  <a:srgbClr val="FFFFFF"/>
+                </a:solidFill>
+              </a:defRPr>
+            </a:pPr>
             <a:r>
               <a:t>🔬 Data Sources:</a:t>
             </a:r>
           </a:p>
-          <a:p>
-            <a:pPr/>
-            <a:r>
-              <a:t>  • arXiv Research Papers</a:t>
-            </a:r>
-          </a:p>
-          <a:p>
-            <a:pPr/>
-            <a:r>
-              <a:t>  • Hacker News</a:t>
-            </a:r>
-          </a:p>
-          <a:p>
-            <a:pPr/>
-            <a:r>
-              <a:t>  • Reddit ML Communities</a:t>
-            </a:r>
-          </a:p>
-          <a:p>
-            <a:pPr/>
-          </a:p>
-          <a:p>
-            <a:pPr/>
+        </p:txBody>
+      </p:sp>
+      <p:sp>
+        <p:nvSpPr>
+          <p:cNvPr id="7" name="TextBox 6"/>
+          <p:cNvSpPr txBox="1"/>
+          <p:nvPr/>
+        </p:nvSpPr>
+        <p:spPr>
+          <a:xfrm>
+            <a:off x="457200" y="4114800"/>
+            <a:ext cx="8229600" cy="685800"/>
+          </a:xfrm>
+          <a:prstGeom prst="rect">
+            <a:avLst/>
+          </a:prstGeom>
+          <a:noFill/>
+        </p:spPr>
+        <p:txBody>
+          <a:bodyPr wrap="none">
+            <a:spAutoFit/>
+          </a:bodyPr>
+          <a:lstStyle/>
+          <a:p>
+            <a:pPr>
+              <a:defRPr sz="1100">
+                <a:solidFill>
+                  <a:srgbClr val="EEEEEE"/>
+                </a:solidFill>
+              </a:defRPr>
+            </a:pPr>
+            <a:r>
+              <a:t>arXiv Research Papers • Hacker News • Reddit ML Communities</a:t>
+            </a:r>
+          </a:p>
+        </p:txBody>
+      </p:sp>
+      <p:sp>
+        <p:nvSpPr>
+          <p:cNvPr id="8" name="TextBox 7"/>
+          <p:cNvSpPr txBox="1"/>
+          <p:nvPr/>
+        </p:nvSpPr>
+        <p:spPr>
+          <a:xfrm>
+            <a:off x="457200" y="4800600"/>
+            <a:ext cx="8229600" cy="685800"/>
+          </a:xfrm>
+          <a:prstGeom prst="rect">
+            <a:avLst/>
+          </a:prstGeom>
+          <a:noFill/>
+        </p:spPr>
+        <p:txBody>
+          <a:bodyPr wrap="none">
+            <a:spAutoFit/>
+          </a:bodyPr>
+          <a:lstStyle/>
+          <a:p>
+            <a:pPr>
+              <a:defRPr sz="1000"/>
+            </a:pPr>
+          </a:p>
+        </p:txBody>
+      </p:sp>
+      <p:sp>
+        <p:nvSpPr>
+          <p:cNvPr id="9" name="TextBox 8"/>
+          <p:cNvSpPr txBox="1"/>
+          <p:nvPr/>
+        </p:nvSpPr>
+        <p:spPr>
+          <a:xfrm>
+            <a:off x="457200" y="5486400"/>
+            <a:ext cx="8229600" cy="685800"/>
+          </a:xfrm>
+          <a:prstGeom prst="rect">
+            <a:avLst/>
+          </a:prstGeom>
+          <a:noFill/>
+        </p:spPr>
+        <p:txBody>
+          <a:bodyPr wrap="none">
+            <a:spAutoFit/>
+          </a:bodyPr>
+          <a:lstStyle/>
+          <a:p>
+            <a:pPr>
+              <a:defRPr sz="1100" i="1">
+                <a:solidFill>
+                  <a:srgbClr val="CCCCCC"/>
+                </a:solidFill>
+              </a:defRPr>
+            </a:pPr>
             <a:r>
               <a:t>📅 Next edition: December 21, 2025</a:t>
             </a:r>
@@ -5240,7 +5909,7 @@
       </p:sp>
       <p:sp>
         <p:nvSpPr>
-          <p:cNvPr id="4" name="TextBox 3"/>
+          <p:cNvPr id="10" name="TextBox 9"/>
           <p:cNvSpPr txBox="1"/>
           <p:nvPr/>
         </p:nvSpPr>
@@ -5264,7 +5933,7 @@
               <a:defRPr sz="1000"/>
             </a:pPr>
             <a:r>
-              <a:t>Slide 25</a:t>
+              <a:t>Slide 20</a:t>
             </a:r>
           </a:p>
         </p:txBody>
@@ -5297,19 +5966,29 @@
       <p:grpSpPr/>
       <p:sp>
         <p:nvSpPr>
-          <p:cNvPr id="2" name="Title 1"/>
-          <p:cNvSpPr>
-            <a:spLocks noGrp="1"/>
-          </p:cNvSpPr>
-          <p:nvPr>
-            <p:ph type="title"/>
-          </p:nvPr>
-        </p:nvSpPr>
-        <p:spPr/>
-        <p:txBody>
-          <a:bodyPr/>
-          <a:lstStyle/>
-          <a:p>
+          <p:cNvPr id="2" name="TextBox 1"/>
+          <p:cNvSpPr txBox="1"/>
+          <p:nvPr/>
+        </p:nvSpPr>
+        <p:spPr>
+          <a:xfrm>
+            <a:off x="457200" y="457200"/>
+            <a:ext cx="8229600" cy="685800"/>
+          </a:xfrm>
+          <a:prstGeom prst="rect">
+            <a:avLst/>
+          </a:prstGeom>
+          <a:noFill/>
+        </p:spPr>
+        <p:txBody>
+          <a:bodyPr wrap="none">
+            <a:spAutoFit/>
+          </a:bodyPr>
+          <a:lstStyle/>
+          <a:p>
+            <a:pPr>
+              <a:defRPr sz="3200" b="1"/>
+            </a:pPr>
             <a:r>
               <a:t>🔬 Key Research Papers</a:t>
             </a:r>
@@ -5318,28 +5997,96 @@
       </p:sp>
       <p:sp>
         <p:nvSpPr>
-          <p:cNvPr id="3" name="Content Placeholder 2"/>
-          <p:cNvSpPr>
-            <a:spLocks noGrp="1"/>
-          </p:cNvSpPr>
-          <p:nvPr>
-            <p:ph idx="1"/>
-          </p:nvPr>
-        </p:nvSpPr>
-        <p:spPr/>
-        <p:txBody>
-          <a:bodyPr/>
-          <a:lstStyle/>
-          <a:p>
+          <p:cNvPr id="3" name="TextBox 2"/>
+          <p:cNvSpPr txBox="1"/>
+          <p:nvPr/>
+        </p:nvSpPr>
+        <p:spPr>
+          <a:xfrm>
+            <a:off x="457200" y="1371600"/>
+            <a:ext cx="8229600" cy="685800"/>
+          </a:xfrm>
+          <a:prstGeom prst="rect">
+            <a:avLst/>
+          </a:prstGeom>
+          <a:noFill/>
+        </p:spPr>
+        <p:txBody>
+          <a:bodyPr wrap="none">
+            <a:spAutoFit/>
+          </a:bodyPr>
+          <a:lstStyle/>
+          <a:p>
+            <a:pPr>
+              <a:defRPr sz="1800" b="1">
+                <a:solidFill>
+                  <a:srgbClr val="FFFFFF"/>
+                </a:solidFill>
+              </a:defRPr>
+            </a:pPr>
             <a:r>
               <a:t>5 key updates this week</a:t>
             </a:r>
           </a:p>
-          <a:p>
-            <a:pPr/>
-          </a:p>
-          <a:p>
-            <a:pPr/>
+        </p:txBody>
+      </p:sp>
+      <p:sp>
+        <p:nvSpPr>
+          <p:cNvPr id="4" name="TextBox 3"/>
+          <p:cNvSpPr txBox="1"/>
+          <p:nvPr/>
+        </p:nvSpPr>
+        <p:spPr>
+          <a:xfrm>
+            <a:off x="457200" y="2057400"/>
+            <a:ext cx="8229600" cy="685800"/>
+          </a:xfrm>
+          <a:prstGeom prst="rect">
+            <a:avLst/>
+          </a:prstGeom>
+          <a:noFill/>
+        </p:spPr>
+        <p:txBody>
+          <a:bodyPr wrap="none">
+            <a:spAutoFit/>
+          </a:bodyPr>
+          <a:lstStyle/>
+          <a:p>
+            <a:pPr>
+              <a:defRPr sz="1200"/>
+            </a:pPr>
+          </a:p>
+        </p:txBody>
+      </p:sp>
+      <p:sp>
+        <p:nvSpPr>
+          <p:cNvPr id="5" name="TextBox 4"/>
+          <p:cNvSpPr txBox="1"/>
+          <p:nvPr/>
+        </p:nvSpPr>
+        <p:spPr>
+          <a:xfrm>
+            <a:off x="457200" y="2743200"/>
+            <a:ext cx="8229600" cy="685800"/>
+          </a:xfrm>
+          <a:prstGeom prst="rect">
+            <a:avLst/>
+          </a:prstGeom>
+          <a:noFill/>
+        </p:spPr>
+        <p:txBody>
+          <a:bodyPr wrap="none">
+            <a:spAutoFit/>
+          </a:bodyPr>
+          <a:lstStyle/>
+          <a:p>
+            <a:pPr>
+              <a:defRPr sz="1400" i="1">
+                <a:solidFill>
+                  <a:srgbClr val="FFFFFF"/>
+                </a:solidFill>
+              </a:defRPr>
+            </a:pPr>
             <a:r>
               <a:t>→ Swipe to explore</a:t>
             </a:r>
@@ -5348,7 +6095,7 @@
       </p:sp>
       <p:sp>
         <p:nvSpPr>
-          <p:cNvPr id="4" name="TextBox 3"/>
+          <p:cNvPr id="6" name="TextBox 5"/>
           <p:cNvSpPr txBox="1"/>
           <p:nvPr/>
         </p:nvSpPr>
@@ -5405,19 +6152,29 @@
       <p:grpSpPr/>
       <p:sp>
         <p:nvSpPr>
-          <p:cNvPr id="2" name="Title 1"/>
-          <p:cNvSpPr>
-            <a:spLocks noGrp="1"/>
-          </p:cNvSpPr>
-          <p:nvPr>
-            <p:ph type="title"/>
-          </p:nvPr>
-        </p:nvSpPr>
-        <p:spPr/>
-        <p:txBody>
-          <a:bodyPr/>
-          <a:lstStyle/>
-          <a:p>
+          <p:cNvPr id="2" name="TextBox 1"/>
+          <p:cNvSpPr txBox="1"/>
+          <p:nvPr/>
+        </p:nvSpPr>
+        <p:spPr>
+          <a:xfrm>
+            <a:off x="457200" y="457200"/>
+            <a:ext cx="8229600" cy="685800"/>
+          </a:xfrm>
+          <a:prstGeom prst="rect">
+            <a:avLst/>
+          </a:prstGeom>
+          <a:noFill/>
+        </p:spPr>
+        <p:txBody>
+          <a:bodyPr wrap="none">
+            <a:spAutoFit/>
+          </a:bodyPr>
+          <a:lstStyle/>
+          <a:p>
+            <a:pPr>
+              <a:defRPr sz="3200" b="1"/>
+            </a:pPr>
             <a:r>
               <a:t>1. Agile Flight Emerges from Multi-Agent Competitive Racing</a:t>
             </a:r>
@@ -5426,46 +6183,131 @@
       </p:sp>
       <p:sp>
         <p:nvSpPr>
-          <p:cNvPr id="3" name="Content Placeholder 2"/>
-          <p:cNvSpPr>
-            <a:spLocks noGrp="1"/>
-          </p:cNvSpPr>
-          <p:nvPr>
-            <p:ph idx="1"/>
-          </p:nvPr>
-        </p:nvSpPr>
-        <p:spPr/>
-        <p:txBody>
-          <a:bodyPr/>
-          <a:lstStyle/>
-          <a:p>
-            <a:r>
-              <a:t>Demonstrates that agile flight capabilities and strategic behavior emerge naturally from</a:t>
-            </a:r>
-          </a:p>
-          <a:p>
-            <a:pPr/>
-            <a:r>
-              <a:t>multi-agent competition with minimal reward engineering, showing how agent interaction</a:t>
-            </a:r>
-          </a:p>
-          <a:p>
-            <a:pPr/>
-            <a:r>
-              <a:t>drives sophisticated behavior.</a:t>
-            </a:r>
-          </a:p>
-          <a:p>
-            <a:pPr/>
-          </a:p>
-          <a:p>
-            <a:pPr/>
+          <p:cNvPr id="3" name="TextBox 2"/>
+          <p:cNvSpPr txBox="1"/>
+          <p:nvPr/>
+        </p:nvSpPr>
+        <p:spPr>
+          <a:xfrm>
+            <a:off x="457200" y="1371600"/>
+            <a:ext cx="8229600" cy="685800"/>
+          </a:xfrm>
+          <a:prstGeom prst="rect">
+            <a:avLst/>
+          </a:prstGeom>
+          <a:noFill/>
+        </p:spPr>
+        <p:txBody>
+          <a:bodyPr wrap="none">
+            <a:spAutoFit/>
+          </a:bodyPr>
+          <a:lstStyle/>
+          <a:p>
+            <a:pPr>
+              <a:defRPr sz="1100">
+                <a:solidFill>
+                  <a:srgbClr val="333333"/>
+                </a:solidFill>
+              </a:defRPr>
+            </a:pPr>
+            <a:r>
+              <a:t>Demonstrates emergent agile flight behavior and strategic reasoning in drones through multi-agent competitive racing with sparse high-level objectives, showing how complex agent capabilities arise from competition.</a:t>
+            </a:r>
+          </a:p>
+        </p:txBody>
+      </p:sp>
+      <p:sp>
+        <p:nvSpPr>
+          <p:cNvPr id="4" name="TextBox 3"/>
+          <p:cNvSpPr txBox="1"/>
+          <p:nvPr/>
+        </p:nvSpPr>
+        <p:spPr>
+          <a:xfrm>
+            <a:off x="457200" y="2057400"/>
+            <a:ext cx="8229600" cy="685800"/>
+          </a:xfrm>
+          <a:prstGeom prst="rect">
+            <a:avLst/>
+          </a:prstGeom>
+          <a:noFill/>
+        </p:spPr>
+        <p:txBody>
+          <a:bodyPr wrap="none">
+            <a:spAutoFit/>
+          </a:bodyPr>
+          <a:lstStyle/>
+          <a:p>
+            <a:pPr>
+              <a:defRPr sz="800"/>
+            </a:pPr>
+          </a:p>
+        </p:txBody>
+      </p:sp>
+      <p:sp>
+        <p:nvSpPr>
+          <p:cNvPr id="5" name="TextBox 4"/>
+          <p:cNvSpPr txBox="1"/>
+          <p:nvPr/>
+        </p:nvSpPr>
+        <p:spPr>
+          <a:xfrm>
+            <a:off x="457200" y="2743200"/>
+            <a:ext cx="8229600" cy="685800"/>
+          </a:xfrm>
+          <a:prstGeom prst="rect">
+            <a:avLst/>
+          </a:prstGeom>
+          <a:noFill/>
+        </p:spPr>
+        <p:txBody>
+          <a:bodyPr wrap="none">
+            <a:spAutoFit/>
+          </a:bodyPr>
+          <a:lstStyle/>
+          <a:p>
+            <a:pPr>
+              <a:defRPr sz="900" i="1">
+                <a:solidFill>
+                  <a:srgbClr val="666666"/>
+                </a:solidFill>
+              </a:defRPr>
+            </a:pPr>
             <a:r>
               <a:t>📍 arXiv • Vineet Pasumarti, Lorenzo Bianchi, Antonio Loquercio</a:t>
             </a:r>
           </a:p>
-          <a:p>
-            <a:pPr/>
+        </p:txBody>
+      </p:sp>
+      <p:sp>
+        <p:nvSpPr>
+          <p:cNvPr id="6" name="TextBox 5"/>
+          <p:cNvSpPr txBox="1"/>
+          <p:nvPr/>
+        </p:nvSpPr>
+        <p:spPr>
+          <a:xfrm>
+            <a:off x="457200" y="3429000"/>
+            <a:ext cx="8229600" cy="685800"/>
+          </a:xfrm>
+          <a:prstGeom prst="rect">
+            <a:avLst/>
+          </a:prstGeom>
+          <a:noFill/>
+        </p:spPr>
+        <p:txBody>
+          <a:bodyPr wrap="none">
+            <a:spAutoFit/>
+          </a:bodyPr>
+          <a:lstStyle/>
+          <a:p>
+            <a:pPr>
+              <a:defRPr sz="800">
+                <a:solidFill>
+                  <a:srgbClr val="3498DB"/>
+                </a:solidFill>
+              </a:defRPr>
+            </a:pPr>
             <a:r>
               <a:t>🔗 https://arxiv.org/abs/2512.11781v1</a:t>
             </a:r>
@@ -5474,7 +6316,7 @@
       </p:sp>
       <p:sp>
         <p:nvSpPr>
-          <p:cNvPr id="4" name="TextBox 3"/>
+          <p:cNvPr id="7" name="TextBox 6"/>
           <p:cNvSpPr txBox="1"/>
           <p:nvPr/>
         </p:nvSpPr>
@@ -5531,61 +6373,162 @@
       <p:grpSpPr/>
       <p:sp>
         <p:nvSpPr>
-          <p:cNvPr id="2" name="Title 1"/>
-          <p:cNvSpPr>
-            <a:spLocks noGrp="1"/>
-          </p:cNvSpPr>
-          <p:nvPr>
-            <p:ph type="title"/>
-          </p:nvPr>
-        </p:nvSpPr>
-        <p:spPr/>
-        <p:txBody>
-          <a:bodyPr/>
-          <a:lstStyle/>
-          <a:p>
-            <a:r>
-              <a:t>2. MedAI: Evaluating TxAgent's Therapeutic Agentic Reasoning in the NeurIPS...</a:t>
-            </a:r>
-          </a:p>
-        </p:txBody>
-      </p:sp>
-      <p:sp>
-        <p:nvSpPr>
-          <p:cNvPr id="3" name="Content Placeholder 2"/>
-          <p:cNvSpPr>
-            <a:spLocks noGrp="1"/>
-          </p:cNvSpPr>
-          <p:nvPr>
-            <p:ph idx="1"/>
-          </p:nvPr>
-        </p:nvSpPr>
-        <p:spPr/>
-        <p:txBody>
-          <a:bodyPr/>
-          <a:lstStyle/>
-          <a:p>
-            <a:r>
-              <a:t>Introduces TxAgent for therapeutic decision-making in clinical medicine, advancing agentic</a:t>
-            </a:r>
-          </a:p>
-          <a:p>
-            <a:pPr/>
-            <a:r>
-              <a:t>reasoning in high-stakes medical domains with complex multi-factor reasoning requirements.</a:t>
-            </a:r>
-          </a:p>
-          <a:p>
-            <a:pPr/>
-          </a:p>
-          <a:p>
-            <a:pPr/>
+          <p:cNvPr id="2" name="TextBox 1"/>
+          <p:cNvSpPr txBox="1"/>
+          <p:nvPr/>
+        </p:nvSpPr>
+        <p:spPr>
+          <a:xfrm>
+            <a:off x="457200" y="457200"/>
+            <a:ext cx="8229600" cy="685800"/>
+          </a:xfrm>
+          <a:prstGeom prst="rect">
+            <a:avLst/>
+          </a:prstGeom>
+          <a:noFill/>
+        </p:spPr>
+        <p:txBody>
+          <a:bodyPr wrap="none">
+            <a:spAutoFit/>
+          </a:bodyPr>
+          <a:lstStyle/>
+          <a:p>
+            <a:pPr>
+              <a:defRPr sz="3200" b="1"/>
+            </a:pPr>
+            <a:r>
+              <a:t>2. MedAI: Evaluating TxAgent's Therapeutic Agentic Reasoning in the NeurIPS CURE-Bench Competition</a:t>
+            </a:r>
+          </a:p>
+        </p:txBody>
+      </p:sp>
+      <p:sp>
+        <p:nvSpPr>
+          <p:cNvPr id="3" name="TextBox 2"/>
+          <p:cNvSpPr txBox="1"/>
+          <p:nvPr/>
+        </p:nvSpPr>
+        <p:spPr>
+          <a:xfrm>
+            <a:off x="457200" y="1371600"/>
+            <a:ext cx="8229600" cy="685800"/>
+          </a:xfrm>
+          <a:prstGeom prst="rect">
+            <a:avLst/>
+          </a:prstGeom>
+          <a:noFill/>
+        </p:spPr>
+        <p:txBody>
+          <a:bodyPr wrap="none">
+            <a:spAutoFit/>
+          </a:bodyPr>
+          <a:lstStyle/>
+          <a:p>
+            <a:pPr>
+              <a:defRPr sz="1100">
+                <a:solidFill>
+                  <a:srgbClr val="333333"/>
+                </a:solidFill>
+              </a:defRPr>
+            </a:pPr>
+            <a:r>
+              <a:t>Presents TxAgent for therapeutic decision-making that demonstrates agentic reasoning in high-stakes clinical medicine through complex multi-step planning and tool use.</a:t>
+            </a:r>
+          </a:p>
+        </p:txBody>
+      </p:sp>
+      <p:sp>
+        <p:nvSpPr>
+          <p:cNvPr id="4" name="TextBox 3"/>
+          <p:cNvSpPr txBox="1"/>
+          <p:nvPr/>
+        </p:nvSpPr>
+        <p:spPr>
+          <a:xfrm>
+            <a:off x="457200" y="2057400"/>
+            <a:ext cx="8229600" cy="685800"/>
+          </a:xfrm>
+          <a:prstGeom prst="rect">
+            <a:avLst/>
+          </a:prstGeom>
+          <a:noFill/>
+        </p:spPr>
+        <p:txBody>
+          <a:bodyPr wrap="none">
+            <a:spAutoFit/>
+          </a:bodyPr>
+          <a:lstStyle/>
+          <a:p>
+            <a:pPr>
+              <a:defRPr sz="800"/>
+            </a:pPr>
+          </a:p>
+        </p:txBody>
+      </p:sp>
+      <p:sp>
+        <p:nvSpPr>
+          <p:cNvPr id="5" name="TextBox 4"/>
+          <p:cNvSpPr txBox="1"/>
+          <p:nvPr/>
+        </p:nvSpPr>
+        <p:spPr>
+          <a:xfrm>
+            <a:off x="457200" y="2743200"/>
+            <a:ext cx="8229600" cy="685800"/>
+          </a:xfrm>
+          <a:prstGeom prst="rect">
+            <a:avLst/>
+          </a:prstGeom>
+          <a:noFill/>
+        </p:spPr>
+        <p:txBody>
+          <a:bodyPr wrap="none">
+            <a:spAutoFit/>
+          </a:bodyPr>
+          <a:lstStyle/>
+          <a:p>
+            <a:pPr>
+              <a:defRPr sz="900" i="1">
+                <a:solidFill>
+                  <a:srgbClr val="666666"/>
+                </a:solidFill>
+              </a:defRPr>
+            </a:pPr>
             <a:r>
               <a:t>📍 arXiv • Tim Cofala, Christian Kalfar, Jingge Xiao</a:t>
             </a:r>
           </a:p>
-          <a:p>
-            <a:pPr/>
+        </p:txBody>
+      </p:sp>
+      <p:sp>
+        <p:nvSpPr>
+          <p:cNvPr id="6" name="TextBox 5"/>
+          <p:cNvSpPr txBox="1"/>
+          <p:nvPr/>
+        </p:nvSpPr>
+        <p:spPr>
+          <a:xfrm>
+            <a:off x="457200" y="3429000"/>
+            <a:ext cx="8229600" cy="685800"/>
+          </a:xfrm>
+          <a:prstGeom prst="rect">
+            <a:avLst/>
+          </a:prstGeom>
+          <a:noFill/>
+        </p:spPr>
+        <p:txBody>
+          <a:bodyPr wrap="none">
+            <a:spAutoFit/>
+          </a:bodyPr>
+          <a:lstStyle/>
+          <a:p>
+            <a:pPr>
+              <a:defRPr sz="800">
+                <a:solidFill>
+                  <a:srgbClr val="3498DB"/>
+                </a:solidFill>
+              </a:defRPr>
+            </a:pPr>
             <a:r>
               <a:t>🔗 https://arxiv.org/abs/2512.11682v1</a:t>
             </a:r>
@@ -5594,7 +6537,7 @@
       </p:sp>
       <p:sp>
         <p:nvSpPr>
-          <p:cNvPr id="4" name="TextBox 3"/>
+          <p:cNvPr id="7" name="TextBox 6"/>
           <p:cNvSpPr txBox="1"/>
           <p:nvPr/>
         </p:nvSpPr>
@@ -5651,61 +6594,162 @@
       <p:grpSpPr/>
       <p:sp>
         <p:nvSpPr>
-          <p:cNvPr id="2" name="Title 1"/>
-          <p:cNvSpPr>
-            <a:spLocks noGrp="1"/>
-          </p:cNvSpPr>
-          <p:nvPr>
-            <p:ph type="title"/>
-          </p:nvPr>
-        </p:nvSpPr>
-        <p:spPr/>
-        <p:txBody>
-          <a:bodyPr/>
-          <a:lstStyle/>
-          <a:p>
-            <a:r>
-              <a:t>3. Bounding Hallucinations: Information-Theoretic Guarantees for RAG System...</a:t>
-            </a:r>
-          </a:p>
-        </p:txBody>
-      </p:sp>
-      <p:sp>
-        <p:nvSpPr>
-          <p:cNvPr id="3" name="Content Placeholder 2"/>
-          <p:cNvSpPr>
-            <a:spLocks noGrp="1"/>
-          </p:cNvSpPr>
-          <p:nvPr>
-            <p:ph idx="1"/>
-          </p:nvPr>
-        </p:nvSpPr>
-        <p:spPr/>
-        <p:txBody>
-          <a:bodyPr/>
-          <a:lstStyle/>
-          <a:p>
-            <a:r>
-              <a:t>Provides theoretical framework for verifiable retrieval in RAG agents using information</a:t>
-            </a:r>
-          </a:p>
-          <a:p>
-            <a:pPr/>
-            <a:r>
-              <a:t>theory, moving beyond heuristic retrieval to provable guarantees against hallucination.</a:t>
-            </a:r>
-          </a:p>
-          <a:p>
-            <a:pPr/>
-          </a:p>
-          <a:p>
-            <a:pPr/>
+          <p:cNvPr id="2" name="TextBox 1"/>
+          <p:cNvSpPr txBox="1"/>
+          <p:nvPr/>
+        </p:nvSpPr>
+        <p:spPr>
+          <a:xfrm>
+            <a:off x="457200" y="457200"/>
+            <a:ext cx="8229600" cy="685800"/>
+          </a:xfrm>
+          <a:prstGeom prst="rect">
+            <a:avLst/>
+          </a:prstGeom>
+          <a:noFill/>
+        </p:spPr>
+        <p:txBody>
+          <a:bodyPr wrap="none">
+            <a:spAutoFit/>
+          </a:bodyPr>
+          <a:lstStyle/>
+          <a:p>
+            <a:pPr>
+              <a:defRPr sz="3200" b="1"/>
+            </a:pPr>
+            <a:r>
+              <a:t>3. Bounding Hallucinations: Information-Theoretic Guarantees for RAG Systems via Merlin-Arthur Protocols</a:t>
+            </a:r>
+          </a:p>
+        </p:txBody>
+      </p:sp>
+      <p:sp>
+        <p:nvSpPr>
+          <p:cNvPr id="3" name="TextBox 2"/>
+          <p:cNvSpPr txBox="1"/>
+          <p:nvPr/>
+        </p:nvSpPr>
+        <p:spPr>
+          <a:xfrm>
+            <a:off x="457200" y="1371600"/>
+            <a:ext cx="8229600" cy="685800"/>
+          </a:xfrm>
+          <a:prstGeom prst="rect">
+            <a:avLst/>
+          </a:prstGeom>
+          <a:noFill/>
+        </p:spPr>
+        <p:txBody>
+          <a:bodyPr wrap="none">
+            <a:spAutoFit/>
+          </a:bodyPr>
+          <a:lstStyle/>
+          <a:p>
+            <a:pPr>
+              <a:defRPr sz="1100">
+                <a:solidFill>
+                  <a:srgbClr val="333333"/>
+                </a:solidFill>
+              </a:defRPr>
+            </a:pPr>
+            <a:r>
+              <a:t>Provides theoretical framework for verifiable retrieval in RAG systems, moving beyond heuristic retrieval to guarantee-backed evidence processing for more reliable agent tool use.</a:t>
+            </a:r>
+          </a:p>
+        </p:txBody>
+      </p:sp>
+      <p:sp>
+        <p:nvSpPr>
+          <p:cNvPr id="4" name="TextBox 3"/>
+          <p:cNvSpPr txBox="1"/>
+          <p:nvPr/>
+        </p:nvSpPr>
+        <p:spPr>
+          <a:xfrm>
+            <a:off x="457200" y="2057400"/>
+            <a:ext cx="8229600" cy="685800"/>
+          </a:xfrm>
+          <a:prstGeom prst="rect">
+            <a:avLst/>
+          </a:prstGeom>
+          <a:noFill/>
+        </p:spPr>
+        <p:txBody>
+          <a:bodyPr wrap="none">
+            <a:spAutoFit/>
+          </a:bodyPr>
+          <a:lstStyle/>
+          <a:p>
+            <a:pPr>
+              <a:defRPr sz="800"/>
+            </a:pPr>
+          </a:p>
+        </p:txBody>
+      </p:sp>
+      <p:sp>
+        <p:nvSpPr>
+          <p:cNvPr id="5" name="TextBox 4"/>
+          <p:cNvSpPr txBox="1"/>
+          <p:nvPr/>
+        </p:nvSpPr>
+        <p:spPr>
+          <a:xfrm>
+            <a:off x="457200" y="2743200"/>
+            <a:ext cx="8229600" cy="685800"/>
+          </a:xfrm>
+          <a:prstGeom prst="rect">
+            <a:avLst/>
+          </a:prstGeom>
+          <a:noFill/>
+        </p:spPr>
+        <p:txBody>
+          <a:bodyPr wrap="none">
+            <a:spAutoFit/>
+          </a:bodyPr>
+          <a:lstStyle/>
+          <a:p>
+            <a:pPr>
+              <a:defRPr sz="900" i="1">
+                <a:solidFill>
+                  <a:srgbClr val="666666"/>
+                </a:solidFill>
+              </a:defRPr>
+            </a:pPr>
             <a:r>
               <a:t>📍 arXiv • Björn Deiseroth, Max Henning Höth, Kristian Kersting</a:t>
             </a:r>
           </a:p>
-          <a:p>
-            <a:pPr/>
+        </p:txBody>
+      </p:sp>
+      <p:sp>
+        <p:nvSpPr>
+          <p:cNvPr id="6" name="TextBox 5"/>
+          <p:cNvSpPr txBox="1"/>
+          <p:nvPr/>
+        </p:nvSpPr>
+        <p:spPr>
+          <a:xfrm>
+            <a:off x="457200" y="3429000"/>
+            <a:ext cx="8229600" cy="685800"/>
+          </a:xfrm>
+          <a:prstGeom prst="rect">
+            <a:avLst/>
+          </a:prstGeom>
+          <a:noFill/>
+        </p:spPr>
+        <p:txBody>
+          <a:bodyPr wrap="none">
+            <a:spAutoFit/>
+          </a:bodyPr>
+          <a:lstStyle/>
+          <a:p>
+            <a:pPr>
+              <a:defRPr sz="800">
+                <a:solidFill>
+                  <a:srgbClr val="3498DB"/>
+                </a:solidFill>
+              </a:defRPr>
+            </a:pPr>
             <a:r>
               <a:t>🔗 https://arxiv.org/abs/2512.11614v1</a:t>
             </a:r>
@@ -5714,7 +6758,7 @@
       </p:sp>
       <p:sp>
         <p:nvSpPr>
-          <p:cNvPr id="4" name="TextBox 3"/>
+          <p:cNvPr id="7" name="TextBox 6"/>
           <p:cNvSpPr txBox="1"/>
           <p:nvPr/>
         </p:nvSpPr>
@@ -5771,61 +6815,162 @@
       <p:grpSpPr/>
       <p:sp>
         <p:nvSpPr>
-          <p:cNvPr id="2" name="Title 1"/>
-          <p:cNvSpPr>
-            <a:spLocks noGrp="1"/>
-          </p:cNvSpPr>
-          <p:nvPr>
-            <p:ph type="title"/>
-          </p:nvPr>
-        </p:nvSpPr>
-        <p:spPr/>
-        <p:txBody>
-          <a:bodyPr/>
-          <a:lstStyle/>
-          <a:p>
-            <a:r>
-              <a:t>4. From Verification Burden to Trusted Collaboration: Design Goals for LLM-...</a:t>
-            </a:r>
-          </a:p>
-        </p:txBody>
-      </p:sp>
-      <p:sp>
-        <p:nvSpPr>
-          <p:cNvPr id="3" name="Content Placeholder 2"/>
-          <p:cNvSpPr>
-            <a:spLocks noGrp="1"/>
-          </p:cNvSpPr>
-          <p:nvPr>
-            <p:ph idx="1"/>
-          </p:nvPr>
-        </p:nvSpPr>
-        <p:spPr/>
-        <p:txBody>
-          <a:bodyPr/>
-          <a:lstStyle/>
-          <a:p>
-            <a:r>
-              <a:t>Explores design principles for LLM agents in academic workflows, addressing the critical</a:t>
-            </a:r>
-          </a:p>
-          <a:p>
-            <a:pPr/>
-            <a:r>
-              <a:t>challenge of building trust in AI-assisted research tasks.</a:t>
-            </a:r>
-          </a:p>
-          <a:p>
-            <a:pPr/>
-          </a:p>
-          <a:p>
-            <a:pPr/>
+          <p:cNvPr id="2" name="TextBox 1"/>
+          <p:cNvSpPr txBox="1"/>
+          <p:nvPr/>
+        </p:nvSpPr>
+        <p:spPr>
+          <a:xfrm>
+            <a:off x="457200" y="457200"/>
+            <a:ext cx="8229600" cy="685800"/>
+          </a:xfrm>
+          <a:prstGeom prst="rect">
+            <a:avLst/>
+          </a:prstGeom>
+          <a:noFill/>
+        </p:spPr>
+        <p:txBody>
+          <a:bodyPr wrap="none">
+            <a:spAutoFit/>
+          </a:bodyPr>
+          <a:lstStyle/>
+          <a:p>
+            <a:pPr>
+              <a:defRPr sz="3200" b="1"/>
+            </a:pPr>
+            <a:r>
+              <a:t>4. From Verification Burden to Trusted Collaboration: Design Goals for LLM-Assisted Literature Reviews</a:t>
+            </a:r>
+          </a:p>
+        </p:txBody>
+      </p:sp>
+      <p:sp>
+        <p:nvSpPr>
+          <p:cNvPr id="3" name="TextBox 2"/>
+          <p:cNvSpPr txBox="1"/>
+          <p:nvPr/>
+        </p:nvSpPr>
+        <p:spPr>
+          <a:xfrm>
+            <a:off x="457200" y="1371600"/>
+            <a:ext cx="8229600" cy="685800"/>
+          </a:xfrm>
+          <a:prstGeom prst="rect">
+            <a:avLst/>
+          </a:prstGeom>
+          <a:noFill/>
+        </p:spPr>
+        <p:txBody>
+          <a:bodyPr wrap="none">
+            <a:spAutoFit/>
+          </a:bodyPr>
+          <a:lstStyle/>
+          <a:p>
+            <a:pPr>
+              <a:defRPr sz="1100">
+                <a:solidFill>
+                  <a:srgbClr val="333333"/>
+                </a:solidFill>
+              </a:defRPr>
+            </a:pPr>
+            <a:r>
+              <a:t>Explores concrete usage patterns of LLM agents in academic workflows, identifying design requirements for trusted human-AI collaboration in complex reasoning tasks.</a:t>
+            </a:r>
+          </a:p>
+        </p:txBody>
+      </p:sp>
+      <p:sp>
+        <p:nvSpPr>
+          <p:cNvPr id="4" name="TextBox 3"/>
+          <p:cNvSpPr txBox="1"/>
+          <p:nvPr/>
+        </p:nvSpPr>
+        <p:spPr>
+          <a:xfrm>
+            <a:off x="457200" y="2057400"/>
+            <a:ext cx="8229600" cy="685800"/>
+          </a:xfrm>
+          <a:prstGeom prst="rect">
+            <a:avLst/>
+          </a:prstGeom>
+          <a:noFill/>
+        </p:spPr>
+        <p:txBody>
+          <a:bodyPr wrap="none">
+            <a:spAutoFit/>
+          </a:bodyPr>
+          <a:lstStyle/>
+          <a:p>
+            <a:pPr>
+              <a:defRPr sz="800"/>
+            </a:pPr>
+          </a:p>
+        </p:txBody>
+      </p:sp>
+      <p:sp>
+        <p:nvSpPr>
+          <p:cNvPr id="5" name="TextBox 4"/>
+          <p:cNvSpPr txBox="1"/>
+          <p:nvPr/>
+        </p:nvSpPr>
+        <p:spPr>
+          <a:xfrm>
+            <a:off x="457200" y="2743200"/>
+            <a:ext cx="8229600" cy="685800"/>
+          </a:xfrm>
+          <a:prstGeom prst="rect">
+            <a:avLst/>
+          </a:prstGeom>
+          <a:noFill/>
+        </p:spPr>
+        <p:txBody>
+          <a:bodyPr wrap="none">
+            <a:spAutoFit/>
+          </a:bodyPr>
+          <a:lstStyle/>
+          <a:p>
+            <a:pPr>
+              <a:defRPr sz="900" i="1">
+                <a:solidFill>
+                  <a:srgbClr val="666666"/>
+                </a:solidFill>
+              </a:defRPr>
+            </a:pPr>
             <a:r>
               <a:t>📍 arXiv • Brenda Nogueira, Werner Geyer, Andrew Anderson</a:t>
             </a:r>
           </a:p>
-          <a:p>
-            <a:pPr/>
+        </p:txBody>
+      </p:sp>
+      <p:sp>
+        <p:nvSpPr>
+          <p:cNvPr id="6" name="TextBox 5"/>
+          <p:cNvSpPr txBox="1"/>
+          <p:nvPr/>
+        </p:nvSpPr>
+        <p:spPr>
+          <a:xfrm>
+            <a:off x="457200" y="3429000"/>
+            <a:ext cx="8229600" cy="685800"/>
+          </a:xfrm>
+          <a:prstGeom prst="rect">
+            <a:avLst/>
+          </a:prstGeom>
+          <a:noFill/>
+        </p:spPr>
+        <p:txBody>
+          <a:bodyPr wrap="none">
+            <a:spAutoFit/>
+          </a:bodyPr>
+          <a:lstStyle/>
+          <a:p>
+            <a:pPr>
+              <a:defRPr sz="800">
+                <a:solidFill>
+                  <a:srgbClr val="3498DB"/>
+                </a:solidFill>
+              </a:defRPr>
+            </a:pPr>
             <a:r>
               <a:t>🔗 https://arxiv.org/abs/2512.11661v1</a:t>
             </a:r>
@@ -5834,7 +6979,7 @@
       </p:sp>
       <p:sp>
         <p:nvSpPr>
-          <p:cNvPr id="4" name="TextBox 3"/>
+          <p:cNvPr id="7" name="TextBox 6"/>
           <p:cNvSpPr txBox="1"/>
           <p:nvPr/>
         </p:nvSpPr>
@@ -5891,67 +7036,162 @@
       <p:grpSpPr/>
       <p:sp>
         <p:nvSpPr>
-          <p:cNvPr id="2" name="Title 1"/>
-          <p:cNvSpPr>
-            <a:spLocks noGrp="1"/>
-          </p:cNvSpPr>
-          <p:nvPr>
-            <p:ph type="title"/>
-          </p:nvPr>
-        </p:nvSpPr>
-        <p:spPr/>
-        <p:txBody>
-          <a:bodyPr/>
-          <a:lstStyle/>
-          <a:p>
-            <a:r>
-              <a:t>5. LUCID: Learning-Enabled Uncertainty-Aware Certification of Stochastic Dy...</a:t>
-            </a:r>
-          </a:p>
-        </p:txBody>
-      </p:sp>
-      <p:sp>
-        <p:nvSpPr>
-          <p:cNvPr id="3" name="Content Placeholder 2"/>
-          <p:cNvSpPr>
-            <a:spLocks noGrp="1"/>
-          </p:cNvSpPr>
-          <p:nvPr>
-            <p:ph idx="1"/>
-          </p:nvPr>
-        </p:nvSpPr>
-        <p:spPr/>
-        <p:txBody>
-          <a:bodyPr/>
-          <a:lstStyle/>
-          <a:p>
-            <a:r>
-              <a:t>Addresses formal verification of AI-enabled autonomous systems with uncertainty</a:t>
-            </a:r>
-          </a:p>
-          <a:p>
-            <a:pPr/>
-            <a:r>
-              <a:t>quantification, crucial for deploying agents in safety-critical applications like</a:t>
-            </a:r>
-          </a:p>
-          <a:p>
-            <a:pPr/>
-            <a:r>
-              <a:t>autonomous driving.</a:t>
-            </a:r>
-          </a:p>
-          <a:p>
-            <a:pPr/>
-          </a:p>
-          <a:p>
-            <a:pPr/>
+          <p:cNvPr id="2" name="TextBox 1"/>
+          <p:cNvSpPr txBox="1"/>
+          <p:nvPr/>
+        </p:nvSpPr>
+        <p:spPr>
+          <a:xfrm>
+            <a:off x="457200" y="457200"/>
+            <a:ext cx="8229600" cy="685800"/>
+          </a:xfrm>
+          <a:prstGeom prst="rect">
+            <a:avLst/>
+          </a:prstGeom>
+          <a:noFill/>
+        </p:spPr>
+        <p:txBody>
+          <a:bodyPr wrap="none">
+            <a:spAutoFit/>
+          </a:bodyPr>
+          <a:lstStyle/>
+          <a:p>
+            <a:pPr>
+              <a:defRPr sz="3200" b="1"/>
+            </a:pPr>
+            <a:r>
+              <a:t>5. LUCID: Learning-Enabled Uncertainty-Aware Certification of Stochastic Dynamical Systems</a:t>
+            </a:r>
+          </a:p>
+        </p:txBody>
+      </p:sp>
+      <p:sp>
+        <p:nvSpPr>
+          <p:cNvPr id="3" name="TextBox 2"/>
+          <p:cNvSpPr txBox="1"/>
+          <p:nvPr/>
+        </p:nvSpPr>
+        <p:spPr>
+          <a:xfrm>
+            <a:off x="457200" y="1371600"/>
+            <a:ext cx="8229600" cy="685800"/>
+          </a:xfrm>
+          <a:prstGeom prst="rect">
+            <a:avLst/>
+          </a:prstGeom>
+          <a:noFill/>
+        </p:spPr>
+        <p:txBody>
+          <a:bodyPr wrap="none">
+            <a:spAutoFit/>
+          </a:bodyPr>
+          <a:lstStyle/>
+          <a:p>
+            <a:pPr>
+              <a:defRPr sz="1100">
+                <a:solidFill>
+                  <a:srgbClr val="333333"/>
+                </a:solidFill>
+              </a:defRPr>
+            </a:pPr>
+            <a:r>
+              <a:t>Addresses formal verification challenges for AI-enabled autonomous systems, providing certification methods critical for deploying agents in safety-critical domains like autonomous driving.</a:t>
+            </a:r>
+          </a:p>
+        </p:txBody>
+      </p:sp>
+      <p:sp>
+        <p:nvSpPr>
+          <p:cNvPr id="4" name="TextBox 3"/>
+          <p:cNvSpPr txBox="1"/>
+          <p:nvPr/>
+        </p:nvSpPr>
+        <p:spPr>
+          <a:xfrm>
+            <a:off x="457200" y="2057400"/>
+            <a:ext cx="8229600" cy="685800"/>
+          </a:xfrm>
+          <a:prstGeom prst="rect">
+            <a:avLst/>
+          </a:prstGeom>
+          <a:noFill/>
+        </p:spPr>
+        <p:txBody>
+          <a:bodyPr wrap="none">
+            <a:spAutoFit/>
+          </a:bodyPr>
+          <a:lstStyle/>
+          <a:p>
+            <a:pPr>
+              <a:defRPr sz="800"/>
+            </a:pPr>
+          </a:p>
+        </p:txBody>
+      </p:sp>
+      <p:sp>
+        <p:nvSpPr>
+          <p:cNvPr id="5" name="TextBox 4"/>
+          <p:cNvSpPr txBox="1"/>
+          <p:nvPr/>
+        </p:nvSpPr>
+        <p:spPr>
+          <a:xfrm>
+            <a:off x="457200" y="2743200"/>
+            <a:ext cx="8229600" cy="685800"/>
+          </a:xfrm>
+          <a:prstGeom prst="rect">
+            <a:avLst/>
+          </a:prstGeom>
+          <a:noFill/>
+        </p:spPr>
+        <p:txBody>
+          <a:bodyPr wrap="none">
+            <a:spAutoFit/>
+          </a:bodyPr>
+          <a:lstStyle/>
+          <a:p>
+            <a:pPr>
+              <a:defRPr sz="900" i="1">
+                <a:solidFill>
+                  <a:srgbClr val="666666"/>
+                </a:solidFill>
+              </a:defRPr>
+            </a:pPr>
             <a:r>
               <a:t>📍 arXiv • Ernesto Casablanca, Oliver Schön, Paolo Zuliani</a:t>
             </a:r>
           </a:p>
-          <a:p>
-            <a:pPr/>
+        </p:txBody>
+      </p:sp>
+      <p:sp>
+        <p:nvSpPr>
+          <p:cNvPr id="6" name="TextBox 5"/>
+          <p:cNvSpPr txBox="1"/>
+          <p:nvPr/>
+        </p:nvSpPr>
+        <p:spPr>
+          <a:xfrm>
+            <a:off x="457200" y="3429000"/>
+            <a:ext cx="8229600" cy="685800"/>
+          </a:xfrm>
+          <a:prstGeom prst="rect">
+            <a:avLst/>
+          </a:prstGeom>
+          <a:noFill/>
+        </p:spPr>
+        <p:txBody>
+          <a:bodyPr wrap="none">
+            <a:spAutoFit/>
+          </a:bodyPr>
+          <a:lstStyle/>
+          <a:p>
+            <a:pPr>
+              <a:defRPr sz="800">
+                <a:solidFill>
+                  <a:srgbClr val="3498DB"/>
+                </a:solidFill>
+              </a:defRPr>
+            </a:pPr>
             <a:r>
               <a:t>🔗 https://arxiv.org/abs/2512.11750v1</a:t>
             </a:r>
@@ -5960,7 +7200,7 @@
       </p:sp>
       <p:sp>
         <p:nvSpPr>
-          <p:cNvPr id="4" name="TextBox 3"/>
+          <p:cNvPr id="7" name="TextBox 6"/>
           <p:cNvSpPr txBox="1"/>
           <p:nvPr/>
         </p:nvSpPr>
@@ -6017,19 +7257,29 @@
       <p:grpSpPr/>
       <p:sp>
         <p:nvSpPr>
-          <p:cNvPr id="2" name="Title 1"/>
-          <p:cNvSpPr>
-            <a:spLocks noGrp="1"/>
-          </p:cNvSpPr>
-          <p:nvPr>
-            <p:ph type="title"/>
-          </p:nvPr>
-        </p:nvSpPr>
-        <p:spPr/>
-        <p:txBody>
-          <a:bodyPr/>
-          <a:lstStyle/>
-          <a:p>
+          <p:cNvPr id="2" name="TextBox 1"/>
+          <p:cNvSpPr txBox="1"/>
+          <p:nvPr/>
+        </p:nvSpPr>
+        <p:spPr>
+          <a:xfrm>
+            <a:off x="457200" y="457200"/>
+            <a:ext cx="8229600" cy="685800"/>
+          </a:xfrm>
+          <a:prstGeom prst="rect">
+            <a:avLst/>
+          </a:prstGeom>
+          <a:noFill/>
+        </p:spPr>
+        <p:txBody>
+          <a:bodyPr wrap="none">
+            <a:spAutoFit/>
+          </a:bodyPr>
+          <a:lstStyle/>
+          <a:p>
+            <a:pPr>
+              <a:defRPr sz="3200" b="1"/>
+            </a:pPr>
             <a:r>
               <a:t>🏢 Industry Updates</a:t>
             </a:r>
@@ -6038,28 +7288,96 @@
       </p:sp>
       <p:sp>
         <p:nvSpPr>
-          <p:cNvPr id="3" name="Content Placeholder 2"/>
-          <p:cNvSpPr>
-            <a:spLocks noGrp="1"/>
-          </p:cNvSpPr>
-          <p:nvPr>
-            <p:ph idx="1"/>
-          </p:nvPr>
-        </p:nvSpPr>
-        <p:spPr/>
-        <p:txBody>
-          <a:bodyPr/>
-          <a:lstStyle/>
-          <a:p>
+          <p:cNvPr id="3" name="TextBox 2"/>
+          <p:cNvSpPr txBox="1"/>
+          <p:nvPr/>
+        </p:nvSpPr>
+        <p:spPr>
+          <a:xfrm>
+            <a:off x="457200" y="1371600"/>
+            <a:ext cx="8229600" cy="685800"/>
+          </a:xfrm>
+          <a:prstGeom prst="rect">
+            <a:avLst/>
+          </a:prstGeom>
+          <a:noFill/>
+        </p:spPr>
+        <p:txBody>
+          <a:bodyPr wrap="none">
+            <a:spAutoFit/>
+          </a:bodyPr>
+          <a:lstStyle/>
+          <a:p>
+            <a:pPr>
+              <a:defRPr sz="1800" b="1">
+                <a:solidFill>
+                  <a:srgbClr val="FFFFFF"/>
+                </a:solidFill>
+              </a:defRPr>
+            </a:pPr>
             <a:r>
               <a:t>5 key updates this week</a:t>
             </a:r>
           </a:p>
-          <a:p>
-            <a:pPr/>
-          </a:p>
-          <a:p>
-            <a:pPr/>
+        </p:txBody>
+      </p:sp>
+      <p:sp>
+        <p:nvSpPr>
+          <p:cNvPr id="4" name="TextBox 3"/>
+          <p:cNvSpPr txBox="1"/>
+          <p:nvPr/>
+        </p:nvSpPr>
+        <p:spPr>
+          <a:xfrm>
+            <a:off x="457200" y="2057400"/>
+            <a:ext cx="8229600" cy="685800"/>
+          </a:xfrm>
+          <a:prstGeom prst="rect">
+            <a:avLst/>
+          </a:prstGeom>
+          <a:noFill/>
+        </p:spPr>
+        <p:txBody>
+          <a:bodyPr wrap="none">
+            <a:spAutoFit/>
+          </a:bodyPr>
+          <a:lstStyle/>
+          <a:p>
+            <a:pPr>
+              <a:defRPr sz="1200"/>
+            </a:pPr>
+          </a:p>
+        </p:txBody>
+      </p:sp>
+      <p:sp>
+        <p:nvSpPr>
+          <p:cNvPr id="5" name="TextBox 4"/>
+          <p:cNvSpPr txBox="1"/>
+          <p:nvPr/>
+        </p:nvSpPr>
+        <p:spPr>
+          <a:xfrm>
+            <a:off x="457200" y="2743200"/>
+            <a:ext cx="8229600" cy="685800"/>
+          </a:xfrm>
+          <a:prstGeom prst="rect">
+            <a:avLst/>
+          </a:prstGeom>
+          <a:noFill/>
+        </p:spPr>
+        <p:txBody>
+          <a:bodyPr wrap="none">
+            <a:spAutoFit/>
+          </a:bodyPr>
+          <a:lstStyle/>
+          <a:p>
+            <a:pPr>
+              <a:defRPr sz="1400" i="1">
+                <a:solidFill>
+                  <a:srgbClr val="FFFFFF"/>
+                </a:solidFill>
+              </a:defRPr>
+            </a:pPr>
             <a:r>
               <a:t>→ Swipe to explore</a:t>
             </a:r>
@@ -6068,7 +7386,7 @@
       </p:sp>
       <p:sp>
         <p:nvSpPr>
-          <p:cNvPr id="4" name="TextBox 3"/>
+          <p:cNvPr id="6" name="TextBox 5"/>
           <p:cNvSpPr txBox="1"/>
           <p:nvPr/>
         </p:nvSpPr>
